--- a/public/conectividad/Conectividad-Modela-Directorio.pptx
+++ b/public/conectividad/Conectividad-Modela-Directorio.pptx
@@ -3334,7 +3334,7 @@
                 </a:solidFill>
                 <a:latin typeface="Helvetica Neue"/>
               </a:rPr>
-              <a:t>Cómo la accesibilidad vial y ferroviaria se traduce en valor inmobiliario — y por qué Batuco y Estación Colina compiten hoy, y lideran mañana.</a:t>
+              <a:t>Cómo la accesibilidad vial y ferroviaria se traduce en valor inmobiliario, y por qué Batuco y Estación Colina compiten hoy y lideran mañana.</a:t>
             </a:r>
           </a:p>
         </p:txBody>
@@ -3661,7 +3661,7 @@
                 </a:solidFill>
                 <a:latin typeface="Helvetica Neue"/>
               </a:rPr>
-              <a:t>Menos tiempo y menos costo de traslado se capitalizan en cuánto puede pagar una familia por su vivienda. Medimos esa conexión, zona por zona — y el veredicto para el portafolio es claro.</a:t>
+              <a:t>Menos tiempo y menos costo de traslado se capitalizan en cuánto puede pagar una familia por su vivienda. Medimos esa conexión, zona por zona, y el veredicto para nuestros proyectos es claro.</a:t>
             </a:r>
           </a:p>
         </p:txBody>
@@ -3751,7 +3751,7 @@
                 </a:solidFill>
                 <a:latin typeface="Helvetica Neue"/>
               </a:rPr>
-              <a:t>Batuco en auto, con la Orbital</a:t>
+              <a:t>Batuco en auto, con la Autopista</a:t>
             </a:r>
           </a:p>
         </p:txBody>
@@ -3976,7 +3976,7 @@
                 </a:solidFill>
                 <a:latin typeface="Helvetica Neue"/>
               </a:rPr>
-              <a:t>−1 h 07</a:t>
+              <a:t>1 h 07</a:t>
             </a:r>
           </a:p>
         </p:txBody>
@@ -4021,7 +4021,7 @@
                 </a:solidFill>
                 <a:latin typeface="Helvetica Neue"/>
               </a:rPr>
-              <a:t>que recorta el tren a Batuco</a:t>
+              <a:t>menos de viaje con el tren, desde Batuco</a:t>
             </a:r>
           </a:p>
         </p:txBody>
@@ -4111,7 +4111,7 @@
                 </a:solidFill>
                 <a:latin typeface="Helvetica Neue"/>
               </a:rPr>
-              <a:t>+1.686</a:t>
+              <a:t>+1.363</a:t>
             </a:r>
           </a:p>
         </p:txBody>
@@ -4156,7 +4156,7 @@
                 </a:solidFill>
                 <a:latin typeface="Helvetica Neue"/>
               </a:rPr>
-              <a:t>UF de mayor valor — Est. Colina</a:t>
+              <a:t>UF sobre la zona peor conectada, Estación Colina</a:t>
             </a:r>
           </a:p>
         </p:txBody>
@@ -4201,7 +4201,7 @@
                 </a:solidFill>
                 <a:latin typeface="Helvetica Neue"/>
               </a:rPr>
-              <a:t>Batuco, +1.019 UF</a:t>
+              <a:t>Batuco, +696 UF</a:t>
             </a:r>
           </a:p>
         </p:txBody>
@@ -4381,7 +4381,7 @@
                 </a:solidFill>
                 <a:latin typeface="Helvetica Neue"/>
               </a:rPr>
-              <a:t>Batuco y Estación Colina son competitivos hoy y de los más competitivos del norte con la infraestructura que ya está en construcción.</a:t>
+              <a:t>Batuco y Estación Colina: competitivos hoy y líderes del corredor norte con la infraestructura ya en construcción.</a:t>
             </a:r>
           </a:p>
         </p:txBody>
@@ -4680,13 +4680,13 @@
               </a:spcAft>
             </a:pPr>
             <a:r>
-              <a:rPr sz="2700" b="1" spc="-10">
+              <a:rPr sz="2600" b="1" spc="-10">
                 <a:solidFill>
                   <a:srgbClr val="161616"/>
                 </a:solidFill>
                 <a:latin typeface="Helvetica Neue"/>
               </a:rPr>
-              <a:t>Hoy: una ya es central, el otro es</a:t>
+              <a:t>Hoy: Estación Colina ya es central;</a:t>
             </a:r>
           </a:p>
           <a:p>
@@ -4702,13 +4702,13 @@
               </a:spcAft>
             </a:pPr>
             <a:r>
-              <a:rPr sz="2700" b="1" spc="-10">
+              <a:rPr sz="2600" b="1" spc="-10">
                 <a:solidFill>
                   <a:srgbClr val="161616"/>
                 </a:solidFill>
                 <a:latin typeface="Helvetica Neue"/>
               </a:rPr>
-              <a:t>periférico — y ninguno es RED.</a:t>
+              <a:t>Batuco es periférico y ninguno es RED.</a:t>
             </a:r>
           </a:p>
         </p:txBody>
@@ -4721,14 +4721,14 @@
         </p:nvSpPr>
         <p:spPr>
           <a:xfrm>
-            <a:off x="1161288" y="3833385"/>
-            <a:ext cx="2567250" cy="738614"/>
-          </a:xfrm>
-          <a:prstGeom prst="rect">
-            <a:avLst/>
-          </a:prstGeom>
-          <a:solidFill>
-            <a:srgbClr val="EFF3F0"/>
+            <a:off x="1161288" y="3906139"/>
+            <a:ext cx="2506463" cy="711580"/>
+          </a:xfrm>
+          <a:prstGeom prst="rect">
+            <a:avLst/>
+          </a:prstGeom>
+          <a:solidFill>
+            <a:srgbClr val="ECF2EE"/>
           </a:solidFill>
           <a:ln>
             <a:noFill/>
@@ -4765,8 +4765,8 @@
         </p:nvCxnSpPr>
         <p:spPr>
           <a:xfrm>
-            <a:off x="3728538" y="2468880"/>
-            <a:ext cx="0" cy="2103120"/>
+            <a:off x="3667751" y="2606040"/>
+            <a:ext cx="0" cy="2011680"/>
           </a:xfrm>
           <a:prstGeom prst="line">
             <a:avLst/>
@@ -4801,7 +4801,7 @@
         </p:nvCxnSpPr>
         <p:spPr>
           <a:xfrm>
-            <a:off x="1161288" y="3833385"/>
+            <a:off x="1161288" y="3906139"/>
             <a:ext cx="5486400" cy="0"/>
           </a:xfrm>
           <a:prstGeom prst="line">
@@ -4829,16 +4829,88 @@
           </a:fontRef>
         </p:style>
       </p:cxnSp>
-      <p:sp>
-        <p:nvSpPr>
-          <p:cNvPr id="8" name="TextBox 7"/>
+      <p:cxnSp>
+        <p:nvCxnSpPr>
+          <p:cNvPr id="8" name="Connector 7"/>
+          <p:cNvCxnSpPr/>
+          <p:nvPr/>
+        </p:nvCxnSpPr>
+        <p:spPr>
+          <a:xfrm>
+            <a:off x="1161288" y="4617720"/>
+            <a:ext cx="5486400" cy="0"/>
+          </a:xfrm>
+          <a:prstGeom prst="line">
+            <a:avLst/>
+          </a:prstGeom>
+          <a:ln w="12700">
+            <a:solidFill>
+              <a:srgbClr val="C9C4BA"/>
+            </a:solidFill>
+          </a:ln>
+          <a:effectLst/>
+        </p:spPr>
+        <p:style>
+          <a:lnRef idx="2">
+            <a:schemeClr val="accent1"/>
+          </a:lnRef>
+          <a:fillRef idx="0">
+            <a:schemeClr val="accent1"/>
+          </a:fillRef>
+          <a:effectRef idx="1">
+            <a:schemeClr val="accent1"/>
+          </a:effectRef>
+          <a:fontRef idx="minor">
+            <a:schemeClr val="tx1"/>
+          </a:fontRef>
+        </p:style>
+      </p:cxnSp>
+      <p:cxnSp>
+        <p:nvCxnSpPr>
+          <p:cNvPr id="9" name="Connector 8"/>
+          <p:cNvCxnSpPr/>
+          <p:nvPr/>
+        </p:nvCxnSpPr>
+        <p:spPr>
+          <a:xfrm>
+            <a:off x="1161288" y="2606040"/>
+            <a:ext cx="0" cy="2011680"/>
+          </a:xfrm>
+          <a:prstGeom prst="line">
+            <a:avLst/>
+          </a:prstGeom>
+          <a:ln w="12700">
+            <a:solidFill>
+              <a:srgbClr val="C9C4BA"/>
+            </a:solidFill>
+          </a:ln>
+          <a:effectLst/>
+        </p:spPr>
+        <p:style>
+          <a:lnRef idx="2">
+            <a:schemeClr val="accent1"/>
+          </a:lnRef>
+          <a:fillRef idx="0">
+            <a:schemeClr val="accent1"/>
+          </a:fillRef>
+          <a:effectRef idx="1">
+            <a:schemeClr val="accent1"/>
+          </a:effectRef>
+          <a:fontRef idx="minor">
+            <a:schemeClr val="tx1"/>
+          </a:fontRef>
+        </p:style>
+      </p:cxnSp>
+      <p:sp>
+        <p:nvSpPr>
+          <p:cNvPr id="10" name="TextBox 9"/>
           <p:cNvSpPr txBox="1"/>
           <p:nvPr/>
         </p:nvSpPr>
         <p:spPr>
           <a:xfrm>
-            <a:off x="1161288" y="4626864"/>
-            <a:ext cx="2743200" cy="182880"/>
+            <a:off x="1161288" y="4690872"/>
+            <a:ext cx="5486400" cy="182880"/>
           </a:xfrm>
           <a:prstGeom prst="rect">
             <a:avLst/>
@@ -4863,27 +4935,393 @@
               </a:spcAft>
             </a:pPr>
             <a:r>
-              <a:rPr sz="850" b="0">
+              <a:rPr sz="900" b="0">
                 <a:solidFill>
                   <a:srgbClr val="6E6A64"/>
                 </a:solidFill>
                 <a:latin typeface="Helvetica Neue"/>
               </a:rPr>
-              <a:t>← más rápido en auto</a:t>
-            </a:r>
-          </a:p>
-        </p:txBody>
-      </p:sp>
-      <p:sp>
-        <p:nvSpPr>
-          <p:cNvPr id="9" name="TextBox 8"/>
+              <a:t>Minutos promedio en auto a los 9 destinos (40 a 99 min)  →</a:t>
+            </a:r>
+          </a:p>
+        </p:txBody>
+      </p:sp>
+      <p:sp>
+        <p:nvSpPr>
+          <p:cNvPr id="11" name="TextBox 10"/>
           <p:cNvSpPr txBox="1"/>
           <p:nvPr/>
         </p:nvSpPr>
         <p:spPr>
           <a:xfrm>
-            <a:off x="4453127" y="4626864"/>
-            <a:ext cx="2194560" cy="182880"/>
+            <a:off x="1161288" y="2331720"/>
+            <a:ext cx="5943600" cy="182880"/>
+          </a:xfrm>
+          <a:prstGeom prst="rect">
+            <a:avLst/>
+          </a:prstGeom>
+          <a:noFill/>
+        </p:spPr>
+        <p:txBody>
+          <a:bodyPr wrap="square" anchor="t" lIns="0" rIns="0" tIns="0" bIns="0">
+            <a:spAutoFit/>
+          </a:bodyPr>
+          <a:lstStyle/>
+          <a:p>
+            <a:pPr algn="l">
+              <a:lnSpc>
+                <a:spcPct val="100000"/>
+              </a:lnSpc>
+              <a:spcBef>
+                <a:spcPts val="0"/>
+              </a:spcBef>
+              <a:spcAft>
+                <a:spcPts val="0"/>
+              </a:spcAft>
+            </a:pPr>
+            <a:r>
+              <a:rPr sz="900" b="0">
+                <a:solidFill>
+                  <a:srgbClr val="6E6A64"/>
+                </a:solidFill>
+                <a:latin typeface="Helvetica Neue"/>
+              </a:rPr>
+              <a:t>Costo mensual de manejar ($189 a $496 mil/mes)  ↑</a:t>
+            </a:r>
+          </a:p>
+        </p:txBody>
+      </p:sp>
+      <p:sp>
+        <p:nvSpPr>
+          <p:cNvPr id="12" name="TextBox 11"/>
+          <p:cNvSpPr txBox="1"/>
+          <p:nvPr/>
+        </p:nvSpPr>
+        <p:spPr>
+          <a:xfrm>
+            <a:off x="1252728" y="3970147"/>
+            <a:ext cx="2377440" cy="182880"/>
+          </a:xfrm>
+          <a:prstGeom prst="rect">
+            <a:avLst/>
+          </a:prstGeom>
+          <a:noFill/>
+        </p:spPr>
+        <p:txBody>
+          <a:bodyPr wrap="square" anchor="t" lIns="0" rIns="0" tIns="0" bIns="0">
+            <a:spAutoFit/>
+          </a:bodyPr>
+          <a:lstStyle/>
+          <a:p>
+            <a:pPr algn="l">
+              <a:lnSpc>
+                <a:spcPct val="100000"/>
+              </a:lnSpc>
+              <a:spcBef>
+                <a:spcPts val="0"/>
+              </a:spcBef>
+              <a:spcAft>
+                <a:spcPts val="0"/>
+              </a:spcAft>
+            </a:pPr>
+            <a:r>
+              <a:rPr sz="800" b="1" spc="80">
+                <a:solidFill>
+                  <a:srgbClr val="2F9E6E"/>
+                </a:solidFill>
+                <a:latin typeface="Helvetica Neue"/>
+              </a:rPr>
+              <a:t>RÁPIDA Y BARATA</a:t>
+            </a:r>
+          </a:p>
+        </p:txBody>
+      </p:sp>
+      <p:sp>
+        <p:nvSpPr>
+          <p:cNvPr id="13" name="Oval 12"/>
+          <p:cNvSpPr/>
+          <p:nvPr/>
+        </p:nvSpPr>
+        <p:spPr>
+          <a:xfrm>
+            <a:off x="1553476" y="4219186"/>
+            <a:ext cx="118872" cy="118872"/>
+          </a:xfrm>
+          <a:prstGeom prst="ellipse">
+            <a:avLst/>
+          </a:prstGeom>
+          <a:solidFill>
+            <a:srgbClr val="134E48"/>
+          </a:solidFill>
+          <a:ln w="15240">
+            <a:solidFill>
+              <a:srgbClr val="FFFFFF"/>
+            </a:solidFill>
+          </a:ln>
+          <a:effectLst/>
+        </p:spPr>
+        <p:style>
+          <a:lnRef idx="1">
+            <a:schemeClr val="accent1"/>
+          </a:lnRef>
+          <a:fillRef idx="3">
+            <a:schemeClr val="accent1"/>
+          </a:fillRef>
+          <a:effectRef idx="2">
+            <a:schemeClr val="accent1"/>
+          </a:effectRef>
+          <a:fontRef idx="minor">
+            <a:schemeClr val="lt1"/>
+          </a:fontRef>
+        </p:style>
+        <p:txBody>
+          <a:bodyPr rtlCol="0" anchor="ctr"/>
+          <a:lstStyle/>
+          <a:p>
+            <a:pPr algn="ctr"/>
+          </a:p>
+        </p:txBody>
+      </p:sp>
+      <p:sp>
+        <p:nvSpPr>
+          <p:cNvPr id="14" name="Oval 13"/>
+          <p:cNvSpPr/>
+          <p:nvPr/>
+        </p:nvSpPr>
+        <p:spPr>
+          <a:xfrm>
+            <a:off x="2297820" y="4358035"/>
+            <a:ext cx="118872" cy="118872"/>
+          </a:xfrm>
+          <a:prstGeom prst="ellipse">
+            <a:avLst/>
+          </a:prstGeom>
+          <a:solidFill>
+            <a:srgbClr val="134E48"/>
+          </a:solidFill>
+          <a:ln w="15240">
+            <a:solidFill>
+              <a:srgbClr val="FFFFFF"/>
+            </a:solidFill>
+          </a:ln>
+          <a:effectLst/>
+        </p:spPr>
+        <p:style>
+          <a:lnRef idx="1">
+            <a:schemeClr val="accent1"/>
+          </a:lnRef>
+          <a:fillRef idx="3">
+            <a:schemeClr val="accent1"/>
+          </a:fillRef>
+          <a:effectRef idx="2">
+            <a:schemeClr val="accent1"/>
+          </a:effectRef>
+          <a:fontRef idx="minor">
+            <a:schemeClr val="lt1"/>
+          </a:fontRef>
+        </p:style>
+        <p:txBody>
+          <a:bodyPr rtlCol="0" anchor="ctr"/>
+          <a:lstStyle/>
+          <a:p>
+            <a:pPr algn="ctr"/>
+          </a:p>
+        </p:txBody>
+      </p:sp>
+      <p:sp>
+        <p:nvSpPr>
+          <p:cNvPr id="15" name="Oval 14"/>
+          <p:cNvSpPr/>
+          <p:nvPr/>
+        </p:nvSpPr>
+        <p:spPr>
+          <a:xfrm>
+            <a:off x="2741081" y="2986889"/>
+            <a:ext cx="118872" cy="118872"/>
+          </a:xfrm>
+          <a:prstGeom prst="ellipse">
+            <a:avLst/>
+          </a:prstGeom>
+          <a:solidFill>
+            <a:srgbClr val="134E48"/>
+          </a:solidFill>
+          <a:ln w="15240">
+            <a:solidFill>
+              <a:srgbClr val="FFFFFF"/>
+            </a:solidFill>
+          </a:ln>
+          <a:effectLst/>
+        </p:spPr>
+        <p:style>
+          <a:lnRef idx="1">
+            <a:schemeClr val="accent1"/>
+          </a:lnRef>
+          <a:fillRef idx="3">
+            <a:schemeClr val="accent1"/>
+          </a:fillRef>
+          <a:effectRef idx="2">
+            <a:schemeClr val="accent1"/>
+          </a:effectRef>
+          <a:fontRef idx="minor">
+            <a:schemeClr val="lt1"/>
+          </a:fontRef>
+        </p:style>
+        <p:txBody>
+          <a:bodyPr rtlCol="0" anchor="ctr"/>
+          <a:lstStyle/>
+          <a:p>
+            <a:pPr algn="ctr"/>
+          </a:p>
+        </p:txBody>
+      </p:sp>
+      <p:sp>
+        <p:nvSpPr>
+          <p:cNvPr id="16" name="Oval 15"/>
+          <p:cNvSpPr/>
+          <p:nvPr/>
+        </p:nvSpPr>
+        <p:spPr>
+          <a:xfrm>
+            <a:off x="2841442" y="3581631"/>
+            <a:ext cx="118872" cy="118872"/>
+          </a:xfrm>
+          <a:prstGeom prst="ellipse">
+            <a:avLst/>
+          </a:prstGeom>
+          <a:solidFill>
+            <a:srgbClr val="134E48"/>
+          </a:solidFill>
+          <a:ln w="15240">
+            <a:solidFill>
+              <a:srgbClr val="FFFFFF"/>
+            </a:solidFill>
+          </a:ln>
+          <a:effectLst/>
+        </p:spPr>
+        <p:style>
+          <a:lnRef idx="1">
+            <a:schemeClr val="accent1"/>
+          </a:lnRef>
+          <a:fillRef idx="3">
+            <a:schemeClr val="accent1"/>
+          </a:fillRef>
+          <a:effectRef idx="2">
+            <a:schemeClr val="accent1"/>
+          </a:effectRef>
+          <a:fontRef idx="minor">
+            <a:schemeClr val="lt1"/>
+          </a:fontRef>
+        </p:style>
+        <p:txBody>
+          <a:bodyPr rtlCol="0" anchor="ctr"/>
+          <a:lstStyle/>
+          <a:p>
+            <a:pPr algn="ctr"/>
+          </a:p>
+        </p:txBody>
+      </p:sp>
+      <p:sp>
+        <p:nvSpPr>
+          <p:cNvPr id="17" name="Oval 16"/>
+          <p:cNvSpPr/>
+          <p:nvPr/>
+        </p:nvSpPr>
+        <p:spPr>
+          <a:xfrm>
+            <a:off x="2883259" y="4398187"/>
+            <a:ext cx="118872" cy="118872"/>
+          </a:xfrm>
+          <a:prstGeom prst="ellipse">
+            <a:avLst/>
+          </a:prstGeom>
+          <a:solidFill>
+            <a:srgbClr val="134E48"/>
+          </a:solidFill>
+          <a:ln w="15240">
+            <a:solidFill>
+              <a:srgbClr val="FFFFFF"/>
+            </a:solidFill>
+          </a:ln>
+          <a:effectLst/>
+        </p:spPr>
+        <p:style>
+          <a:lnRef idx="1">
+            <a:schemeClr val="accent1"/>
+          </a:lnRef>
+          <a:fillRef idx="3">
+            <a:schemeClr val="accent1"/>
+          </a:fillRef>
+          <a:effectRef idx="2">
+            <a:schemeClr val="accent1"/>
+          </a:effectRef>
+          <a:fontRef idx="minor">
+            <a:schemeClr val="lt1"/>
+          </a:fontRef>
+        </p:style>
+        <p:txBody>
+          <a:bodyPr rtlCol="0" anchor="ctr"/>
+          <a:lstStyle/>
+          <a:p>
+            <a:pPr algn="ctr"/>
+          </a:p>
+        </p:txBody>
+      </p:sp>
+      <p:sp>
+        <p:nvSpPr>
+          <p:cNvPr id="18" name="Oval 17"/>
+          <p:cNvSpPr/>
+          <p:nvPr/>
+        </p:nvSpPr>
+        <p:spPr>
+          <a:xfrm>
+            <a:off x="2981278" y="3873511"/>
+            <a:ext cx="173736" cy="173736"/>
+          </a:xfrm>
+          <a:prstGeom prst="ellipse">
+            <a:avLst/>
+          </a:prstGeom>
+          <a:solidFill>
+            <a:srgbClr val="B07D24"/>
+          </a:solidFill>
+          <a:ln w="15240">
+            <a:solidFill>
+              <a:srgbClr val="FFFFFF"/>
+            </a:solidFill>
+          </a:ln>
+          <a:effectLst/>
+        </p:spPr>
+        <p:style>
+          <a:lnRef idx="1">
+            <a:schemeClr val="accent1"/>
+          </a:lnRef>
+          <a:fillRef idx="3">
+            <a:schemeClr val="accent1"/>
+          </a:fillRef>
+          <a:effectRef idx="2">
+            <a:schemeClr val="accent1"/>
+          </a:effectRef>
+          <a:fontRef idx="minor">
+            <a:schemeClr val="lt1"/>
+          </a:fontRef>
+        </p:style>
+        <p:txBody>
+          <a:bodyPr rtlCol="0" anchor="ctr"/>
+          <a:lstStyle/>
+          <a:p>
+            <a:pPr algn="ctr"/>
+          </a:p>
+        </p:txBody>
+      </p:sp>
+      <p:sp>
+        <p:nvSpPr>
+          <p:cNvPr id="19" name="TextBox 18"/>
+          <p:cNvSpPr txBox="1"/>
+          <p:nvPr/>
+        </p:nvSpPr>
+        <p:spPr>
+          <a:xfrm>
+            <a:off x="1810846" y="3882655"/>
+            <a:ext cx="1147572" cy="164592"/>
           </a:xfrm>
           <a:prstGeom prst="rect">
             <a:avLst/>
@@ -4908,125 +5346,35 @@
               </a:spcAft>
             </a:pPr>
             <a:r>
-              <a:rPr sz="850" b="0">
+              <a:rPr sz="950" b="1">
                 <a:solidFill>
-                  <a:srgbClr val="6E6A64"/>
+                  <a:srgbClr val="B07D24"/>
                 </a:solidFill>
                 <a:latin typeface="Helvetica Neue"/>
               </a:rPr>
-              <a:t>más lento →</a:t>
-            </a:r>
-          </a:p>
-        </p:txBody>
-      </p:sp>
-      <p:sp>
-        <p:nvSpPr>
-          <p:cNvPr id="10" name="TextBox 9"/>
-          <p:cNvSpPr txBox="1"/>
-          <p:nvPr/>
-        </p:nvSpPr>
-        <p:spPr>
-          <a:xfrm>
-            <a:off x="704088" y="2212848"/>
-            <a:ext cx="2743200" cy="182880"/>
-          </a:xfrm>
-          <a:prstGeom prst="rect">
-            <a:avLst/>
-          </a:prstGeom>
-          <a:noFill/>
-        </p:spPr>
-        <p:txBody>
-          <a:bodyPr wrap="square" anchor="t" lIns="0" rIns="0" tIns="0" bIns="0">
-            <a:spAutoFit/>
-          </a:bodyPr>
-          <a:lstStyle/>
-          <a:p>
-            <a:pPr algn="l">
-              <a:lnSpc>
-                <a:spcPct val="100000"/>
-              </a:lnSpc>
-              <a:spcBef>
-                <a:spcPts val="0"/>
-              </a:spcBef>
-              <a:spcAft>
-                <a:spcPts val="0"/>
-              </a:spcAft>
-            </a:pPr>
-            <a:r>
-              <a:rPr sz="850" b="0">
-                <a:solidFill>
-                  <a:srgbClr val="6E6A64"/>
-                </a:solidFill>
-                <a:latin typeface="Helvetica Neue"/>
-              </a:rPr>
-              <a:t>↑ más caro de manejar</a:t>
-            </a:r>
-          </a:p>
-        </p:txBody>
-      </p:sp>
-      <p:sp>
-        <p:nvSpPr>
-          <p:cNvPr id="11" name="TextBox 10"/>
-          <p:cNvSpPr txBox="1"/>
-          <p:nvPr/>
-        </p:nvSpPr>
-        <p:spPr>
-          <a:xfrm>
-            <a:off x="1271016" y="4261104"/>
-            <a:ext cx="2743200" cy="182880"/>
-          </a:xfrm>
-          <a:prstGeom prst="rect">
-            <a:avLst/>
-          </a:prstGeom>
-          <a:noFill/>
-        </p:spPr>
-        <p:txBody>
-          <a:bodyPr wrap="square" anchor="t" lIns="0" rIns="0" tIns="0" bIns="0">
-            <a:spAutoFit/>
-          </a:bodyPr>
-          <a:lstStyle/>
-          <a:p>
-            <a:pPr algn="l">
-              <a:lnSpc>
-                <a:spcPct val="100000"/>
-              </a:lnSpc>
-              <a:spcBef>
-                <a:spcPts val="0"/>
-              </a:spcBef>
-              <a:spcAft>
-                <a:spcPts val="0"/>
-              </a:spcAft>
-            </a:pPr>
-            <a:r>
-              <a:rPr sz="850" b="1" spc="40">
-                <a:solidFill>
-                  <a:srgbClr val="2F9E6E"/>
-                </a:solidFill>
-                <a:latin typeface="Helvetica Neue"/>
-              </a:rPr>
-              <a:t>RÁPIDA Y BARATA ✓</a:t>
-            </a:r>
-          </a:p>
-        </p:txBody>
-      </p:sp>
-      <p:sp>
-        <p:nvSpPr>
-          <p:cNvPr id="12" name="Oval 11"/>
-          <p:cNvSpPr/>
-          <p:nvPr/>
-        </p:nvSpPr>
-        <p:spPr>
-          <a:xfrm>
-            <a:off x="4615046" y="3352197"/>
-            <a:ext cx="182880" cy="182880"/>
+              <a:t>Estación Colina</a:t>
+            </a:r>
+          </a:p>
+        </p:txBody>
+      </p:sp>
+      <p:sp>
+        <p:nvSpPr>
+          <p:cNvPr id="20" name="Oval 19"/>
+          <p:cNvSpPr/>
+          <p:nvPr/>
+        </p:nvSpPr>
+        <p:spPr>
+          <a:xfrm>
+            <a:off x="3485425" y="3560707"/>
+            <a:ext cx="118872" cy="118872"/>
           </a:xfrm>
           <a:prstGeom prst="ellipse">
             <a:avLst/>
           </a:prstGeom>
           <a:solidFill>
-            <a:srgbClr val="B07D24"/>
-          </a:solidFill>
-          <a:ln w="16510">
+            <a:srgbClr val="134E48"/>
+          </a:solidFill>
+          <a:ln w="15240">
             <a:solidFill>
               <a:srgbClr val="FFFFFF"/>
             </a:solidFill>
@@ -5057,14 +5405,198 @@
       </p:sp>
       <p:sp>
         <p:nvSpPr>
-          <p:cNvPr id="13" name="TextBox 12"/>
+          <p:cNvPr id="21" name="Oval 20"/>
+          <p:cNvSpPr/>
+          <p:nvPr/>
+        </p:nvSpPr>
+        <p:spPr>
+          <a:xfrm>
+            <a:off x="3608315" y="3890142"/>
+            <a:ext cx="118872" cy="118872"/>
+          </a:xfrm>
+          <a:prstGeom prst="ellipse">
+            <a:avLst/>
+          </a:prstGeom>
+          <a:solidFill>
+            <a:srgbClr val="134E48"/>
+          </a:solidFill>
+          <a:ln w="15240">
+            <a:solidFill>
+              <a:srgbClr val="FFFFFF"/>
+            </a:solidFill>
+          </a:ln>
+          <a:effectLst/>
+        </p:spPr>
+        <p:style>
+          <a:lnRef idx="1">
+            <a:schemeClr val="accent1"/>
+          </a:lnRef>
+          <a:fillRef idx="3">
+            <a:schemeClr val="accent1"/>
+          </a:fillRef>
+          <a:effectRef idx="2">
+            <a:schemeClr val="accent1"/>
+          </a:effectRef>
+          <a:fontRef idx="minor">
+            <a:schemeClr val="lt1"/>
+          </a:fontRef>
+        </p:style>
+        <p:txBody>
+          <a:bodyPr rtlCol="0" anchor="ctr"/>
+          <a:lstStyle/>
+          <a:p>
+            <a:pPr algn="ctr"/>
+          </a:p>
+        </p:txBody>
+      </p:sp>
+      <p:sp>
+        <p:nvSpPr>
+          <p:cNvPr id="22" name="Oval 21"/>
+          <p:cNvSpPr/>
+          <p:nvPr/>
+        </p:nvSpPr>
+        <p:spPr>
+          <a:xfrm>
+            <a:off x="3937049" y="3092579"/>
+            <a:ext cx="118872" cy="118872"/>
+          </a:xfrm>
+          <a:prstGeom prst="ellipse">
+            <a:avLst/>
+          </a:prstGeom>
+          <a:solidFill>
+            <a:srgbClr val="134E48"/>
+          </a:solidFill>
+          <a:ln w="15240">
+            <a:solidFill>
+              <a:srgbClr val="FFFFFF"/>
+            </a:solidFill>
+          </a:ln>
+          <a:effectLst/>
+        </p:spPr>
+        <p:style>
+          <a:lnRef idx="1">
+            <a:schemeClr val="accent1"/>
+          </a:lnRef>
+          <a:fillRef idx="3">
+            <a:schemeClr val="accent1"/>
+          </a:fillRef>
+          <a:effectRef idx="2">
+            <a:schemeClr val="accent1"/>
+          </a:effectRef>
+          <a:fontRef idx="minor">
+            <a:schemeClr val="lt1"/>
+          </a:fontRef>
+        </p:style>
+        <p:txBody>
+          <a:bodyPr rtlCol="0" anchor="ctr"/>
+          <a:lstStyle/>
+          <a:p>
+            <a:pPr algn="ctr"/>
+          </a:p>
+        </p:txBody>
+      </p:sp>
+      <p:sp>
+        <p:nvSpPr>
+          <p:cNvPr id="23" name="Oval 22"/>
+          <p:cNvSpPr/>
+          <p:nvPr/>
+        </p:nvSpPr>
+        <p:spPr>
+          <a:xfrm>
+            <a:off x="4321766" y="2760065"/>
+            <a:ext cx="118872" cy="118872"/>
+          </a:xfrm>
+          <a:prstGeom prst="ellipse">
+            <a:avLst/>
+          </a:prstGeom>
+          <a:solidFill>
+            <a:srgbClr val="134E48"/>
+          </a:solidFill>
+          <a:ln w="15240">
+            <a:solidFill>
+              <a:srgbClr val="FFFFFF"/>
+            </a:solidFill>
+          </a:ln>
+          <a:effectLst/>
+        </p:spPr>
+        <p:style>
+          <a:lnRef idx="1">
+            <a:schemeClr val="accent1"/>
+          </a:lnRef>
+          <a:fillRef idx="3">
+            <a:schemeClr val="accent1"/>
+          </a:fillRef>
+          <a:effectRef idx="2">
+            <a:schemeClr val="accent1"/>
+          </a:effectRef>
+          <a:fontRef idx="minor">
+            <a:schemeClr val="lt1"/>
+          </a:fontRef>
+        </p:style>
+        <p:txBody>
+          <a:bodyPr rtlCol="0" anchor="ctr"/>
+          <a:lstStyle/>
+          <a:p>
+            <a:pPr algn="ctr"/>
+          </a:p>
+        </p:txBody>
+      </p:sp>
+      <p:sp>
+        <p:nvSpPr>
+          <p:cNvPr id="24" name="Oval 23"/>
+          <p:cNvSpPr/>
+          <p:nvPr/>
+        </p:nvSpPr>
+        <p:spPr>
+          <a:xfrm>
+            <a:off x="4478329" y="3486026"/>
+            <a:ext cx="173736" cy="173736"/>
+          </a:xfrm>
+          <a:prstGeom prst="ellipse">
+            <a:avLst/>
+          </a:prstGeom>
+          <a:solidFill>
+            <a:srgbClr val="B07D24"/>
+          </a:solidFill>
+          <a:ln w="15240">
+            <a:solidFill>
+              <a:srgbClr val="FFFFFF"/>
+            </a:solidFill>
+          </a:ln>
+          <a:effectLst/>
+        </p:spPr>
+        <p:style>
+          <a:lnRef idx="1">
+            <a:schemeClr val="accent1"/>
+          </a:lnRef>
+          <a:fillRef idx="3">
+            <a:schemeClr val="accent1"/>
+          </a:fillRef>
+          <a:effectRef idx="2">
+            <a:schemeClr val="accent1"/>
+          </a:effectRef>
+          <a:fontRef idx="minor">
+            <a:schemeClr val="lt1"/>
+          </a:fontRef>
+        </p:style>
+        <p:txBody>
+          <a:bodyPr rtlCol="0" anchor="ctr"/>
+          <a:lstStyle/>
+          <a:p>
+            <a:pPr algn="ctr"/>
+          </a:p>
+        </p:txBody>
+      </p:sp>
+      <p:sp>
+        <p:nvSpPr>
+          <p:cNvPr id="25" name="TextBox 24"/>
           <p:cNvSpPr txBox="1"/>
           <p:nvPr/>
         </p:nvSpPr>
         <p:spPr>
           <a:xfrm>
-            <a:off x="4843646" y="3333909"/>
-            <a:ext cx="2011680" cy="182880"/>
+            <a:off x="4720645" y="3495170"/>
+            <a:ext cx="530352" cy="164592"/>
           </a:xfrm>
           <a:prstGeom prst="rect">
             <a:avLst/>
@@ -5102,22 +5634,22 @@
       </p:sp>
       <p:sp>
         <p:nvSpPr>
-          <p:cNvPr id="14" name="Oval 13"/>
-          <p:cNvSpPr/>
-          <p:nvPr/>
-        </p:nvSpPr>
-        <p:spPr>
-          <a:xfrm>
-            <a:off x="2983708" y="3805383"/>
-            <a:ext cx="182880" cy="182880"/>
+          <p:cNvPr id="26" name="Oval 25"/>
+          <p:cNvSpPr/>
+          <p:nvPr/>
+        </p:nvSpPr>
+        <p:spPr>
+          <a:xfrm>
+            <a:off x="4681393" y="4157327"/>
+            <a:ext cx="118872" cy="118872"/>
           </a:xfrm>
           <a:prstGeom prst="ellipse">
             <a:avLst/>
           </a:prstGeom>
           <a:solidFill>
-            <a:srgbClr val="B07D24"/>
-          </a:solidFill>
-          <a:ln w="16510">
+            <a:srgbClr val="134E48"/>
+          </a:solidFill>
+          <a:ln w="15240">
             <a:solidFill>
               <a:srgbClr val="FFFFFF"/>
             </a:solidFill>
@@ -5148,59 +5680,14 @@
       </p:sp>
       <p:sp>
         <p:nvSpPr>
-          <p:cNvPr id="15" name="TextBox 14"/>
-          <p:cNvSpPr txBox="1"/>
-          <p:nvPr/>
-        </p:nvSpPr>
-        <p:spPr>
-          <a:xfrm>
-            <a:off x="3212308" y="3787095"/>
-            <a:ext cx="2011680" cy="182880"/>
-          </a:xfrm>
-          <a:prstGeom prst="rect">
-            <a:avLst/>
-          </a:prstGeom>
-          <a:noFill/>
-        </p:spPr>
-        <p:txBody>
-          <a:bodyPr wrap="square" anchor="t" lIns="0" rIns="0" tIns="0" bIns="0">
-            <a:spAutoFit/>
-          </a:bodyPr>
-          <a:lstStyle/>
-          <a:p>
-            <a:pPr algn="l">
-              <a:lnSpc>
-                <a:spcPct val="100000"/>
-              </a:lnSpc>
-              <a:spcBef>
-                <a:spcPts val="0"/>
-              </a:spcBef>
-              <a:spcAft>
-                <a:spcPts val="0"/>
-              </a:spcAft>
-            </a:pPr>
-            <a:r>
-              <a:rPr sz="950" b="1">
-                <a:solidFill>
-                  <a:srgbClr val="B07D24"/>
-                </a:solidFill>
-                <a:latin typeface="Helvetica Neue"/>
-              </a:rPr>
-              <a:t>Estación Colina</a:t>
-            </a:r>
-          </a:p>
-        </p:txBody>
-      </p:sp>
-      <p:sp>
-        <p:nvSpPr>
-          <p:cNvPr id="16" name="Oval 15"/>
-          <p:cNvSpPr/>
-          <p:nvPr/>
-        </p:nvSpPr>
-        <p:spPr>
-          <a:xfrm>
-            <a:off x="2883580" y="4423515"/>
-            <a:ext cx="109728" cy="109728"/>
+          <p:cNvPr id="27" name="Oval 26"/>
+          <p:cNvSpPr/>
+          <p:nvPr/>
+        </p:nvSpPr>
+        <p:spPr>
+          <a:xfrm>
+            <a:off x="5484281" y="4006111"/>
+            <a:ext cx="118872" cy="118872"/>
           </a:xfrm>
           <a:prstGeom prst="ellipse">
             <a:avLst/>
@@ -5208,43 +5695,45 @@
           <a:solidFill>
             <a:srgbClr val="134E48"/>
           </a:solidFill>
-          <a:ln>
-            <a:noFill/>
-          </a:ln>
-          <a:effectLst/>
-        </p:spPr>
-        <p:style>
-          <a:lnRef idx="1">
-            <a:schemeClr val="accent1"/>
-          </a:lnRef>
-          <a:fillRef idx="3">
-            <a:schemeClr val="accent1"/>
-          </a:fillRef>
-          <a:effectRef idx="2">
-            <a:schemeClr val="accent1"/>
-          </a:effectRef>
-          <a:fontRef idx="minor">
-            <a:schemeClr val="lt1"/>
-          </a:fontRef>
-        </p:style>
-        <p:txBody>
-          <a:bodyPr rtlCol="0" anchor="ctr"/>
-          <a:lstStyle/>
-          <a:p>
-            <a:pPr algn="ctr"/>
-          </a:p>
-        </p:txBody>
-      </p:sp>
-      <p:sp>
-        <p:nvSpPr>
-          <p:cNvPr id="17" name="Oval 16"/>
-          <p:cNvSpPr/>
-          <p:nvPr/>
-        </p:nvSpPr>
-        <p:spPr>
-          <a:xfrm>
-            <a:off x="4843008" y="4141815"/>
-            <a:ext cx="109728" cy="109728"/>
+          <a:ln w="15240">
+            <a:solidFill>
+              <a:srgbClr val="FFFFFF"/>
+            </a:solidFill>
+          </a:ln>
+          <a:effectLst/>
+        </p:spPr>
+        <p:style>
+          <a:lnRef idx="1">
+            <a:schemeClr val="accent1"/>
+          </a:lnRef>
+          <a:fillRef idx="3">
+            <a:schemeClr val="accent1"/>
+          </a:fillRef>
+          <a:effectRef idx="2">
+            <a:schemeClr val="accent1"/>
+          </a:effectRef>
+          <a:fontRef idx="minor">
+            <a:schemeClr val="lt1"/>
+          </a:fontRef>
+        </p:style>
+        <p:txBody>
+          <a:bodyPr rtlCol="0" anchor="ctr"/>
+          <a:lstStyle/>
+          <a:p>
+            <a:pPr algn="ctr"/>
+          </a:p>
+        </p:txBody>
+      </p:sp>
+      <p:sp>
+        <p:nvSpPr>
+          <p:cNvPr id="28" name="Oval 27"/>
+          <p:cNvSpPr/>
+          <p:nvPr/>
+        </p:nvSpPr>
+        <p:spPr>
+          <a:xfrm>
+            <a:off x="5986086" y="3846703"/>
+            <a:ext cx="118872" cy="118872"/>
           </a:xfrm>
           <a:prstGeom prst="ellipse">
             <a:avLst/>
@@ -5252,476 +5741,38 @@
           <a:solidFill>
             <a:srgbClr val="134E48"/>
           </a:solidFill>
-          <a:ln>
-            <a:noFill/>
-          </a:ln>
-          <a:effectLst/>
-        </p:spPr>
-        <p:style>
-          <a:lnRef idx="1">
-            <a:schemeClr val="accent1"/>
-          </a:lnRef>
-          <a:fillRef idx="3">
-            <a:schemeClr val="accent1"/>
-          </a:fillRef>
-          <a:effectRef idx="2">
-            <a:schemeClr val="accent1"/>
-          </a:effectRef>
-          <a:fontRef idx="minor">
-            <a:schemeClr val="lt1"/>
-          </a:fontRef>
-        </p:style>
-        <p:txBody>
-          <a:bodyPr rtlCol="0" anchor="ctr"/>
-          <a:lstStyle/>
-          <a:p>
-            <a:pPr algn="ctr"/>
-          </a:p>
-        </p:txBody>
-      </p:sp>
-      <p:sp>
-        <p:nvSpPr>
-          <p:cNvPr id="18" name="Oval 17"/>
-          <p:cNvSpPr/>
-          <p:nvPr/>
-        </p:nvSpPr>
-        <p:spPr>
-          <a:xfrm>
-            <a:off x="1434514" y="4214162"/>
-            <a:ext cx="109728" cy="109728"/>
-          </a:xfrm>
-          <a:prstGeom prst="ellipse">
-            <a:avLst/>
-          </a:prstGeom>
-          <a:solidFill>
-            <a:srgbClr val="134E48"/>
-          </a:solidFill>
-          <a:ln>
-            <a:noFill/>
-          </a:ln>
-          <a:effectLst/>
-        </p:spPr>
-        <p:style>
-          <a:lnRef idx="1">
-            <a:schemeClr val="accent1"/>
-          </a:lnRef>
-          <a:fillRef idx="3">
-            <a:schemeClr val="accent1"/>
-          </a:fillRef>
-          <a:effectRef idx="2">
-            <a:schemeClr val="accent1"/>
-          </a:effectRef>
-          <a:fontRef idx="minor">
-            <a:schemeClr val="lt1"/>
-          </a:fontRef>
-        </p:style>
-        <p:txBody>
-          <a:bodyPr rtlCol="0" anchor="ctr"/>
-          <a:lstStyle/>
-          <a:p>
-            <a:pPr algn="ctr"/>
-          </a:p>
-        </p:txBody>
-      </p:sp>
-      <p:sp>
-        <p:nvSpPr>
-          <p:cNvPr id="19" name="Oval 18"/>
-          <p:cNvSpPr/>
-          <p:nvPr/>
-        </p:nvSpPr>
-        <p:spPr>
-          <a:xfrm>
-            <a:off x="2728648" y="2772920"/>
-            <a:ext cx="109728" cy="109728"/>
-          </a:xfrm>
-          <a:prstGeom prst="ellipse">
-            <a:avLst/>
-          </a:prstGeom>
-          <a:solidFill>
-            <a:srgbClr val="134E48"/>
-          </a:solidFill>
-          <a:ln>
-            <a:noFill/>
-          </a:ln>
-          <a:effectLst/>
-        </p:spPr>
-        <p:style>
-          <a:lnRef idx="1">
-            <a:schemeClr val="accent1"/>
-          </a:lnRef>
-          <a:fillRef idx="3">
-            <a:schemeClr val="accent1"/>
-          </a:fillRef>
-          <a:effectRef idx="2">
-            <a:schemeClr val="accent1"/>
-          </a:effectRef>
-          <a:fontRef idx="minor">
-            <a:schemeClr val="lt1"/>
-          </a:fontRef>
-        </p:style>
-        <p:txBody>
-          <a:bodyPr rtlCol="0" anchor="ctr"/>
-          <a:lstStyle/>
-          <a:p>
-            <a:pPr algn="ctr"/>
-          </a:p>
-        </p:txBody>
-      </p:sp>
-      <p:sp>
-        <p:nvSpPr>
-          <p:cNvPr id="20" name="Oval 19"/>
-          <p:cNvSpPr/>
-          <p:nvPr/>
-        </p:nvSpPr>
-        <p:spPr>
-          <a:xfrm>
-            <a:off x="2838012" y="3468505"/>
-            <a:ext cx="109728" cy="109728"/>
-          </a:xfrm>
-          <a:prstGeom prst="ellipse">
-            <a:avLst/>
-          </a:prstGeom>
-          <a:solidFill>
-            <a:srgbClr val="134E48"/>
-          </a:solidFill>
-          <a:ln>
-            <a:noFill/>
-          </a:ln>
-          <a:effectLst/>
-        </p:spPr>
-        <p:style>
-          <a:lnRef idx="1">
-            <a:schemeClr val="accent1"/>
-          </a:lnRef>
-          <a:fillRef idx="3">
-            <a:schemeClr val="accent1"/>
-          </a:fillRef>
-          <a:effectRef idx="2">
-            <a:schemeClr val="accent1"/>
-          </a:effectRef>
-          <a:fontRef idx="minor">
-            <a:schemeClr val="lt1"/>
-          </a:fontRef>
-        </p:style>
-        <p:txBody>
-          <a:bodyPr rtlCol="0" anchor="ctr"/>
-          <a:lstStyle/>
-          <a:p>
-            <a:pPr algn="ctr"/>
-          </a:p>
-        </p:txBody>
-      </p:sp>
-      <p:sp>
-        <p:nvSpPr>
-          <p:cNvPr id="21" name="Oval 20"/>
-          <p:cNvSpPr/>
-          <p:nvPr/>
-        </p:nvSpPr>
-        <p:spPr>
-          <a:xfrm>
-            <a:off x="6264733" y="3778521"/>
-            <a:ext cx="109728" cy="109728"/>
-          </a:xfrm>
-          <a:prstGeom prst="ellipse">
-            <a:avLst/>
-          </a:prstGeom>
-          <a:solidFill>
-            <a:srgbClr val="134E48"/>
-          </a:solidFill>
-          <a:ln>
-            <a:noFill/>
-          </a:ln>
-          <a:effectLst/>
-        </p:spPr>
-        <p:style>
-          <a:lnRef idx="1">
-            <a:schemeClr val="accent1"/>
-          </a:lnRef>
-          <a:fillRef idx="3">
-            <a:schemeClr val="accent1"/>
-          </a:fillRef>
-          <a:effectRef idx="2">
-            <a:schemeClr val="accent1"/>
-          </a:effectRef>
-          <a:fontRef idx="minor">
-            <a:schemeClr val="lt1"/>
-          </a:fontRef>
-        </p:style>
-        <p:txBody>
-          <a:bodyPr rtlCol="0" anchor="ctr"/>
-          <a:lstStyle/>
-          <a:p>
-            <a:pPr algn="ctr"/>
-          </a:p>
-        </p:txBody>
-      </p:sp>
-      <p:sp>
-        <p:nvSpPr>
-          <p:cNvPr id="22" name="Oval 21"/>
-          <p:cNvSpPr/>
-          <p:nvPr/>
-        </p:nvSpPr>
-        <p:spPr>
-          <a:xfrm>
-            <a:off x="5717916" y="3964959"/>
-            <a:ext cx="109728" cy="109728"/>
-          </a:xfrm>
-          <a:prstGeom prst="ellipse">
-            <a:avLst/>
-          </a:prstGeom>
-          <a:solidFill>
-            <a:srgbClr val="134E48"/>
-          </a:solidFill>
-          <a:ln>
-            <a:noFill/>
-          </a:ln>
-          <a:effectLst/>
-        </p:spPr>
-        <p:style>
-          <a:lnRef idx="1">
-            <a:schemeClr val="accent1"/>
-          </a:lnRef>
-          <a:fillRef idx="3">
-            <a:schemeClr val="accent1"/>
-          </a:fillRef>
-          <a:effectRef idx="2">
-            <a:schemeClr val="accent1"/>
-          </a:effectRef>
-          <a:fontRef idx="minor">
-            <a:schemeClr val="lt1"/>
-          </a:fontRef>
-        </p:style>
-        <p:txBody>
-          <a:bodyPr rtlCol="0" anchor="ctr"/>
-          <a:lstStyle/>
-          <a:p>
-            <a:pPr algn="ctr"/>
-          </a:p>
-        </p:txBody>
-      </p:sp>
-      <p:sp>
-        <p:nvSpPr>
-          <p:cNvPr id="23" name="Oval 22"/>
-          <p:cNvSpPr/>
-          <p:nvPr/>
-        </p:nvSpPr>
-        <p:spPr>
-          <a:xfrm>
-            <a:off x="4451123" y="2507636"/>
-            <a:ext cx="109728" cy="109728"/>
-          </a:xfrm>
-          <a:prstGeom prst="ellipse">
-            <a:avLst/>
-          </a:prstGeom>
-          <a:solidFill>
-            <a:srgbClr val="134E48"/>
-          </a:solidFill>
-          <a:ln>
-            <a:noFill/>
-          </a:ln>
-          <a:effectLst/>
-        </p:spPr>
-        <p:style>
-          <a:lnRef idx="1">
-            <a:schemeClr val="accent1"/>
-          </a:lnRef>
-          <a:fillRef idx="3">
-            <a:schemeClr val="accent1"/>
-          </a:fillRef>
-          <a:effectRef idx="2">
-            <a:schemeClr val="accent1"/>
-          </a:effectRef>
-          <a:fontRef idx="minor">
-            <a:schemeClr val="lt1"/>
-          </a:fontRef>
-        </p:style>
-        <p:txBody>
-          <a:bodyPr rtlCol="0" anchor="ctr"/>
-          <a:lstStyle/>
-          <a:p>
-            <a:pPr algn="ctr"/>
-          </a:p>
-        </p:txBody>
-      </p:sp>
-      <p:sp>
-        <p:nvSpPr>
-          <p:cNvPr id="24" name="Oval 23"/>
-          <p:cNvSpPr/>
-          <p:nvPr/>
-        </p:nvSpPr>
-        <p:spPr>
-          <a:xfrm>
-            <a:off x="4031896" y="2896530"/>
-            <a:ext cx="109728" cy="109728"/>
-          </a:xfrm>
-          <a:prstGeom prst="ellipse">
-            <a:avLst/>
-          </a:prstGeom>
-          <a:solidFill>
-            <a:srgbClr val="134E48"/>
-          </a:solidFill>
-          <a:ln>
-            <a:noFill/>
-          </a:ln>
-          <a:effectLst/>
-        </p:spPr>
-        <p:style>
-          <a:lnRef idx="1">
-            <a:schemeClr val="accent1"/>
-          </a:lnRef>
-          <a:fillRef idx="3">
-            <a:schemeClr val="accent1"/>
-          </a:fillRef>
-          <a:effectRef idx="2">
-            <a:schemeClr val="accent1"/>
-          </a:effectRef>
-          <a:fontRef idx="minor">
-            <a:schemeClr val="lt1"/>
-          </a:fontRef>
-        </p:style>
-        <p:txBody>
-          <a:bodyPr rtlCol="0" anchor="ctr"/>
-          <a:lstStyle/>
-          <a:p>
-            <a:pPr algn="ctr"/>
-          </a:p>
-        </p:txBody>
-      </p:sp>
-      <p:sp>
-        <p:nvSpPr>
-          <p:cNvPr id="25" name="Oval 24"/>
-          <p:cNvSpPr/>
-          <p:nvPr/>
-        </p:nvSpPr>
-        <p:spPr>
-          <a:xfrm>
-            <a:off x="2245626" y="4376554"/>
-            <a:ext cx="109728" cy="109728"/>
-          </a:xfrm>
-          <a:prstGeom prst="ellipse">
-            <a:avLst/>
-          </a:prstGeom>
-          <a:solidFill>
-            <a:srgbClr val="134E48"/>
-          </a:solidFill>
-          <a:ln>
-            <a:noFill/>
-          </a:ln>
-          <a:effectLst/>
-        </p:spPr>
-        <p:style>
-          <a:lnRef idx="1">
-            <a:schemeClr val="accent1"/>
-          </a:lnRef>
-          <a:fillRef idx="3">
-            <a:schemeClr val="accent1"/>
-          </a:fillRef>
-          <a:effectRef idx="2">
-            <a:schemeClr val="accent1"/>
-          </a:effectRef>
-          <a:fontRef idx="minor">
-            <a:schemeClr val="lt1"/>
-          </a:fontRef>
-        </p:style>
-        <p:txBody>
-          <a:bodyPr rtlCol="0" anchor="ctr"/>
-          <a:lstStyle/>
-          <a:p>
-            <a:pPr algn="ctr"/>
-          </a:p>
-        </p:txBody>
-      </p:sp>
-      <p:sp>
-        <p:nvSpPr>
-          <p:cNvPr id="26" name="Oval 25"/>
-          <p:cNvSpPr/>
-          <p:nvPr/>
-        </p:nvSpPr>
-        <p:spPr>
-          <a:xfrm>
-            <a:off x="3539760" y="3444033"/>
-            <a:ext cx="109728" cy="109728"/>
-          </a:xfrm>
-          <a:prstGeom prst="ellipse">
-            <a:avLst/>
-          </a:prstGeom>
-          <a:solidFill>
-            <a:srgbClr val="134E48"/>
-          </a:solidFill>
-          <a:ln>
-            <a:noFill/>
-          </a:ln>
-          <a:effectLst/>
-        </p:spPr>
-        <p:style>
-          <a:lnRef idx="1">
-            <a:schemeClr val="accent1"/>
-          </a:lnRef>
-          <a:fillRef idx="3">
-            <a:schemeClr val="accent1"/>
-          </a:fillRef>
-          <a:effectRef idx="2">
-            <a:schemeClr val="accent1"/>
-          </a:effectRef>
-          <a:fontRef idx="minor">
-            <a:schemeClr val="lt1"/>
-          </a:fontRef>
-        </p:style>
-        <p:txBody>
-          <a:bodyPr rtlCol="0" anchor="ctr"/>
-          <a:lstStyle/>
-          <a:p>
-            <a:pPr algn="ctr"/>
-          </a:p>
-        </p:txBody>
-      </p:sp>
-      <p:sp>
-        <p:nvSpPr>
-          <p:cNvPr id="27" name="Oval 26"/>
-          <p:cNvSpPr/>
-          <p:nvPr/>
-        </p:nvSpPr>
-        <p:spPr>
-          <a:xfrm>
-            <a:off x="3673674" y="3829326"/>
-            <a:ext cx="109728" cy="109728"/>
-          </a:xfrm>
-          <a:prstGeom prst="ellipse">
-            <a:avLst/>
-          </a:prstGeom>
-          <a:solidFill>
-            <a:srgbClr val="134E48"/>
-          </a:solidFill>
-          <a:ln>
-            <a:noFill/>
-          </a:ln>
-          <a:effectLst/>
-        </p:spPr>
-        <p:style>
-          <a:lnRef idx="1">
-            <a:schemeClr val="accent1"/>
-          </a:lnRef>
-          <a:fillRef idx="3">
-            <a:schemeClr val="accent1"/>
-          </a:fillRef>
-          <a:effectRef idx="2">
-            <a:schemeClr val="accent1"/>
-          </a:effectRef>
-          <a:fontRef idx="minor">
-            <a:schemeClr val="lt1"/>
-          </a:fontRef>
-        </p:style>
-        <p:txBody>
-          <a:bodyPr rtlCol="0" anchor="ctr"/>
-          <a:lstStyle/>
-          <a:p>
-            <a:pPr algn="ctr"/>
-          </a:p>
-        </p:txBody>
-      </p:sp>
-      <p:sp>
-        <p:nvSpPr>
-          <p:cNvPr id="28" name="TextBox 27"/>
+          <a:ln w="15240">
+            <a:solidFill>
+              <a:srgbClr val="FFFFFF"/>
+            </a:solidFill>
+          </a:ln>
+          <a:effectLst/>
+        </p:spPr>
+        <p:style>
+          <a:lnRef idx="1">
+            <a:schemeClr val="accent1"/>
+          </a:lnRef>
+          <a:fillRef idx="3">
+            <a:schemeClr val="accent1"/>
+          </a:fillRef>
+          <a:effectRef idx="2">
+            <a:schemeClr val="accent1"/>
+          </a:effectRef>
+          <a:fontRef idx="minor">
+            <a:schemeClr val="lt1"/>
+          </a:fontRef>
+        </p:style>
+        <p:txBody>
+          <a:bodyPr rtlCol="0" anchor="ctr"/>
+          <a:lstStyle/>
+          <a:p>
+            <a:pPr algn="ctr"/>
+          </a:p>
+        </p:txBody>
+      </p:sp>
+      <p:sp>
+        <p:nvSpPr>
+          <p:cNvPr id="29" name="TextBox 28"/>
           <p:cNvSpPr txBox="1"/>
           <p:nvPr/>
         </p:nvSpPr>
@@ -5759,14 +5810,14 @@
                 </a:solidFill>
                 <a:latin typeface="Helvetica Neue"/>
               </a:rPr>
-              <a:t>LOS REPAROS, SIN VUELTAS</a:t>
-            </a:r>
-          </a:p>
-        </p:txBody>
-      </p:sp>
-      <p:sp>
-        <p:nvSpPr>
-          <p:cNvPr id="29" name="TextBox 28"/>
+              <a:t>EL DIAGNÓSTICO</a:t>
+            </a:r>
+          </a:p>
+        </p:txBody>
+      </p:sp>
+      <p:sp>
+        <p:nvSpPr>
+          <p:cNvPr id="30" name="TextBox 29"/>
           <p:cNvSpPr txBox="1"/>
           <p:nvPr/>
         </p:nvSpPr>
@@ -5811,7 +5862,7 @@
       </p:sp>
       <p:sp>
         <p:nvSpPr>
-          <p:cNvPr id="30" name="TextBox 29"/>
+          <p:cNvPr id="31" name="TextBox 30"/>
           <p:cNvSpPr txBox="1"/>
           <p:nvPr/>
         </p:nvSpPr>
@@ -5856,7 +5907,7 @@
       </p:sp>
       <p:sp>
         <p:nvSpPr>
-          <p:cNvPr id="31" name="TextBox 30"/>
+          <p:cNvPr id="32" name="TextBox 31"/>
           <p:cNvSpPr txBox="1"/>
           <p:nvPr/>
         </p:nvSpPr>
@@ -5901,7 +5952,7 @@
       </p:sp>
       <p:sp>
         <p:nvSpPr>
-          <p:cNvPr id="32" name="TextBox 31"/>
+          <p:cNvPr id="33" name="TextBox 32"/>
           <p:cNvSpPr txBox="1"/>
           <p:nvPr/>
         </p:nvSpPr>
@@ -5939,14 +5990,14 @@
                 </a:solidFill>
                 <a:latin typeface="Helvetica Neue"/>
               </a:rPr>
-              <a:t>Lejano y caro en auto: cruza pórticos hacia casi todo.</a:t>
-            </a:r>
-          </a:p>
-        </p:txBody>
-      </p:sp>
-      <p:sp>
-        <p:nvSpPr>
-          <p:cNvPr id="33" name="TextBox 32"/>
+              <a:t>Lejano y caro en auto: cruza autopistas concesionadas hacia la mayoría de los destinos.</a:t>
+            </a:r>
+          </a:p>
+        </p:txBody>
+      </p:sp>
+      <p:sp>
+        <p:nvSpPr>
+          <p:cNvPr id="34" name="TextBox 33"/>
           <p:cNvSpPr txBox="1"/>
           <p:nvPr/>
         </p:nvSpPr>
@@ -5991,7 +6042,7 @@
       </p:sp>
       <p:sp>
         <p:nvSpPr>
-          <p:cNvPr id="34" name="TextBox 33"/>
+          <p:cNvPr id="35" name="TextBox 34"/>
           <p:cNvSpPr txBox="1"/>
           <p:nvPr/>
         </p:nvSpPr>
@@ -6029,14 +6080,14 @@
                 </a:solidFill>
                 <a:latin typeface="Helvetica Neue"/>
               </a:rPr>
-              <a:t>No son RED: pagan el transporte público por tramo, más caro.</a:t>
-            </a:r>
-          </a:p>
-        </p:txBody>
-      </p:sp>
-      <p:sp>
-        <p:nvSpPr>
-          <p:cNvPr id="35" name="Rectangle 34"/>
+              <a:t>Sin integración a RED: pagan el transporte público por tramo, más caro.</a:t>
+            </a:r>
+          </a:p>
+        </p:txBody>
+      </p:sp>
+      <p:sp>
+        <p:nvSpPr>
+          <p:cNvPr id="36" name="Rectangle 35"/>
           <p:cNvSpPr/>
           <p:nvPr/>
         </p:nvSpPr>
@@ -6082,7 +6133,7 @@
       </p:sp>
       <p:sp>
         <p:nvSpPr>
-          <p:cNvPr id="36" name="Rectangle 35"/>
+          <p:cNvPr id="37" name="Rectangle 36"/>
           <p:cNvSpPr/>
           <p:nvPr/>
         </p:nvSpPr>
@@ -6126,7 +6177,7 @@
       </p:sp>
       <p:sp>
         <p:nvSpPr>
-          <p:cNvPr id="37" name="TextBox 36"/>
+          <p:cNvPr id="38" name="TextBox 37"/>
           <p:cNvSpPr txBox="1"/>
           <p:nvPr/>
         </p:nvSpPr>
@@ -6171,7 +6222,7 @@
       </p:sp>
       <p:sp>
         <p:nvSpPr>
-          <p:cNvPr id="38" name="TextBox 37"/>
+          <p:cNvPr id="39" name="TextBox 38"/>
           <p:cNvSpPr txBox="1"/>
           <p:nvPr/>
         </p:nvSpPr>
@@ -6209,14 +6260,14 @@
                 </a:solidFill>
                 <a:latin typeface="Helvetica Neue"/>
               </a:rPr>
-              <a:t>La foto de hoy tiene una fortaleza y reparos claros — y cada reparo tiene salida con la infraestructura que viene, o con gestión.</a:t>
+              <a:t>El diagnóstico de hoy tiene una fortaleza y debilidades claras. Cada debilidad tiene respuesta: infraestructura en construcción o gestión propia.</a:t>
             </a:r>
           </a:p>
         </p:txBody>
       </p:sp>
       <p:cxnSp>
         <p:nvCxnSpPr>
-          <p:cNvPr id="39" name="Connector 38"/>
+          <p:cNvPr id="40" name="Connector 39"/>
           <p:cNvCxnSpPr/>
           <p:nvPr/>
         </p:nvCxnSpPr>
@@ -6252,7 +6303,7 @@
       </p:cxnSp>
       <p:sp>
         <p:nvSpPr>
-          <p:cNvPr id="40" name="TextBox 39"/>
+          <p:cNvPr id="41" name="TextBox 40"/>
           <p:cNvSpPr txBox="1"/>
           <p:nvPr/>
         </p:nvSpPr>
@@ -6306,7 +6357,7 @@
       </p:sp>
       <p:sp>
         <p:nvSpPr>
-          <p:cNvPr id="41" name="TextBox 40"/>
+          <p:cNvPr id="42" name="TextBox 41"/>
           <p:cNvSpPr txBox="1"/>
           <p:nvPr/>
         </p:nvSpPr>
@@ -6508,13 +6559,13 @@
               </a:spcAft>
             </a:pPr>
             <a:r>
-              <a:rPr sz="2700" b="1" spc="-10">
+              <a:rPr sz="2600" b="1" spc="-10">
                 <a:solidFill>
                   <a:srgbClr val="161616"/>
                 </a:solidFill>
                 <a:latin typeface="Helvetica Neue"/>
               </a:rPr>
-              <a:t>El tren y la Orbital mueven a nuestros</a:t>
+              <a:t>El tren y la Autopista mueven a nuestros</a:t>
             </a:r>
           </a:p>
           <a:p>
@@ -6530,7 +6581,7 @@
               </a:spcAft>
             </a:pPr>
             <a:r>
-              <a:rPr sz="2700" b="1" spc="-10">
+              <a:rPr sz="2600" b="1" spc="-10">
                 <a:solidFill>
                   <a:srgbClr val="161616"/>
                 </a:solidFill>
@@ -20041,7 +20092,7 @@
                 </a:solidFill>
                 <a:latin typeface="Helvetica Neue"/>
               </a:rPr>
-              <a:t>      con la Orbital  </a:t>
+              <a:t>      con la Autopista  </a:t>
             </a:r>
             <a:r>
               <a:rPr sz="1300" b="1">
@@ -20230,7 +20281,7 @@
                 </a:solidFill>
                 <a:latin typeface="Helvetica Neue"/>
               </a:rPr>
-              <a:t>El transporte público de nuestros proyectos pasa de rojo a verde con el tren; la Orbital hace lo mismo con Batuco en auto. Ambas obras ya están en construcción.</a:t>
+              <a:t>El transporte público de nuestros proyectos pasa de rojo a verde con el tren; la Autopista hace lo mismo con Batuco en auto. Ambas obras ya están en construcción.</a:t>
             </a:r>
           </a:p>
         </p:txBody>
@@ -20490,7 +20541,7 @@
                 </a:solidFill>
                 <a:latin typeface="Helvetica Neue"/>
               </a:rPr>
-              <a:t>CUÁNTO VALE · SOBREPRECIO, TODAS CON TODAS</a:t>
+              <a:t>CUÁNTO VALE · SOBREPRECIO ENTRE ZONAS</a:t>
             </a:r>
           </a:p>
         </p:txBody>
@@ -20529,13 +20580,13 @@
               </a:spcAft>
             </a:pPr>
             <a:r>
-              <a:rPr sz="2500" b="1" spc="-10">
+              <a:rPr sz="2600" b="1" spc="-10">
                 <a:solidFill>
                   <a:srgbClr val="161616"/>
                 </a:solidFill>
                 <a:latin typeface="Helvetica Neue"/>
               </a:rPr>
-              <a:t>Cuánto más —o menos— puede pedir cada</a:t>
+              <a:t>Sobreprecio justificado entre zonas:</a:t>
             </a:r>
           </a:p>
           <a:p>
@@ -20551,13 +20602,13 @@
               </a:spcAft>
             </a:pPr>
             <a:r>
-              <a:rPr sz="2500" b="1" spc="-10">
+              <a:rPr sz="2600" b="1" spc="-10">
                 <a:solidFill>
                   <a:srgbClr val="161616"/>
                 </a:solidFill>
                 <a:latin typeface="Helvetica Neue"/>
               </a:rPr>
-              <a:t>zona que otra, en UF de conectividad.</a:t>
+              <a:t>la comparación completa, en UF.</a:t>
             </a:r>
           </a:p>
         </p:txBody>
@@ -20569,9 +20620,9 @@
           <p:nvPr/>
         </p:nvSpPr>
         <p:spPr>
-          <a:xfrm>
-            <a:off x="2624328" y="2121408"/>
-            <a:ext cx="636357" cy="237744"/>
+          <a:xfrm rot="16200000">
+            <a:off x="2622466" y="2377440"/>
+            <a:ext cx="640080" cy="164592"/>
           </a:xfrm>
           <a:prstGeom prst="rect">
             <a:avLst/>
@@ -20579,12 +20630,12 @@
           <a:noFill/>
         </p:spPr>
         <p:txBody>
-          <a:bodyPr wrap="square" anchor="ctr" lIns="0" rIns="0" tIns="0" bIns="0">
+          <a:bodyPr wrap="square" anchor="t" lIns="0" rIns="0" tIns="0" bIns="0">
             <a:spAutoFit/>
           </a:bodyPr>
           <a:lstStyle/>
           <a:p>
-            <a:pPr algn="ctr">
+            <a:pPr algn="l">
               <a:lnSpc>
                 <a:spcPct val="100000"/>
               </a:lnSpc>
@@ -20596,13 +20647,13 @@
               </a:spcAft>
             </a:pPr>
             <a:r>
-              <a:rPr sz="750" b="1">
+              <a:rPr sz="600" b="0">
                 <a:solidFill>
                   <a:srgbClr val="6E6A64"/>
                 </a:solidFill>
                 <a:latin typeface="Helvetica Neue"/>
               </a:rPr>
-              <a:t>1</a:t>
+              <a:t>Chicauma</a:t>
             </a:r>
           </a:p>
         </p:txBody>
@@ -20614,9 +20665,9 @@
           <p:nvPr/>
         </p:nvSpPr>
         <p:spPr>
-          <a:xfrm>
-            <a:off x="3260685" y="2121408"/>
-            <a:ext cx="636357" cy="237744"/>
+          <a:xfrm rot="16200000">
+            <a:off x="3258823" y="2377440"/>
+            <a:ext cx="640080" cy="164592"/>
           </a:xfrm>
           <a:prstGeom prst="rect">
             <a:avLst/>
@@ -20624,12 +20675,12 @@
           <a:noFill/>
         </p:spPr>
         <p:txBody>
-          <a:bodyPr wrap="square" anchor="ctr" lIns="0" rIns="0" tIns="0" bIns="0">
+          <a:bodyPr wrap="square" anchor="t" lIns="0" rIns="0" tIns="0" bIns="0">
             <a:spAutoFit/>
           </a:bodyPr>
           <a:lstStyle/>
           <a:p>
-            <a:pPr algn="ctr">
+            <a:pPr algn="l">
               <a:lnSpc>
                 <a:spcPct val="100000"/>
               </a:lnSpc>
@@ -20641,13 +20692,13 @@
               </a:spcAft>
             </a:pPr>
             <a:r>
-              <a:rPr sz="750" b="1">
+              <a:rPr sz="600" b="0">
                 <a:solidFill>
                   <a:srgbClr val="6E6A64"/>
                 </a:solidFill>
                 <a:latin typeface="Helvetica Neue"/>
               </a:rPr>
-              <a:t>2</a:t>
+              <a:t>Urbanya</a:t>
             </a:r>
           </a:p>
         </p:txBody>
@@ -20659,9 +20710,9 @@
           <p:nvPr/>
         </p:nvSpPr>
         <p:spPr>
-          <a:xfrm>
-            <a:off x="3897042" y="2121408"/>
-            <a:ext cx="636357" cy="237744"/>
+          <a:xfrm rot="16200000">
+            <a:off x="3895180" y="2377440"/>
+            <a:ext cx="640080" cy="164592"/>
           </a:xfrm>
           <a:prstGeom prst="rect">
             <a:avLst/>
@@ -20669,12 +20720,12 @@
           <a:noFill/>
         </p:spPr>
         <p:txBody>
-          <a:bodyPr wrap="square" anchor="ctr" lIns="0" rIns="0" tIns="0" bIns="0">
+          <a:bodyPr wrap="square" anchor="t" lIns="0" rIns="0" tIns="0" bIns="0">
             <a:spAutoFit/>
           </a:bodyPr>
           <a:lstStyle/>
           <a:p>
-            <a:pPr algn="ctr">
+            <a:pPr algn="l">
               <a:lnSpc>
                 <a:spcPct val="100000"/>
               </a:lnSpc>
@@ -20686,13 +20737,13 @@
               </a:spcAft>
             </a:pPr>
             <a:r>
-              <a:rPr sz="750" b="1">
+              <a:rPr sz="600" b="0">
                 <a:solidFill>
                   <a:srgbClr val="6E6A64"/>
                 </a:solidFill>
                 <a:latin typeface="Helvetica Neue"/>
               </a:rPr>
-              <a:t>3</a:t>
+              <a:t>Valle Grande</a:t>
             </a:r>
           </a:p>
         </p:txBody>
@@ -20704,9 +20755,9 @@
           <p:nvPr/>
         </p:nvSpPr>
         <p:spPr>
-          <a:xfrm>
-            <a:off x="4533399" y="2121408"/>
-            <a:ext cx="636357" cy="237744"/>
+          <a:xfrm rot="16200000">
+            <a:off x="4531537" y="2377440"/>
+            <a:ext cx="640080" cy="164592"/>
           </a:xfrm>
           <a:prstGeom prst="rect">
             <a:avLst/>
@@ -20714,12 +20765,12 @@
           <a:noFill/>
         </p:spPr>
         <p:txBody>
-          <a:bodyPr wrap="square" anchor="ctr" lIns="0" rIns="0" tIns="0" bIns="0">
+          <a:bodyPr wrap="square" anchor="t" lIns="0" rIns="0" tIns="0" bIns="0">
             <a:spAutoFit/>
           </a:bodyPr>
           <a:lstStyle/>
           <a:p>
-            <a:pPr algn="ctr">
+            <a:pPr algn="l">
               <a:lnSpc>
                 <a:spcPct val="100000"/>
               </a:lnSpc>
@@ -20731,27 +20782,72 @@
               </a:spcAft>
             </a:pPr>
             <a:r>
-              <a:rPr sz="750" b="1">
+              <a:rPr sz="600" b="1">
+                <a:solidFill>
+                  <a:srgbClr val="B07D24"/>
+                </a:solidFill>
+                <a:latin typeface="Helvetica Neue"/>
+              </a:rPr>
+              <a:t>Estación Colina</a:t>
+            </a:r>
+          </a:p>
+        </p:txBody>
+      </p:sp>
+      <p:sp>
+        <p:nvSpPr>
+          <p:cNvPr id="9" name="TextBox 8"/>
+          <p:cNvSpPr txBox="1"/>
+          <p:nvPr/>
+        </p:nvSpPr>
+        <p:spPr>
+          <a:xfrm rot="16200000">
+            <a:off x="5167894" y="2377440"/>
+            <a:ext cx="640080" cy="164592"/>
+          </a:xfrm>
+          <a:prstGeom prst="rect">
+            <a:avLst/>
+          </a:prstGeom>
+          <a:noFill/>
+        </p:spPr>
+        <p:txBody>
+          <a:bodyPr wrap="square" anchor="t" lIns="0" rIns="0" tIns="0" bIns="0">
+            <a:spAutoFit/>
+          </a:bodyPr>
+          <a:lstStyle/>
+          <a:p>
+            <a:pPr algn="l">
+              <a:lnSpc>
+                <a:spcPct val="100000"/>
+              </a:lnSpc>
+              <a:spcBef>
+                <a:spcPts val="0"/>
+              </a:spcBef>
+              <a:spcAft>
+                <a:spcPts val="0"/>
+              </a:spcAft>
+            </a:pPr>
+            <a:r>
+              <a:rPr sz="600" b="0">
                 <a:solidFill>
                   <a:srgbClr val="6E6A64"/>
                 </a:solidFill>
                 <a:latin typeface="Helvetica Neue"/>
               </a:rPr>
-              <a:t>4</a:t>
-            </a:r>
-          </a:p>
-        </p:txBody>
-      </p:sp>
-      <p:sp>
-        <p:nvSpPr>
-          <p:cNvPr id="9" name="TextBox 8"/>
+              <a:t>Larapinta</a:t>
+            </a:r>
+          </a:p>
+        </p:txBody>
+      </p:sp>
+      <p:sp>
+        <p:nvSpPr>
+          <p:cNvPr id="10" name="TextBox 9"/>
           <p:cNvSpPr txBox="1"/>
           <p:nvPr/>
         </p:nvSpPr>
         <p:spPr>
-          <a:xfrm>
-            <a:off x="5169756" y="2121408"/>
-            <a:ext cx="636357" cy="237744"/>
+          <a:xfrm rot="16200000">
+            <a:off x="5804251" y="2377440"/>
+            <a:ext cx="640080" cy="164592"/>
           </a:xfrm>
           <a:prstGeom prst="rect">
             <a:avLst/>
@@ -20759,12 +20855,12 @@
           <a:noFill/>
         </p:spPr>
         <p:txBody>
-          <a:bodyPr wrap="square" anchor="ctr" lIns="0" rIns="0" tIns="0" bIns="0">
+          <a:bodyPr wrap="square" anchor="t" lIns="0" rIns="0" tIns="0" bIns="0">
             <a:spAutoFit/>
           </a:bodyPr>
           <a:lstStyle/>
           <a:p>
-            <a:pPr algn="ctr">
+            <a:pPr algn="l">
               <a:lnSpc>
                 <a:spcPct val="100000"/>
               </a:lnSpc>
@@ -20776,27 +20872,27 @@
               </a:spcAft>
             </a:pPr>
             <a:r>
-              <a:rPr sz="750" b="1">
+              <a:rPr sz="600" b="0">
                 <a:solidFill>
                   <a:srgbClr val="6E6A64"/>
                 </a:solidFill>
                 <a:latin typeface="Helvetica Neue"/>
               </a:rPr>
-              <a:t>5</a:t>
-            </a:r>
-          </a:p>
-        </p:txBody>
-      </p:sp>
-      <p:sp>
-        <p:nvSpPr>
-          <p:cNvPr id="10" name="TextBox 9"/>
+              <a:t>NOS</a:t>
+            </a:r>
+          </a:p>
+        </p:txBody>
+      </p:sp>
+      <p:sp>
+        <p:nvSpPr>
+          <p:cNvPr id="11" name="TextBox 10"/>
           <p:cNvSpPr txBox="1"/>
           <p:nvPr/>
         </p:nvSpPr>
         <p:spPr>
-          <a:xfrm>
-            <a:off x="5806113" y="2121408"/>
-            <a:ext cx="636357" cy="237744"/>
+          <a:xfrm rot="16200000">
+            <a:off x="6440609" y="2377440"/>
+            <a:ext cx="640080" cy="164592"/>
           </a:xfrm>
           <a:prstGeom prst="rect">
             <a:avLst/>
@@ -20804,12 +20900,12 @@
           <a:noFill/>
         </p:spPr>
         <p:txBody>
-          <a:bodyPr wrap="square" anchor="ctr" lIns="0" rIns="0" tIns="0" bIns="0">
+          <a:bodyPr wrap="square" anchor="t" lIns="0" rIns="0" tIns="0" bIns="0">
             <a:spAutoFit/>
           </a:bodyPr>
           <a:lstStyle/>
           <a:p>
-            <a:pPr algn="ctr">
+            <a:pPr algn="l">
               <a:lnSpc>
                 <a:spcPct val="100000"/>
               </a:lnSpc>
@@ -20821,27 +20917,27 @@
               </a:spcAft>
             </a:pPr>
             <a:r>
-              <a:rPr sz="750" b="1">
+              <a:rPr sz="600" b="0">
                 <a:solidFill>
                   <a:srgbClr val="6E6A64"/>
                 </a:solidFill>
                 <a:latin typeface="Helvetica Neue"/>
               </a:rPr>
-              <a:t>6</a:t>
-            </a:r>
-          </a:p>
-        </p:txBody>
-      </p:sp>
-      <p:sp>
-        <p:nvSpPr>
-          <p:cNvPr id="11" name="TextBox 10"/>
+              <a:t>Santa Elena</a:t>
+            </a:r>
+          </a:p>
+        </p:txBody>
+      </p:sp>
+      <p:sp>
+        <p:nvSpPr>
+          <p:cNvPr id="12" name="TextBox 11"/>
           <p:cNvSpPr txBox="1"/>
           <p:nvPr/>
         </p:nvSpPr>
         <p:spPr>
-          <a:xfrm>
-            <a:off x="6442470" y="2121408"/>
-            <a:ext cx="636357" cy="237744"/>
+          <a:xfrm rot="16200000">
+            <a:off x="7076966" y="2377440"/>
+            <a:ext cx="640080" cy="164592"/>
           </a:xfrm>
           <a:prstGeom prst="rect">
             <a:avLst/>
@@ -20849,12 +20945,12 @@
           <a:noFill/>
         </p:spPr>
         <p:txBody>
-          <a:bodyPr wrap="square" anchor="ctr" lIns="0" rIns="0" tIns="0" bIns="0">
+          <a:bodyPr wrap="square" anchor="t" lIns="0" rIns="0" tIns="0" bIns="0">
             <a:spAutoFit/>
           </a:bodyPr>
           <a:lstStyle/>
           <a:p>
-            <a:pPr algn="ctr">
+            <a:pPr algn="l">
               <a:lnSpc>
                 <a:spcPct val="100000"/>
               </a:lnSpc>
@@ -20866,27 +20962,27 @@
               </a:spcAft>
             </a:pPr>
             <a:r>
-              <a:rPr sz="750" b="1">
+              <a:rPr sz="600" b="0">
                 <a:solidFill>
                   <a:srgbClr val="6E6A64"/>
                 </a:solidFill>
                 <a:latin typeface="Helvetica Neue"/>
               </a:rPr>
-              <a:t>7</a:t>
-            </a:r>
-          </a:p>
-        </p:txBody>
-      </p:sp>
-      <p:sp>
-        <p:nvSpPr>
-          <p:cNvPr id="12" name="TextBox 11"/>
+              <a:t>Laguna del Sol</a:t>
+            </a:r>
+          </a:p>
+        </p:txBody>
+      </p:sp>
+      <p:sp>
+        <p:nvSpPr>
+          <p:cNvPr id="13" name="TextBox 12"/>
           <p:cNvSpPr txBox="1"/>
           <p:nvPr/>
         </p:nvSpPr>
         <p:spPr>
-          <a:xfrm>
-            <a:off x="7078827" y="2121408"/>
-            <a:ext cx="636357" cy="237744"/>
+          <a:xfrm rot="16200000">
+            <a:off x="7713323" y="2377440"/>
+            <a:ext cx="640080" cy="164592"/>
           </a:xfrm>
           <a:prstGeom prst="rect">
             <a:avLst/>
@@ -20894,12 +20990,12 @@
           <a:noFill/>
         </p:spPr>
         <p:txBody>
-          <a:bodyPr wrap="square" anchor="ctr" lIns="0" rIns="0" tIns="0" bIns="0">
+          <a:bodyPr wrap="square" anchor="t" lIns="0" rIns="0" tIns="0" bIns="0">
             <a:spAutoFit/>
           </a:bodyPr>
           <a:lstStyle/>
           <a:p>
-            <a:pPr algn="ctr">
+            <a:pPr algn="l">
               <a:lnSpc>
                 <a:spcPct val="100000"/>
               </a:lnSpc>
@@ -20911,27 +21007,27 @@
               </a:spcAft>
             </a:pPr>
             <a:r>
-              <a:rPr sz="750" b="1">
+              <a:rPr sz="600" b="0">
                 <a:solidFill>
                   <a:srgbClr val="6E6A64"/>
                 </a:solidFill>
                 <a:latin typeface="Helvetica Neue"/>
               </a:rPr>
-              <a:t>8</a:t>
-            </a:r>
-          </a:p>
-        </p:txBody>
-      </p:sp>
-      <p:sp>
-        <p:nvSpPr>
-          <p:cNvPr id="13" name="TextBox 12"/>
+              <a:t>Hacienda Batuco</a:t>
+            </a:r>
+          </a:p>
+        </p:txBody>
+      </p:sp>
+      <p:sp>
+        <p:nvSpPr>
+          <p:cNvPr id="14" name="TextBox 13"/>
           <p:cNvSpPr txBox="1"/>
           <p:nvPr/>
         </p:nvSpPr>
         <p:spPr>
-          <a:xfrm>
-            <a:off x="7715184" y="2121408"/>
-            <a:ext cx="636357" cy="237744"/>
+          <a:xfrm rot="16200000">
+            <a:off x="8349680" y="2377440"/>
+            <a:ext cx="640080" cy="164592"/>
           </a:xfrm>
           <a:prstGeom prst="rect">
             <a:avLst/>
@@ -20939,12 +21035,12 @@
           <a:noFill/>
         </p:spPr>
         <p:txBody>
-          <a:bodyPr wrap="square" anchor="ctr" lIns="0" rIns="0" tIns="0" bIns="0">
+          <a:bodyPr wrap="square" anchor="t" lIns="0" rIns="0" tIns="0" bIns="0">
             <a:spAutoFit/>
           </a:bodyPr>
           <a:lstStyle/>
           <a:p>
-            <a:pPr algn="ctr">
+            <a:pPr algn="l">
               <a:lnSpc>
                 <a:spcPct val="100000"/>
               </a:lnSpc>
@@ -20956,27 +21052,27 @@
               </a:spcAft>
             </a:pPr>
             <a:r>
-              <a:rPr sz="750" b="1">
+              <a:rPr sz="600" b="0">
                 <a:solidFill>
                   <a:srgbClr val="6E6A64"/>
                 </a:solidFill>
                 <a:latin typeface="Helvetica Neue"/>
               </a:rPr>
-              <a:t>9</a:t>
-            </a:r>
-          </a:p>
-        </p:txBody>
-      </p:sp>
-      <p:sp>
-        <p:nvSpPr>
-          <p:cNvPr id="14" name="TextBox 13"/>
+              <a:t>El Peñón</a:t>
+            </a:r>
+          </a:p>
+        </p:txBody>
+      </p:sp>
+      <p:sp>
+        <p:nvSpPr>
+          <p:cNvPr id="15" name="TextBox 14"/>
           <p:cNvSpPr txBox="1"/>
           <p:nvPr/>
         </p:nvSpPr>
         <p:spPr>
-          <a:xfrm>
-            <a:off x="8351541" y="2121408"/>
-            <a:ext cx="636357" cy="237744"/>
+          <a:xfrm rot="16200000">
+            <a:off x="8986037" y="2377440"/>
+            <a:ext cx="640080" cy="164592"/>
           </a:xfrm>
           <a:prstGeom prst="rect">
             <a:avLst/>
@@ -20984,12 +21080,12 @@
           <a:noFill/>
         </p:spPr>
         <p:txBody>
-          <a:bodyPr wrap="square" anchor="ctr" lIns="0" rIns="0" tIns="0" bIns="0">
+          <a:bodyPr wrap="square" anchor="t" lIns="0" rIns="0" tIns="0" bIns="0">
             <a:spAutoFit/>
           </a:bodyPr>
           <a:lstStyle/>
           <a:p>
-            <a:pPr algn="ctr">
+            <a:pPr algn="l">
               <a:lnSpc>
                 <a:spcPct val="100000"/>
               </a:lnSpc>
@@ -21001,27 +21097,72 @@
               </a:spcAft>
             </a:pPr>
             <a:r>
-              <a:rPr sz="750" b="1">
+              <a:rPr sz="600" b="1">
+                <a:solidFill>
+                  <a:srgbClr val="B07D24"/>
+                </a:solidFill>
+                <a:latin typeface="Helvetica Neue"/>
+              </a:rPr>
+              <a:t>Batuco</a:t>
+            </a:r>
+          </a:p>
+        </p:txBody>
+      </p:sp>
+      <p:sp>
+        <p:nvSpPr>
+          <p:cNvPr id="16" name="TextBox 15"/>
+          <p:cNvSpPr txBox="1"/>
+          <p:nvPr/>
+        </p:nvSpPr>
+        <p:spPr>
+          <a:xfrm rot="16200000">
+            <a:off x="9622394" y="2377440"/>
+            <a:ext cx="640080" cy="164592"/>
+          </a:xfrm>
+          <a:prstGeom prst="rect">
+            <a:avLst/>
+          </a:prstGeom>
+          <a:noFill/>
+        </p:spPr>
+        <p:txBody>
+          <a:bodyPr wrap="square" anchor="t" lIns="0" rIns="0" tIns="0" bIns="0">
+            <a:spAutoFit/>
+          </a:bodyPr>
+          <a:lstStyle/>
+          <a:p>
+            <a:pPr algn="l">
+              <a:lnSpc>
+                <a:spcPct val="100000"/>
+              </a:lnSpc>
+              <a:spcBef>
+                <a:spcPts val="0"/>
+              </a:spcBef>
+              <a:spcAft>
+                <a:spcPts val="0"/>
+              </a:spcAft>
+            </a:pPr>
+            <a:r>
+              <a:rPr sz="600" b="0">
                 <a:solidFill>
                   <a:srgbClr val="6E6A64"/>
                 </a:solidFill>
                 <a:latin typeface="Helvetica Neue"/>
               </a:rPr>
-              <a:t>10</a:t>
-            </a:r>
-          </a:p>
-        </p:txBody>
-      </p:sp>
-      <p:sp>
-        <p:nvSpPr>
-          <p:cNvPr id="15" name="TextBox 14"/>
+              <a:t>Ayres</a:t>
+            </a:r>
+          </a:p>
+        </p:txBody>
+      </p:sp>
+      <p:sp>
+        <p:nvSpPr>
+          <p:cNvPr id="17" name="TextBox 16"/>
           <p:cNvSpPr txBox="1"/>
           <p:nvPr/>
         </p:nvSpPr>
         <p:spPr>
-          <a:xfrm>
-            <a:off x="8987898" y="2121408"/>
-            <a:ext cx="636357" cy="237744"/>
+          <a:xfrm rot="16200000">
+            <a:off x="10258751" y="2377440"/>
+            <a:ext cx="640080" cy="164592"/>
           </a:xfrm>
           <a:prstGeom prst="rect">
             <a:avLst/>
@@ -21029,12 +21170,12 @@
           <a:noFill/>
         </p:spPr>
         <p:txBody>
-          <a:bodyPr wrap="square" anchor="ctr" lIns="0" rIns="0" tIns="0" bIns="0">
+          <a:bodyPr wrap="square" anchor="t" lIns="0" rIns="0" tIns="0" bIns="0">
             <a:spAutoFit/>
           </a:bodyPr>
           <a:lstStyle/>
           <a:p>
-            <a:pPr algn="ctr">
+            <a:pPr algn="l">
               <a:lnSpc>
                 <a:spcPct val="100000"/>
               </a:lnSpc>
@@ -21046,27 +21187,27 @@
               </a:spcAft>
             </a:pPr>
             <a:r>
-              <a:rPr sz="750" b="1">
+              <a:rPr sz="600" b="0">
                 <a:solidFill>
                   <a:srgbClr val="6E6A64"/>
                 </a:solidFill>
                 <a:latin typeface="Helvetica Neue"/>
               </a:rPr>
-              <a:t>11</a:t>
-            </a:r>
-          </a:p>
-        </p:txBody>
-      </p:sp>
-      <p:sp>
-        <p:nvSpPr>
-          <p:cNvPr id="16" name="TextBox 15"/>
+              <a:t>Colina · Reina N.</a:t>
+            </a:r>
+          </a:p>
+        </p:txBody>
+      </p:sp>
+      <p:sp>
+        <p:nvSpPr>
+          <p:cNvPr id="18" name="TextBox 17"/>
           <p:cNvSpPr txBox="1"/>
           <p:nvPr/>
         </p:nvSpPr>
         <p:spPr>
-          <a:xfrm>
-            <a:off x="9624255" y="2121408"/>
-            <a:ext cx="636357" cy="237744"/>
+          <a:xfrm rot="16200000">
+            <a:off x="10895108" y="2377440"/>
+            <a:ext cx="640080" cy="164592"/>
           </a:xfrm>
           <a:prstGeom prst="rect">
             <a:avLst/>
@@ -21074,12 +21215,12 @@
           <a:noFill/>
         </p:spPr>
         <p:txBody>
-          <a:bodyPr wrap="square" anchor="ctr" lIns="0" rIns="0" tIns="0" bIns="0">
+          <a:bodyPr wrap="square" anchor="t" lIns="0" rIns="0" tIns="0" bIns="0">
             <a:spAutoFit/>
           </a:bodyPr>
           <a:lstStyle/>
           <a:p>
-            <a:pPr algn="ctr">
+            <a:pPr algn="l">
               <a:lnSpc>
                 <a:spcPct val="100000"/>
               </a:lnSpc>
@@ -21091,103 +21232,13 @@
               </a:spcAft>
             </a:pPr>
             <a:r>
-              <a:rPr sz="750" b="1">
+              <a:rPr sz="600" b="0">
                 <a:solidFill>
                   <a:srgbClr val="6E6A64"/>
                 </a:solidFill>
                 <a:latin typeface="Helvetica Neue"/>
               </a:rPr>
-              <a:t>12</a:t>
-            </a:r>
-          </a:p>
-        </p:txBody>
-      </p:sp>
-      <p:sp>
-        <p:nvSpPr>
-          <p:cNvPr id="17" name="TextBox 16"/>
-          <p:cNvSpPr txBox="1"/>
-          <p:nvPr/>
-        </p:nvSpPr>
-        <p:spPr>
-          <a:xfrm>
-            <a:off x="10260613" y="2121408"/>
-            <a:ext cx="636357" cy="237744"/>
-          </a:xfrm>
-          <a:prstGeom prst="rect">
-            <a:avLst/>
-          </a:prstGeom>
-          <a:noFill/>
-        </p:spPr>
-        <p:txBody>
-          <a:bodyPr wrap="square" anchor="ctr" lIns="0" rIns="0" tIns="0" bIns="0">
-            <a:spAutoFit/>
-          </a:bodyPr>
-          <a:lstStyle/>
-          <a:p>
-            <a:pPr algn="ctr">
-              <a:lnSpc>
-                <a:spcPct val="100000"/>
-              </a:lnSpc>
-              <a:spcBef>
-                <a:spcPts val="0"/>
-              </a:spcBef>
-              <a:spcAft>
-                <a:spcPts val="0"/>
-              </a:spcAft>
-            </a:pPr>
-            <a:r>
-              <a:rPr sz="750" b="1">
-                <a:solidFill>
-                  <a:srgbClr val="6E6A64"/>
-                </a:solidFill>
-                <a:latin typeface="Helvetica Neue"/>
-              </a:rPr>
-              <a:t>13</a:t>
-            </a:r>
-          </a:p>
-        </p:txBody>
-      </p:sp>
-      <p:sp>
-        <p:nvSpPr>
-          <p:cNvPr id="18" name="TextBox 17"/>
-          <p:cNvSpPr txBox="1"/>
-          <p:nvPr/>
-        </p:nvSpPr>
-        <p:spPr>
-          <a:xfrm>
-            <a:off x="10896970" y="2121408"/>
-            <a:ext cx="636357" cy="237744"/>
-          </a:xfrm>
-          <a:prstGeom prst="rect">
-            <a:avLst/>
-          </a:prstGeom>
-          <a:noFill/>
-        </p:spPr>
-        <p:txBody>
-          <a:bodyPr wrap="square" anchor="ctr" lIns="0" rIns="0" tIns="0" bIns="0">
-            <a:spAutoFit/>
-          </a:bodyPr>
-          <a:lstStyle/>
-          <a:p>
-            <a:pPr algn="ctr">
-              <a:lnSpc>
-                <a:spcPct val="100000"/>
-              </a:lnSpc>
-              <a:spcBef>
-                <a:spcPts val="0"/>
-              </a:spcBef>
-              <a:spcAft>
-                <a:spcPts val="0"/>
-              </a:spcAft>
-            </a:pPr>
-            <a:r>
-              <a:rPr sz="750" b="1">
-                <a:solidFill>
-                  <a:srgbClr val="6E6A64"/>
-                </a:solidFill>
-                <a:latin typeface="Helvetica Neue"/>
-              </a:rPr>
-              <a:t>14</a:t>
+              <a:t>Buin</a:t>
             </a:r>
           </a:p>
         </p:txBody>
@@ -21200,8 +21251,8 @@
         </p:nvSpPr>
         <p:spPr>
           <a:xfrm>
-            <a:off x="704088" y="2359152"/>
-            <a:ext cx="1856231" cy="177654"/>
+            <a:off x="704088" y="2798063"/>
+            <a:ext cx="1856231" cy="146304"/>
           </a:xfrm>
           <a:prstGeom prst="rect">
             <a:avLst/>
@@ -21254,8 +21305,8 @@
         </p:nvSpPr>
         <p:spPr>
           <a:xfrm>
-            <a:off x="2635300" y="2370124"/>
-            <a:ext cx="614411" cy="155709"/>
+            <a:off x="2635300" y="2809036"/>
+            <a:ext cx="614411" cy="124358"/>
           </a:xfrm>
           <a:prstGeom prst="rect">
             <a:avLst/>
@@ -21298,8 +21349,8 @@
         </p:nvSpPr>
         <p:spPr>
           <a:xfrm>
-            <a:off x="3271657" y="2370124"/>
-            <a:ext cx="614411" cy="155709"/>
+            <a:off x="3271657" y="2809036"/>
+            <a:ext cx="614411" cy="124358"/>
           </a:xfrm>
           <a:prstGeom prst="rect">
             <a:avLst/>
@@ -21342,8 +21393,8 @@
         </p:nvSpPr>
         <p:spPr>
           <a:xfrm>
-            <a:off x="3260685" y="2359152"/>
-            <a:ext cx="636357" cy="177654"/>
+            <a:off x="3260685" y="2798063"/>
+            <a:ext cx="636357" cy="146304"/>
           </a:xfrm>
           <a:prstGeom prst="rect">
             <a:avLst/>
@@ -21368,9 +21419,9 @@
               </a:spcAft>
             </a:pPr>
             <a:r>
-              <a:rPr sz="580" b="0">
+              <a:rPr sz="620" b="0">
                 <a:solidFill>
-                  <a:srgbClr val="6E6A64"/>
+                  <a:srgbClr val="161616"/>
                 </a:solidFill>
                 <a:latin typeface="Helvetica Neue"/>
               </a:rPr>
@@ -21387,8 +21438,8 @@
         </p:nvSpPr>
         <p:spPr>
           <a:xfrm>
-            <a:off x="3908014" y="2370124"/>
-            <a:ext cx="614411" cy="155709"/>
+            <a:off x="3908014" y="2809036"/>
+            <a:ext cx="614411" cy="124358"/>
           </a:xfrm>
           <a:prstGeom prst="rect">
             <a:avLst/>
@@ -21431,8 +21482,8 @@
         </p:nvSpPr>
         <p:spPr>
           <a:xfrm>
-            <a:off x="3897042" y="2359152"/>
-            <a:ext cx="636357" cy="177654"/>
+            <a:off x="3897042" y="2798063"/>
+            <a:ext cx="636357" cy="146304"/>
           </a:xfrm>
           <a:prstGeom prst="rect">
             <a:avLst/>
@@ -21457,9 +21508,9 @@
               </a:spcAft>
             </a:pPr>
             <a:r>
-              <a:rPr sz="580" b="0">
+              <a:rPr sz="620" b="0">
                 <a:solidFill>
-                  <a:srgbClr val="6E6A64"/>
+                  <a:srgbClr val="161616"/>
                 </a:solidFill>
                 <a:latin typeface="Helvetica Neue"/>
               </a:rPr>
@@ -21476,8 +21527,8 @@
         </p:nvSpPr>
         <p:spPr>
           <a:xfrm>
-            <a:off x="4544372" y="2370124"/>
-            <a:ext cx="614411" cy="155709"/>
+            <a:off x="4544372" y="2809036"/>
+            <a:ext cx="614411" cy="124358"/>
           </a:xfrm>
           <a:prstGeom prst="rect">
             <a:avLst/>
@@ -21520,8 +21571,8 @@
         </p:nvSpPr>
         <p:spPr>
           <a:xfrm>
-            <a:off x="4533399" y="2359152"/>
-            <a:ext cx="636357" cy="177654"/>
+            <a:off x="4533399" y="2798063"/>
+            <a:ext cx="636357" cy="146304"/>
           </a:xfrm>
           <a:prstGeom prst="rect">
             <a:avLst/>
@@ -21546,9 +21597,9 @@
               </a:spcAft>
             </a:pPr>
             <a:r>
-              <a:rPr sz="580" b="0">
+              <a:rPr sz="620" b="0">
                 <a:solidFill>
-                  <a:srgbClr val="6E6A64"/>
+                  <a:srgbClr val="161616"/>
                 </a:solidFill>
                 <a:latin typeface="Helvetica Neue"/>
               </a:rPr>
@@ -21565,8 +21616,8 @@
         </p:nvSpPr>
         <p:spPr>
           <a:xfrm>
-            <a:off x="5180729" y="2370124"/>
-            <a:ext cx="614411" cy="155709"/>
+            <a:off x="5180729" y="2809036"/>
+            <a:ext cx="614411" cy="124358"/>
           </a:xfrm>
           <a:prstGeom prst="rect">
             <a:avLst/>
@@ -21609,8 +21660,8 @@
         </p:nvSpPr>
         <p:spPr>
           <a:xfrm>
-            <a:off x="5169756" y="2359152"/>
-            <a:ext cx="636357" cy="177654"/>
+            <a:off x="5169756" y="2798063"/>
+            <a:ext cx="636357" cy="146304"/>
           </a:xfrm>
           <a:prstGeom prst="rect">
             <a:avLst/>
@@ -21635,9 +21686,9 @@
               </a:spcAft>
             </a:pPr>
             <a:r>
-              <a:rPr sz="580" b="0">
+              <a:rPr sz="620" b="0">
                 <a:solidFill>
-                  <a:srgbClr val="6E6A64"/>
+                  <a:srgbClr val="161616"/>
                 </a:solidFill>
                 <a:latin typeface="Helvetica Neue"/>
               </a:rPr>
@@ -21654,8 +21705,8 @@
         </p:nvSpPr>
         <p:spPr>
           <a:xfrm>
-            <a:off x="5817086" y="2370124"/>
-            <a:ext cx="614411" cy="155709"/>
+            <a:off x="5817086" y="2809036"/>
+            <a:ext cx="614411" cy="124358"/>
           </a:xfrm>
           <a:prstGeom prst="rect">
             <a:avLst/>
@@ -21698,8 +21749,8 @@
         </p:nvSpPr>
         <p:spPr>
           <a:xfrm>
-            <a:off x="5806113" y="2359152"/>
-            <a:ext cx="636357" cy="177654"/>
+            <a:off x="5806113" y="2798063"/>
+            <a:ext cx="636357" cy="146304"/>
           </a:xfrm>
           <a:prstGeom prst="rect">
             <a:avLst/>
@@ -21724,9 +21775,9 @@
               </a:spcAft>
             </a:pPr>
             <a:r>
-              <a:rPr sz="580" b="0">
+              <a:rPr sz="620" b="0">
                 <a:solidFill>
-                  <a:srgbClr val="6E6A64"/>
+                  <a:srgbClr val="161616"/>
                 </a:solidFill>
                 <a:latin typeface="Helvetica Neue"/>
               </a:rPr>
@@ -21743,8 +21794,8 @@
         </p:nvSpPr>
         <p:spPr>
           <a:xfrm>
-            <a:off x="6453443" y="2370124"/>
-            <a:ext cx="614411" cy="155709"/>
+            <a:off x="6453443" y="2809036"/>
+            <a:ext cx="614411" cy="124358"/>
           </a:xfrm>
           <a:prstGeom prst="rect">
             <a:avLst/>
@@ -21787,8 +21838,8 @@
         </p:nvSpPr>
         <p:spPr>
           <a:xfrm>
-            <a:off x="6442470" y="2359152"/>
-            <a:ext cx="636357" cy="177654"/>
+            <a:off x="6442470" y="2798063"/>
+            <a:ext cx="636357" cy="146304"/>
           </a:xfrm>
           <a:prstGeom prst="rect">
             <a:avLst/>
@@ -21813,9 +21864,9 @@
               </a:spcAft>
             </a:pPr>
             <a:r>
-              <a:rPr sz="580" b="0">
+              <a:rPr sz="620" b="0">
                 <a:solidFill>
-                  <a:srgbClr val="6E6A64"/>
+                  <a:srgbClr val="161616"/>
                 </a:solidFill>
                 <a:latin typeface="Helvetica Neue"/>
               </a:rPr>
@@ -21832,8 +21883,8 @@
         </p:nvSpPr>
         <p:spPr>
           <a:xfrm>
-            <a:off x="7089800" y="2370124"/>
-            <a:ext cx="614411" cy="155709"/>
+            <a:off x="7089800" y="2809036"/>
+            <a:ext cx="614411" cy="124358"/>
           </a:xfrm>
           <a:prstGeom prst="rect">
             <a:avLst/>
@@ -21876,8 +21927,8 @@
         </p:nvSpPr>
         <p:spPr>
           <a:xfrm>
-            <a:off x="7078827" y="2359152"/>
-            <a:ext cx="636357" cy="177654"/>
+            <a:off x="7078827" y="2798063"/>
+            <a:ext cx="636357" cy="146304"/>
           </a:xfrm>
           <a:prstGeom prst="rect">
             <a:avLst/>
@@ -21902,9 +21953,9 @@
               </a:spcAft>
             </a:pPr>
             <a:r>
-              <a:rPr sz="580" b="0">
+              <a:rPr sz="620" b="0">
                 <a:solidFill>
-                  <a:srgbClr val="6E6A64"/>
+                  <a:srgbClr val="161616"/>
                 </a:solidFill>
                 <a:latin typeface="Helvetica Neue"/>
               </a:rPr>
@@ -21921,8 +21972,8 @@
         </p:nvSpPr>
         <p:spPr>
           <a:xfrm>
-            <a:off x="7726157" y="2370124"/>
-            <a:ext cx="614411" cy="155709"/>
+            <a:off x="7726157" y="2809036"/>
+            <a:ext cx="614411" cy="124358"/>
           </a:xfrm>
           <a:prstGeom prst="rect">
             <a:avLst/>
@@ -21965,8 +22016,8 @@
         </p:nvSpPr>
         <p:spPr>
           <a:xfrm>
-            <a:off x="7715184" y="2359152"/>
-            <a:ext cx="636357" cy="177654"/>
+            <a:off x="7715184" y="2798063"/>
+            <a:ext cx="636357" cy="146304"/>
           </a:xfrm>
           <a:prstGeom prst="rect">
             <a:avLst/>
@@ -21991,9 +22042,9 @@
               </a:spcAft>
             </a:pPr>
             <a:r>
-              <a:rPr sz="580" b="0">
+              <a:rPr sz="620" b="0">
                 <a:solidFill>
-                  <a:srgbClr val="6E6A64"/>
+                  <a:srgbClr val="161616"/>
                 </a:solidFill>
                 <a:latin typeface="Helvetica Neue"/>
               </a:rPr>
@@ -22010,8 +22061,8 @@
         </p:nvSpPr>
         <p:spPr>
           <a:xfrm>
-            <a:off x="8362514" y="2370124"/>
-            <a:ext cx="614411" cy="155709"/>
+            <a:off x="8362514" y="2809036"/>
+            <a:ext cx="614411" cy="124358"/>
           </a:xfrm>
           <a:prstGeom prst="rect">
             <a:avLst/>
@@ -22054,8 +22105,8 @@
         </p:nvSpPr>
         <p:spPr>
           <a:xfrm>
-            <a:off x="8351541" y="2359152"/>
-            <a:ext cx="636357" cy="177654"/>
+            <a:off x="8351541" y="2798063"/>
+            <a:ext cx="636357" cy="146304"/>
           </a:xfrm>
           <a:prstGeom prst="rect">
             <a:avLst/>
@@ -22080,7 +22131,7 @@
               </a:spcAft>
             </a:pPr>
             <a:r>
-              <a:rPr sz="580" b="0">
+              <a:rPr sz="620" b="0">
                 <a:solidFill>
                   <a:srgbClr val="FFFFFF"/>
                 </a:solidFill>
@@ -22099,8 +22150,8 @@
         </p:nvSpPr>
         <p:spPr>
           <a:xfrm>
-            <a:off x="8998871" y="2370124"/>
-            <a:ext cx="614411" cy="155709"/>
+            <a:off x="8998871" y="2809036"/>
+            <a:ext cx="614411" cy="124358"/>
           </a:xfrm>
           <a:prstGeom prst="rect">
             <a:avLst/>
@@ -22143,8 +22194,8 @@
         </p:nvSpPr>
         <p:spPr>
           <a:xfrm>
-            <a:off x="8987898" y="2359152"/>
-            <a:ext cx="636357" cy="177654"/>
+            <a:off x="8987898" y="2798063"/>
+            <a:ext cx="636357" cy="146304"/>
           </a:xfrm>
           <a:prstGeom prst="rect">
             <a:avLst/>
@@ -22169,7 +22220,7 @@
               </a:spcAft>
             </a:pPr>
             <a:r>
-              <a:rPr sz="580" b="0">
+              <a:rPr sz="620" b="0">
                 <a:solidFill>
                   <a:srgbClr val="FFFFFF"/>
                 </a:solidFill>
@@ -22188,8 +22239,8 @@
         </p:nvSpPr>
         <p:spPr>
           <a:xfrm>
-            <a:off x="9635228" y="2370124"/>
-            <a:ext cx="614411" cy="155709"/>
+            <a:off x="9635228" y="2809036"/>
+            <a:ext cx="614411" cy="124358"/>
           </a:xfrm>
           <a:prstGeom prst="rect">
             <a:avLst/>
@@ -22232,8 +22283,8 @@
         </p:nvSpPr>
         <p:spPr>
           <a:xfrm>
-            <a:off x="9624255" y="2359152"/>
-            <a:ext cx="636357" cy="177654"/>
+            <a:off x="9624255" y="2798063"/>
+            <a:ext cx="636357" cy="146304"/>
           </a:xfrm>
           <a:prstGeom prst="rect">
             <a:avLst/>
@@ -22258,7 +22309,7 @@
               </a:spcAft>
             </a:pPr>
             <a:r>
-              <a:rPr sz="580" b="0">
+              <a:rPr sz="620" b="0">
                 <a:solidFill>
                   <a:srgbClr val="FFFFFF"/>
                 </a:solidFill>
@@ -22277,8 +22328,8 @@
         </p:nvSpPr>
         <p:spPr>
           <a:xfrm>
-            <a:off x="10271585" y="2370124"/>
-            <a:ext cx="614411" cy="155709"/>
+            <a:off x="10271585" y="2809036"/>
+            <a:ext cx="614411" cy="124358"/>
           </a:xfrm>
           <a:prstGeom prst="rect">
             <a:avLst/>
@@ -22321,8 +22372,8 @@
         </p:nvSpPr>
         <p:spPr>
           <a:xfrm>
-            <a:off x="10260613" y="2359152"/>
-            <a:ext cx="636357" cy="177654"/>
+            <a:off x="10260613" y="2798063"/>
+            <a:ext cx="636357" cy="146304"/>
           </a:xfrm>
           <a:prstGeom prst="rect">
             <a:avLst/>
@@ -22347,7 +22398,7 @@
               </a:spcAft>
             </a:pPr>
             <a:r>
-              <a:rPr sz="580" b="0">
+              <a:rPr sz="620" b="0">
                 <a:solidFill>
                   <a:srgbClr val="FFFFFF"/>
                 </a:solidFill>
@@ -22366,8 +22417,8 @@
         </p:nvSpPr>
         <p:spPr>
           <a:xfrm>
-            <a:off x="10907942" y="2370124"/>
-            <a:ext cx="614411" cy="155709"/>
+            <a:off x="10907942" y="2809036"/>
+            <a:ext cx="614411" cy="124358"/>
           </a:xfrm>
           <a:prstGeom prst="rect">
             <a:avLst/>
@@ -22410,8 +22461,8 @@
         </p:nvSpPr>
         <p:spPr>
           <a:xfrm>
-            <a:off x="10896970" y="2359152"/>
-            <a:ext cx="636357" cy="177654"/>
+            <a:off x="10896970" y="2798063"/>
+            <a:ext cx="636357" cy="146304"/>
           </a:xfrm>
           <a:prstGeom prst="rect">
             <a:avLst/>
@@ -22436,7 +22487,7 @@
               </a:spcAft>
             </a:pPr>
             <a:r>
-              <a:rPr sz="580" b="0">
+              <a:rPr sz="620" b="0">
                 <a:solidFill>
                   <a:srgbClr val="FFFFFF"/>
                 </a:solidFill>
@@ -22455,8 +22506,8 @@
         </p:nvSpPr>
         <p:spPr>
           <a:xfrm>
-            <a:off x="704088" y="2536806"/>
-            <a:ext cx="1856231" cy="177654"/>
+            <a:off x="704088" y="2944368"/>
+            <a:ext cx="1856231" cy="146304"/>
           </a:xfrm>
           <a:prstGeom prst="rect">
             <a:avLst/>
@@ -22509,8 +22560,8 @@
         </p:nvSpPr>
         <p:spPr>
           <a:xfrm>
-            <a:off x="2635300" y="2547779"/>
-            <a:ext cx="614411" cy="155709"/>
+            <a:off x="2635300" y="2955340"/>
+            <a:ext cx="614411" cy="124358"/>
           </a:xfrm>
           <a:prstGeom prst="rect">
             <a:avLst/>
@@ -22553,8 +22604,8 @@
         </p:nvSpPr>
         <p:spPr>
           <a:xfrm>
-            <a:off x="2624328" y="2536806"/>
-            <a:ext cx="636357" cy="177654"/>
+            <a:off x="2624328" y="2944368"/>
+            <a:ext cx="636357" cy="146304"/>
           </a:xfrm>
           <a:prstGeom prst="rect">
             <a:avLst/>
@@ -22579,9 +22630,9 @@
               </a:spcAft>
             </a:pPr>
             <a:r>
-              <a:rPr sz="580" b="0">
+              <a:rPr sz="620" b="0">
                 <a:solidFill>
-                  <a:srgbClr val="6E6A64"/>
+                  <a:srgbClr val="161616"/>
                 </a:solidFill>
                 <a:latin typeface="Helvetica Neue"/>
               </a:rPr>
@@ -22598,8 +22649,8 @@
         </p:nvSpPr>
         <p:spPr>
           <a:xfrm>
-            <a:off x="3271657" y="2547779"/>
-            <a:ext cx="614411" cy="155709"/>
+            <a:off x="3271657" y="2955340"/>
+            <a:ext cx="614411" cy="124358"/>
           </a:xfrm>
           <a:prstGeom prst="rect">
             <a:avLst/>
@@ -22642,8 +22693,8 @@
         </p:nvSpPr>
         <p:spPr>
           <a:xfrm>
-            <a:off x="3908014" y="2547779"/>
-            <a:ext cx="614411" cy="155709"/>
+            <a:off x="3908014" y="2955340"/>
+            <a:ext cx="614411" cy="124358"/>
           </a:xfrm>
           <a:prstGeom prst="rect">
             <a:avLst/>
@@ -22686,8 +22737,8 @@
         </p:nvSpPr>
         <p:spPr>
           <a:xfrm>
-            <a:off x="3897042" y="2536806"/>
-            <a:ext cx="636357" cy="177654"/>
+            <a:off x="3897042" y="2944368"/>
+            <a:ext cx="636357" cy="146304"/>
           </a:xfrm>
           <a:prstGeom prst="rect">
             <a:avLst/>
@@ -22712,9 +22763,9 @@
               </a:spcAft>
             </a:pPr>
             <a:r>
-              <a:rPr sz="580" b="0">
+              <a:rPr sz="620" b="0">
                 <a:solidFill>
-                  <a:srgbClr val="6E6A64"/>
+                  <a:srgbClr val="161616"/>
                 </a:solidFill>
                 <a:latin typeface="Helvetica Neue"/>
               </a:rPr>
@@ -22731,8 +22782,8 @@
         </p:nvSpPr>
         <p:spPr>
           <a:xfrm>
-            <a:off x="4544372" y="2547779"/>
-            <a:ext cx="614411" cy="155709"/>
+            <a:off x="4544372" y="2955340"/>
+            <a:ext cx="614411" cy="124358"/>
           </a:xfrm>
           <a:prstGeom prst="rect">
             <a:avLst/>
@@ -22775,8 +22826,8 @@
         </p:nvSpPr>
         <p:spPr>
           <a:xfrm>
-            <a:off x="4533399" y="2536806"/>
-            <a:ext cx="636357" cy="177654"/>
+            <a:off x="4533399" y="2944368"/>
+            <a:ext cx="636357" cy="146304"/>
           </a:xfrm>
           <a:prstGeom prst="rect">
             <a:avLst/>
@@ -22801,9 +22852,9 @@
               </a:spcAft>
             </a:pPr>
             <a:r>
-              <a:rPr sz="580" b="0">
+              <a:rPr sz="620" b="0">
                 <a:solidFill>
-                  <a:srgbClr val="6E6A64"/>
+                  <a:srgbClr val="161616"/>
                 </a:solidFill>
                 <a:latin typeface="Helvetica Neue"/>
               </a:rPr>
@@ -22820,8 +22871,8 @@
         </p:nvSpPr>
         <p:spPr>
           <a:xfrm>
-            <a:off x="5180729" y="2547779"/>
-            <a:ext cx="614411" cy="155709"/>
+            <a:off x="5180729" y="2955340"/>
+            <a:ext cx="614411" cy="124358"/>
           </a:xfrm>
           <a:prstGeom prst="rect">
             <a:avLst/>
@@ -22864,8 +22915,8 @@
         </p:nvSpPr>
         <p:spPr>
           <a:xfrm>
-            <a:off x="5169756" y="2536806"/>
-            <a:ext cx="636357" cy="177654"/>
+            <a:off x="5169756" y="2944368"/>
+            <a:ext cx="636357" cy="146304"/>
           </a:xfrm>
           <a:prstGeom prst="rect">
             <a:avLst/>
@@ -22890,9 +22941,9 @@
               </a:spcAft>
             </a:pPr>
             <a:r>
-              <a:rPr sz="580" b="0">
+              <a:rPr sz="620" b="0">
                 <a:solidFill>
-                  <a:srgbClr val="6E6A64"/>
+                  <a:srgbClr val="161616"/>
                 </a:solidFill>
                 <a:latin typeface="Helvetica Neue"/>
               </a:rPr>
@@ -22909,8 +22960,8 @@
         </p:nvSpPr>
         <p:spPr>
           <a:xfrm>
-            <a:off x="5817086" y="2547779"/>
-            <a:ext cx="614411" cy="155709"/>
+            <a:off x="5817086" y="2955340"/>
+            <a:ext cx="614411" cy="124358"/>
           </a:xfrm>
           <a:prstGeom prst="rect">
             <a:avLst/>
@@ -22953,8 +23004,8 @@
         </p:nvSpPr>
         <p:spPr>
           <a:xfrm>
-            <a:off x="5806113" y="2536806"/>
-            <a:ext cx="636357" cy="177654"/>
+            <a:off x="5806113" y="2944368"/>
+            <a:ext cx="636357" cy="146304"/>
           </a:xfrm>
           <a:prstGeom prst="rect">
             <a:avLst/>
@@ -22979,9 +23030,9 @@
               </a:spcAft>
             </a:pPr>
             <a:r>
-              <a:rPr sz="580" b="0">
+              <a:rPr sz="620" b="0">
                 <a:solidFill>
-                  <a:srgbClr val="6E6A64"/>
+                  <a:srgbClr val="161616"/>
                 </a:solidFill>
                 <a:latin typeface="Helvetica Neue"/>
               </a:rPr>
@@ -22998,8 +23049,8 @@
         </p:nvSpPr>
         <p:spPr>
           <a:xfrm>
-            <a:off x="6453443" y="2547779"/>
-            <a:ext cx="614411" cy="155709"/>
+            <a:off x="6453443" y="2955340"/>
+            <a:ext cx="614411" cy="124358"/>
           </a:xfrm>
           <a:prstGeom prst="rect">
             <a:avLst/>
@@ -23042,8 +23093,8 @@
         </p:nvSpPr>
         <p:spPr>
           <a:xfrm>
-            <a:off x="6442470" y="2536806"/>
-            <a:ext cx="636357" cy="177654"/>
+            <a:off x="6442470" y="2944368"/>
+            <a:ext cx="636357" cy="146304"/>
           </a:xfrm>
           <a:prstGeom prst="rect">
             <a:avLst/>
@@ -23068,9 +23119,9 @@
               </a:spcAft>
             </a:pPr>
             <a:r>
-              <a:rPr sz="580" b="0">
+              <a:rPr sz="620" b="0">
                 <a:solidFill>
-                  <a:srgbClr val="6E6A64"/>
+                  <a:srgbClr val="161616"/>
                 </a:solidFill>
                 <a:latin typeface="Helvetica Neue"/>
               </a:rPr>
@@ -23087,8 +23138,8 @@
         </p:nvSpPr>
         <p:spPr>
           <a:xfrm>
-            <a:off x="7089800" y="2547779"/>
-            <a:ext cx="614411" cy="155709"/>
+            <a:off x="7089800" y="2955340"/>
+            <a:ext cx="614411" cy="124358"/>
           </a:xfrm>
           <a:prstGeom prst="rect">
             <a:avLst/>
@@ -23131,8 +23182,8 @@
         </p:nvSpPr>
         <p:spPr>
           <a:xfrm>
-            <a:off x="7078827" y="2536806"/>
-            <a:ext cx="636357" cy="177654"/>
+            <a:off x="7078827" y="2944368"/>
+            <a:ext cx="636357" cy="146304"/>
           </a:xfrm>
           <a:prstGeom prst="rect">
             <a:avLst/>
@@ -23157,9 +23208,9 @@
               </a:spcAft>
             </a:pPr>
             <a:r>
-              <a:rPr sz="580" b="0">
+              <a:rPr sz="620" b="0">
                 <a:solidFill>
-                  <a:srgbClr val="6E6A64"/>
+                  <a:srgbClr val="161616"/>
                 </a:solidFill>
                 <a:latin typeface="Helvetica Neue"/>
               </a:rPr>
@@ -23176,8 +23227,8 @@
         </p:nvSpPr>
         <p:spPr>
           <a:xfrm>
-            <a:off x="7726157" y="2547779"/>
-            <a:ext cx="614411" cy="155709"/>
+            <a:off x="7726157" y="2955340"/>
+            <a:ext cx="614411" cy="124358"/>
           </a:xfrm>
           <a:prstGeom prst="rect">
             <a:avLst/>
@@ -23220,8 +23271,8 @@
         </p:nvSpPr>
         <p:spPr>
           <a:xfrm>
-            <a:off x="7715184" y="2536806"/>
-            <a:ext cx="636357" cy="177654"/>
+            <a:off x="7715184" y="2944368"/>
+            <a:ext cx="636357" cy="146304"/>
           </a:xfrm>
           <a:prstGeom prst="rect">
             <a:avLst/>
@@ -23246,9 +23297,9 @@
               </a:spcAft>
             </a:pPr>
             <a:r>
-              <a:rPr sz="580" b="0">
+              <a:rPr sz="620" b="0">
                 <a:solidFill>
-                  <a:srgbClr val="6E6A64"/>
+                  <a:srgbClr val="161616"/>
                 </a:solidFill>
                 <a:latin typeface="Helvetica Neue"/>
               </a:rPr>
@@ -23265,8 +23316,8 @@
         </p:nvSpPr>
         <p:spPr>
           <a:xfrm>
-            <a:off x="8362514" y="2547779"/>
-            <a:ext cx="614411" cy="155709"/>
+            <a:off x="8362514" y="2955340"/>
+            <a:ext cx="614411" cy="124358"/>
           </a:xfrm>
           <a:prstGeom prst="rect">
             <a:avLst/>
@@ -23309,8 +23360,8 @@
         </p:nvSpPr>
         <p:spPr>
           <a:xfrm>
-            <a:off x="8351541" y="2536806"/>
-            <a:ext cx="636357" cy="177654"/>
+            <a:off x="8351541" y="2944368"/>
+            <a:ext cx="636357" cy="146304"/>
           </a:xfrm>
           <a:prstGeom prst="rect">
             <a:avLst/>
@@ -23335,7 +23386,7 @@
               </a:spcAft>
             </a:pPr>
             <a:r>
-              <a:rPr sz="580" b="0">
+              <a:rPr sz="620" b="0">
                 <a:solidFill>
                   <a:srgbClr val="FFFFFF"/>
                 </a:solidFill>
@@ -23354,8 +23405,8 @@
         </p:nvSpPr>
         <p:spPr>
           <a:xfrm>
-            <a:off x="8998871" y="2547779"/>
-            <a:ext cx="614411" cy="155709"/>
+            <a:off x="8998871" y="2955340"/>
+            <a:ext cx="614411" cy="124358"/>
           </a:xfrm>
           <a:prstGeom prst="rect">
             <a:avLst/>
@@ -23398,8 +23449,8 @@
         </p:nvSpPr>
         <p:spPr>
           <a:xfrm>
-            <a:off x="8987898" y="2536806"/>
-            <a:ext cx="636357" cy="177654"/>
+            <a:off x="8987898" y="2944368"/>
+            <a:ext cx="636357" cy="146304"/>
           </a:xfrm>
           <a:prstGeom prst="rect">
             <a:avLst/>
@@ -23424,7 +23475,7 @@
               </a:spcAft>
             </a:pPr>
             <a:r>
-              <a:rPr sz="580" b="0">
+              <a:rPr sz="620" b="0">
                 <a:solidFill>
                   <a:srgbClr val="FFFFFF"/>
                 </a:solidFill>
@@ -23443,8 +23494,8 @@
         </p:nvSpPr>
         <p:spPr>
           <a:xfrm>
-            <a:off x="9635228" y="2547779"/>
-            <a:ext cx="614411" cy="155709"/>
+            <a:off x="9635228" y="2955340"/>
+            <a:ext cx="614411" cy="124358"/>
           </a:xfrm>
           <a:prstGeom prst="rect">
             <a:avLst/>
@@ -23487,8 +23538,8 @@
         </p:nvSpPr>
         <p:spPr>
           <a:xfrm>
-            <a:off x="9624255" y="2536806"/>
-            <a:ext cx="636357" cy="177654"/>
+            <a:off x="9624255" y="2944368"/>
+            <a:ext cx="636357" cy="146304"/>
           </a:xfrm>
           <a:prstGeom prst="rect">
             <a:avLst/>
@@ -23513,7 +23564,7 @@
               </a:spcAft>
             </a:pPr>
             <a:r>
-              <a:rPr sz="580" b="0">
+              <a:rPr sz="620" b="0">
                 <a:solidFill>
                   <a:srgbClr val="FFFFFF"/>
                 </a:solidFill>
@@ -23532,8 +23583,8 @@
         </p:nvSpPr>
         <p:spPr>
           <a:xfrm>
-            <a:off x="10271585" y="2547779"/>
-            <a:ext cx="614411" cy="155709"/>
+            <a:off x="10271585" y="2955340"/>
+            <a:ext cx="614411" cy="124358"/>
           </a:xfrm>
           <a:prstGeom prst="rect">
             <a:avLst/>
@@ -23576,8 +23627,8 @@
         </p:nvSpPr>
         <p:spPr>
           <a:xfrm>
-            <a:off x="10260613" y="2536806"/>
-            <a:ext cx="636357" cy="177654"/>
+            <a:off x="10260613" y="2944368"/>
+            <a:ext cx="636357" cy="146304"/>
           </a:xfrm>
           <a:prstGeom prst="rect">
             <a:avLst/>
@@ -23602,7 +23653,7 @@
               </a:spcAft>
             </a:pPr>
             <a:r>
-              <a:rPr sz="580" b="0">
+              <a:rPr sz="620" b="0">
                 <a:solidFill>
                   <a:srgbClr val="FFFFFF"/>
                 </a:solidFill>
@@ -23621,8 +23672,8 @@
         </p:nvSpPr>
         <p:spPr>
           <a:xfrm>
-            <a:off x="10907942" y="2547779"/>
-            <a:ext cx="614411" cy="155709"/>
+            <a:off x="10907942" y="2955340"/>
+            <a:ext cx="614411" cy="124358"/>
           </a:xfrm>
           <a:prstGeom prst="rect">
             <a:avLst/>
@@ -23665,8 +23716,8 @@
         </p:nvSpPr>
         <p:spPr>
           <a:xfrm>
-            <a:off x="10896970" y="2536806"/>
-            <a:ext cx="636357" cy="177654"/>
+            <a:off x="10896970" y="2944368"/>
+            <a:ext cx="636357" cy="146304"/>
           </a:xfrm>
           <a:prstGeom prst="rect">
             <a:avLst/>
@@ -23691,7 +23742,7 @@
               </a:spcAft>
             </a:pPr>
             <a:r>
-              <a:rPr sz="580" b="0">
+              <a:rPr sz="620" b="0">
                 <a:solidFill>
                   <a:srgbClr val="FFFFFF"/>
                 </a:solidFill>
@@ -23710,8 +23761,8 @@
         </p:nvSpPr>
         <p:spPr>
           <a:xfrm>
-            <a:off x="704088" y="2714461"/>
-            <a:ext cx="1856231" cy="177654"/>
+            <a:off x="704088" y="3090671"/>
+            <a:ext cx="1856231" cy="146304"/>
           </a:xfrm>
           <a:prstGeom prst="rect">
             <a:avLst/>
@@ -23764,8 +23815,8 @@
         </p:nvSpPr>
         <p:spPr>
           <a:xfrm>
-            <a:off x="2635300" y="2725434"/>
-            <a:ext cx="614411" cy="155709"/>
+            <a:off x="2635300" y="3101644"/>
+            <a:ext cx="614411" cy="124358"/>
           </a:xfrm>
           <a:prstGeom prst="rect">
             <a:avLst/>
@@ -23808,8 +23859,8 @@
         </p:nvSpPr>
         <p:spPr>
           <a:xfrm>
-            <a:off x="2624328" y="2714461"/>
-            <a:ext cx="636357" cy="177654"/>
+            <a:off x="2624328" y="3090671"/>
+            <a:ext cx="636357" cy="146304"/>
           </a:xfrm>
           <a:prstGeom prst="rect">
             <a:avLst/>
@@ -23834,9 +23885,9 @@
               </a:spcAft>
             </a:pPr>
             <a:r>
-              <a:rPr sz="580" b="0">
+              <a:rPr sz="620" b="0">
                 <a:solidFill>
-                  <a:srgbClr val="6E6A64"/>
+                  <a:srgbClr val="161616"/>
                 </a:solidFill>
                 <a:latin typeface="Helvetica Neue"/>
               </a:rPr>
@@ -23853,8 +23904,8 @@
         </p:nvSpPr>
         <p:spPr>
           <a:xfrm>
-            <a:off x="3271657" y="2725434"/>
-            <a:ext cx="614411" cy="155709"/>
+            <a:off x="3271657" y="3101644"/>
+            <a:ext cx="614411" cy="124358"/>
           </a:xfrm>
           <a:prstGeom prst="rect">
             <a:avLst/>
@@ -23897,8 +23948,8 @@
         </p:nvSpPr>
         <p:spPr>
           <a:xfrm>
-            <a:off x="3260685" y="2714461"/>
-            <a:ext cx="636357" cy="177654"/>
+            <a:off x="3260685" y="3090671"/>
+            <a:ext cx="636357" cy="146304"/>
           </a:xfrm>
           <a:prstGeom prst="rect">
             <a:avLst/>
@@ -23923,9 +23974,9 @@
               </a:spcAft>
             </a:pPr>
             <a:r>
-              <a:rPr sz="580" b="0">
+              <a:rPr sz="620" b="0">
                 <a:solidFill>
-                  <a:srgbClr val="6E6A64"/>
+                  <a:srgbClr val="161616"/>
                 </a:solidFill>
                 <a:latin typeface="Helvetica Neue"/>
               </a:rPr>
@@ -23942,8 +23993,8 @@
         </p:nvSpPr>
         <p:spPr>
           <a:xfrm>
-            <a:off x="3908014" y="2725434"/>
-            <a:ext cx="614411" cy="155709"/>
+            <a:off x="3908014" y="3101644"/>
+            <a:ext cx="614411" cy="124358"/>
           </a:xfrm>
           <a:prstGeom prst="rect">
             <a:avLst/>
@@ -23986,8 +24037,8 @@
         </p:nvSpPr>
         <p:spPr>
           <a:xfrm>
-            <a:off x="4544372" y="2725434"/>
-            <a:ext cx="614411" cy="155709"/>
+            <a:off x="4544372" y="3101644"/>
+            <a:ext cx="614411" cy="124358"/>
           </a:xfrm>
           <a:prstGeom prst="rect">
             <a:avLst/>
@@ -24030,8 +24081,8 @@
         </p:nvSpPr>
         <p:spPr>
           <a:xfrm>
-            <a:off x="4533399" y="2714461"/>
-            <a:ext cx="636357" cy="177654"/>
+            <a:off x="4533399" y="3090671"/>
+            <a:ext cx="636357" cy="146304"/>
           </a:xfrm>
           <a:prstGeom prst="rect">
             <a:avLst/>
@@ -24056,9 +24107,9 @@
               </a:spcAft>
             </a:pPr>
             <a:r>
-              <a:rPr sz="580" b="0">
+              <a:rPr sz="620" b="0">
                 <a:solidFill>
-                  <a:srgbClr val="6E6A64"/>
+                  <a:srgbClr val="161616"/>
                 </a:solidFill>
                 <a:latin typeface="Helvetica Neue"/>
               </a:rPr>
@@ -24075,8 +24126,8 @@
         </p:nvSpPr>
         <p:spPr>
           <a:xfrm>
-            <a:off x="5180729" y="2725434"/>
-            <a:ext cx="614411" cy="155709"/>
+            <a:off x="5180729" y="3101644"/>
+            <a:ext cx="614411" cy="124358"/>
           </a:xfrm>
           <a:prstGeom prst="rect">
             <a:avLst/>
@@ -24119,8 +24170,8 @@
         </p:nvSpPr>
         <p:spPr>
           <a:xfrm>
-            <a:off x="5169756" y="2714461"/>
-            <a:ext cx="636357" cy="177654"/>
+            <a:off x="5169756" y="3090671"/>
+            <a:ext cx="636357" cy="146304"/>
           </a:xfrm>
           <a:prstGeom prst="rect">
             <a:avLst/>
@@ -24145,9 +24196,9 @@
               </a:spcAft>
             </a:pPr>
             <a:r>
-              <a:rPr sz="580" b="0">
+              <a:rPr sz="620" b="0">
                 <a:solidFill>
-                  <a:srgbClr val="6E6A64"/>
+                  <a:srgbClr val="161616"/>
                 </a:solidFill>
                 <a:latin typeface="Helvetica Neue"/>
               </a:rPr>
@@ -24164,8 +24215,8 @@
         </p:nvSpPr>
         <p:spPr>
           <a:xfrm>
-            <a:off x="5817086" y="2725434"/>
-            <a:ext cx="614411" cy="155709"/>
+            <a:off x="5817086" y="3101644"/>
+            <a:ext cx="614411" cy="124358"/>
           </a:xfrm>
           <a:prstGeom prst="rect">
             <a:avLst/>
@@ -24208,8 +24259,8 @@
         </p:nvSpPr>
         <p:spPr>
           <a:xfrm>
-            <a:off x="5806113" y="2714461"/>
-            <a:ext cx="636357" cy="177654"/>
+            <a:off x="5806113" y="3090671"/>
+            <a:ext cx="636357" cy="146304"/>
           </a:xfrm>
           <a:prstGeom prst="rect">
             <a:avLst/>
@@ -24234,9 +24285,9 @@
               </a:spcAft>
             </a:pPr>
             <a:r>
-              <a:rPr sz="580" b="0">
+              <a:rPr sz="620" b="0">
                 <a:solidFill>
-                  <a:srgbClr val="6E6A64"/>
+                  <a:srgbClr val="161616"/>
                 </a:solidFill>
                 <a:latin typeface="Helvetica Neue"/>
               </a:rPr>
@@ -24253,8 +24304,8 @@
         </p:nvSpPr>
         <p:spPr>
           <a:xfrm>
-            <a:off x="6453443" y="2725434"/>
-            <a:ext cx="614411" cy="155709"/>
+            <a:off x="6453443" y="3101644"/>
+            <a:ext cx="614411" cy="124358"/>
           </a:xfrm>
           <a:prstGeom prst="rect">
             <a:avLst/>
@@ -24297,8 +24348,8 @@
         </p:nvSpPr>
         <p:spPr>
           <a:xfrm>
-            <a:off x="6442470" y="2714461"/>
-            <a:ext cx="636357" cy="177654"/>
+            <a:off x="6442470" y="3090671"/>
+            <a:ext cx="636357" cy="146304"/>
           </a:xfrm>
           <a:prstGeom prst="rect">
             <a:avLst/>
@@ -24323,9 +24374,9 @@
               </a:spcAft>
             </a:pPr>
             <a:r>
-              <a:rPr sz="580" b="0">
+              <a:rPr sz="620" b="0">
                 <a:solidFill>
-                  <a:srgbClr val="6E6A64"/>
+                  <a:srgbClr val="161616"/>
                 </a:solidFill>
                 <a:latin typeface="Helvetica Neue"/>
               </a:rPr>
@@ -24342,8 +24393,8 @@
         </p:nvSpPr>
         <p:spPr>
           <a:xfrm>
-            <a:off x="7089800" y="2725434"/>
-            <a:ext cx="614411" cy="155709"/>
+            <a:off x="7089800" y="3101644"/>
+            <a:ext cx="614411" cy="124358"/>
           </a:xfrm>
           <a:prstGeom prst="rect">
             <a:avLst/>
@@ -24386,8 +24437,8 @@
         </p:nvSpPr>
         <p:spPr>
           <a:xfrm>
-            <a:off x="7078827" y="2714461"/>
-            <a:ext cx="636357" cy="177654"/>
+            <a:off x="7078827" y="3090671"/>
+            <a:ext cx="636357" cy="146304"/>
           </a:xfrm>
           <a:prstGeom prst="rect">
             <a:avLst/>
@@ -24412,9 +24463,9 @@
               </a:spcAft>
             </a:pPr>
             <a:r>
-              <a:rPr sz="580" b="0">
+              <a:rPr sz="620" b="0">
                 <a:solidFill>
-                  <a:srgbClr val="6E6A64"/>
+                  <a:srgbClr val="161616"/>
                 </a:solidFill>
                 <a:latin typeface="Helvetica Neue"/>
               </a:rPr>
@@ -24431,8 +24482,8 @@
         </p:nvSpPr>
         <p:spPr>
           <a:xfrm>
-            <a:off x="7726157" y="2725434"/>
-            <a:ext cx="614411" cy="155709"/>
+            <a:off x="7726157" y="3101644"/>
+            <a:ext cx="614411" cy="124358"/>
           </a:xfrm>
           <a:prstGeom prst="rect">
             <a:avLst/>
@@ -24475,8 +24526,8 @@
         </p:nvSpPr>
         <p:spPr>
           <a:xfrm>
-            <a:off x="7715184" y="2714461"/>
-            <a:ext cx="636357" cy="177654"/>
+            <a:off x="7715184" y="3090671"/>
+            <a:ext cx="636357" cy="146304"/>
           </a:xfrm>
           <a:prstGeom prst="rect">
             <a:avLst/>
@@ -24501,9 +24552,9 @@
               </a:spcAft>
             </a:pPr>
             <a:r>
-              <a:rPr sz="580" b="0">
+              <a:rPr sz="620" b="0">
                 <a:solidFill>
-                  <a:srgbClr val="6E6A64"/>
+                  <a:srgbClr val="161616"/>
                 </a:solidFill>
                 <a:latin typeface="Helvetica Neue"/>
               </a:rPr>
@@ -24520,8 +24571,8 @@
         </p:nvSpPr>
         <p:spPr>
           <a:xfrm>
-            <a:off x="8362514" y="2725434"/>
-            <a:ext cx="614411" cy="155709"/>
+            <a:off x="8362514" y="3101644"/>
+            <a:ext cx="614411" cy="124358"/>
           </a:xfrm>
           <a:prstGeom prst="rect">
             <a:avLst/>
@@ -24564,8 +24615,8 @@
         </p:nvSpPr>
         <p:spPr>
           <a:xfrm>
-            <a:off x="8351541" y="2714461"/>
-            <a:ext cx="636357" cy="177654"/>
+            <a:off x="8351541" y="3090671"/>
+            <a:ext cx="636357" cy="146304"/>
           </a:xfrm>
           <a:prstGeom prst="rect">
             <a:avLst/>
@@ -24590,7 +24641,7 @@
               </a:spcAft>
             </a:pPr>
             <a:r>
-              <a:rPr sz="580" b="0">
+              <a:rPr sz="620" b="0">
                 <a:solidFill>
                   <a:srgbClr val="FFFFFF"/>
                 </a:solidFill>
@@ -24609,8 +24660,8 @@
         </p:nvSpPr>
         <p:spPr>
           <a:xfrm>
-            <a:off x="8998871" y="2725434"/>
-            <a:ext cx="614411" cy="155709"/>
+            <a:off x="8998871" y="3101644"/>
+            <a:ext cx="614411" cy="124358"/>
           </a:xfrm>
           <a:prstGeom prst="rect">
             <a:avLst/>
@@ -24653,8 +24704,8 @@
         </p:nvSpPr>
         <p:spPr>
           <a:xfrm>
-            <a:off x="8987898" y="2714461"/>
-            <a:ext cx="636357" cy="177654"/>
+            <a:off x="8987898" y="3090671"/>
+            <a:ext cx="636357" cy="146304"/>
           </a:xfrm>
           <a:prstGeom prst="rect">
             <a:avLst/>
@@ -24679,7 +24730,7 @@
               </a:spcAft>
             </a:pPr>
             <a:r>
-              <a:rPr sz="580" b="0">
+              <a:rPr sz="620" b="0">
                 <a:solidFill>
                   <a:srgbClr val="FFFFFF"/>
                 </a:solidFill>
@@ -24698,8 +24749,8 @@
         </p:nvSpPr>
         <p:spPr>
           <a:xfrm>
-            <a:off x="9635228" y="2725434"/>
-            <a:ext cx="614411" cy="155709"/>
+            <a:off x="9635228" y="3101644"/>
+            <a:ext cx="614411" cy="124358"/>
           </a:xfrm>
           <a:prstGeom prst="rect">
             <a:avLst/>
@@ -24742,8 +24793,8 @@
         </p:nvSpPr>
         <p:spPr>
           <a:xfrm>
-            <a:off x="9624255" y="2714461"/>
-            <a:ext cx="636357" cy="177654"/>
+            <a:off x="9624255" y="3090671"/>
+            <a:ext cx="636357" cy="146304"/>
           </a:xfrm>
           <a:prstGeom prst="rect">
             <a:avLst/>
@@ -24768,7 +24819,7 @@
               </a:spcAft>
             </a:pPr>
             <a:r>
-              <a:rPr sz="580" b="0">
+              <a:rPr sz="620" b="0">
                 <a:solidFill>
                   <a:srgbClr val="FFFFFF"/>
                 </a:solidFill>
@@ -24787,8 +24838,8 @@
         </p:nvSpPr>
         <p:spPr>
           <a:xfrm>
-            <a:off x="10271585" y="2725434"/>
-            <a:ext cx="614411" cy="155709"/>
+            <a:off x="10271585" y="3101644"/>
+            <a:ext cx="614411" cy="124358"/>
           </a:xfrm>
           <a:prstGeom prst="rect">
             <a:avLst/>
@@ -24831,8 +24882,8 @@
         </p:nvSpPr>
         <p:spPr>
           <a:xfrm>
-            <a:off x="10260613" y="2714461"/>
-            <a:ext cx="636357" cy="177654"/>
+            <a:off x="10260613" y="3090671"/>
+            <a:ext cx="636357" cy="146304"/>
           </a:xfrm>
           <a:prstGeom prst="rect">
             <a:avLst/>
@@ -24857,7 +24908,7 @@
               </a:spcAft>
             </a:pPr>
             <a:r>
-              <a:rPr sz="580" b="0">
+              <a:rPr sz="620" b="0">
                 <a:solidFill>
                   <a:srgbClr val="FFFFFF"/>
                 </a:solidFill>
@@ -24876,8 +24927,8 @@
         </p:nvSpPr>
         <p:spPr>
           <a:xfrm>
-            <a:off x="10907942" y="2725434"/>
-            <a:ext cx="614411" cy="155709"/>
+            <a:off x="10907942" y="3101644"/>
+            <a:ext cx="614411" cy="124358"/>
           </a:xfrm>
           <a:prstGeom prst="rect">
             <a:avLst/>
@@ -24920,8 +24971,8 @@
         </p:nvSpPr>
         <p:spPr>
           <a:xfrm>
-            <a:off x="10896970" y="2714461"/>
-            <a:ext cx="636357" cy="177654"/>
+            <a:off x="10896970" y="3090671"/>
+            <a:ext cx="636357" cy="146304"/>
           </a:xfrm>
           <a:prstGeom prst="rect">
             <a:avLst/>
@@ -24946,7 +24997,7 @@
               </a:spcAft>
             </a:pPr>
             <a:r>
-              <a:rPr sz="580" b="0">
+              <a:rPr sz="620" b="0">
                 <a:solidFill>
                   <a:srgbClr val="FFFFFF"/>
                 </a:solidFill>
@@ -24965,8 +25016,8 @@
         </p:nvSpPr>
         <p:spPr>
           <a:xfrm>
-            <a:off x="658368" y="2899431"/>
-            <a:ext cx="1920240" cy="163024"/>
+            <a:off x="658368" y="3244291"/>
+            <a:ext cx="1920240" cy="131673"/>
           </a:xfrm>
           <a:prstGeom prst="rect">
             <a:avLst/>
@@ -25009,8 +25060,8 @@
         </p:nvSpPr>
         <p:spPr>
           <a:xfrm>
-            <a:off x="704088" y="2892116"/>
-            <a:ext cx="1856231" cy="177654"/>
+            <a:off x="704088" y="3236975"/>
+            <a:ext cx="1856231" cy="146304"/>
           </a:xfrm>
           <a:prstGeom prst="rect">
             <a:avLst/>
@@ -25063,8 +25114,8 @@
         </p:nvSpPr>
         <p:spPr>
           <a:xfrm>
-            <a:off x="2635300" y="2903089"/>
-            <a:ext cx="614411" cy="155709"/>
+            <a:off x="2635300" y="3247948"/>
+            <a:ext cx="614411" cy="124358"/>
           </a:xfrm>
           <a:prstGeom prst="rect">
             <a:avLst/>
@@ -25107,8 +25158,8 @@
         </p:nvSpPr>
         <p:spPr>
           <a:xfrm>
-            <a:off x="2624328" y="2892116"/>
-            <a:ext cx="636357" cy="177654"/>
+            <a:off x="2624328" y="3236975"/>
+            <a:ext cx="636357" cy="146304"/>
           </a:xfrm>
           <a:prstGeom prst="rect">
             <a:avLst/>
@@ -25133,9 +25184,9 @@
               </a:spcAft>
             </a:pPr>
             <a:r>
-              <a:rPr sz="580" b="0">
+              <a:rPr sz="620" b="0">
                 <a:solidFill>
-                  <a:srgbClr val="6E6A64"/>
+                  <a:srgbClr val="161616"/>
                 </a:solidFill>
                 <a:latin typeface="Helvetica Neue"/>
               </a:rPr>
@@ -25152,8 +25203,8 @@
         </p:nvSpPr>
         <p:spPr>
           <a:xfrm>
-            <a:off x="3271657" y="2903089"/>
-            <a:ext cx="614411" cy="155709"/>
+            <a:off x="3271657" y="3247948"/>
+            <a:ext cx="614411" cy="124358"/>
           </a:xfrm>
           <a:prstGeom prst="rect">
             <a:avLst/>
@@ -25196,8 +25247,8 @@
         </p:nvSpPr>
         <p:spPr>
           <a:xfrm>
-            <a:off x="3260685" y="2892116"/>
-            <a:ext cx="636357" cy="177654"/>
+            <a:off x="3260685" y="3236975"/>
+            <a:ext cx="636357" cy="146304"/>
           </a:xfrm>
           <a:prstGeom prst="rect">
             <a:avLst/>
@@ -25222,9 +25273,9 @@
               </a:spcAft>
             </a:pPr>
             <a:r>
-              <a:rPr sz="580" b="0">
+              <a:rPr sz="620" b="0">
                 <a:solidFill>
-                  <a:srgbClr val="6E6A64"/>
+                  <a:srgbClr val="161616"/>
                 </a:solidFill>
                 <a:latin typeface="Helvetica Neue"/>
               </a:rPr>
@@ -25241,8 +25292,8 @@
         </p:nvSpPr>
         <p:spPr>
           <a:xfrm>
-            <a:off x="3908014" y="2903089"/>
-            <a:ext cx="614411" cy="155709"/>
+            <a:off x="3908014" y="3247948"/>
+            <a:ext cx="614411" cy="124358"/>
           </a:xfrm>
           <a:prstGeom prst="rect">
             <a:avLst/>
@@ -25285,8 +25336,8 @@
         </p:nvSpPr>
         <p:spPr>
           <a:xfrm>
-            <a:off x="3897042" y="2892116"/>
-            <a:ext cx="636357" cy="177654"/>
+            <a:off x="3897042" y="3236975"/>
+            <a:ext cx="636357" cy="146304"/>
           </a:xfrm>
           <a:prstGeom prst="rect">
             <a:avLst/>
@@ -25311,9 +25362,9 @@
               </a:spcAft>
             </a:pPr>
             <a:r>
-              <a:rPr sz="580" b="0">
+              <a:rPr sz="620" b="0">
                 <a:solidFill>
-                  <a:srgbClr val="6E6A64"/>
+                  <a:srgbClr val="161616"/>
                 </a:solidFill>
                 <a:latin typeface="Helvetica Neue"/>
               </a:rPr>
@@ -25330,8 +25381,8 @@
         </p:nvSpPr>
         <p:spPr>
           <a:xfrm>
-            <a:off x="4544372" y="2903089"/>
-            <a:ext cx="614411" cy="155709"/>
+            <a:off x="4544372" y="3247948"/>
+            <a:ext cx="614411" cy="124358"/>
           </a:xfrm>
           <a:prstGeom prst="rect">
             <a:avLst/>
@@ -25374,8 +25425,8 @@
         </p:nvSpPr>
         <p:spPr>
           <a:xfrm>
-            <a:off x="5180729" y="2903089"/>
-            <a:ext cx="614411" cy="155709"/>
+            <a:off x="5180729" y="3247948"/>
+            <a:ext cx="614411" cy="124358"/>
           </a:xfrm>
           <a:prstGeom prst="rect">
             <a:avLst/>
@@ -25418,8 +25469,8 @@
         </p:nvSpPr>
         <p:spPr>
           <a:xfrm>
-            <a:off x="5169756" y="2892116"/>
-            <a:ext cx="636357" cy="177654"/>
+            <a:off x="5169756" y="3236975"/>
+            <a:ext cx="636357" cy="146304"/>
           </a:xfrm>
           <a:prstGeom prst="rect">
             <a:avLst/>
@@ -25444,9 +25495,9 @@
               </a:spcAft>
             </a:pPr>
             <a:r>
-              <a:rPr sz="580" b="0">
+              <a:rPr sz="620" b="0">
                 <a:solidFill>
-                  <a:srgbClr val="6E6A64"/>
+                  <a:srgbClr val="161616"/>
                 </a:solidFill>
                 <a:latin typeface="Helvetica Neue"/>
               </a:rPr>
@@ -25463,8 +25514,8 @@
         </p:nvSpPr>
         <p:spPr>
           <a:xfrm>
-            <a:off x="5817086" y="2903089"/>
-            <a:ext cx="614411" cy="155709"/>
+            <a:off x="5817086" y="3247948"/>
+            <a:ext cx="614411" cy="124358"/>
           </a:xfrm>
           <a:prstGeom prst="rect">
             <a:avLst/>
@@ -25507,8 +25558,8 @@
         </p:nvSpPr>
         <p:spPr>
           <a:xfrm>
-            <a:off x="5806113" y="2892116"/>
-            <a:ext cx="636357" cy="177654"/>
+            <a:off x="5806113" y="3236975"/>
+            <a:ext cx="636357" cy="146304"/>
           </a:xfrm>
           <a:prstGeom prst="rect">
             <a:avLst/>
@@ -25533,9 +25584,9 @@
               </a:spcAft>
             </a:pPr>
             <a:r>
-              <a:rPr sz="580" b="0">
+              <a:rPr sz="620" b="0">
                 <a:solidFill>
-                  <a:srgbClr val="6E6A64"/>
+                  <a:srgbClr val="161616"/>
                 </a:solidFill>
                 <a:latin typeface="Helvetica Neue"/>
               </a:rPr>
@@ -25552,8 +25603,8 @@
         </p:nvSpPr>
         <p:spPr>
           <a:xfrm>
-            <a:off x="6453443" y="2903089"/>
-            <a:ext cx="614411" cy="155709"/>
+            <a:off x="6453443" y="3247948"/>
+            <a:ext cx="614411" cy="124358"/>
           </a:xfrm>
           <a:prstGeom prst="rect">
             <a:avLst/>
@@ -25596,8 +25647,8 @@
         </p:nvSpPr>
         <p:spPr>
           <a:xfrm>
-            <a:off x="6442470" y="2892116"/>
-            <a:ext cx="636357" cy="177654"/>
+            <a:off x="6442470" y="3236975"/>
+            <a:ext cx="636357" cy="146304"/>
           </a:xfrm>
           <a:prstGeom prst="rect">
             <a:avLst/>
@@ -25622,9 +25673,9 @@
               </a:spcAft>
             </a:pPr>
             <a:r>
-              <a:rPr sz="580" b="0">
+              <a:rPr sz="620" b="0">
                 <a:solidFill>
-                  <a:srgbClr val="6E6A64"/>
+                  <a:srgbClr val="161616"/>
                 </a:solidFill>
                 <a:latin typeface="Helvetica Neue"/>
               </a:rPr>
@@ -25641,8 +25692,8 @@
         </p:nvSpPr>
         <p:spPr>
           <a:xfrm>
-            <a:off x="7089800" y="2903089"/>
-            <a:ext cx="614411" cy="155709"/>
+            <a:off x="7089800" y="3247948"/>
+            <a:ext cx="614411" cy="124358"/>
           </a:xfrm>
           <a:prstGeom prst="rect">
             <a:avLst/>
@@ -25685,8 +25736,8 @@
         </p:nvSpPr>
         <p:spPr>
           <a:xfrm>
-            <a:off x="7078827" y="2892116"/>
-            <a:ext cx="636357" cy="177654"/>
+            <a:off x="7078827" y="3236975"/>
+            <a:ext cx="636357" cy="146304"/>
           </a:xfrm>
           <a:prstGeom prst="rect">
             <a:avLst/>
@@ -25711,9 +25762,9 @@
               </a:spcAft>
             </a:pPr>
             <a:r>
-              <a:rPr sz="580" b="0">
+              <a:rPr sz="620" b="0">
                 <a:solidFill>
-                  <a:srgbClr val="6E6A64"/>
+                  <a:srgbClr val="161616"/>
                 </a:solidFill>
                 <a:latin typeface="Helvetica Neue"/>
               </a:rPr>
@@ -25730,8 +25781,8 @@
         </p:nvSpPr>
         <p:spPr>
           <a:xfrm>
-            <a:off x="7726157" y="2903089"/>
-            <a:ext cx="614411" cy="155709"/>
+            <a:off x="7726157" y="3247948"/>
+            <a:ext cx="614411" cy="124358"/>
           </a:xfrm>
           <a:prstGeom prst="rect">
             <a:avLst/>
@@ -25774,8 +25825,8 @@
         </p:nvSpPr>
         <p:spPr>
           <a:xfrm>
-            <a:off x="7715184" y="2892116"/>
-            <a:ext cx="636357" cy="177654"/>
+            <a:off x="7715184" y="3236975"/>
+            <a:ext cx="636357" cy="146304"/>
           </a:xfrm>
           <a:prstGeom prst="rect">
             <a:avLst/>
@@ -25800,9 +25851,9 @@
               </a:spcAft>
             </a:pPr>
             <a:r>
-              <a:rPr sz="580" b="0">
+              <a:rPr sz="620" b="0">
                 <a:solidFill>
-                  <a:srgbClr val="6E6A64"/>
+                  <a:srgbClr val="161616"/>
                 </a:solidFill>
                 <a:latin typeface="Helvetica Neue"/>
               </a:rPr>
@@ -25819,8 +25870,8 @@
         </p:nvSpPr>
         <p:spPr>
           <a:xfrm>
-            <a:off x="8362514" y="2903089"/>
-            <a:ext cx="614411" cy="155709"/>
+            <a:off x="8362514" y="3247948"/>
+            <a:ext cx="614411" cy="124358"/>
           </a:xfrm>
           <a:prstGeom prst="rect">
             <a:avLst/>
@@ -25863,8 +25914,8 @@
         </p:nvSpPr>
         <p:spPr>
           <a:xfrm>
-            <a:off x="8351541" y="2892116"/>
-            <a:ext cx="636357" cy="177654"/>
+            <a:off x="8351541" y="3236975"/>
+            <a:ext cx="636357" cy="146304"/>
           </a:xfrm>
           <a:prstGeom prst="rect">
             <a:avLst/>
@@ -25889,9 +25940,9 @@
               </a:spcAft>
             </a:pPr>
             <a:r>
-              <a:rPr sz="580" b="0">
+              <a:rPr sz="620" b="0">
                 <a:solidFill>
-                  <a:srgbClr val="6E6A64"/>
+                  <a:srgbClr val="161616"/>
                 </a:solidFill>
                 <a:latin typeface="Helvetica Neue"/>
               </a:rPr>
@@ -25908,8 +25959,8 @@
         </p:nvSpPr>
         <p:spPr>
           <a:xfrm>
-            <a:off x="8998871" y="2903089"/>
-            <a:ext cx="614411" cy="155709"/>
+            <a:off x="8998871" y="3247948"/>
+            <a:ext cx="614411" cy="124358"/>
           </a:xfrm>
           <a:prstGeom prst="rect">
             <a:avLst/>
@@ -25952,8 +26003,8 @@
         </p:nvSpPr>
         <p:spPr>
           <a:xfrm>
-            <a:off x="8987898" y="2892116"/>
-            <a:ext cx="636357" cy="177654"/>
+            <a:off x="8987898" y="3236975"/>
+            <a:ext cx="636357" cy="146304"/>
           </a:xfrm>
           <a:prstGeom prst="rect">
             <a:avLst/>
@@ -25978,9 +26029,9 @@
               </a:spcAft>
             </a:pPr>
             <a:r>
-              <a:rPr sz="580" b="0">
+              <a:rPr sz="620" b="0">
                 <a:solidFill>
-                  <a:srgbClr val="6E6A64"/>
+                  <a:srgbClr val="161616"/>
                 </a:solidFill>
                 <a:latin typeface="Helvetica Neue"/>
               </a:rPr>
@@ -25997,8 +26048,8 @@
         </p:nvSpPr>
         <p:spPr>
           <a:xfrm>
-            <a:off x="9635228" y="2903089"/>
-            <a:ext cx="614411" cy="155709"/>
+            <a:off x="9635228" y="3247948"/>
+            <a:ext cx="614411" cy="124358"/>
           </a:xfrm>
           <a:prstGeom prst="rect">
             <a:avLst/>
@@ -26041,8 +26092,8 @@
         </p:nvSpPr>
         <p:spPr>
           <a:xfrm>
-            <a:off x="9624255" y="2892116"/>
-            <a:ext cx="636357" cy="177654"/>
+            <a:off x="9624255" y="3236975"/>
+            <a:ext cx="636357" cy="146304"/>
           </a:xfrm>
           <a:prstGeom prst="rect">
             <a:avLst/>
@@ -26067,9 +26118,9 @@
               </a:spcAft>
             </a:pPr>
             <a:r>
-              <a:rPr sz="580" b="0">
+              <a:rPr sz="620" b="0">
                 <a:solidFill>
-                  <a:srgbClr val="6E6A64"/>
+                  <a:srgbClr val="161616"/>
                 </a:solidFill>
                 <a:latin typeface="Helvetica Neue"/>
               </a:rPr>
@@ -26086,8 +26137,8 @@
         </p:nvSpPr>
         <p:spPr>
           <a:xfrm>
-            <a:off x="10271585" y="2903089"/>
-            <a:ext cx="614411" cy="155709"/>
+            <a:off x="10271585" y="3247948"/>
+            <a:ext cx="614411" cy="124358"/>
           </a:xfrm>
           <a:prstGeom prst="rect">
             <a:avLst/>
@@ -26130,8 +26181,8 @@
         </p:nvSpPr>
         <p:spPr>
           <a:xfrm>
-            <a:off x="10260613" y="2892116"/>
-            <a:ext cx="636357" cy="177654"/>
+            <a:off x="10260613" y="3236975"/>
+            <a:ext cx="636357" cy="146304"/>
           </a:xfrm>
           <a:prstGeom prst="rect">
             <a:avLst/>
@@ -26156,9 +26207,9 @@
               </a:spcAft>
             </a:pPr>
             <a:r>
-              <a:rPr sz="580" b="0">
+              <a:rPr sz="620" b="0">
                 <a:solidFill>
-                  <a:srgbClr val="6E6A64"/>
+                  <a:srgbClr val="161616"/>
                 </a:solidFill>
                 <a:latin typeface="Helvetica Neue"/>
               </a:rPr>
@@ -26175,8 +26226,8 @@
         </p:nvSpPr>
         <p:spPr>
           <a:xfrm>
-            <a:off x="10907942" y="2903089"/>
-            <a:ext cx="614411" cy="155709"/>
+            <a:off x="10907942" y="3247948"/>
+            <a:ext cx="614411" cy="124358"/>
           </a:xfrm>
           <a:prstGeom prst="rect">
             <a:avLst/>
@@ -26219,8 +26270,8 @@
         </p:nvSpPr>
         <p:spPr>
           <a:xfrm>
-            <a:off x="10896970" y="2892116"/>
-            <a:ext cx="636357" cy="177654"/>
+            <a:off x="10896970" y="3236975"/>
+            <a:ext cx="636357" cy="146304"/>
           </a:xfrm>
           <a:prstGeom prst="rect">
             <a:avLst/>
@@ -26245,7 +26296,7 @@
               </a:spcAft>
             </a:pPr>
             <a:r>
-              <a:rPr sz="580" b="0">
+              <a:rPr sz="620" b="0">
                 <a:solidFill>
                   <a:srgbClr val="FFFFFF"/>
                 </a:solidFill>
@@ -26264,8 +26315,8 @@
         </p:nvSpPr>
         <p:spPr>
           <a:xfrm>
-            <a:off x="704088" y="3069771"/>
-            <a:ext cx="1856231" cy="177654"/>
+            <a:off x="704088" y="3383279"/>
+            <a:ext cx="1856231" cy="146304"/>
           </a:xfrm>
           <a:prstGeom prst="rect">
             <a:avLst/>
@@ -26318,8 +26369,8 @@
         </p:nvSpPr>
         <p:spPr>
           <a:xfrm>
-            <a:off x="2635300" y="3080744"/>
-            <a:ext cx="614411" cy="155709"/>
+            <a:off x="2635300" y="3394252"/>
+            <a:ext cx="614411" cy="124358"/>
           </a:xfrm>
           <a:prstGeom prst="rect">
             <a:avLst/>
@@ -26362,8 +26413,8 @@
         </p:nvSpPr>
         <p:spPr>
           <a:xfrm>
-            <a:off x="2624328" y="3069771"/>
-            <a:ext cx="636357" cy="177654"/>
+            <a:off x="2624328" y="3383279"/>
+            <a:ext cx="636357" cy="146304"/>
           </a:xfrm>
           <a:prstGeom prst="rect">
             <a:avLst/>
@@ -26388,9 +26439,9 @@
               </a:spcAft>
             </a:pPr>
             <a:r>
-              <a:rPr sz="580" b="0">
+              <a:rPr sz="620" b="0">
                 <a:solidFill>
-                  <a:srgbClr val="6E6A64"/>
+                  <a:srgbClr val="161616"/>
                 </a:solidFill>
                 <a:latin typeface="Helvetica Neue"/>
               </a:rPr>
@@ -26407,8 +26458,8 @@
         </p:nvSpPr>
         <p:spPr>
           <a:xfrm>
-            <a:off x="3271657" y="3080744"/>
-            <a:ext cx="614411" cy="155709"/>
+            <a:off x="3271657" y="3394252"/>
+            <a:ext cx="614411" cy="124358"/>
           </a:xfrm>
           <a:prstGeom prst="rect">
             <a:avLst/>
@@ -26451,8 +26502,8 @@
         </p:nvSpPr>
         <p:spPr>
           <a:xfrm>
-            <a:off x="3260685" y="3069771"/>
-            <a:ext cx="636357" cy="177654"/>
+            <a:off x="3260685" y="3383279"/>
+            <a:ext cx="636357" cy="146304"/>
           </a:xfrm>
           <a:prstGeom prst="rect">
             <a:avLst/>
@@ -26477,9 +26528,9 @@
               </a:spcAft>
             </a:pPr>
             <a:r>
-              <a:rPr sz="580" b="0">
+              <a:rPr sz="620" b="0">
                 <a:solidFill>
-                  <a:srgbClr val="6E6A64"/>
+                  <a:srgbClr val="161616"/>
                 </a:solidFill>
                 <a:latin typeface="Helvetica Neue"/>
               </a:rPr>
@@ -26496,8 +26547,8 @@
         </p:nvSpPr>
         <p:spPr>
           <a:xfrm>
-            <a:off x="3908014" y="3080744"/>
-            <a:ext cx="614411" cy="155709"/>
+            <a:off x="3908014" y="3394252"/>
+            <a:ext cx="614411" cy="124358"/>
           </a:xfrm>
           <a:prstGeom prst="rect">
             <a:avLst/>
@@ -26540,8 +26591,8 @@
         </p:nvSpPr>
         <p:spPr>
           <a:xfrm>
-            <a:off x="3897042" y="3069771"/>
-            <a:ext cx="636357" cy="177654"/>
+            <a:off x="3897042" y="3383279"/>
+            <a:ext cx="636357" cy="146304"/>
           </a:xfrm>
           <a:prstGeom prst="rect">
             <a:avLst/>
@@ -26566,9 +26617,9 @@
               </a:spcAft>
             </a:pPr>
             <a:r>
-              <a:rPr sz="580" b="0">
+              <a:rPr sz="620" b="0">
                 <a:solidFill>
-                  <a:srgbClr val="6E6A64"/>
+                  <a:srgbClr val="161616"/>
                 </a:solidFill>
                 <a:latin typeface="Helvetica Neue"/>
               </a:rPr>
@@ -26585,8 +26636,8 @@
         </p:nvSpPr>
         <p:spPr>
           <a:xfrm>
-            <a:off x="4544372" y="3080744"/>
-            <a:ext cx="614411" cy="155709"/>
+            <a:off x="4544372" y="3394252"/>
+            <a:ext cx="614411" cy="124358"/>
           </a:xfrm>
           <a:prstGeom prst="rect">
             <a:avLst/>
@@ -26629,8 +26680,8 @@
         </p:nvSpPr>
         <p:spPr>
           <a:xfrm>
-            <a:off x="4533399" y="3069771"/>
-            <a:ext cx="636357" cy="177654"/>
+            <a:off x="4533399" y="3383279"/>
+            <a:ext cx="636357" cy="146304"/>
           </a:xfrm>
           <a:prstGeom prst="rect">
             <a:avLst/>
@@ -26655,9 +26706,9 @@
               </a:spcAft>
             </a:pPr>
             <a:r>
-              <a:rPr sz="580" b="0">
+              <a:rPr sz="620" b="0">
                 <a:solidFill>
-                  <a:srgbClr val="6E6A64"/>
+                  <a:srgbClr val="161616"/>
                 </a:solidFill>
                 <a:latin typeface="Helvetica Neue"/>
               </a:rPr>
@@ -26674,8 +26725,8 @@
         </p:nvSpPr>
         <p:spPr>
           <a:xfrm>
-            <a:off x="5180729" y="3080744"/>
-            <a:ext cx="614411" cy="155709"/>
+            <a:off x="5180729" y="3394252"/>
+            <a:ext cx="614411" cy="124358"/>
           </a:xfrm>
           <a:prstGeom prst="rect">
             <a:avLst/>
@@ -26718,8 +26769,8 @@
         </p:nvSpPr>
         <p:spPr>
           <a:xfrm>
-            <a:off x="5817086" y="3080744"/>
-            <a:ext cx="614411" cy="155709"/>
+            <a:off x="5817086" y="3394252"/>
+            <a:ext cx="614411" cy="124358"/>
           </a:xfrm>
           <a:prstGeom prst="rect">
             <a:avLst/>
@@ -26762,8 +26813,8 @@
         </p:nvSpPr>
         <p:spPr>
           <a:xfrm>
-            <a:off x="5806113" y="3069771"/>
-            <a:ext cx="636357" cy="177654"/>
+            <a:off x="5806113" y="3383279"/>
+            <a:ext cx="636357" cy="146304"/>
           </a:xfrm>
           <a:prstGeom prst="rect">
             <a:avLst/>
@@ -26788,9 +26839,9 @@
               </a:spcAft>
             </a:pPr>
             <a:r>
-              <a:rPr sz="580" b="0">
+              <a:rPr sz="620" b="0">
                 <a:solidFill>
-                  <a:srgbClr val="6E6A64"/>
+                  <a:srgbClr val="161616"/>
                 </a:solidFill>
                 <a:latin typeface="Helvetica Neue"/>
               </a:rPr>
@@ -26807,8 +26858,8 @@
         </p:nvSpPr>
         <p:spPr>
           <a:xfrm>
-            <a:off x="6453443" y="3080744"/>
-            <a:ext cx="614411" cy="155709"/>
+            <a:off x="6453443" y="3394252"/>
+            <a:ext cx="614411" cy="124358"/>
           </a:xfrm>
           <a:prstGeom prst="rect">
             <a:avLst/>
@@ -26851,8 +26902,8 @@
         </p:nvSpPr>
         <p:spPr>
           <a:xfrm>
-            <a:off x="6442470" y="3069771"/>
-            <a:ext cx="636357" cy="177654"/>
+            <a:off x="6442470" y="3383279"/>
+            <a:ext cx="636357" cy="146304"/>
           </a:xfrm>
           <a:prstGeom prst="rect">
             <a:avLst/>
@@ -26877,9 +26928,9 @@
               </a:spcAft>
             </a:pPr>
             <a:r>
-              <a:rPr sz="580" b="0">
+              <a:rPr sz="620" b="0">
                 <a:solidFill>
-                  <a:srgbClr val="6E6A64"/>
+                  <a:srgbClr val="161616"/>
                 </a:solidFill>
                 <a:latin typeface="Helvetica Neue"/>
               </a:rPr>
@@ -26896,8 +26947,8 @@
         </p:nvSpPr>
         <p:spPr>
           <a:xfrm>
-            <a:off x="7089800" y="3080744"/>
-            <a:ext cx="614411" cy="155709"/>
+            <a:off x="7089800" y="3394252"/>
+            <a:ext cx="614411" cy="124358"/>
           </a:xfrm>
           <a:prstGeom prst="rect">
             <a:avLst/>
@@ -26940,8 +26991,8 @@
         </p:nvSpPr>
         <p:spPr>
           <a:xfrm>
-            <a:off x="7078827" y="3069771"/>
-            <a:ext cx="636357" cy="177654"/>
+            <a:off x="7078827" y="3383279"/>
+            <a:ext cx="636357" cy="146304"/>
           </a:xfrm>
           <a:prstGeom prst="rect">
             <a:avLst/>
@@ -26966,9 +27017,9 @@
               </a:spcAft>
             </a:pPr>
             <a:r>
-              <a:rPr sz="580" b="0">
+              <a:rPr sz="620" b="0">
                 <a:solidFill>
-                  <a:srgbClr val="6E6A64"/>
+                  <a:srgbClr val="161616"/>
                 </a:solidFill>
                 <a:latin typeface="Helvetica Neue"/>
               </a:rPr>
@@ -26985,8 +27036,8 @@
         </p:nvSpPr>
         <p:spPr>
           <a:xfrm>
-            <a:off x="7726157" y="3080744"/>
-            <a:ext cx="614411" cy="155709"/>
+            <a:off x="7726157" y="3394252"/>
+            <a:ext cx="614411" cy="124358"/>
           </a:xfrm>
           <a:prstGeom prst="rect">
             <a:avLst/>
@@ -27029,8 +27080,8 @@
         </p:nvSpPr>
         <p:spPr>
           <a:xfrm>
-            <a:off x="7715184" y="3069771"/>
-            <a:ext cx="636357" cy="177654"/>
+            <a:off x="7715184" y="3383279"/>
+            <a:ext cx="636357" cy="146304"/>
           </a:xfrm>
           <a:prstGeom prst="rect">
             <a:avLst/>
@@ -27055,9 +27106,9 @@
               </a:spcAft>
             </a:pPr>
             <a:r>
-              <a:rPr sz="580" b="0">
+              <a:rPr sz="620" b="0">
                 <a:solidFill>
-                  <a:srgbClr val="6E6A64"/>
+                  <a:srgbClr val="161616"/>
                 </a:solidFill>
                 <a:latin typeface="Helvetica Neue"/>
               </a:rPr>
@@ -27074,8 +27125,8 @@
         </p:nvSpPr>
         <p:spPr>
           <a:xfrm>
-            <a:off x="8362514" y="3080744"/>
-            <a:ext cx="614411" cy="155709"/>
+            <a:off x="8362514" y="3394252"/>
+            <a:ext cx="614411" cy="124358"/>
           </a:xfrm>
           <a:prstGeom prst="rect">
             <a:avLst/>
@@ -27118,8 +27169,8 @@
         </p:nvSpPr>
         <p:spPr>
           <a:xfrm>
-            <a:off x="8351541" y="3069771"/>
-            <a:ext cx="636357" cy="177654"/>
+            <a:off x="8351541" y="3383279"/>
+            <a:ext cx="636357" cy="146304"/>
           </a:xfrm>
           <a:prstGeom prst="rect">
             <a:avLst/>
@@ -27144,9 +27195,9 @@
               </a:spcAft>
             </a:pPr>
             <a:r>
-              <a:rPr sz="580" b="0">
+              <a:rPr sz="620" b="0">
                 <a:solidFill>
-                  <a:srgbClr val="6E6A64"/>
+                  <a:srgbClr val="161616"/>
                 </a:solidFill>
                 <a:latin typeface="Helvetica Neue"/>
               </a:rPr>
@@ -27163,8 +27214,8 @@
         </p:nvSpPr>
         <p:spPr>
           <a:xfrm>
-            <a:off x="8998871" y="3080744"/>
-            <a:ext cx="614411" cy="155709"/>
+            <a:off x="8998871" y="3394252"/>
+            <a:ext cx="614411" cy="124358"/>
           </a:xfrm>
           <a:prstGeom prst="rect">
             <a:avLst/>
@@ -27207,8 +27258,8 @@
         </p:nvSpPr>
         <p:spPr>
           <a:xfrm>
-            <a:off x="8987898" y="3069771"/>
-            <a:ext cx="636357" cy="177654"/>
+            <a:off x="8987898" y="3383279"/>
+            <a:ext cx="636357" cy="146304"/>
           </a:xfrm>
           <a:prstGeom prst="rect">
             <a:avLst/>
@@ -27233,9 +27284,9 @@
               </a:spcAft>
             </a:pPr>
             <a:r>
-              <a:rPr sz="580" b="0">
+              <a:rPr sz="620" b="0">
                 <a:solidFill>
-                  <a:srgbClr val="6E6A64"/>
+                  <a:srgbClr val="161616"/>
                 </a:solidFill>
                 <a:latin typeface="Helvetica Neue"/>
               </a:rPr>
@@ -27252,8 +27303,8 @@
         </p:nvSpPr>
         <p:spPr>
           <a:xfrm>
-            <a:off x="9635228" y="3080744"/>
-            <a:ext cx="614411" cy="155709"/>
+            <a:off x="9635228" y="3394252"/>
+            <a:ext cx="614411" cy="124358"/>
           </a:xfrm>
           <a:prstGeom prst="rect">
             <a:avLst/>
@@ -27296,8 +27347,8 @@
         </p:nvSpPr>
         <p:spPr>
           <a:xfrm>
-            <a:off x="9624255" y="3069771"/>
-            <a:ext cx="636357" cy="177654"/>
+            <a:off x="9624255" y="3383279"/>
+            <a:ext cx="636357" cy="146304"/>
           </a:xfrm>
           <a:prstGeom prst="rect">
             <a:avLst/>
@@ -27322,9 +27373,9 @@
               </a:spcAft>
             </a:pPr>
             <a:r>
-              <a:rPr sz="580" b="0">
+              <a:rPr sz="620" b="0">
                 <a:solidFill>
-                  <a:srgbClr val="6E6A64"/>
+                  <a:srgbClr val="161616"/>
                 </a:solidFill>
                 <a:latin typeface="Helvetica Neue"/>
               </a:rPr>
@@ -27341,8 +27392,8 @@
         </p:nvSpPr>
         <p:spPr>
           <a:xfrm>
-            <a:off x="10271585" y="3080744"/>
-            <a:ext cx="614411" cy="155709"/>
+            <a:off x="10271585" y="3394252"/>
+            <a:ext cx="614411" cy="124358"/>
           </a:xfrm>
           <a:prstGeom prst="rect">
             <a:avLst/>
@@ -27385,8 +27436,8 @@
         </p:nvSpPr>
         <p:spPr>
           <a:xfrm>
-            <a:off x="10260613" y="3069771"/>
-            <a:ext cx="636357" cy="177654"/>
+            <a:off x="10260613" y="3383279"/>
+            <a:ext cx="636357" cy="146304"/>
           </a:xfrm>
           <a:prstGeom prst="rect">
             <a:avLst/>
@@ -27411,9 +27462,9 @@
               </a:spcAft>
             </a:pPr>
             <a:r>
-              <a:rPr sz="580" b="0">
+              <a:rPr sz="620" b="0">
                 <a:solidFill>
-                  <a:srgbClr val="6E6A64"/>
+                  <a:srgbClr val="161616"/>
                 </a:solidFill>
                 <a:latin typeface="Helvetica Neue"/>
               </a:rPr>
@@ -27430,8 +27481,8 @@
         </p:nvSpPr>
         <p:spPr>
           <a:xfrm>
-            <a:off x="10907942" y="3080744"/>
-            <a:ext cx="614411" cy="155709"/>
+            <a:off x="10907942" y="3394252"/>
+            <a:ext cx="614411" cy="124358"/>
           </a:xfrm>
           <a:prstGeom prst="rect">
             <a:avLst/>
@@ -27474,8 +27525,8 @@
         </p:nvSpPr>
         <p:spPr>
           <a:xfrm>
-            <a:off x="10896970" y="3069771"/>
-            <a:ext cx="636357" cy="177654"/>
+            <a:off x="10896970" y="3383279"/>
+            <a:ext cx="636357" cy="146304"/>
           </a:xfrm>
           <a:prstGeom prst="rect">
             <a:avLst/>
@@ -27500,7 +27551,7 @@
               </a:spcAft>
             </a:pPr>
             <a:r>
-              <a:rPr sz="580" b="0">
+              <a:rPr sz="620" b="0">
                 <a:solidFill>
                   <a:srgbClr val="FFFFFF"/>
                 </a:solidFill>
@@ -27519,8 +27570,8 @@
         </p:nvSpPr>
         <p:spPr>
           <a:xfrm>
-            <a:off x="704088" y="3247426"/>
-            <a:ext cx="1856231" cy="177654"/>
+            <a:off x="704088" y="3529583"/>
+            <a:ext cx="1856231" cy="146304"/>
           </a:xfrm>
           <a:prstGeom prst="rect">
             <a:avLst/>
@@ -27573,8 +27624,8 @@
         </p:nvSpPr>
         <p:spPr>
           <a:xfrm>
-            <a:off x="2635300" y="3258399"/>
-            <a:ext cx="614411" cy="155709"/>
+            <a:off x="2635300" y="3540556"/>
+            <a:ext cx="614411" cy="124358"/>
           </a:xfrm>
           <a:prstGeom prst="rect">
             <a:avLst/>
@@ -27617,8 +27668,8 @@
         </p:nvSpPr>
         <p:spPr>
           <a:xfrm>
-            <a:off x="2624328" y="3247426"/>
-            <a:ext cx="636357" cy="177654"/>
+            <a:off x="2624328" y="3529583"/>
+            <a:ext cx="636357" cy="146304"/>
           </a:xfrm>
           <a:prstGeom prst="rect">
             <a:avLst/>
@@ -27643,9 +27694,9 @@
               </a:spcAft>
             </a:pPr>
             <a:r>
-              <a:rPr sz="580" b="0">
+              <a:rPr sz="620" b="0">
                 <a:solidFill>
-                  <a:srgbClr val="6E6A64"/>
+                  <a:srgbClr val="161616"/>
                 </a:solidFill>
                 <a:latin typeface="Helvetica Neue"/>
               </a:rPr>
@@ -27662,8 +27713,8 @@
         </p:nvSpPr>
         <p:spPr>
           <a:xfrm>
-            <a:off x="3271657" y="3258399"/>
-            <a:ext cx="614411" cy="155709"/>
+            <a:off x="3271657" y="3540556"/>
+            <a:ext cx="614411" cy="124358"/>
           </a:xfrm>
           <a:prstGeom prst="rect">
             <a:avLst/>
@@ -27706,8 +27757,8 @@
         </p:nvSpPr>
         <p:spPr>
           <a:xfrm>
-            <a:off x="3260685" y="3247426"/>
-            <a:ext cx="636357" cy="177654"/>
+            <a:off x="3260685" y="3529583"/>
+            <a:ext cx="636357" cy="146304"/>
           </a:xfrm>
           <a:prstGeom prst="rect">
             <a:avLst/>
@@ -27732,9 +27783,9 @@
               </a:spcAft>
             </a:pPr>
             <a:r>
-              <a:rPr sz="580" b="0">
+              <a:rPr sz="620" b="0">
                 <a:solidFill>
-                  <a:srgbClr val="6E6A64"/>
+                  <a:srgbClr val="161616"/>
                 </a:solidFill>
                 <a:latin typeface="Helvetica Neue"/>
               </a:rPr>
@@ -27751,8 +27802,8 @@
         </p:nvSpPr>
         <p:spPr>
           <a:xfrm>
-            <a:off x="3908014" y="3258399"/>
-            <a:ext cx="614411" cy="155709"/>
+            <a:off x="3908014" y="3540556"/>
+            <a:ext cx="614411" cy="124358"/>
           </a:xfrm>
           <a:prstGeom prst="rect">
             <a:avLst/>
@@ -27795,8 +27846,8 @@
         </p:nvSpPr>
         <p:spPr>
           <a:xfrm>
-            <a:off x="3897042" y="3247426"/>
-            <a:ext cx="636357" cy="177654"/>
+            <a:off x="3897042" y="3529583"/>
+            <a:ext cx="636357" cy="146304"/>
           </a:xfrm>
           <a:prstGeom prst="rect">
             <a:avLst/>
@@ -27821,9 +27872,9 @@
               </a:spcAft>
             </a:pPr>
             <a:r>
-              <a:rPr sz="580" b="0">
+              <a:rPr sz="620" b="0">
                 <a:solidFill>
-                  <a:srgbClr val="6E6A64"/>
+                  <a:srgbClr val="161616"/>
                 </a:solidFill>
                 <a:latin typeface="Helvetica Neue"/>
               </a:rPr>
@@ -27840,8 +27891,8 @@
         </p:nvSpPr>
         <p:spPr>
           <a:xfrm>
-            <a:off x="4544372" y="3258399"/>
-            <a:ext cx="614411" cy="155709"/>
+            <a:off x="4544372" y="3540556"/>
+            <a:ext cx="614411" cy="124358"/>
           </a:xfrm>
           <a:prstGeom prst="rect">
             <a:avLst/>
@@ -27884,8 +27935,8 @@
         </p:nvSpPr>
         <p:spPr>
           <a:xfrm>
-            <a:off x="4533399" y="3247426"/>
-            <a:ext cx="636357" cy="177654"/>
+            <a:off x="4533399" y="3529583"/>
+            <a:ext cx="636357" cy="146304"/>
           </a:xfrm>
           <a:prstGeom prst="rect">
             <a:avLst/>
@@ -27910,9 +27961,9 @@
               </a:spcAft>
             </a:pPr>
             <a:r>
-              <a:rPr sz="580" b="0">
+              <a:rPr sz="620" b="0">
                 <a:solidFill>
-                  <a:srgbClr val="6E6A64"/>
+                  <a:srgbClr val="161616"/>
                 </a:solidFill>
                 <a:latin typeface="Helvetica Neue"/>
               </a:rPr>
@@ -27929,8 +27980,8 @@
         </p:nvSpPr>
         <p:spPr>
           <a:xfrm>
-            <a:off x="5180729" y="3258399"/>
-            <a:ext cx="614411" cy="155709"/>
+            <a:off x="5180729" y="3540556"/>
+            <a:ext cx="614411" cy="124358"/>
           </a:xfrm>
           <a:prstGeom prst="rect">
             <a:avLst/>
@@ -27973,8 +28024,8 @@
         </p:nvSpPr>
         <p:spPr>
           <a:xfrm>
-            <a:off x="5169756" y="3247426"/>
-            <a:ext cx="636357" cy="177654"/>
+            <a:off x="5169756" y="3529583"/>
+            <a:ext cx="636357" cy="146304"/>
           </a:xfrm>
           <a:prstGeom prst="rect">
             <a:avLst/>
@@ -27999,9 +28050,9 @@
               </a:spcAft>
             </a:pPr>
             <a:r>
-              <a:rPr sz="580" b="0">
+              <a:rPr sz="620" b="0">
                 <a:solidFill>
-                  <a:srgbClr val="6E6A64"/>
+                  <a:srgbClr val="161616"/>
                 </a:solidFill>
                 <a:latin typeface="Helvetica Neue"/>
               </a:rPr>
@@ -28018,8 +28069,8 @@
         </p:nvSpPr>
         <p:spPr>
           <a:xfrm>
-            <a:off x="5817086" y="3258399"/>
-            <a:ext cx="614411" cy="155709"/>
+            <a:off x="5817086" y="3540556"/>
+            <a:ext cx="614411" cy="124358"/>
           </a:xfrm>
           <a:prstGeom prst="rect">
             <a:avLst/>
@@ -28062,8 +28113,8 @@
         </p:nvSpPr>
         <p:spPr>
           <a:xfrm>
-            <a:off x="6453443" y="3258399"/>
-            <a:ext cx="614411" cy="155709"/>
+            <a:off x="6453443" y="3540556"/>
+            <a:ext cx="614411" cy="124358"/>
           </a:xfrm>
           <a:prstGeom prst="rect">
             <a:avLst/>
@@ -28106,8 +28157,8 @@
         </p:nvSpPr>
         <p:spPr>
           <a:xfrm>
-            <a:off x="6442470" y="3247426"/>
-            <a:ext cx="636357" cy="177654"/>
+            <a:off x="6442470" y="3529583"/>
+            <a:ext cx="636357" cy="146304"/>
           </a:xfrm>
           <a:prstGeom prst="rect">
             <a:avLst/>
@@ -28132,9 +28183,9 @@
               </a:spcAft>
             </a:pPr>
             <a:r>
-              <a:rPr sz="580" b="0">
+              <a:rPr sz="620" b="0">
                 <a:solidFill>
-                  <a:srgbClr val="6E6A64"/>
+                  <a:srgbClr val="161616"/>
                 </a:solidFill>
                 <a:latin typeface="Helvetica Neue"/>
               </a:rPr>
@@ -28151,8 +28202,8 @@
         </p:nvSpPr>
         <p:spPr>
           <a:xfrm>
-            <a:off x="7089800" y="3258399"/>
-            <a:ext cx="614411" cy="155709"/>
+            <a:off x="7089800" y="3540556"/>
+            <a:ext cx="614411" cy="124358"/>
           </a:xfrm>
           <a:prstGeom prst="rect">
             <a:avLst/>
@@ -28195,8 +28246,8 @@
         </p:nvSpPr>
         <p:spPr>
           <a:xfrm>
-            <a:off x="7078827" y="3247426"/>
-            <a:ext cx="636357" cy="177654"/>
+            <a:off x="7078827" y="3529583"/>
+            <a:ext cx="636357" cy="146304"/>
           </a:xfrm>
           <a:prstGeom prst="rect">
             <a:avLst/>
@@ -28221,9 +28272,9 @@
               </a:spcAft>
             </a:pPr>
             <a:r>
-              <a:rPr sz="580" b="0">
+              <a:rPr sz="620" b="0">
                 <a:solidFill>
-                  <a:srgbClr val="6E6A64"/>
+                  <a:srgbClr val="161616"/>
                 </a:solidFill>
                 <a:latin typeface="Helvetica Neue"/>
               </a:rPr>
@@ -28240,8 +28291,8 @@
         </p:nvSpPr>
         <p:spPr>
           <a:xfrm>
-            <a:off x="7726157" y="3258399"/>
-            <a:ext cx="614411" cy="155709"/>
+            <a:off x="7726157" y="3540556"/>
+            <a:ext cx="614411" cy="124358"/>
           </a:xfrm>
           <a:prstGeom prst="rect">
             <a:avLst/>
@@ -28284,8 +28335,8 @@
         </p:nvSpPr>
         <p:spPr>
           <a:xfrm>
-            <a:off x="7715184" y="3247426"/>
-            <a:ext cx="636357" cy="177654"/>
+            <a:off x="7715184" y="3529583"/>
+            <a:ext cx="636357" cy="146304"/>
           </a:xfrm>
           <a:prstGeom prst="rect">
             <a:avLst/>
@@ -28310,9 +28361,9 @@
               </a:spcAft>
             </a:pPr>
             <a:r>
-              <a:rPr sz="580" b="0">
+              <a:rPr sz="620" b="0">
                 <a:solidFill>
-                  <a:srgbClr val="6E6A64"/>
+                  <a:srgbClr val="161616"/>
                 </a:solidFill>
                 <a:latin typeface="Helvetica Neue"/>
               </a:rPr>
@@ -28329,8 +28380,8 @@
         </p:nvSpPr>
         <p:spPr>
           <a:xfrm>
-            <a:off x="8362514" y="3258399"/>
-            <a:ext cx="614411" cy="155709"/>
+            <a:off x="8362514" y="3540556"/>
+            <a:ext cx="614411" cy="124358"/>
           </a:xfrm>
           <a:prstGeom prst="rect">
             <a:avLst/>
@@ -28373,8 +28424,8 @@
         </p:nvSpPr>
         <p:spPr>
           <a:xfrm>
-            <a:off x="8351541" y="3247426"/>
-            <a:ext cx="636357" cy="177654"/>
+            <a:off x="8351541" y="3529583"/>
+            <a:ext cx="636357" cy="146304"/>
           </a:xfrm>
           <a:prstGeom prst="rect">
             <a:avLst/>
@@ -28399,9 +28450,9 @@
               </a:spcAft>
             </a:pPr>
             <a:r>
-              <a:rPr sz="580" b="0">
+              <a:rPr sz="620" b="0">
                 <a:solidFill>
-                  <a:srgbClr val="6E6A64"/>
+                  <a:srgbClr val="161616"/>
                 </a:solidFill>
                 <a:latin typeface="Helvetica Neue"/>
               </a:rPr>
@@ -28418,8 +28469,8 @@
         </p:nvSpPr>
         <p:spPr>
           <a:xfrm>
-            <a:off x="8998871" y="3258399"/>
-            <a:ext cx="614411" cy="155709"/>
+            <a:off x="8998871" y="3540556"/>
+            <a:ext cx="614411" cy="124358"/>
           </a:xfrm>
           <a:prstGeom prst="rect">
             <a:avLst/>
@@ -28462,8 +28513,8 @@
         </p:nvSpPr>
         <p:spPr>
           <a:xfrm>
-            <a:off x="8987898" y="3247426"/>
-            <a:ext cx="636357" cy="177654"/>
+            <a:off x="8987898" y="3529583"/>
+            <a:ext cx="636357" cy="146304"/>
           </a:xfrm>
           <a:prstGeom prst="rect">
             <a:avLst/>
@@ -28488,9 +28539,9 @@
               </a:spcAft>
             </a:pPr>
             <a:r>
-              <a:rPr sz="580" b="0">
+              <a:rPr sz="620" b="0">
                 <a:solidFill>
-                  <a:srgbClr val="6E6A64"/>
+                  <a:srgbClr val="161616"/>
                 </a:solidFill>
                 <a:latin typeface="Helvetica Neue"/>
               </a:rPr>
@@ -28507,8 +28558,8 @@
         </p:nvSpPr>
         <p:spPr>
           <a:xfrm>
-            <a:off x="9635228" y="3258399"/>
-            <a:ext cx="614411" cy="155709"/>
+            <a:off x="9635228" y="3540556"/>
+            <a:ext cx="614411" cy="124358"/>
           </a:xfrm>
           <a:prstGeom prst="rect">
             <a:avLst/>
@@ -28551,8 +28602,8 @@
         </p:nvSpPr>
         <p:spPr>
           <a:xfrm>
-            <a:off x="9624255" y="3247426"/>
-            <a:ext cx="636357" cy="177654"/>
+            <a:off x="9624255" y="3529583"/>
+            <a:ext cx="636357" cy="146304"/>
           </a:xfrm>
           <a:prstGeom prst="rect">
             <a:avLst/>
@@ -28577,9 +28628,9 @@
               </a:spcAft>
             </a:pPr>
             <a:r>
-              <a:rPr sz="580" b="0">
+              <a:rPr sz="620" b="0">
                 <a:solidFill>
-                  <a:srgbClr val="6E6A64"/>
+                  <a:srgbClr val="161616"/>
                 </a:solidFill>
                 <a:latin typeface="Helvetica Neue"/>
               </a:rPr>
@@ -28596,8 +28647,8 @@
         </p:nvSpPr>
         <p:spPr>
           <a:xfrm>
-            <a:off x="10271585" y="3258399"/>
-            <a:ext cx="614411" cy="155709"/>
+            <a:off x="10271585" y="3540556"/>
+            <a:ext cx="614411" cy="124358"/>
           </a:xfrm>
           <a:prstGeom prst="rect">
             <a:avLst/>
@@ -28640,8 +28691,8 @@
         </p:nvSpPr>
         <p:spPr>
           <a:xfrm>
-            <a:off x="10260613" y="3247426"/>
-            <a:ext cx="636357" cy="177654"/>
+            <a:off x="10260613" y="3529583"/>
+            <a:ext cx="636357" cy="146304"/>
           </a:xfrm>
           <a:prstGeom prst="rect">
             <a:avLst/>
@@ -28666,9 +28717,9 @@
               </a:spcAft>
             </a:pPr>
             <a:r>
-              <a:rPr sz="580" b="0">
+              <a:rPr sz="620" b="0">
                 <a:solidFill>
-                  <a:srgbClr val="6E6A64"/>
+                  <a:srgbClr val="161616"/>
                 </a:solidFill>
                 <a:latin typeface="Helvetica Neue"/>
               </a:rPr>
@@ -28685,8 +28736,8 @@
         </p:nvSpPr>
         <p:spPr>
           <a:xfrm>
-            <a:off x="10907942" y="3258399"/>
-            <a:ext cx="614411" cy="155709"/>
+            <a:off x="10907942" y="3540556"/>
+            <a:ext cx="614411" cy="124358"/>
           </a:xfrm>
           <a:prstGeom prst="rect">
             <a:avLst/>
@@ -28729,8 +28780,8 @@
         </p:nvSpPr>
         <p:spPr>
           <a:xfrm>
-            <a:off x="10896970" y="3247426"/>
-            <a:ext cx="636357" cy="177654"/>
+            <a:off x="10896970" y="3529583"/>
+            <a:ext cx="636357" cy="146304"/>
           </a:xfrm>
           <a:prstGeom prst="rect">
             <a:avLst/>
@@ -28755,7 +28806,7 @@
               </a:spcAft>
             </a:pPr>
             <a:r>
-              <a:rPr sz="580" b="0">
+              <a:rPr sz="620" b="0">
                 <a:solidFill>
                   <a:srgbClr val="FFFFFF"/>
                 </a:solidFill>
@@ -28774,8 +28825,8 @@
         </p:nvSpPr>
         <p:spPr>
           <a:xfrm>
-            <a:off x="704088" y="3425081"/>
-            <a:ext cx="1856231" cy="177654"/>
+            <a:off x="704088" y="3675887"/>
+            <a:ext cx="1856231" cy="146304"/>
           </a:xfrm>
           <a:prstGeom prst="rect">
             <a:avLst/>
@@ -28828,8 +28879,8 @@
         </p:nvSpPr>
         <p:spPr>
           <a:xfrm>
-            <a:off x="2635300" y="3436053"/>
-            <a:ext cx="614411" cy="155709"/>
+            <a:off x="2635300" y="3686860"/>
+            <a:ext cx="614411" cy="124358"/>
           </a:xfrm>
           <a:prstGeom prst="rect">
             <a:avLst/>
@@ -28872,8 +28923,8 @@
         </p:nvSpPr>
         <p:spPr>
           <a:xfrm>
-            <a:off x="2624328" y="3425081"/>
-            <a:ext cx="636357" cy="177654"/>
+            <a:off x="2624328" y="3675887"/>
+            <a:ext cx="636357" cy="146304"/>
           </a:xfrm>
           <a:prstGeom prst="rect">
             <a:avLst/>
@@ -28898,9 +28949,9 @@
               </a:spcAft>
             </a:pPr>
             <a:r>
-              <a:rPr sz="580" b="0">
+              <a:rPr sz="620" b="0">
                 <a:solidFill>
-                  <a:srgbClr val="6E6A64"/>
+                  <a:srgbClr val="161616"/>
                 </a:solidFill>
                 <a:latin typeface="Helvetica Neue"/>
               </a:rPr>
@@ -28917,8 +28968,8 @@
         </p:nvSpPr>
         <p:spPr>
           <a:xfrm>
-            <a:off x="3271657" y="3436053"/>
-            <a:ext cx="614411" cy="155709"/>
+            <a:off x="3271657" y="3686860"/>
+            <a:ext cx="614411" cy="124358"/>
           </a:xfrm>
           <a:prstGeom prst="rect">
             <a:avLst/>
@@ -28961,8 +29012,8 @@
         </p:nvSpPr>
         <p:spPr>
           <a:xfrm>
-            <a:off x="3260685" y="3425081"/>
-            <a:ext cx="636357" cy="177654"/>
+            <a:off x="3260685" y="3675887"/>
+            <a:ext cx="636357" cy="146304"/>
           </a:xfrm>
           <a:prstGeom prst="rect">
             <a:avLst/>
@@ -28987,9 +29038,9 @@
               </a:spcAft>
             </a:pPr>
             <a:r>
-              <a:rPr sz="580" b="0">
+              <a:rPr sz="620" b="0">
                 <a:solidFill>
-                  <a:srgbClr val="6E6A64"/>
+                  <a:srgbClr val="161616"/>
                 </a:solidFill>
                 <a:latin typeface="Helvetica Neue"/>
               </a:rPr>
@@ -29006,8 +29057,8 @@
         </p:nvSpPr>
         <p:spPr>
           <a:xfrm>
-            <a:off x="3908014" y="3436053"/>
-            <a:ext cx="614411" cy="155709"/>
+            <a:off x="3908014" y="3686860"/>
+            <a:ext cx="614411" cy="124358"/>
           </a:xfrm>
           <a:prstGeom prst="rect">
             <a:avLst/>
@@ -29050,8 +29101,8 @@
         </p:nvSpPr>
         <p:spPr>
           <a:xfrm>
-            <a:off x="3897042" y="3425081"/>
-            <a:ext cx="636357" cy="177654"/>
+            <a:off x="3897042" y="3675887"/>
+            <a:ext cx="636357" cy="146304"/>
           </a:xfrm>
           <a:prstGeom prst="rect">
             <a:avLst/>
@@ -29076,9 +29127,9 @@
               </a:spcAft>
             </a:pPr>
             <a:r>
-              <a:rPr sz="580" b="0">
+              <a:rPr sz="620" b="0">
                 <a:solidFill>
-                  <a:srgbClr val="6E6A64"/>
+                  <a:srgbClr val="161616"/>
                 </a:solidFill>
                 <a:latin typeface="Helvetica Neue"/>
               </a:rPr>
@@ -29095,8 +29146,8 @@
         </p:nvSpPr>
         <p:spPr>
           <a:xfrm>
-            <a:off x="4544372" y="3436053"/>
-            <a:ext cx="614411" cy="155709"/>
+            <a:off x="4544372" y="3686860"/>
+            <a:ext cx="614411" cy="124358"/>
           </a:xfrm>
           <a:prstGeom prst="rect">
             <a:avLst/>
@@ -29139,8 +29190,8 @@
         </p:nvSpPr>
         <p:spPr>
           <a:xfrm>
-            <a:off x="4533399" y="3425081"/>
-            <a:ext cx="636357" cy="177654"/>
+            <a:off x="4533399" y="3675887"/>
+            <a:ext cx="636357" cy="146304"/>
           </a:xfrm>
           <a:prstGeom prst="rect">
             <a:avLst/>
@@ -29165,9 +29216,9 @@
               </a:spcAft>
             </a:pPr>
             <a:r>
-              <a:rPr sz="580" b="0">
+              <a:rPr sz="620" b="0">
                 <a:solidFill>
-                  <a:srgbClr val="6E6A64"/>
+                  <a:srgbClr val="161616"/>
                 </a:solidFill>
                 <a:latin typeface="Helvetica Neue"/>
               </a:rPr>
@@ -29184,8 +29235,8 @@
         </p:nvSpPr>
         <p:spPr>
           <a:xfrm>
-            <a:off x="5180729" y="3436053"/>
-            <a:ext cx="614411" cy="155709"/>
+            <a:off x="5180729" y="3686860"/>
+            <a:ext cx="614411" cy="124358"/>
           </a:xfrm>
           <a:prstGeom prst="rect">
             <a:avLst/>
@@ -29228,8 +29279,8 @@
         </p:nvSpPr>
         <p:spPr>
           <a:xfrm>
-            <a:off x="5169756" y="3425081"/>
-            <a:ext cx="636357" cy="177654"/>
+            <a:off x="5169756" y="3675887"/>
+            <a:ext cx="636357" cy="146304"/>
           </a:xfrm>
           <a:prstGeom prst="rect">
             <a:avLst/>
@@ -29254,9 +29305,9 @@
               </a:spcAft>
             </a:pPr>
             <a:r>
-              <a:rPr sz="580" b="0">
+              <a:rPr sz="620" b="0">
                 <a:solidFill>
-                  <a:srgbClr val="6E6A64"/>
+                  <a:srgbClr val="161616"/>
                 </a:solidFill>
                 <a:latin typeface="Helvetica Neue"/>
               </a:rPr>
@@ -29273,8 +29324,8 @@
         </p:nvSpPr>
         <p:spPr>
           <a:xfrm>
-            <a:off x="5817086" y="3436053"/>
-            <a:ext cx="614411" cy="155709"/>
+            <a:off x="5817086" y="3686860"/>
+            <a:ext cx="614411" cy="124358"/>
           </a:xfrm>
           <a:prstGeom prst="rect">
             <a:avLst/>
@@ -29317,8 +29368,8 @@
         </p:nvSpPr>
         <p:spPr>
           <a:xfrm>
-            <a:off x="5806113" y="3425081"/>
-            <a:ext cx="636357" cy="177654"/>
+            <a:off x="5806113" y="3675887"/>
+            <a:ext cx="636357" cy="146304"/>
           </a:xfrm>
           <a:prstGeom prst="rect">
             <a:avLst/>
@@ -29343,9 +29394,9 @@
               </a:spcAft>
             </a:pPr>
             <a:r>
-              <a:rPr sz="580" b="0">
+              <a:rPr sz="620" b="0">
                 <a:solidFill>
-                  <a:srgbClr val="6E6A64"/>
+                  <a:srgbClr val="161616"/>
                 </a:solidFill>
                 <a:latin typeface="Helvetica Neue"/>
               </a:rPr>
@@ -29362,8 +29413,8 @@
         </p:nvSpPr>
         <p:spPr>
           <a:xfrm>
-            <a:off x="6453443" y="3436053"/>
-            <a:ext cx="614411" cy="155709"/>
+            <a:off x="6453443" y="3686860"/>
+            <a:ext cx="614411" cy="124358"/>
           </a:xfrm>
           <a:prstGeom prst="rect">
             <a:avLst/>
@@ -29406,8 +29457,8 @@
         </p:nvSpPr>
         <p:spPr>
           <a:xfrm>
-            <a:off x="7089800" y="3436053"/>
-            <a:ext cx="614411" cy="155709"/>
+            <a:off x="7089800" y="3686860"/>
+            <a:ext cx="614411" cy="124358"/>
           </a:xfrm>
           <a:prstGeom prst="rect">
             <a:avLst/>
@@ -29450,8 +29501,8 @@
         </p:nvSpPr>
         <p:spPr>
           <a:xfrm>
-            <a:off x="7078827" y="3425081"/>
-            <a:ext cx="636357" cy="177654"/>
+            <a:off x="7078827" y="3675887"/>
+            <a:ext cx="636357" cy="146304"/>
           </a:xfrm>
           <a:prstGeom prst="rect">
             <a:avLst/>
@@ -29476,9 +29527,9 @@
               </a:spcAft>
             </a:pPr>
             <a:r>
-              <a:rPr sz="580" b="0">
+              <a:rPr sz="620" b="0">
                 <a:solidFill>
-                  <a:srgbClr val="6E6A64"/>
+                  <a:srgbClr val="161616"/>
                 </a:solidFill>
                 <a:latin typeface="Helvetica Neue"/>
               </a:rPr>
@@ -29495,8 +29546,8 @@
         </p:nvSpPr>
         <p:spPr>
           <a:xfrm>
-            <a:off x="7726157" y="3436053"/>
-            <a:ext cx="614411" cy="155709"/>
+            <a:off x="7726157" y="3686860"/>
+            <a:ext cx="614411" cy="124358"/>
           </a:xfrm>
           <a:prstGeom prst="rect">
             <a:avLst/>
@@ -29539,8 +29590,8 @@
         </p:nvSpPr>
         <p:spPr>
           <a:xfrm>
-            <a:off x="7715184" y="3425081"/>
-            <a:ext cx="636357" cy="177654"/>
+            <a:off x="7715184" y="3675887"/>
+            <a:ext cx="636357" cy="146304"/>
           </a:xfrm>
           <a:prstGeom prst="rect">
             <a:avLst/>
@@ -29565,9 +29616,9 @@
               </a:spcAft>
             </a:pPr>
             <a:r>
-              <a:rPr sz="580" b="0">
+              <a:rPr sz="620" b="0">
                 <a:solidFill>
-                  <a:srgbClr val="6E6A64"/>
+                  <a:srgbClr val="161616"/>
                 </a:solidFill>
                 <a:latin typeface="Helvetica Neue"/>
               </a:rPr>
@@ -29584,8 +29635,8 @@
         </p:nvSpPr>
         <p:spPr>
           <a:xfrm>
-            <a:off x="8362514" y="3436053"/>
-            <a:ext cx="614411" cy="155709"/>
+            <a:off x="8362514" y="3686860"/>
+            <a:ext cx="614411" cy="124358"/>
           </a:xfrm>
           <a:prstGeom prst="rect">
             <a:avLst/>
@@ -29628,8 +29679,8 @@
         </p:nvSpPr>
         <p:spPr>
           <a:xfrm>
-            <a:off x="8351541" y="3425081"/>
-            <a:ext cx="636357" cy="177654"/>
+            <a:off x="8351541" y="3675887"/>
+            <a:ext cx="636357" cy="146304"/>
           </a:xfrm>
           <a:prstGeom prst="rect">
             <a:avLst/>
@@ -29654,9 +29705,9 @@
               </a:spcAft>
             </a:pPr>
             <a:r>
-              <a:rPr sz="580" b="0">
+              <a:rPr sz="620" b="0">
                 <a:solidFill>
-                  <a:srgbClr val="6E6A64"/>
+                  <a:srgbClr val="161616"/>
                 </a:solidFill>
                 <a:latin typeface="Helvetica Neue"/>
               </a:rPr>
@@ -29673,8 +29724,8 @@
         </p:nvSpPr>
         <p:spPr>
           <a:xfrm>
-            <a:off x="8998871" y="3436053"/>
-            <a:ext cx="614411" cy="155709"/>
+            <a:off x="8998871" y="3686860"/>
+            <a:ext cx="614411" cy="124358"/>
           </a:xfrm>
           <a:prstGeom prst="rect">
             <a:avLst/>
@@ -29717,8 +29768,8 @@
         </p:nvSpPr>
         <p:spPr>
           <a:xfrm>
-            <a:off x="8987898" y="3425081"/>
-            <a:ext cx="636357" cy="177654"/>
+            <a:off x="8987898" y="3675887"/>
+            <a:ext cx="636357" cy="146304"/>
           </a:xfrm>
           <a:prstGeom prst="rect">
             <a:avLst/>
@@ -29743,9 +29794,9 @@
               </a:spcAft>
             </a:pPr>
             <a:r>
-              <a:rPr sz="580" b="0">
+              <a:rPr sz="620" b="0">
                 <a:solidFill>
-                  <a:srgbClr val="6E6A64"/>
+                  <a:srgbClr val="161616"/>
                 </a:solidFill>
                 <a:latin typeface="Helvetica Neue"/>
               </a:rPr>
@@ -29762,8 +29813,8 @@
         </p:nvSpPr>
         <p:spPr>
           <a:xfrm>
-            <a:off x="9635228" y="3436053"/>
-            <a:ext cx="614411" cy="155709"/>
+            <a:off x="9635228" y="3686860"/>
+            <a:ext cx="614411" cy="124358"/>
           </a:xfrm>
           <a:prstGeom prst="rect">
             <a:avLst/>
@@ -29806,8 +29857,8 @@
         </p:nvSpPr>
         <p:spPr>
           <a:xfrm>
-            <a:off x="9624255" y="3425081"/>
-            <a:ext cx="636357" cy="177654"/>
+            <a:off x="9624255" y="3675887"/>
+            <a:ext cx="636357" cy="146304"/>
           </a:xfrm>
           <a:prstGeom prst="rect">
             <a:avLst/>
@@ -29832,9 +29883,9 @@
               </a:spcAft>
             </a:pPr>
             <a:r>
-              <a:rPr sz="580" b="0">
+              <a:rPr sz="620" b="0">
                 <a:solidFill>
-                  <a:srgbClr val="6E6A64"/>
+                  <a:srgbClr val="161616"/>
                 </a:solidFill>
                 <a:latin typeface="Helvetica Neue"/>
               </a:rPr>
@@ -29851,8 +29902,8 @@
         </p:nvSpPr>
         <p:spPr>
           <a:xfrm>
-            <a:off x="10271585" y="3436053"/>
-            <a:ext cx="614411" cy="155709"/>
+            <a:off x="10271585" y="3686860"/>
+            <a:ext cx="614411" cy="124358"/>
           </a:xfrm>
           <a:prstGeom prst="rect">
             <a:avLst/>
@@ -29895,8 +29946,8 @@
         </p:nvSpPr>
         <p:spPr>
           <a:xfrm>
-            <a:off x="10260613" y="3425081"/>
-            <a:ext cx="636357" cy="177654"/>
+            <a:off x="10260613" y="3675887"/>
+            <a:ext cx="636357" cy="146304"/>
           </a:xfrm>
           <a:prstGeom prst="rect">
             <a:avLst/>
@@ -29921,9 +29972,9 @@
               </a:spcAft>
             </a:pPr>
             <a:r>
-              <a:rPr sz="580" b="0">
+              <a:rPr sz="620" b="0">
                 <a:solidFill>
-                  <a:srgbClr val="6E6A64"/>
+                  <a:srgbClr val="161616"/>
                 </a:solidFill>
                 <a:latin typeface="Helvetica Neue"/>
               </a:rPr>
@@ -29940,8 +29991,8 @@
         </p:nvSpPr>
         <p:spPr>
           <a:xfrm>
-            <a:off x="10907942" y="3436053"/>
-            <a:ext cx="614411" cy="155709"/>
+            <a:off x="10907942" y="3686860"/>
+            <a:ext cx="614411" cy="124358"/>
           </a:xfrm>
           <a:prstGeom prst="rect">
             <a:avLst/>
@@ -29984,8 +30035,8 @@
         </p:nvSpPr>
         <p:spPr>
           <a:xfrm>
-            <a:off x="10896970" y="3425081"/>
-            <a:ext cx="636357" cy="177654"/>
+            <a:off x="10896970" y="3675887"/>
+            <a:ext cx="636357" cy="146304"/>
           </a:xfrm>
           <a:prstGeom prst="rect">
             <a:avLst/>
@@ -30010,7 +30061,7 @@
               </a:spcAft>
             </a:pPr>
             <a:r>
-              <a:rPr sz="580" b="0">
+              <a:rPr sz="620" b="0">
                 <a:solidFill>
                   <a:srgbClr val="FFFFFF"/>
                 </a:solidFill>
@@ -30029,8 +30080,8 @@
         </p:nvSpPr>
         <p:spPr>
           <a:xfrm>
-            <a:off x="704088" y="3602736"/>
-            <a:ext cx="1856231" cy="177654"/>
+            <a:off x="704088" y="3822191"/>
+            <a:ext cx="1856231" cy="146304"/>
           </a:xfrm>
           <a:prstGeom prst="rect">
             <a:avLst/>
@@ -30083,8 +30134,8 @@
         </p:nvSpPr>
         <p:spPr>
           <a:xfrm>
-            <a:off x="2635300" y="3613708"/>
-            <a:ext cx="614411" cy="155709"/>
+            <a:off x="2635300" y="3833164"/>
+            <a:ext cx="614411" cy="124358"/>
           </a:xfrm>
           <a:prstGeom prst="rect">
             <a:avLst/>
@@ -30127,8 +30178,8 @@
         </p:nvSpPr>
         <p:spPr>
           <a:xfrm>
-            <a:off x="2624328" y="3602736"/>
-            <a:ext cx="636357" cy="177654"/>
+            <a:off x="2624328" y="3822191"/>
+            <a:ext cx="636357" cy="146304"/>
           </a:xfrm>
           <a:prstGeom prst="rect">
             <a:avLst/>
@@ -30153,9 +30204,9 @@
               </a:spcAft>
             </a:pPr>
             <a:r>
-              <a:rPr sz="580" b="0">
+              <a:rPr sz="620" b="0">
                 <a:solidFill>
-                  <a:srgbClr val="6E6A64"/>
+                  <a:srgbClr val="161616"/>
                 </a:solidFill>
                 <a:latin typeface="Helvetica Neue"/>
               </a:rPr>
@@ -30172,8 +30223,8 @@
         </p:nvSpPr>
         <p:spPr>
           <a:xfrm>
-            <a:off x="3271657" y="3613708"/>
-            <a:ext cx="614411" cy="155709"/>
+            <a:off x="3271657" y="3833164"/>
+            <a:ext cx="614411" cy="124358"/>
           </a:xfrm>
           <a:prstGeom prst="rect">
             <a:avLst/>
@@ -30216,8 +30267,8 @@
         </p:nvSpPr>
         <p:spPr>
           <a:xfrm>
-            <a:off x="3260685" y="3602736"/>
-            <a:ext cx="636357" cy="177654"/>
+            <a:off x="3260685" y="3822191"/>
+            <a:ext cx="636357" cy="146304"/>
           </a:xfrm>
           <a:prstGeom prst="rect">
             <a:avLst/>
@@ -30242,9 +30293,9 @@
               </a:spcAft>
             </a:pPr>
             <a:r>
-              <a:rPr sz="580" b="0">
+              <a:rPr sz="620" b="0">
                 <a:solidFill>
-                  <a:srgbClr val="6E6A64"/>
+                  <a:srgbClr val="161616"/>
                 </a:solidFill>
                 <a:latin typeface="Helvetica Neue"/>
               </a:rPr>
@@ -30261,8 +30312,8 @@
         </p:nvSpPr>
         <p:spPr>
           <a:xfrm>
-            <a:off x="3908014" y="3613708"/>
-            <a:ext cx="614411" cy="155709"/>
+            <a:off x="3908014" y="3833164"/>
+            <a:ext cx="614411" cy="124358"/>
           </a:xfrm>
           <a:prstGeom prst="rect">
             <a:avLst/>
@@ -30305,8 +30356,8 @@
         </p:nvSpPr>
         <p:spPr>
           <a:xfrm>
-            <a:off x="3897042" y="3602736"/>
-            <a:ext cx="636357" cy="177654"/>
+            <a:off x="3897042" y="3822191"/>
+            <a:ext cx="636357" cy="146304"/>
           </a:xfrm>
           <a:prstGeom prst="rect">
             <a:avLst/>
@@ -30331,9 +30382,9 @@
               </a:spcAft>
             </a:pPr>
             <a:r>
-              <a:rPr sz="580" b="0">
+              <a:rPr sz="620" b="0">
                 <a:solidFill>
-                  <a:srgbClr val="6E6A64"/>
+                  <a:srgbClr val="161616"/>
                 </a:solidFill>
                 <a:latin typeface="Helvetica Neue"/>
               </a:rPr>
@@ -30350,8 +30401,8 @@
         </p:nvSpPr>
         <p:spPr>
           <a:xfrm>
-            <a:off x="4544372" y="3613708"/>
-            <a:ext cx="614411" cy="155709"/>
+            <a:off x="4544372" y="3833164"/>
+            <a:ext cx="614411" cy="124358"/>
           </a:xfrm>
           <a:prstGeom prst="rect">
             <a:avLst/>
@@ -30394,8 +30445,8 @@
         </p:nvSpPr>
         <p:spPr>
           <a:xfrm>
-            <a:off x="4533399" y="3602736"/>
-            <a:ext cx="636357" cy="177654"/>
+            <a:off x="4533399" y="3822191"/>
+            <a:ext cx="636357" cy="146304"/>
           </a:xfrm>
           <a:prstGeom prst="rect">
             <a:avLst/>
@@ -30420,9 +30471,9 @@
               </a:spcAft>
             </a:pPr>
             <a:r>
-              <a:rPr sz="580" b="0">
+              <a:rPr sz="620" b="0">
                 <a:solidFill>
-                  <a:srgbClr val="6E6A64"/>
+                  <a:srgbClr val="161616"/>
                 </a:solidFill>
                 <a:latin typeface="Helvetica Neue"/>
               </a:rPr>
@@ -30439,8 +30490,8 @@
         </p:nvSpPr>
         <p:spPr>
           <a:xfrm>
-            <a:off x="5180729" y="3613708"/>
-            <a:ext cx="614411" cy="155709"/>
+            <a:off x="5180729" y="3833164"/>
+            <a:ext cx="614411" cy="124358"/>
           </a:xfrm>
           <a:prstGeom prst="rect">
             <a:avLst/>
@@ -30483,8 +30534,8 @@
         </p:nvSpPr>
         <p:spPr>
           <a:xfrm>
-            <a:off x="5169756" y="3602736"/>
-            <a:ext cx="636357" cy="177654"/>
+            <a:off x="5169756" y="3822191"/>
+            <a:ext cx="636357" cy="146304"/>
           </a:xfrm>
           <a:prstGeom prst="rect">
             <a:avLst/>
@@ -30509,9 +30560,9 @@
               </a:spcAft>
             </a:pPr>
             <a:r>
-              <a:rPr sz="580" b="0">
+              <a:rPr sz="620" b="0">
                 <a:solidFill>
-                  <a:srgbClr val="6E6A64"/>
+                  <a:srgbClr val="161616"/>
                 </a:solidFill>
                 <a:latin typeface="Helvetica Neue"/>
               </a:rPr>
@@ -30528,8 +30579,8 @@
         </p:nvSpPr>
         <p:spPr>
           <a:xfrm>
-            <a:off x="5817086" y="3613708"/>
-            <a:ext cx="614411" cy="155709"/>
+            <a:off x="5817086" y="3833164"/>
+            <a:ext cx="614411" cy="124358"/>
           </a:xfrm>
           <a:prstGeom prst="rect">
             <a:avLst/>
@@ -30572,8 +30623,8 @@
         </p:nvSpPr>
         <p:spPr>
           <a:xfrm>
-            <a:off x="5806113" y="3602736"/>
-            <a:ext cx="636357" cy="177654"/>
+            <a:off x="5806113" y="3822191"/>
+            <a:ext cx="636357" cy="146304"/>
           </a:xfrm>
           <a:prstGeom prst="rect">
             <a:avLst/>
@@ -30598,9 +30649,9 @@
               </a:spcAft>
             </a:pPr>
             <a:r>
-              <a:rPr sz="580" b="0">
+              <a:rPr sz="620" b="0">
                 <a:solidFill>
-                  <a:srgbClr val="6E6A64"/>
+                  <a:srgbClr val="161616"/>
                 </a:solidFill>
                 <a:latin typeface="Helvetica Neue"/>
               </a:rPr>
@@ -30617,8 +30668,8 @@
         </p:nvSpPr>
         <p:spPr>
           <a:xfrm>
-            <a:off x="6453443" y="3613708"/>
-            <a:ext cx="614411" cy="155709"/>
+            <a:off x="6453443" y="3833164"/>
+            <a:ext cx="614411" cy="124358"/>
           </a:xfrm>
           <a:prstGeom prst="rect">
             <a:avLst/>
@@ -30661,8 +30712,8 @@
         </p:nvSpPr>
         <p:spPr>
           <a:xfrm>
-            <a:off x="6442470" y="3602736"/>
-            <a:ext cx="636357" cy="177654"/>
+            <a:off x="6442470" y="3822191"/>
+            <a:ext cx="636357" cy="146304"/>
           </a:xfrm>
           <a:prstGeom prst="rect">
             <a:avLst/>
@@ -30687,9 +30738,9 @@
               </a:spcAft>
             </a:pPr>
             <a:r>
-              <a:rPr sz="580" b="0">
+              <a:rPr sz="620" b="0">
                 <a:solidFill>
-                  <a:srgbClr val="6E6A64"/>
+                  <a:srgbClr val="161616"/>
                 </a:solidFill>
                 <a:latin typeface="Helvetica Neue"/>
               </a:rPr>
@@ -30706,8 +30757,8 @@
         </p:nvSpPr>
         <p:spPr>
           <a:xfrm>
-            <a:off x="7089800" y="3613708"/>
-            <a:ext cx="614411" cy="155709"/>
+            <a:off x="7089800" y="3833164"/>
+            <a:ext cx="614411" cy="124358"/>
           </a:xfrm>
           <a:prstGeom prst="rect">
             <a:avLst/>
@@ -30750,8 +30801,8 @@
         </p:nvSpPr>
         <p:spPr>
           <a:xfrm>
-            <a:off x="7726157" y="3613708"/>
-            <a:ext cx="614411" cy="155709"/>
+            <a:off x="7726157" y="3833164"/>
+            <a:ext cx="614411" cy="124358"/>
           </a:xfrm>
           <a:prstGeom prst="rect">
             <a:avLst/>
@@ -30794,8 +30845,8 @@
         </p:nvSpPr>
         <p:spPr>
           <a:xfrm>
-            <a:off x="7715184" y="3602736"/>
-            <a:ext cx="636357" cy="177654"/>
+            <a:off x="7715184" y="3822191"/>
+            <a:ext cx="636357" cy="146304"/>
           </a:xfrm>
           <a:prstGeom prst="rect">
             <a:avLst/>
@@ -30820,9 +30871,9 @@
               </a:spcAft>
             </a:pPr>
             <a:r>
-              <a:rPr sz="580" b="0">
+              <a:rPr sz="620" b="0">
                 <a:solidFill>
-                  <a:srgbClr val="6E6A64"/>
+                  <a:srgbClr val="161616"/>
                 </a:solidFill>
                 <a:latin typeface="Helvetica Neue"/>
               </a:rPr>
@@ -30839,8 +30890,8 @@
         </p:nvSpPr>
         <p:spPr>
           <a:xfrm>
-            <a:off x="8362514" y="3613708"/>
-            <a:ext cx="614411" cy="155709"/>
+            <a:off x="8362514" y="3833164"/>
+            <a:ext cx="614411" cy="124358"/>
           </a:xfrm>
           <a:prstGeom prst="rect">
             <a:avLst/>
@@ -30883,8 +30934,8 @@
         </p:nvSpPr>
         <p:spPr>
           <a:xfrm>
-            <a:off x="8351541" y="3602736"/>
-            <a:ext cx="636357" cy="177654"/>
+            <a:off x="8351541" y="3822191"/>
+            <a:ext cx="636357" cy="146304"/>
           </a:xfrm>
           <a:prstGeom prst="rect">
             <a:avLst/>
@@ -30909,9 +30960,9 @@
               </a:spcAft>
             </a:pPr>
             <a:r>
-              <a:rPr sz="580" b="0">
+              <a:rPr sz="620" b="0">
                 <a:solidFill>
-                  <a:srgbClr val="6E6A64"/>
+                  <a:srgbClr val="161616"/>
                 </a:solidFill>
                 <a:latin typeface="Helvetica Neue"/>
               </a:rPr>
@@ -30928,8 +30979,8 @@
         </p:nvSpPr>
         <p:spPr>
           <a:xfrm>
-            <a:off x="8998871" y="3613708"/>
-            <a:ext cx="614411" cy="155709"/>
+            <a:off x="8998871" y="3833164"/>
+            <a:ext cx="614411" cy="124358"/>
           </a:xfrm>
           <a:prstGeom prst="rect">
             <a:avLst/>
@@ -30972,8 +31023,8 @@
         </p:nvSpPr>
         <p:spPr>
           <a:xfrm>
-            <a:off x="8987898" y="3602736"/>
-            <a:ext cx="636357" cy="177654"/>
+            <a:off x="8987898" y="3822191"/>
+            <a:ext cx="636357" cy="146304"/>
           </a:xfrm>
           <a:prstGeom prst="rect">
             <a:avLst/>
@@ -30998,9 +31049,9 @@
               </a:spcAft>
             </a:pPr>
             <a:r>
-              <a:rPr sz="580" b="0">
+              <a:rPr sz="620" b="0">
                 <a:solidFill>
-                  <a:srgbClr val="6E6A64"/>
+                  <a:srgbClr val="161616"/>
                 </a:solidFill>
                 <a:latin typeface="Helvetica Neue"/>
               </a:rPr>
@@ -31017,8 +31068,8 @@
         </p:nvSpPr>
         <p:spPr>
           <a:xfrm>
-            <a:off x="9635228" y="3613708"/>
-            <a:ext cx="614411" cy="155709"/>
+            <a:off x="9635228" y="3833164"/>
+            <a:ext cx="614411" cy="124358"/>
           </a:xfrm>
           <a:prstGeom prst="rect">
             <a:avLst/>
@@ -31061,8 +31112,8 @@
         </p:nvSpPr>
         <p:spPr>
           <a:xfrm>
-            <a:off x="9624255" y="3602736"/>
-            <a:ext cx="636357" cy="177654"/>
+            <a:off x="9624255" y="3822191"/>
+            <a:ext cx="636357" cy="146304"/>
           </a:xfrm>
           <a:prstGeom prst="rect">
             <a:avLst/>
@@ -31087,9 +31138,9 @@
               </a:spcAft>
             </a:pPr>
             <a:r>
-              <a:rPr sz="580" b="0">
+              <a:rPr sz="620" b="0">
                 <a:solidFill>
-                  <a:srgbClr val="6E6A64"/>
+                  <a:srgbClr val="161616"/>
                 </a:solidFill>
                 <a:latin typeface="Helvetica Neue"/>
               </a:rPr>
@@ -31106,8 +31157,8 @@
         </p:nvSpPr>
         <p:spPr>
           <a:xfrm>
-            <a:off x="10271585" y="3613708"/>
-            <a:ext cx="614411" cy="155709"/>
+            <a:off x="10271585" y="3833164"/>
+            <a:ext cx="614411" cy="124358"/>
           </a:xfrm>
           <a:prstGeom prst="rect">
             <a:avLst/>
@@ -31150,8 +31201,8 @@
         </p:nvSpPr>
         <p:spPr>
           <a:xfrm>
-            <a:off x="10260613" y="3602736"/>
-            <a:ext cx="636357" cy="177654"/>
+            <a:off x="10260613" y="3822191"/>
+            <a:ext cx="636357" cy="146304"/>
           </a:xfrm>
           <a:prstGeom prst="rect">
             <a:avLst/>
@@ -31176,9 +31227,9 @@
               </a:spcAft>
             </a:pPr>
             <a:r>
-              <a:rPr sz="580" b="0">
+              <a:rPr sz="620" b="0">
                 <a:solidFill>
-                  <a:srgbClr val="6E6A64"/>
+                  <a:srgbClr val="161616"/>
                 </a:solidFill>
                 <a:latin typeface="Helvetica Neue"/>
               </a:rPr>
@@ -31195,8 +31246,8 @@
         </p:nvSpPr>
         <p:spPr>
           <a:xfrm>
-            <a:off x="10907942" y="3613708"/>
-            <a:ext cx="614411" cy="155709"/>
+            <a:off x="10907942" y="3833164"/>
+            <a:ext cx="614411" cy="124358"/>
           </a:xfrm>
           <a:prstGeom prst="rect">
             <a:avLst/>
@@ -31239,8 +31290,8 @@
         </p:nvSpPr>
         <p:spPr>
           <a:xfrm>
-            <a:off x="10896970" y="3602736"/>
-            <a:ext cx="636357" cy="177654"/>
+            <a:off x="10896970" y="3822191"/>
+            <a:ext cx="636357" cy="146304"/>
           </a:xfrm>
           <a:prstGeom prst="rect">
             <a:avLst/>
@@ -31265,9 +31316,9 @@
               </a:spcAft>
             </a:pPr>
             <a:r>
-              <a:rPr sz="580" b="0">
+              <a:rPr sz="620" b="0">
                 <a:solidFill>
-                  <a:srgbClr val="6E6A64"/>
+                  <a:srgbClr val="161616"/>
                 </a:solidFill>
                 <a:latin typeface="Helvetica Neue"/>
               </a:rPr>
@@ -31284,8 +31335,8 @@
         </p:nvSpPr>
         <p:spPr>
           <a:xfrm>
-            <a:off x="704088" y="3780390"/>
-            <a:ext cx="1856231" cy="177654"/>
+            <a:off x="704088" y="3968496"/>
+            <a:ext cx="1856231" cy="146304"/>
           </a:xfrm>
           <a:prstGeom prst="rect">
             <a:avLst/>
@@ -31338,8 +31389,8 @@
         </p:nvSpPr>
         <p:spPr>
           <a:xfrm>
-            <a:off x="2635300" y="3791363"/>
-            <a:ext cx="614411" cy="155709"/>
+            <a:off x="2635300" y="3979468"/>
+            <a:ext cx="614411" cy="124358"/>
           </a:xfrm>
           <a:prstGeom prst="rect">
             <a:avLst/>
@@ -31382,8 +31433,8 @@
         </p:nvSpPr>
         <p:spPr>
           <a:xfrm>
-            <a:off x="2624328" y="3780390"/>
-            <a:ext cx="636357" cy="177654"/>
+            <a:off x="2624328" y="3968496"/>
+            <a:ext cx="636357" cy="146304"/>
           </a:xfrm>
           <a:prstGeom prst="rect">
             <a:avLst/>
@@ -31408,9 +31459,9 @@
               </a:spcAft>
             </a:pPr>
             <a:r>
-              <a:rPr sz="580" b="0">
+              <a:rPr sz="620" b="0">
                 <a:solidFill>
-                  <a:srgbClr val="6E6A64"/>
+                  <a:srgbClr val="161616"/>
                 </a:solidFill>
                 <a:latin typeface="Helvetica Neue"/>
               </a:rPr>
@@ -31427,8 +31478,8 @@
         </p:nvSpPr>
         <p:spPr>
           <a:xfrm>
-            <a:off x="3271657" y="3791363"/>
-            <a:ext cx="614411" cy="155709"/>
+            <a:off x="3271657" y="3979468"/>
+            <a:ext cx="614411" cy="124358"/>
           </a:xfrm>
           <a:prstGeom prst="rect">
             <a:avLst/>
@@ -31471,8 +31522,8 @@
         </p:nvSpPr>
         <p:spPr>
           <a:xfrm>
-            <a:off x="3260685" y="3780390"/>
-            <a:ext cx="636357" cy="177654"/>
+            <a:off x="3260685" y="3968496"/>
+            <a:ext cx="636357" cy="146304"/>
           </a:xfrm>
           <a:prstGeom prst="rect">
             <a:avLst/>
@@ -31497,9 +31548,9 @@
               </a:spcAft>
             </a:pPr>
             <a:r>
-              <a:rPr sz="580" b="0">
+              <a:rPr sz="620" b="0">
                 <a:solidFill>
-                  <a:srgbClr val="6E6A64"/>
+                  <a:srgbClr val="161616"/>
                 </a:solidFill>
                 <a:latin typeface="Helvetica Neue"/>
               </a:rPr>
@@ -31516,8 +31567,8 @@
         </p:nvSpPr>
         <p:spPr>
           <a:xfrm>
-            <a:off x="3908014" y="3791363"/>
-            <a:ext cx="614411" cy="155709"/>
+            <a:off x="3908014" y="3979468"/>
+            <a:ext cx="614411" cy="124358"/>
           </a:xfrm>
           <a:prstGeom prst="rect">
             <a:avLst/>
@@ -31560,8 +31611,8 @@
         </p:nvSpPr>
         <p:spPr>
           <a:xfrm>
-            <a:off x="3897042" y="3780390"/>
-            <a:ext cx="636357" cy="177654"/>
+            <a:off x="3897042" y="3968496"/>
+            <a:ext cx="636357" cy="146304"/>
           </a:xfrm>
           <a:prstGeom prst="rect">
             <a:avLst/>
@@ -31586,9 +31637,9 @@
               </a:spcAft>
             </a:pPr>
             <a:r>
-              <a:rPr sz="580" b="0">
+              <a:rPr sz="620" b="0">
                 <a:solidFill>
-                  <a:srgbClr val="6E6A64"/>
+                  <a:srgbClr val="161616"/>
                 </a:solidFill>
                 <a:latin typeface="Helvetica Neue"/>
               </a:rPr>
@@ -31605,8 +31656,8 @@
         </p:nvSpPr>
         <p:spPr>
           <a:xfrm>
-            <a:off x="4544372" y="3791363"/>
-            <a:ext cx="614411" cy="155709"/>
+            <a:off x="4544372" y="3979468"/>
+            <a:ext cx="614411" cy="124358"/>
           </a:xfrm>
           <a:prstGeom prst="rect">
             <a:avLst/>
@@ -31649,8 +31700,8 @@
         </p:nvSpPr>
         <p:spPr>
           <a:xfrm>
-            <a:off x="4533399" y="3780390"/>
-            <a:ext cx="636357" cy="177654"/>
+            <a:off x="4533399" y="3968496"/>
+            <a:ext cx="636357" cy="146304"/>
           </a:xfrm>
           <a:prstGeom prst="rect">
             <a:avLst/>
@@ -31675,9 +31726,9 @@
               </a:spcAft>
             </a:pPr>
             <a:r>
-              <a:rPr sz="580" b="0">
+              <a:rPr sz="620" b="0">
                 <a:solidFill>
-                  <a:srgbClr val="6E6A64"/>
+                  <a:srgbClr val="161616"/>
                 </a:solidFill>
                 <a:latin typeface="Helvetica Neue"/>
               </a:rPr>
@@ -31694,8 +31745,8 @@
         </p:nvSpPr>
         <p:spPr>
           <a:xfrm>
-            <a:off x="5180729" y="3791363"/>
-            <a:ext cx="614411" cy="155709"/>
+            <a:off x="5180729" y="3979468"/>
+            <a:ext cx="614411" cy="124358"/>
           </a:xfrm>
           <a:prstGeom prst="rect">
             <a:avLst/>
@@ -31738,8 +31789,8 @@
         </p:nvSpPr>
         <p:spPr>
           <a:xfrm>
-            <a:off x="5169756" y="3780390"/>
-            <a:ext cx="636357" cy="177654"/>
+            <a:off x="5169756" y="3968496"/>
+            <a:ext cx="636357" cy="146304"/>
           </a:xfrm>
           <a:prstGeom prst="rect">
             <a:avLst/>
@@ -31764,9 +31815,9 @@
               </a:spcAft>
             </a:pPr>
             <a:r>
-              <a:rPr sz="580" b="0">
+              <a:rPr sz="620" b="0">
                 <a:solidFill>
-                  <a:srgbClr val="6E6A64"/>
+                  <a:srgbClr val="161616"/>
                 </a:solidFill>
                 <a:latin typeface="Helvetica Neue"/>
               </a:rPr>
@@ -31783,8 +31834,8 @@
         </p:nvSpPr>
         <p:spPr>
           <a:xfrm>
-            <a:off x="5817086" y="3791363"/>
-            <a:ext cx="614411" cy="155709"/>
+            <a:off x="5817086" y="3979468"/>
+            <a:ext cx="614411" cy="124358"/>
           </a:xfrm>
           <a:prstGeom prst="rect">
             <a:avLst/>
@@ -31827,8 +31878,8 @@
         </p:nvSpPr>
         <p:spPr>
           <a:xfrm>
-            <a:off x="5806113" y="3780390"/>
-            <a:ext cx="636357" cy="177654"/>
+            <a:off x="5806113" y="3968496"/>
+            <a:ext cx="636357" cy="146304"/>
           </a:xfrm>
           <a:prstGeom prst="rect">
             <a:avLst/>
@@ -31853,9 +31904,9 @@
               </a:spcAft>
             </a:pPr>
             <a:r>
-              <a:rPr sz="580" b="0">
+              <a:rPr sz="620" b="0">
                 <a:solidFill>
-                  <a:srgbClr val="6E6A64"/>
+                  <a:srgbClr val="161616"/>
                 </a:solidFill>
                 <a:latin typeface="Helvetica Neue"/>
               </a:rPr>
@@ -31872,8 +31923,8 @@
         </p:nvSpPr>
         <p:spPr>
           <a:xfrm>
-            <a:off x="6453443" y="3791363"/>
-            <a:ext cx="614411" cy="155709"/>
+            <a:off x="6453443" y="3979468"/>
+            <a:ext cx="614411" cy="124358"/>
           </a:xfrm>
           <a:prstGeom prst="rect">
             <a:avLst/>
@@ -31916,8 +31967,8 @@
         </p:nvSpPr>
         <p:spPr>
           <a:xfrm>
-            <a:off x="6442470" y="3780390"/>
-            <a:ext cx="636357" cy="177654"/>
+            <a:off x="6442470" y="3968496"/>
+            <a:ext cx="636357" cy="146304"/>
           </a:xfrm>
           <a:prstGeom prst="rect">
             <a:avLst/>
@@ -31942,9 +31993,9 @@
               </a:spcAft>
             </a:pPr>
             <a:r>
-              <a:rPr sz="580" b="0">
+              <a:rPr sz="620" b="0">
                 <a:solidFill>
-                  <a:srgbClr val="6E6A64"/>
+                  <a:srgbClr val="161616"/>
                 </a:solidFill>
                 <a:latin typeface="Helvetica Neue"/>
               </a:rPr>
@@ -31961,8 +32012,8 @@
         </p:nvSpPr>
         <p:spPr>
           <a:xfrm>
-            <a:off x="7089800" y="3791363"/>
-            <a:ext cx="614411" cy="155709"/>
+            <a:off x="7089800" y="3979468"/>
+            <a:ext cx="614411" cy="124358"/>
           </a:xfrm>
           <a:prstGeom prst="rect">
             <a:avLst/>
@@ -32005,8 +32056,8 @@
         </p:nvSpPr>
         <p:spPr>
           <a:xfrm>
-            <a:off x="7078827" y="3780390"/>
-            <a:ext cx="636357" cy="177654"/>
+            <a:off x="7078827" y="3968496"/>
+            <a:ext cx="636357" cy="146304"/>
           </a:xfrm>
           <a:prstGeom prst="rect">
             <a:avLst/>
@@ -32031,9 +32082,9 @@
               </a:spcAft>
             </a:pPr>
             <a:r>
-              <a:rPr sz="580" b="0">
+              <a:rPr sz="620" b="0">
                 <a:solidFill>
-                  <a:srgbClr val="6E6A64"/>
+                  <a:srgbClr val="161616"/>
                 </a:solidFill>
                 <a:latin typeface="Helvetica Neue"/>
               </a:rPr>
@@ -32050,8 +32101,8 @@
         </p:nvSpPr>
         <p:spPr>
           <a:xfrm>
-            <a:off x="7726157" y="3791363"/>
-            <a:ext cx="614411" cy="155709"/>
+            <a:off x="7726157" y="3979468"/>
+            <a:ext cx="614411" cy="124358"/>
           </a:xfrm>
           <a:prstGeom prst="rect">
             <a:avLst/>
@@ -32094,8 +32145,8 @@
         </p:nvSpPr>
         <p:spPr>
           <a:xfrm>
-            <a:off x="8362514" y="3791363"/>
-            <a:ext cx="614411" cy="155709"/>
+            <a:off x="8362514" y="3979468"/>
+            <a:ext cx="614411" cy="124358"/>
           </a:xfrm>
           <a:prstGeom prst="rect">
             <a:avLst/>
@@ -32138,8 +32189,8 @@
         </p:nvSpPr>
         <p:spPr>
           <a:xfrm>
-            <a:off x="8351541" y="3780390"/>
-            <a:ext cx="636357" cy="177654"/>
+            <a:off x="8351541" y="3968496"/>
+            <a:ext cx="636357" cy="146304"/>
           </a:xfrm>
           <a:prstGeom prst="rect">
             <a:avLst/>
@@ -32164,9 +32215,9 @@
               </a:spcAft>
             </a:pPr>
             <a:r>
-              <a:rPr sz="580" b="0">
+              <a:rPr sz="620" b="0">
                 <a:solidFill>
-                  <a:srgbClr val="6E6A64"/>
+                  <a:srgbClr val="161616"/>
                 </a:solidFill>
                 <a:latin typeface="Helvetica Neue"/>
               </a:rPr>
@@ -32183,8 +32234,8 @@
         </p:nvSpPr>
         <p:spPr>
           <a:xfrm>
-            <a:off x="8998871" y="3791363"/>
-            <a:ext cx="614411" cy="155709"/>
+            <a:off x="8998871" y="3979468"/>
+            <a:ext cx="614411" cy="124358"/>
           </a:xfrm>
           <a:prstGeom prst="rect">
             <a:avLst/>
@@ -32227,8 +32278,8 @@
         </p:nvSpPr>
         <p:spPr>
           <a:xfrm>
-            <a:off x="8987898" y="3780390"/>
-            <a:ext cx="636357" cy="177654"/>
+            <a:off x="8987898" y="3968496"/>
+            <a:ext cx="636357" cy="146304"/>
           </a:xfrm>
           <a:prstGeom prst="rect">
             <a:avLst/>
@@ -32253,9 +32304,9 @@
               </a:spcAft>
             </a:pPr>
             <a:r>
-              <a:rPr sz="580" b="0">
+              <a:rPr sz="620" b="0">
                 <a:solidFill>
-                  <a:srgbClr val="6E6A64"/>
+                  <a:srgbClr val="161616"/>
                 </a:solidFill>
                 <a:latin typeface="Helvetica Neue"/>
               </a:rPr>
@@ -32272,8 +32323,8 @@
         </p:nvSpPr>
         <p:spPr>
           <a:xfrm>
-            <a:off x="9635228" y="3791363"/>
-            <a:ext cx="614411" cy="155709"/>
+            <a:off x="9635228" y="3979468"/>
+            <a:ext cx="614411" cy="124358"/>
           </a:xfrm>
           <a:prstGeom prst="rect">
             <a:avLst/>
@@ -32316,8 +32367,8 @@
         </p:nvSpPr>
         <p:spPr>
           <a:xfrm>
-            <a:off x="9624255" y="3780390"/>
-            <a:ext cx="636357" cy="177654"/>
+            <a:off x="9624255" y="3968496"/>
+            <a:ext cx="636357" cy="146304"/>
           </a:xfrm>
           <a:prstGeom prst="rect">
             <a:avLst/>
@@ -32342,9 +32393,9 @@
               </a:spcAft>
             </a:pPr>
             <a:r>
-              <a:rPr sz="580" b="0">
+              <a:rPr sz="620" b="0">
                 <a:solidFill>
-                  <a:srgbClr val="6E6A64"/>
+                  <a:srgbClr val="161616"/>
                 </a:solidFill>
                 <a:latin typeface="Helvetica Neue"/>
               </a:rPr>
@@ -32361,8 +32412,8 @@
         </p:nvSpPr>
         <p:spPr>
           <a:xfrm>
-            <a:off x="10271585" y="3791363"/>
-            <a:ext cx="614411" cy="155709"/>
+            <a:off x="10271585" y="3979468"/>
+            <a:ext cx="614411" cy="124358"/>
           </a:xfrm>
           <a:prstGeom prst="rect">
             <a:avLst/>
@@ -32405,8 +32456,8 @@
         </p:nvSpPr>
         <p:spPr>
           <a:xfrm>
-            <a:off x="10260613" y="3780390"/>
-            <a:ext cx="636357" cy="177654"/>
+            <a:off x="10260613" y="3968496"/>
+            <a:ext cx="636357" cy="146304"/>
           </a:xfrm>
           <a:prstGeom prst="rect">
             <a:avLst/>
@@ -32431,9 +32482,9 @@
               </a:spcAft>
             </a:pPr>
             <a:r>
-              <a:rPr sz="580" b="0">
+              <a:rPr sz="620" b="0">
                 <a:solidFill>
-                  <a:srgbClr val="6E6A64"/>
+                  <a:srgbClr val="161616"/>
                 </a:solidFill>
                 <a:latin typeface="Helvetica Neue"/>
               </a:rPr>
@@ -32450,8 +32501,8 @@
         </p:nvSpPr>
         <p:spPr>
           <a:xfrm>
-            <a:off x="10907942" y="3791363"/>
-            <a:ext cx="614411" cy="155709"/>
+            <a:off x="10907942" y="3979468"/>
+            <a:ext cx="614411" cy="124358"/>
           </a:xfrm>
           <a:prstGeom prst="rect">
             <a:avLst/>
@@ -32494,8 +32545,8 @@
         </p:nvSpPr>
         <p:spPr>
           <a:xfrm>
-            <a:off x="10896970" y="3780390"/>
-            <a:ext cx="636357" cy="177654"/>
+            <a:off x="10896970" y="3968496"/>
+            <a:ext cx="636357" cy="146304"/>
           </a:xfrm>
           <a:prstGeom prst="rect">
             <a:avLst/>
@@ -32520,9 +32571,9 @@
               </a:spcAft>
             </a:pPr>
             <a:r>
-              <a:rPr sz="580" b="0">
+              <a:rPr sz="620" b="0">
                 <a:solidFill>
-                  <a:srgbClr val="6E6A64"/>
+                  <a:srgbClr val="161616"/>
                 </a:solidFill>
                 <a:latin typeface="Helvetica Neue"/>
               </a:rPr>
@@ -32539,8 +32590,8 @@
         </p:nvSpPr>
         <p:spPr>
           <a:xfrm>
-            <a:off x="704088" y="3958045"/>
-            <a:ext cx="1856231" cy="177654"/>
+            <a:off x="704088" y="4114800"/>
+            <a:ext cx="1856231" cy="146304"/>
           </a:xfrm>
           <a:prstGeom prst="rect">
             <a:avLst/>
@@ -32593,8 +32644,8 @@
         </p:nvSpPr>
         <p:spPr>
           <a:xfrm>
-            <a:off x="2635300" y="3969018"/>
-            <a:ext cx="614411" cy="155709"/>
+            <a:off x="2635300" y="4125772"/>
+            <a:ext cx="614411" cy="124358"/>
           </a:xfrm>
           <a:prstGeom prst="rect">
             <a:avLst/>
@@ -32637,8 +32688,8 @@
         </p:nvSpPr>
         <p:spPr>
           <a:xfrm>
-            <a:off x="2624328" y="3958045"/>
-            <a:ext cx="636357" cy="177654"/>
+            <a:off x="2624328" y="4114800"/>
+            <a:ext cx="636357" cy="146304"/>
           </a:xfrm>
           <a:prstGeom prst="rect">
             <a:avLst/>
@@ -32663,7 +32714,7 @@
               </a:spcAft>
             </a:pPr>
             <a:r>
-              <a:rPr sz="580" b="0">
+              <a:rPr sz="620" b="0">
                 <a:solidFill>
                   <a:srgbClr val="FFFFFF"/>
                 </a:solidFill>
@@ -32682,8 +32733,8 @@
         </p:nvSpPr>
         <p:spPr>
           <a:xfrm>
-            <a:off x="3271657" y="3969018"/>
-            <a:ext cx="614411" cy="155709"/>
+            <a:off x="3271657" y="4125772"/>
+            <a:ext cx="614411" cy="124358"/>
           </a:xfrm>
           <a:prstGeom prst="rect">
             <a:avLst/>
@@ -32726,8 +32777,8 @@
         </p:nvSpPr>
         <p:spPr>
           <a:xfrm>
-            <a:off x="3260685" y="3958045"/>
-            <a:ext cx="636357" cy="177654"/>
+            <a:off x="3260685" y="4114800"/>
+            <a:ext cx="636357" cy="146304"/>
           </a:xfrm>
           <a:prstGeom prst="rect">
             <a:avLst/>
@@ -32752,7 +32803,7 @@
               </a:spcAft>
             </a:pPr>
             <a:r>
-              <a:rPr sz="580" b="0">
+              <a:rPr sz="620" b="0">
                 <a:solidFill>
                   <a:srgbClr val="FFFFFF"/>
                 </a:solidFill>
@@ -32771,8 +32822,8 @@
         </p:nvSpPr>
         <p:spPr>
           <a:xfrm>
-            <a:off x="3908014" y="3969018"/>
-            <a:ext cx="614411" cy="155709"/>
+            <a:off x="3908014" y="4125772"/>
+            <a:ext cx="614411" cy="124358"/>
           </a:xfrm>
           <a:prstGeom prst="rect">
             <a:avLst/>
@@ -32815,8 +32866,8 @@
         </p:nvSpPr>
         <p:spPr>
           <a:xfrm>
-            <a:off x="3897042" y="3958045"/>
-            <a:ext cx="636357" cy="177654"/>
+            <a:off x="3897042" y="4114800"/>
+            <a:ext cx="636357" cy="146304"/>
           </a:xfrm>
           <a:prstGeom prst="rect">
             <a:avLst/>
@@ -32841,7 +32892,7 @@
               </a:spcAft>
             </a:pPr>
             <a:r>
-              <a:rPr sz="580" b="0">
+              <a:rPr sz="620" b="0">
                 <a:solidFill>
                   <a:srgbClr val="FFFFFF"/>
                 </a:solidFill>
@@ -32860,8 +32911,8 @@
         </p:nvSpPr>
         <p:spPr>
           <a:xfrm>
-            <a:off x="4544372" y="3969018"/>
-            <a:ext cx="614411" cy="155709"/>
+            <a:off x="4544372" y="4125772"/>
+            <a:ext cx="614411" cy="124358"/>
           </a:xfrm>
           <a:prstGeom prst="rect">
             <a:avLst/>
@@ -32904,8 +32955,8 @@
         </p:nvSpPr>
         <p:spPr>
           <a:xfrm>
-            <a:off x="4533399" y="3958045"/>
-            <a:ext cx="636357" cy="177654"/>
+            <a:off x="4533399" y="4114800"/>
+            <a:ext cx="636357" cy="146304"/>
           </a:xfrm>
           <a:prstGeom prst="rect">
             <a:avLst/>
@@ -32930,9 +32981,9 @@
               </a:spcAft>
             </a:pPr>
             <a:r>
-              <a:rPr sz="580" b="0">
+              <a:rPr sz="620" b="0">
                 <a:solidFill>
-                  <a:srgbClr val="6E6A64"/>
+                  <a:srgbClr val="161616"/>
                 </a:solidFill>
                 <a:latin typeface="Helvetica Neue"/>
               </a:rPr>
@@ -32949,8 +33000,8 @@
         </p:nvSpPr>
         <p:spPr>
           <a:xfrm>
-            <a:off x="5180729" y="3969018"/>
-            <a:ext cx="614411" cy="155709"/>
+            <a:off x="5180729" y="4125772"/>
+            <a:ext cx="614411" cy="124358"/>
           </a:xfrm>
           <a:prstGeom prst="rect">
             <a:avLst/>
@@ -32993,8 +33044,8 @@
         </p:nvSpPr>
         <p:spPr>
           <a:xfrm>
-            <a:off x="5169756" y="3958045"/>
-            <a:ext cx="636357" cy="177654"/>
+            <a:off x="5169756" y="4114800"/>
+            <a:ext cx="636357" cy="146304"/>
           </a:xfrm>
           <a:prstGeom prst="rect">
             <a:avLst/>
@@ -33019,9 +33070,9 @@
               </a:spcAft>
             </a:pPr>
             <a:r>
-              <a:rPr sz="580" b="0">
+              <a:rPr sz="620" b="0">
                 <a:solidFill>
-                  <a:srgbClr val="6E6A64"/>
+                  <a:srgbClr val="161616"/>
                 </a:solidFill>
                 <a:latin typeface="Helvetica Neue"/>
               </a:rPr>
@@ -33038,8 +33089,8 @@
         </p:nvSpPr>
         <p:spPr>
           <a:xfrm>
-            <a:off x="5817086" y="3969018"/>
-            <a:ext cx="614411" cy="155709"/>
+            <a:off x="5817086" y="4125772"/>
+            <a:ext cx="614411" cy="124358"/>
           </a:xfrm>
           <a:prstGeom prst="rect">
             <a:avLst/>
@@ -33082,8 +33133,8 @@
         </p:nvSpPr>
         <p:spPr>
           <a:xfrm>
-            <a:off x="5806113" y="3958045"/>
-            <a:ext cx="636357" cy="177654"/>
+            <a:off x="5806113" y="4114800"/>
+            <a:ext cx="636357" cy="146304"/>
           </a:xfrm>
           <a:prstGeom prst="rect">
             <a:avLst/>
@@ -33108,9 +33159,9 @@
               </a:spcAft>
             </a:pPr>
             <a:r>
-              <a:rPr sz="580" b="0">
+              <a:rPr sz="620" b="0">
                 <a:solidFill>
-                  <a:srgbClr val="6E6A64"/>
+                  <a:srgbClr val="161616"/>
                 </a:solidFill>
                 <a:latin typeface="Helvetica Neue"/>
               </a:rPr>
@@ -33127,8 +33178,8 @@
         </p:nvSpPr>
         <p:spPr>
           <a:xfrm>
-            <a:off x="6453443" y="3969018"/>
-            <a:ext cx="614411" cy="155709"/>
+            <a:off x="6453443" y="4125772"/>
+            <a:ext cx="614411" cy="124358"/>
           </a:xfrm>
           <a:prstGeom prst="rect">
             <a:avLst/>
@@ -33171,8 +33222,8 @@
         </p:nvSpPr>
         <p:spPr>
           <a:xfrm>
-            <a:off x="6442470" y="3958045"/>
-            <a:ext cx="636357" cy="177654"/>
+            <a:off x="6442470" y="4114800"/>
+            <a:ext cx="636357" cy="146304"/>
           </a:xfrm>
           <a:prstGeom prst="rect">
             <a:avLst/>
@@ -33197,9 +33248,9 @@
               </a:spcAft>
             </a:pPr>
             <a:r>
-              <a:rPr sz="580" b="0">
+              <a:rPr sz="620" b="0">
                 <a:solidFill>
-                  <a:srgbClr val="6E6A64"/>
+                  <a:srgbClr val="161616"/>
                 </a:solidFill>
                 <a:latin typeface="Helvetica Neue"/>
               </a:rPr>
@@ -33216,8 +33267,8 @@
         </p:nvSpPr>
         <p:spPr>
           <a:xfrm>
-            <a:off x="7089800" y="3969018"/>
-            <a:ext cx="614411" cy="155709"/>
+            <a:off x="7089800" y="4125772"/>
+            <a:ext cx="614411" cy="124358"/>
           </a:xfrm>
           <a:prstGeom prst="rect">
             <a:avLst/>
@@ -33260,8 +33311,8 @@
         </p:nvSpPr>
         <p:spPr>
           <a:xfrm>
-            <a:off x="7078827" y="3958045"/>
-            <a:ext cx="636357" cy="177654"/>
+            <a:off x="7078827" y="4114800"/>
+            <a:ext cx="636357" cy="146304"/>
           </a:xfrm>
           <a:prstGeom prst="rect">
             <a:avLst/>
@@ -33286,9 +33337,9 @@
               </a:spcAft>
             </a:pPr>
             <a:r>
-              <a:rPr sz="580" b="0">
+              <a:rPr sz="620" b="0">
                 <a:solidFill>
-                  <a:srgbClr val="6E6A64"/>
+                  <a:srgbClr val="161616"/>
                 </a:solidFill>
                 <a:latin typeface="Helvetica Neue"/>
               </a:rPr>
@@ -33305,8 +33356,8 @@
         </p:nvSpPr>
         <p:spPr>
           <a:xfrm>
-            <a:off x="7726157" y="3969018"/>
-            <a:ext cx="614411" cy="155709"/>
+            <a:off x="7726157" y="4125772"/>
+            <a:ext cx="614411" cy="124358"/>
           </a:xfrm>
           <a:prstGeom prst="rect">
             <a:avLst/>
@@ -33349,8 +33400,8 @@
         </p:nvSpPr>
         <p:spPr>
           <a:xfrm>
-            <a:off x="7715184" y="3958045"/>
-            <a:ext cx="636357" cy="177654"/>
+            <a:off x="7715184" y="4114800"/>
+            <a:ext cx="636357" cy="146304"/>
           </a:xfrm>
           <a:prstGeom prst="rect">
             <a:avLst/>
@@ -33375,9 +33426,9 @@
               </a:spcAft>
             </a:pPr>
             <a:r>
-              <a:rPr sz="580" b="0">
+              <a:rPr sz="620" b="0">
                 <a:solidFill>
-                  <a:srgbClr val="6E6A64"/>
+                  <a:srgbClr val="161616"/>
                 </a:solidFill>
                 <a:latin typeface="Helvetica Neue"/>
               </a:rPr>
@@ -33394,8 +33445,8 @@
         </p:nvSpPr>
         <p:spPr>
           <a:xfrm>
-            <a:off x="8362514" y="3969018"/>
-            <a:ext cx="614411" cy="155709"/>
+            <a:off x="8362514" y="4125772"/>
+            <a:ext cx="614411" cy="124358"/>
           </a:xfrm>
           <a:prstGeom prst="rect">
             <a:avLst/>
@@ -33438,8 +33489,8 @@
         </p:nvSpPr>
         <p:spPr>
           <a:xfrm>
-            <a:off x="8998871" y="3969018"/>
-            <a:ext cx="614411" cy="155709"/>
+            <a:off x="8998871" y="4125772"/>
+            <a:ext cx="614411" cy="124358"/>
           </a:xfrm>
           <a:prstGeom prst="rect">
             <a:avLst/>
@@ -33482,8 +33533,8 @@
         </p:nvSpPr>
         <p:spPr>
           <a:xfrm>
-            <a:off x="8987898" y="3958045"/>
-            <a:ext cx="636357" cy="177654"/>
+            <a:off x="8987898" y="4114800"/>
+            <a:ext cx="636357" cy="146304"/>
           </a:xfrm>
           <a:prstGeom prst="rect">
             <a:avLst/>
@@ -33508,9 +33559,9 @@
               </a:spcAft>
             </a:pPr>
             <a:r>
-              <a:rPr sz="580" b="0">
+              <a:rPr sz="620" b="0">
                 <a:solidFill>
-                  <a:srgbClr val="6E6A64"/>
+                  <a:srgbClr val="161616"/>
                 </a:solidFill>
                 <a:latin typeface="Helvetica Neue"/>
               </a:rPr>
@@ -33527,8 +33578,8 @@
         </p:nvSpPr>
         <p:spPr>
           <a:xfrm>
-            <a:off x="9635228" y="3969018"/>
-            <a:ext cx="614411" cy="155709"/>
+            <a:off x="9635228" y="4125772"/>
+            <a:ext cx="614411" cy="124358"/>
           </a:xfrm>
           <a:prstGeom prst="rect">
             <a:avLst/>
@@ -33571,8 +33622,8 @@
         </p:nvSpPr>
         <p:spPr>
           <a:xfrm>
-            <a:off x="9624255" y="3958045"/>
-            <a:ext cx="636357" cy="177654"/>
+            <a:off x="9624255" y="4114800"/>
+            <a:ext cx="636357" cy="146304"/>
           </a:xfrm>
           <a:prstGeom prst="rect">
             <a:avLst/>
@@ -33597,9 +33648,9 @@
               </a:spcAft>
             </a:pPr>
             <a:r>
-              <a:rPr sz="580" b="0">
+              <a:rPr sz="620" b="0">
                 <a:solidFill>
-                  <a:srgbClr val="6E6A64"/>
+                  <a:srgbClr val="161616"/>
                 </a:solidFill>
                 <a:latin typeface="Helvetica Neue"/>
               </a:rPr>
@@ -33616,8 +33667,8 @@
         </p:nvSpPr>
         <p:spPr>
           <a:xfrm>
-            <a:off x="10271585" y="3969018"/>
-            <a:ext cx="614411" cy="155709"/>
+            <a:off x="10271585" y="4125772"/>
+            <a:ext cx="614411" cy="124358"/>
           </a:xfrm>
           <a:prstGeom prst="rect">
             <a:avLst/>
@@ -33660,8 +33711,8 @@
         </p:nvSpPr>
         <p:spPr>
           <a:xfrm>
-            <a:off x="10260613" y="3958045"/>
-            <a:ext cx="636357" cy="177654"/>
+            <a:off x="10260613" y="4114800"/>
+            <a:ext cx="636357" cy="146304"/>
           </a:xfrm>
           <a:prstGeom prst="rect">
             <a:avLst/>
@@ -33686,9 +33737,9 @@
               </a:spcAft>
             </a:pPr>
             <a:r>
-              <a:rPr sz="580" b="0">
+              <a:rPr sz="620" b="0">
                 <a:solidFill>
-                  <a:srgbClr val="6E6A64"/>
+                  <a:srgbClr val="161616"/>
                 </a:solidFill>
                 <a:latin typeface="Helvetica Neue"/>
               </a:rPr>
@@ -33705,8 +33756,8 @@
         </p:nvSpPr>
         <p:spPr>
           <a:xfrm>
-            <a:off x="10907942" y="3969018"/>
-            <a:ext cx="614411" cy="155709"/>
+            <a:off x="10907942" y="4125772"/>
+            <a:ext cx="614411" cy="124358"/>
           </a:xfrm>
           <a:prstGeom prst="rect">
             <a:avLst/>
@@ -33749,8 +33800,8 @@
         </p:nvSpPr>
         <p:spPr>
           <a:xfrm>
-            <a:off x="10896970" y="3958045"/>
-            <a:ext cx="636357" cy="177654"/>
+            <a:off x="10896970" y="4114800"/>
+            <a:ext cx="636357" cy="146304"/>
           </a:xfrm>
           <a:prstGeom prst="rect">
             <a:avLst/>
@@ -33775,9 +33826,9 @@
               </a:spcAft>
             </a:pPr>
             <a:r>
-              <a:rPr sz="580" b="0">
+              <a:rPr sz="620" b="0">
                 <a:solidFill>
-                  <a:srgbClr val="6E6A64"/>
+                  <a:srgbClr val="161616"/>
                 </a:solidFill>
                 <a:latin typeface="Helvetica Neue"/>
               </a:rPr>
@@ -33794,8 +33845,8 @@
         </p:nvSpPr>
         <p:spPr>
           <a:xfrm>
-            <a:off x="658368" y="4143015"/>
-            <a:ext cx="1920240" cy="163024"/>
+            <a:off x="658368" y="4268419"/>
+            <a:ext cx="1920240" cy="131673"/>
           </a:xfrm>
           <a:prstGeom prst="rect">
             <a:avLst/>
@@ -33838,8 +33889,8 @@
         </p:nvSpPr>
         <p:spPr>
           <a:xfrm>
-            <a:off x="704088" y="4135700"/>
-            <a:ext cx="1856231" cy="177654"/>
+            <a:off x="704088" y="4261104"/>
+            <a:ext cx="1856231" cy="146304"/>
           </a:xfrm>
           <a:prstGeom prst="rect">
             <a:avLst/>
@@ -33892,8 +33943,8 @@
         </p:nvSpPr>
         <p:spPr>
           <a:xfrm>
-            <a:off x="2635300" y="4146673"/>
-            <a:ext cx="614411" cy="155709"/>
+            <a:off x="2635300" y="4272076"/>
+            <a:ext cx="614411" cy="124358"/>
           </a:xfrm>
           <a:prstGeom prst="rect">
             <a:avLst/>
@@ -33936,8 +33987,8 @@
         </p:nvSpPr>
         <p:spPr>
           <a:xfrm>
-            <a:off x="2624328" y="4135700"/>
-            <a:ext cx="636357" cy="177654"/>
+            <a:off x="2624328" y="4261104"/>
+            <a:ext cx="636357" cy="146304"/>
           </a:xfrm>
           <a:prstGeom prst="rect">
             <a:avLst/>
@@ -33962,7 +34013,7 @@
               </a:spcAft>
             </a:pPr>
             <a:r>
-              <a:rPr sz="580" b="0">
+              <a:rPr sz="620" b="0">
                 <a:solidFill>
                   <a:srgbClr val="FFFFFF"/>
                 </a:solidFill>
@@ -33981,8 +34032,8 @@
         </p:nvSpPr>
         <p:spPr>
           <a:xfrm>
-            <a:off x="3271657" y="4146673"/>
-            <a:ext cx="614411" cy="155709"/>
+            <a:off x="3271657" y="4272076"/>
+            <a:ext cx="614411" cy="124358"/>
           </a:xfrm>
           <a:prstGeom prst="rect">
             <a:avLst/>
@@ -34025,8 +34076,8 @@
         </p:nvSpPr>
         <p:spPr>
           <a:xfrm>
-            <a:off x="3260685" y="4135700"/>
-            <a:ext cx="636357" cy="177654"/>
+            <a:off x="3260685" y="4261104"/>
+            <a:ext cx="636357" cy="146304"/>
           </a:xfrm>
           <a:prstGeom prst="rect">
             <a:avLst/>
@@ -34051,7 +34102,7 @@
               </a:spcAft>
             </a:pPr>
             <a:r>
-              <a:rPr sz="580" b="0">
+              <a:rPr sz="620" b="0">
                 <a:solidFill>
                   <a:srgbClr val="FFFFFF"/>
                 </a:solidFill>
@@ -34070,8 +34121,8 @@
         </p:nvSpPr>
         <p:spPr>
           <a:xfrm>
-            <a:off x="3908014" y="4146673"/>
-            <a:ext cx="614411" cy="155709"/>
+            <a:off x="3908014" y="4272076"/>
+            <a:ext cx="614411" cy="124358"/>
           </a:xfrm>
           <a:prstGeom prst="rect">
             <a:avLst/>
@@ -34114,8 +34165,8 @@
         </p:nvSpPr>
         <p:spPr>
           <a:xfrm>
-            <a:off x="3897042" y="4135700"/>
-            <a:ext cx="636357" cy="177654"/>
+            <a:off x="3897042" y="4261104"/>
+            <a:ext cx="636357" cy="146304"/>
           </a:xfrm>
           <a:prstGeom prst="rect">
             <a:avLst/>
@@ -34140,7 +34191,7 @@
               </a:spcAft>
             </a:pPr>
             <a:r>
-              <a:rPr sz="580" b="0">
+              <a:rPr sz="620" b="0">
                 <a:solidFill>
                   <a:srgbClr val="FFFFFF"/>
                 </a:solidFill>
@@ -34159,8 +34210,8 @@
         </p:nvSpPr>
         <p:spPr>
           <a:xfrm>
-            <a:off x="4544372" y="4146673"/>
-            <a:ext cx="614411" cy="155709"/>
+            <a:off x="4544372" y="4272076"/>
+            <a:ext cx="614411" cy="124358"/>
           </a:xfrm>
           <a:prstGeom prst="rect">
             <a:avLst/>
@@ -34203,8 +34254,8 @@
         </p:nvSpPr>
         <p:spPr>
           <a:xfrm>
-            <a:off x="4533399" y="4135700"/>
-            <a:ext cx="636357" cy="177654"/>
+            <a:off x="4533399" y="4261104"/>
+            <a:ext cx="636357" cy="146304"/>
           </a:xfrm>
           <a:prstGeom prst="rect">
             <a:avLst/>
@@ -34229,9 +34280,9 @@
               </a:spcAft>
             </a:pPr>
             <a:r>
-              <a:rPr sz="580" b="0">
+              <a:rPr sz="620" b="0">
                 <a:solidFill>
-                  <a:srgbClr val="6E6A64"/>
+                  <a:srgbClr val="161616"/>
                 </a:solidFill>
                 <a:latin typeface="Helvetica Neue"/>
               </a:rPr>
@@ -34248,8 +34299,8 @@
         </p:nvSpPr>
         <p:spPr>
           <a:xfrm>
-            <a:off x="5180729" y="4146673"/>
-            <a:ext cx="614411" cy="155709"/>
+            <a:off x="5180729" y="4272076"/>
+            <a:ext cx="614411" cy="124358"/>
           </a:xfrm>
           <a:prstGeom prst="rect">
             <a:avLst/>
@@ -34292,8 +34343,8 @@
         </p:nvSpPr>
         <p:spPr>
           <a:xfrm>
-            <a:off x="5169756" y="4135700"/>
-            <a:ext cx="636357" cy="177654"/>
+            <a:off x="5169756" y="4261104"/>
+            <a:ext cx="636357" cy="146304"/>
           </a:xfrm>
           <a:prstGeom prst="rect">
             <a:avLst/>
@@ -34318,9 +34369,9 @@
               </a:spcAft>
             </a:pPr>
             <a:r>
-              <a:rPr sz="580" b="0">
+              <a:rPr sz="620" b="0">
                 <a:solidFill>
-                  <a:srgbClr val="6E6A64"/>
+                  <a:srgbClr val="161616"/>
                 </a:solidFill>
                 <a:latin typeface="Helvetica Neue"/>
               </a:rPr>
@@ -34337,8 +34388,8 @@
         </p:nvSpPr>
         <p:spPr>
           <a:xfrm>
-            <a:off x="5817086" y="4146673"/>
-            <a:ext cx="614411" cy="155709"/>
+            <a:off x="5817086" y="4272076"/>
+            <a:ext cx="614411" cy="124358"/>
           </a:xfrm>
           <a:prstGeom prst="rect">
             <a:avLst/>
@@ -34381,8 +34432,8 @@
         </p:nvSpPr>
         <p:spPr>
           <a:xfrm>
-            <a:off x="5806113" y="4135700"/>
-            <a:ext cx="636357" cy="177654"/>
+            <a:off x="5806113" y="4261104"/>
+            <a:ext cx="636357" cy="146304"/>
           </a:xfrm>
           <a:prstGeom prst="rect">
             <a:avLst/>
@@ -34407,9 +34458,9 @@
               </a:spcAft>
             </a:pPr>
             <a:r>
-              <a:rPr sz="580" b="0">
+              <a:rPr sz="620" b="0">
                 <a:solidFill>
-                  <a:srgbClr val="6E6A64"/>
+                  <a:srgbClr val="161616"/>
                 </a:solidFill>
                 <a:latin typeface="Helvetica Neue"/>
               </a:rPr>
@@ -34426,8 +34477,8 @@
         </p:nvSpPr>
         <p:spPr>
           <a:xfrm>
-            <a:off x="6453443" y="4146673"/>
-            <a:ext cx="614411" cy="155709"/>
+            <a:off x="6453443" y="4272076"/>
+            <a:ext cx="614411" cy="124358"/>
           </a:xfrm>
           <a:prstGeom prst="rect">
             <a:avLst/>
@@ -34470,8 +34521,8 @@
         </p:nvSpPr>
         <p:spPr>
           <a:xfrm>
-            <a:off x="6442470" y="4135700"/>
-            <a:ext cx="636357" cy="177654"/>
+            <a:off x="6442470" y="4261104"/>
+            <a:ext cx="636357" cy="146304"/>
           </a:xfrm>
           <a:prstGeom prst="rect">
             <a:avLst/>
@@ -34496,9 +34547,9 @@
               </a:spcAft>
             </a:pPr>
             <a:r>
-              <a:rPr sz="580" b="0">
+              <a:rPr sz="620" b="0">
                 <a:solidFill>
-                  <a:srgbClr val="6E6A64"/>
+                  <a:srgbClr val="161616"/>
                 </a:solidFill>
                 <a:latin typeface="Helvetica Neue"/>
               </a:rPr>
@@ -34515,8 +34566,8 @@
         </p:nvSpPr>
         <p:spPr>
           <a:xfrm>
-            <a:off x="7089800" y="4146673"/>
-            <a:ext cx="614411" cy="155709"/>
+            <a:off x="7089800" y="4272076"/>
+            <a:ext cx="614411" cy="124358"/>
           </a:xfrm>
           <a:prstGeom prst="rect">
             <a:avLst/>
@@ -34559,8 +34610,8 @@
         </p:nvSpPr>
         <p:spPr>
           <a:xfrm>
-            <a:off x="7078827" y="4135700"/>
-            <a:ext cx="636357" cy="177654"/>
+            <a:off x="7078827" y="4261104"/>
+            <a:ext cx="636357" cy="146304"/>
           </a:xfrm>
           <a:prstGeom prst="rect">
             <a:avLst/>
@@ -34585,9 +34636,9 @@
               </a:spcAft>
             </a:pPr>
             <a:r>
-              <a:rPr sz="580" b="0">
+              <a:rPr sz="620" b="0">
                 <a:solidFill>
-                  <a:srgbClr val="6E6A64"/>
+                  <a:srgbClr val="161616"/>
                 </a:solidFill>
                 <a:latin typeface="Helvetica Neue"/>
               </a:rPr>
@@ -34604,8 +34655,8 @@
         </p:nvSpPr>
         <p:spPr>
           <a:xfrm>
-            <a:off x="7726157" y="4146673"/>
-            <a:ext cx="614411" cy="155709"/>
+            <a:off x="7726157" y="4272076"/>
+            <a:ext cx="614411" cy="124358"/>
           </a:xfrm>
           <a:prstGeom prst="rect">
             <a:avLst/>
@@ -34648,8 +34699,8 @@
         </p:nvSpPr>
         <p:spPr>
           <a:xfrm>
-            <a:off x="7715184" y="4135700"/>
-            <a:ext cx="636357" cy="177654"/>
+            <a:off x="7715184" y="4261104"/>
+            <a:ext cx="636357" cy="146304"/>
           </a:xfrm>
           <a:prstGeom prst="rect">
             <a:avLst/>
@@ -34674,9 +34725,9 @@
               </a:spcAft>
             </a:pPr>
             <a:r>
-              <a:rPr sz="580" b="0">
+              <a:rPr sz="620" b="0">
                 <a:solidFill>
-                  <a:srgbClr val="6E6A64"/>
+                  <a:srgbClr val="161616"/>
                 </a:solidFill>
                 <a:latin typeface="Helvetica Neue"/>
               </a:rPr>
@@ -34693,8 +34744,8 @@
         </p:nvSpPr>
         <p:spPr>
           <a:xfrm>
-            <a:off x="8362514" y="4146673"/>
-            <a:ext cx="614411" cy="155709"/>
+            <a:off x="8362514" y="4272076"/>
+            <a:ext cx="614411" cy="124358"/>
           </a:xfrm>
           <a:prstGeom prst="rect">
             <a:avLst/>
@@ -34737,8 +34788,8 @@
         </p:nvSpPr>
         <p:spPr>
           <a:xfrm>
-            <a:off x="8351541" y="4135700"/>
-            <a:ext cx="636357" cy="177654"/>
+            <a:off x="8351541" y="4261104"/>
+            <a:ext cx="636357" cy="146304"/>
           </a:xfrm>
           <a:prstGeom prst="rect">
             <a:avLst/>
@@ -34763,9 +34814,9 @@
               </a:spcAft>
             </a:pPr>
             <a:r>
-              <a:rPr sz="580" b="0">
+              <a:rPr sz="620" b="0">
                 <a:solidFill>
-                  <a:srgbClr val="6E6A64"/>
+                  <a:srgbClr val="161616"/>
                 </a:solidFill>
                 <a:latin typeface="Helvetica Neue"/>
               </a:rPr>
@@ -34782,8 +34833,8 @@
         </p:nvSpPr>
         <p:spPr>
           <a:xfrm>
-            <a:off x="8998871" y="4146673"/>
-            <a:ext cx="614411" cy="155709"/>
+            <a:off x="8998871" y="4272076"/>
+            <a:ext cx="614411" cy="124358"/>
           </a:xfrm>
           <a:prstGeom prst="rect">
             <a:avLst/>
@@ -34826,8 +34877,8 @@
         </p:nvSpPr>
         <p:spPr>
           <a:xfrm>
-            <a:off x="9635228" y="4146673"/>
-            <a:ext cx="614411" cy="155709"/>
+            <a:off x="9635228" y="4272076"/>
+            <a:ext cx="614411" cy="124358"/>
           </a:xfrm>
           <a:prstGeom prst="rect">
             <a:avLst/>
@@ -34870,8 +34921,8 @@
         </p:nvSpPr>
         <p:spPr>
           <a:xfrm>
-            <a:off x="9624255" y="4135700"/>
-            <a:ext cx="636357" cy="177654"/>
+            <a:off x="9624255" y="4261104"/>
+            <a:ext cx="636357" cy="146304"/>
           </a:xfrm>
           <a:prstGeom prst="rect">
             <a:avLst/>
@@ -34896,9 +34947,9 @@
               </a:spcAft>
             </a:pPr>
             <a:r>
-              <a:rPr sz="580" b="0">
+              <a:rPr sz="620" b="0">
                 <a:solidFill>
-                  <a:srgbClr val="6E6A64"/>
+                  <a:srgbClr val="161616"/>
                 </a:solidFill>
                 <a:latin typeface="Helvetica Neue"/>
               </a:rPr>
@@ -34915,8 +34966,8 @@
         </p:nvSpPr>
         <p:spPr>
           <a:xfrm>
-            <a:off x="10271585" y="4146673"/>
-            <a:ext cx="614411" cy="155709"/>
+            <a:off x="10271585" y="4272076"/>
+            <a:ext cx="614411" cy="124358"/>
           </a:xfrm>
           <a:prstGeom prst="rect">
             <a:avLst/>
@@ -34959,8 +35010,8 @@
         </p:nvSpPr>
         <p:spPr>
           <a:xfrm>
-            <a:off x="10260613" y="4135700"/>
-            <a:ext cx="636357" cy="177654"/>
+            <a:off x="10260613" y="4261104"/>
+            <a:ext cx="636357" cy="146304"/>
           </a:xfrm>
           <a:prstGeom prst="rect">
             <a:avLst/>
@@ -34985,9 +35036,9 @@
               </a:spcAft>
             </a:pPr>
             <a:r>
-              <a:rPr sz="580" b="0">
+              <a:rPr sz="620" b="0">
                 <a:solidFill>
-                  <a:srgbClr val="6E6A64"/>
+                  <a:srgbClr val="161616"/>
                 </a:solidFill>
                 <a:latin typeface="Helvetica Neue"/>
               </a:rPr>
@@ -35004,8 +35055,8 @@
         </p:nvSpPr>
         <p:spPr>
           <a:xfrm>
-            <a:off x="10907942" y="4146673"/>
-            <a:ext cx="614411" cy="155709"/>
+            <a:off x="10907942" y="4272076"/>
+            <a:ext cx="614411" cy="124358"/>
           </a:xfrm>
           <a:prstGeom prst="rect">
             <a:avLst/>
@@ -35048,8 +35099,8 @@
         </p:nvSpPr>
         <p:spPr>
           <a:xfrm>
-            <a:off x="10896970" y="4135700"/>
-            <a:ext cx="636357" cy="177654"/>
+            <a:off x="10896970" y="4261104"/>
+            <a:ext cx="636357" cy="146304"/>
           </a:xfrm>
           <a:prstGeom prst="rect">
             <a:avLst/>
@@ -35074,9 +35125,9 @@
               </a:spcAft>
             </a:pPr>
             <a:r>
-              <a:rPr sz="580" b="0">
+              <a:rPr sz="620" b="0">
                 <a:solidFill>
-                  <a:srgbClr val="6E6A64"/>
+                  <a:srgbClr val="161616"/>
                 </a:solidFill>
                 <a:latin typeface="Helvetica Neue"/>
               </a:rPr>
@@ -35093,8 +35144,8 @@
         </p:nvSpPr>
         <p:spPr>
           <a:xfrm>
-            <a:off x="704088" y="4313355"/>
-            <a:ext cx="1856231" cy="177654"/>
+            <a:off x="704088" y="4407407"/>
+            <a:ext cx="1856231" cy="146304"/>
           </a:xfrm>
           <a:prstGeom prst="rect">
             <a:avLst/>
@@ -35147,8 +35198,8 @@
         </p:nvSpPr>
         <p:spPr>
           <a:xfrm>
-            <a:off x="2635300" y="4324328"/>
-            <a:ext cx="614411" cy="155709"/>
+            <a:off x="2635300" y="4418380"/>
+            <a:ext cx="614411" cy="124358"/>
           </a:xfrm>
           <a:prstGeom prst="rect">
             <a:avLst/>
@@ -35191,8 +35242,8 @@
         </p:nvSpPr>
         <p:spPr>
           <a:xfrm>
-            <a:off x="2624328" y="4313355"/>
-            <a:ext cx="636357" cy="177654"/>
+            <a:off x="2624328" y="4407407"/>
+            <a:ext cx="636357" cy="146304"/>
           </a:xfrm>
           <a:prstGeom prst="rect">
             <a:avLst/>
@@ -35217,7 +35268,7 @@
               </a:spcAft>
             </a:pPr>
             <a:r>
-              <a:rPr sz="580" b="0">
+              <a:rPr sz="620" b="0">
                 <a:solidFill>
                   <a:srgbClr val="FFFFFF"/>
                 </a:solidFill>
@@ -35236,8 +35287,8 @@
         </p:nvSpPr>
         <p:spPr>
           <a:xfrm>
-            <a:off x="3271657" y="4324328"/>
-            <a:ext cx="614411" cy="155709"/>
+            <a:off x="3271657" y="4418380"/>
+            <a:ext cx="614411" cy="124358"/>
           </a:xfrm>
           <a:prstGeom prst="rect">
             <a:avLst/>
@@ -35280,8 +35331,8 @@
         </p:nvSpPr>
         <p:spPr>
           <a:xfrm>
-            <a:off x="3260685" y="4313355"/>
-            <a:ext cx="636357" cy="177654"/>
+            <a:off x="3260685" y="4407407"/>
+            <a:ext cx="636357" cy="146304"/>
           </a:xfrm>
           <a:prstGeom prst="rect">
             <a:avLst/>
@@ -35306,7 +35357,7 @@
               </a:spcAft>
             </a:pPr>
             <a:r>
-              <a:rPr sz="580" b="0">
+              <a:rPr sz="620" b="0">
                 <a:solidFill>
                   <a:srgbClr val="FFFFFF"/>
                 </a:solidFill>
@@ -35325,8 +35376,8 @@
         </p:nvSpPr>
         <p:spPr>
           <a:xfrm>
-            <a:off x="3908014" y="4324328"/>
-            <a:ext cx="614411" cy="155709"/>
+            <a:off x="3908014" y="4418380"/>
+            <a:ext cx="614411" cy="124358"/>
           </a:xfrm>
           <a:prstGeom prst="rect">
             <a:avLst/>
@@ -35369,8 +35420,8 @@
         </p:nvSpPr>
         <p:spPr>
           <a:xfrm>
-            <a:off x="3897042" y="4313355"/>
-            <a:ext cx="636357" cy="177654"/>
+            <a:off x="3897042" y="4407407"/>
+            <a:ext cx="636357" cy="146304"/>
           </a:xfrm>
           <a:prstGeom prst="rect">
             <a:avLst/>
@@ -35395,7 +35446,7 @@
               </a:spcAft>
             </a:pPr>
             <a:r>
-              <a:rPr sz="580" b="0">
+              <a:rPr sz="620" b="0">
                 <a:solidFill>
                   <a:srgbClr val="FFFFFF"/>
                 </a:solidFill>
@@ -35414,8 +35465,8 @@
         </p:nvSpPr>
         <p:spPr>
           <a:xfrm>
-            <a:off x="4544372" y="4324328"/>
-            <a:ext cx="614411" cy="155709"/>
+            <a:off x="4544372" y="4418380"/>
+            <a:ext cx="614411" cy="124358"/>
           </a:xfrm>
           <a:prstGeom prst="rect">
             <a:avLst/>
@@ -35458,8 +35509,8 @@
         </p:nvSpPr>
         <p:spPr>
           <a:xfrm>
-            <a:off x="4533399" y="4313355"/>
-            <a:ext cx="636357" cy="177654"/>
+            <a:off x="4533399" y="4407407"/>
+            <a:ext cx="636357" cy="146304"/>
           </a:xfrm>
           <a:prstGeom prst="rect">
             <a:avLst/>
@@ -35484,9 +35535,9 @@
               </a:spcAft>
             </a:pPr>
             <a:r>
-              <a:rPr sz="580" b="0">
+              <a:rPr sz="620" b="0">
                 <a:solidFill>
-                  <a:srgbClr val="6E6A64"/>
+                  <a:srgbClr val="161616"/>
                 </a:solidFill>
                 <a:latin typeface="Helvetica Neue"/>
               </a:rPr>
@@ -35503,8 +35554,8 @@
         </p:nvSpPr>
         <p:spPr>
           <a:xfrm>
-            <a:off x="5180729" y="4324328"/>
-            <a:ext cx="614411" cy="155709"/>
+            <a:off x="5180729" y="4418380"/>
+            <a:ext cx="614411" cy="124358"/>
           </a:xfrm>
           <a:prstGeom prst="rect">
             <a:avLst/>
@@ -35547,8 +35598,8 @@
         </p:nvSpPr>
         <p:spPr>
           <a:xfrm>
-            <a:off x="5169756" y="4313355"/>
-            <a:ext cx="636357" cy="177654"/>
+            <a:off x="5169756" y="4407407"/>
+            <a:ext cx="636357" cy="146304"/>
           </a:xfrm>
           <a:prstGeom prst="rect">
             <a:avLst/>
@@ -35573,9 +35624,9 @@
               </a:spcAft>
             </a:pPr>
             <a:r>
-              <a:rPr sz="580" b="0">
+              <a:rPr sz="620" b="0">
                 <a:solidFill>
-                  <a:srgbClr val="6E6A64"/>
+                  <a:srgbClr val="161616"/>
                 </a:solidFill>
                 <a:latin typeface="Helvetica Neue"/>
               </a:rPr>
@@ -35592,8 +35643,8 @@
         </p:nvSpPr>
         <p:spPr>
           <a:xfrm>
-            <a:off x="5817086" y="4324328"/>
-            <a:ext cx="614411" cy="155709"/>
+            <a:off x="5817086" y="4418380"/>
+            <a:ext cx="614411" cy="124358"/>
           </a:xfrm>
           <a:prstGeom prst="rect">
             <a:avLst/>
@@ -35636,8 +35687,8 @@
         </p:nvSpPr>
         <p:spPr>
           <a:xfrm>
-            <a:off x="5806113" y="4313355"/>
-            <a:ext cx="636357" cy="177654"/>
+            <a:off x="5806113" y="4407407"/>
+            <a:ext cx="636357" cy="146304"/>
           </a:xfrm>
           <a:prstGeom prst="rect">
             <a:avLst/>
@@ -35662,9 +35713,9 @@
               </a:spcAft>
             </a:pPr>
             <a:r>
-              <a:rPr sz="580" b="0">
+              <a:rPr sz="620" b="0">
                 <a:solidFill>
-                  <a:srgbClr val="6E6A64"/>
+                  <a:srgbClr val="161616"/>
                 </a:solidFill>
                 <a:latin typeface="Helvetica Neue"/>
               </a:rPr>
@@ -35681,8 +35732,8 @@
         </p:nvSpPr>
         <p:spPr>
           <a:xfrm>
-            <a:off x="6453443" y="4324328"/>
-            <a:ext cx="614411" cy="155709"/>
+            <a:off x="6453443" y="4418380"/>
+            <a:ext cx="614411" cy="124358"/>
           </a:xfrm>
           <a:prstGeom prst="rect">
             <a:avLst/>
@@ -35725,8 +35776,8 @@
         </p:nvSpPr>
         <p:spPr>
           <a:xfrm>
-            <a:off x="6442470" y="4313355"/>
-            <a:ext cx="636357" cy="177654"/>
+            <a:off x="6442470" y="4407407"/>
+            <a:ext cx="636357" cy="146304"/>
           </a:xfrm>
           <a:prstGeom prst="rect">
             <a:avLst/>
@@ -35751,9 +35802,9 @@
               </a:spcAft>
             </a:pPr>
             <a:r>
-              <a:rPr sz="580" b="0">
+              <a:rPr sz="620" b="0">
                 <a:solidFill>
-                  <a:srgbClr val="6E6A64"/>
+                  <a:srgbClr val="161616"/>
                 </a:solidFill>
                 <a:latin typeface="Helvetica Neue"/>
               </a:rPr>
@@ -35770,8 +35821,8 @@
         </p:nvSpPr>
         <p:spPr>
           <a:xfrm>
-            <a:off x="7089800" y="4324328"/>
-            <a:ext cx="614411" cy="155709"/>
+            <a:off x="7089800" y="4418380"/>
+            <a:ext cx="614411" cy="124358"/>
           </a:xfrm>
           <a:prstGeom prst="rect">
             <a:avLst/>
@@ -35814,8 +35865,8 @@
         </p:nvSpPr>
         <p:spPr>
           <a:xfrm>
-            <a:off x="7078827" y="4313355"/>
-            <a:ext cx="636357" cy="177654"/>
+            <a:off x="7078827" y="4407407"/>
+            <a:ext cx="636357" cy="146304"/>
           </a:xfrm>
           <a:prstGeom prst="rect">
             <a:avLst/>
@@ -35840,9 +35891,9 @@
               </a:spcAft>
             </a:pPr>
             <a:r>
-              <a:rPr sz="580" b="0">
+              <a:rPr sz="620" b="0">
                 <a:solidFill>
-                  <a:srgbClr val="6E6A64"/>
+                  <a:srgbClr val="161616"/>
                 </a:solidFill>
                 <a:latin typeface="Helvetica Neue"/>
               </a:rPr>
@@ -35859,8 +35910,8 @@
         </p:nvSpPr>
         <p:spPr>
           <a:xfrm>
-            <a:off x="7726157" y="4324328"/>
-            <a:ext cx="614411" cy="155709"/>
+            <a:off x="7726157" y="4418380"/>
+            <a:ext cx="614411" cy="124358"/>
           </a:xfrm>
           <a:prstGeom prst="rect">
             <a:avLst/>
@@ -35903,8 +35954,8 @@
         </p:nvSpPr>
         <p:spPr>
           <a:xfrm>
-            <a:off x="7715184" y="4313355"/>
-            <a:ext cx="636357" cy="177654"/>
+            <a:off x="7715184" y="4407407"/>
+            <a:ext cx="636357" cy="146304"/>
           </a:xfrm>
           <a:prstGeom prst="rect">
             <a:avLst/>
@@ -35929,9 +35980,9 @@
               </a:spcAft>
             </a:pPr>
             <a:r>
-              <a:rPr sz="580" b="0">
+              <a:rPr sz="620" b="0">
                 <a:solidFill>
-                  <a:srgbClr val="6E6A64"/>
+                  <a:srgbClr val="161616"/>
                 </a:solidFill>
                 <a:latin typeface="Helvetica Neue"/>
               </a:rPr>
@@ -35948,8 +35999,8 @@
         </p:nvSpPr>
         <p:spPr>
           <a:xfrm>
-            <a:off x="8362514" y="4324328"/>
-            <a:ext cx="614411" cy="155709"/>
+            <a:off x="8362514" y="4418380"/>
+            <a:ext cx="614411" cy="124358"/>
           </a:xfrm>
           <a:prstGeom prst="rect">
             <a:avLst/>
@@ -35992,8 +36043,8 @@
         </p:nvSpPr>
         <p:spPr>
           <a:xfrm>
-            <a:off x="8351541" y="4313355"/>
-            <a:ext cx="636357" cy="177654"/>
+            <a:off x="8351541" y="4407407"/>
+            <a:ext cx="636357" cy="146304"/>
           </a:xfrm>
           <a:prstGeom prst="rect">
             <a:avLst/>
@@ -36018,9 +36069,9 @@
               </a:spcAft>
             </a:pPr>
             <a:r>
-              <a:rPr sz="580" b="0">
+              <a:rPr sz="620" b="0">
                 <a:solidFill>
-                  <a:srgbClr val="6E6A64"/>
+                  <a:srgbClr val="161616"/>
                 </a:solidFill>
                 <a:latin typeface="Helvetica Neue"/>
               </a:rPr>
@@ -36037,8 +36088,8 @@
         </p:nvSpPr>
         <p:spPr>
           <a:xfrm>
-            <a:off x="8998871" y="4324328"/>
-            <a:ext cx="614411" cy="155709"/>
+            <a:off x="8998871" y="4418380"/>
+            <a:ext cx="614411" cy="124358"/>
           </a:xfrm>
           <a:prstGeom prst="rect">
             <a:avLst/>
@@ -36081,8 +36132,8 @@
         </p:nvSpPr>
         <p:spPr>
           <a:xfrm>
-            <a:off x="8987898" y="4313355"/>
-            <a:ext cx="636357" cy="177654"/>
+            <a:off x="8987898" y="4407407"/>
+            <a:ext cx="636357" cy="146304"/>
           </a:xfrm>
           <a:prstGeom prst="rect">
             <a:avLst/>
@@ -36107,9 +36158,9 @@
               </a:spcAft>
             </a:pPr>
             <a:r>
-              <a:rPr sz="580" b="0">
+              <a:rPr sz="620" b="0">
                 <a:solidFill>
-                  <a:srgbClr val="6E6A64"/>
+                  <a:srgbClr val="161616"/>
                 </a:solidFill>
                 <a:latin typeface="Helvetica Neue"/>
               </a:rPr>
@@ -36126,8 +36177,8 @@
         </p:nvSpPr>
         <p:spPr>
           <a:xfrm>
-            <a:off x="9635228" y="4324328"/>
-            <a:ext cx="614411" cy="155709"/>
+            <a:off x="9635228" y="4418380"/>
+            <a:ext cx="614411" cy="124358"/>
           </a:xfrm>
           <a:prstGeom prst="rect">
             <a:avLst/>
@@ -36170,8 +36221,8 @@
         </p:nvSpPr>
         <p:spPr>
           <a:xfrm>
-            <a:off x="10271585" y="4324328"/>
-            <a:ext cx="614411" cy="155709"/>
+            <a:off x="10271585" y="4418380"/>
+            <a:ext cx="614411" cy="124358"/>
           </a:xfrm>
           <a:prstGeom prst="rect">
             <a:avLst/>
@@ -36214,8 +36265,8 @@
         </p:nvSpPr>
         <p:spPr>
           <a:xfrm>
-            <a:off x="10260613" y="4313355"/>
-            <a:ext cx="636357" cy="177654"/>
+            <a:off x="10260613" y="4407407"/>
+            <a:ext cx="636357" cy="146304"/>
           </a:xfrm>
           <a:prstGeom prst="rect">
             <a:avLst/>
@@ -36240,9 +36291,9 @@
               </a:spcAft>
             </a:pPr>
             <a:r>
-              <a:rPr sz="580" b="0">
+              <a:rPr sz="620" b="0">
                 <a:solidFill>
-                  <a:srgbClr val="6E6A64"/>
+                  <a:srgbClr val="161616"/>
                 </a:solidFill>
                 <a:latin typeface="Helvetica Neue"/>
               </a:rPr>
@@ -36259,8 +36310,8 @@
         </p:nvSpPr>
         <p:spPr>
           <a:xfrm>
-            <a:off x="10907942" y="4324328"/>
-            <a:ext cx="614411" cy="155709"/>
+            <a:off x="10907942" y="4418380"/>
+            <a:ext cx="614411" cy="124358"/>
           </a:xfrm>
           <a:prstGeom prst="rect">
             <a:avLst/>
@@ -36303,8 +36354,8 @@
         </p:nvSpPr>
         <p:spPr>
           <a:xfrm>
-            <a:off x="10896970" y="4313355"/>
-            <a:ext cx="636357" cy="177654"/>
+            <a:off x="10896970" y="4407407"/>
+            <a:ext cx="636357" cy="146304"/>
           </a:xfrm>
           <a:prstGeom prst="rect">
             <a:avLst/>
@@ -36329,9 +36380,9 @@
               </a:spcAft>
             </a:pPr>
             <a:r>
-              <a:rPr sz="580" b="0">
+              <a:rPr sz="620" b="0">
                 <a:solidFill>
-                  <a:srgbClr val="6E6A64"/>
+                  <a:srgbClr val="161616"/>
                 </a:solidFill>
                 <a:latin typeface="Helvetica Neue"/>
               </a:rPr>
@@ -36348,8 +36399,8 @@
         </p:nvSpPr>
         <p:spPr>
           <a:xfrm>
-            <a:off x="704088" y="4491010"/>
-            <a:ext cx="1856231" cy="177654"/>
+            <a:off x="704088" y="4553712"/>
+            <a:ext cx="1856231" cy="146304"/>
           </a:xfrm>
           <a:prstGeom prst="rect">
             <a:avLst/>
@@ -36389,7 +36440,7 @@
                 </a:solidFill>
                 <a:latin typeface="Helvetica Neue"/>
               </a:rPr>
-              <a:t>Colina Norte</a:t>
+              <a:t>Colina · Reina N.</a:t>
             </a:r>
           </a:p>
         </p:txBody>
@@ -36402,8 +36453,8 @@
         </p:nvSpPr>
         <p:spPr>
           <a:xfrm>
-            <a:off x="2635300" y="4501983"/>
-            <a:ext cx="614411" cy="155709"/>
+            <a:off x="2635300" y="4564684"/>
+            <a:ext cx="614411" cy="124358"/>
           </a:xfrm>
           <a:prstGeom prst="rect">
             <a:avLst/>
@@ -36446,8 +36497,8 @@
         </p:nvSpPr>
         <p:spPr>
           <a:xfrm>
-            <a:off x="2624328" y="4491010"/>
-            <a:ext cx="636357" cy="177654"/>
+            <a:off x="2624328" y="4553712"/>
+            <a:ext cx="636357" cy="146304"/>
           </a:xfrm>
           <a:prstGeom prst="rect">
             <a:avLst/>
@@ -36472,7 +36523,7 @@
               </a:spcAft>
             </a:pPr>
             <a:r>
-              <a:rPr sz="580" b="0">
+              <a:rPr sz="620" b="0">
                 <a:solidFill>
                   <a:srgbClr val="FFFFFF"/>
                 </a:solidFill>
@@ -36491,8 +36542,8 @@
         </p:nvSpPr>
         <p:spPr>
           <a:xfrm>
-            <a:off x="3271657" y="4501983"/>
-            <a:ext cx="614411" cy="155709"/>
+            <a:off x="3271657" y="4564684"/>
+            <a:ext cx="614411" cy="124358"/>
           </a:xfrm>
           <a:prstGeom prst="rect">
             <a:avLst/>
@@ -36535,8 +36586,8 @@
         </p:nvSpPr>
         <p:spPr>
           <a:xfrm>
-            <a:off x="3260685" y="4491010"/>
-            <a:ext cx="636357" cy="177654"/>
+            <a:off x="3260685" y="4553712"/>
+            <a:ext cx="636357" cy="146304"/>
           </a:xfrm>
           <a:prstGeom prst="rect">
             <a:avLst/>
@@ -36561,7 +36612,7 @@
               </a:spcAft>
             </a:pPr>
             <a:r>
-              <a:rPr sz="580" b="0">
+              <a:rPr sz="620" b="0">
                 <a:solidFill>
                   <a:srgbClr val="FFFFFF"/>
                 </a:solidFill>
@@ -36580,8 +36631,8 @@
         </p:nvSpPr>
         <p:spPr>
           <a:xfrm>
-            <a:off x="3908014" y="4501983"/>
-            <a:ext cx="614411" cy="155709"/>
+            <a:off x="3908014" y="4564684"/>
+            <a:ext cx="614411" cy="124358"/>
           </a:xfrm>
           <a:prstGeom prst="rect">
             <a:avLst/>
@@ -36624,8 +36675,8 @@
         </p:nvSpPr>
         <p:spPr>
           <a:xfrm>
-            <a:off x="3897042" y="4491010"/>
-            <a:ext cx="636357" cy="177654"/>
+            <a:off x="3897042" y="4553712"/>
+            <a:ext cx="636357" cy="146304"/>
           </a:xfrm>
           <a:prstGeom prst="rect">
             <a:avLst/>
@@ -36650,7 +36701,7 @@
               </a:spcAft>
             </a:pPr>
             <a:r>
-              <a:rPr sz="580" b="0">
+              <a:rPr sz="620" b="0">
                 <a:solidFill>
                   <a:srgbClr val="FFFFFF"/>
                 </a:solidFill>
@@ -36669,8 +36720,8 @@
         </p:nvSpPr>
         <p:spPr>
           <a:xfrm>
-            <a:off x="4544372" y="4501983"/>
-            <a:ext cx="614411" cy="155709"/>
+            <a:off x="4544372" y="4564684"/>
+            <a:ext cx="614411" cy="124358"/>
           </a:xfrm>
           <a:prstGeom prst="rect">
             <a:avLst/>
@@ -36713,8 +36764,8 @@
         </p:nvSpPr>
         <p:spPr>
           <a:xfrm>
-            <a:off x="4533399" y="4491010"/>
-            <a:ext cx="636357" cy="177654"/>
+            <a:off x="4533399" y="4553712"/>
+            <a:ext cx="636357" cy="146304"/>
           </a:xfrm>
           <a:prstGeom prst="rect">
             <a:avLst/>
@@ -36739,9 +36790,9 @@
               </a:spcAft>
             </a:pPr>
             <a:r>
-              <a:rPr sz="580" b="0">
+              <a:rPr sz="620" b="0">
                 <a:solidFill>
-                  <a:srgbClr val="6E6A64"/>
+                  <a:srgbClr val="161616"/>
                 </a:solidFill>
                 <a:latin typeface="Helvetica Neue"/>
               </a:rPr>
@@ -36758,8 +36809,8 @@
         </p:nvSpPr>
         <p:spPr>
           <a:xfrm>
-            <a:off x="5180729" y="4501983"/>
-            <a:ext cx="614411" cy="155709"/>
+            <a:off x="5180729" y="4564684"/>
+            <a:ext cx="614411" cy="124358"/>
           </a:xfrm>
           <a:prstGeom prst="rect">
             <a:avLst/>
@@ -36802,8 +36853,8 @@
         </p:nvSpPr>
         <p:spPr>
           <a:xfrm>
-            <a:off x="5169756" y="4491010"/>
-            <a:ext cx="636357" cy="177654"/>
+            <a:off x="5169756" y="4553712"/>
+            <a:ext cx="636357" cy="146304"/>
           </a:xfrm>
           <a:prstGeom prst="rect">
             <a:avLst/>
@@ -36828,9 +36879,9 @@
               </a:spcAft>
             </a:pPr>
             <a:r>
-              <a:rPr sz="580" b="0">
+              <a:rPr sz="620" b="0">
                 <a:solidFill>
-                  <a:srgbClr val="6E6A64"/>
+                  <a:srgbClr val="161616"/>
                 </a:solidFill>
                 <a:latin typeface="Helvetica Neue"/>
               </a:rPr>
@@ -36847,8 +36898,8 @@
         </p:nvSpPr>
         <p:spPr>
           <a:xfrm>
-            <a:off x="5817086" y="4501983"/>
-            <a:ext cx="614411" cy="155709"/>
+            <a:off x="5817086" y="4564684"/>
+            <a:ext cx="614411" cy="124358"/>
           </a:xfrm>
           <a:prstGeom prst="rect">
             <a:avLst/>
@@ -36891,8 +36942,8 @@
         </p:nvSpPr>
         <p:spPr>
           <a:xfrm>
-            <a:off x="5806113" y="4491010"/>
-            <a:ext cx="636357" cy="177654"/>
+            <a:off x="5806113" y="4553712"/>
+            <a:ext cx="636357" cy="146304"/>
           </a:xfrm>
           <a:prstGeom prst="rect">
             <a:avLst/>
@@ -36917,9 +36968,9 @@
               </a:spcAft>
             </a:pPr>
             <a:r>
-              <a:rPr sz="580" b="0">
+              <a:rPr sz="620" b="0">
                 <a:solidFill>
-                  <a:srgbClr val="6E6A64"/>
+                  <a:srgbClr val="161616"/>
                 </a:solidFill>
                 <a:latin typeface="Helvetica Neue"/>
               </a:rPr>
@@ -36936,8 +36987,8 @@
         </p:nvSpPr>
         <p:spPr>
           <a:xfrm>
-            <a:off x="6453443" y="4501983"/>
-            <a:ext cx="614411" cy="155709"/>
+            <a:off x="6453443" y="4564684"/>
+            <a:ext cx="614411" cy="124358"/>
           </a:xfrm>
           <a:prstGeom prst="rect">
             <a:avLst/>
@@ -36980,8 +37031,8 @@
         </p:nvSpPr>
         <p:spPr>
           <a:xfrm>
-            <a:off x="6442470" y="4491010"/>
-            <a:ext cx="636357" cy="177654"/>
+            <a:off x="6442470" y="4553712"/>
+            <a:ext cx="636357" cy="146304"/>
           </a:xfrm>
           <a:prstGeom prst="rect">
             <a:avLst/>
@@ -37006,9 +37057,9 @@
               </a:spcAft>
             </a:pPr>
             <a:r>
-              <a:rPr sz="580" b="0">
+              <a:rPr sz="620" b="0">
                 <a:solidFill>
-                  <a:srgbClr val="6E6A64"/>
+                  <a:srgbClr val="161616"/>
                 </a:solidFill>
                 <a:latin typeface="Helvetica Neue"/>
               </a:rPr>
@@ -37025,8 +37076,8 @@
         </p:nvSpPr>
         <p:spPr>
           <a:xfrm>
-            <a:off x="7089800" y="4501983"/>
-            <a:ext cx="614411" cy="155709"/>
+            <a:off x="7089800" y="4564684"/>
+            <a:ext cx="614411" cy="124358"/>
           </a:xfrm>
           <a:prstGeom prst="rect">
             <a:avLst/>
@@ -37069,8 +37120,8 @@
         </p:nvSpPr>
         <p:spPr>
           <a:xfrm>
-            <a:off x="7078827" y="4491010"/>
-            <a:ext cx="636357" cy="177654"/>
+            <a:off x="7078827" y="4553712"/>
+            <a:ext cx="636357" cy="146304"/>
           </a:xfrm>
           <a:prstGeom prst="rect">
             <a:avLst/>
@@ -37095,9 +37146,9 @@
               </a:spcAft>
             </a:pPr>
             <a:r>
-              <a:rPr sz="580" b="0">
+              <a:rPr sz="620" b="0">
                 <a:solidFill>
-                  <a:srgbClr val="6E6A64"/>
+                  <a:srgbClr val="161616"/>
                 </a:solidFill>
                 <a:latin typeface="Helvetica Neue"/>
               </a:rPr>
@@ -37114,8 +37165,8 @@
         </p:nvSpPr>
         <p:spPr>
           <a:xfrm>
-            <a:off x="7726157" y="4501983"/>
-            <a:ext cx="614411" cy="155709"/>
+            <a:off x="7726157" y="4564684"/>
+            <a:ext cx="614411" cy="124358"/>
           </a:xfrm>
           <a:prstGeom prst="rect">
             <a:avLst/>
@@ -37158,8 +37209,8 @@
         </p:nvSpPr>
         <p:spPr>
           <a:xfrm>
-            <a:off x="7715184" y="4491010"/>
-            <a:ext cx="636357" cy="177654"/>
+            <a:off x="7715184" y="4553712"/>
+            <a:ext cx="636357" cy="146304"/>
           </a:xfrm>
           <a:prstGeom prst="rect">
             <a:avLst/>
@@ -37184,9 +37235,9 @@
               </a:spcAft>
             </a:pPr>
             <a:r>
-              <a:rPr sz="580" b="0">
+              <a:rPr sz="620" b="0">
                 <a:solidFill>
-                  <a:srgbClr val="6E6A64"/>
+                  <a:srgbClr val="161616"/>
                 </a:solidFill>
                 <a:latin typeface="Helvetica Neue"/>
               </a:rPr>
@@ -37203,8 +37254,8 @@
         </p:nvSpPr>
         <p:spPr>
           <a:xfrm>
-            <a:off x="8362514" y="4501983"/>
-            <a:ext cx="614411" cy="155709"/>
+            <a:off x="8362514" y="4564684"/>
+            <a:ext cx="614411" cy="124358"/>
           </a:xfrm>
           <a:prstGeom prst="rect">
             <a:avLst/>
@@ -37247,8 +37298,8 @@
         </p:nvSpPr>
         <p:spPr>
           <a:xfrm>
-            <a:off x="8351541" y="4491010"/>
-            <a:ext cx="636357" cy="177654"/>
+            <a:off x="8351541" y="4553712"/>
+            <a:ext cx="636357" cy="146304"/>
           </a:xfrm>
           <a:prstGeom prst="rect">
             <a:avLst/>
@@ -37273,9 +37324,9 @@
               </a:spcAft>
             </a:pPr>
             <a:r>
-              <a:rPr sz="580" b="0">
+              <a:rPr sz="620" b="0">
                 <a:solidFill>
-                  <a:srgbClr val="6E6A64"/>
+                  <a:srgbClr val="161616"/>
                 </a:solidFill>
                 <a:latin typeface="Helvetica Neue"/>
               </a:rPr>
@@ -37292,8 +37343,8 @@
         </p:nvSpPr>
         <p:spPr>
           <a:xfrm>
-            <a:off x="8998871" y="4501983"/>
-            <a:ext cx="614411" cy="155709"/>
+            <a:off x="8998871" y="4564684"/>
+            <a:ext cx="614411" cy="124358"/>
           </a:xfrm>
           <a:prstGeom prst="rect">
             <a:avLst/>
@@ -37336,8 +37387,8 @@
         </p:nvSpPr>
         <p:spPr>
           <a:xfrm>
-            <a:off x="8987898" y="4491010"/>
-            <a:ext cx="636357" cy="177654"/>
+            <a:off x="8987898" y="4553712"/>
+            <a:ext cx="636357" cy="146304"/>
           </a:xfrm>
           <a:prstGeom prst="rect">
             <a:avLst/>
@@ -37362,9 +37413,9 @@
               </a:spcAft>
             </a:pPr>
             <a:r>
-              <a:rPr sz="580" b="0">
+              <a:rPr sz="620" b="0">
                 <a:solidFill>
-                  <a:srgbClr val="6E6A64"/>
+                  <a:srgbClr val="161616"/>
                 </a:solidFill>
                 <a:latin typeface="Helvetica Neue"/>
               </a:rPr>
@@ -37381,8 +37432,8 @@
         </p:nvSpPr>
         <p:spPr>
           <a:xfrm>
-            <a:off x="9635228" y="4501983"/>
-            <a:ext cx="614411" cy="155709"/>
+            <a:off x="9635228" y="4564684"/>
+            <a:ext cx="614411" cy="124358"/>
           </a:xfrm>
           <a:prstGeom prst="rect">
             <a:avLst/>
@@ -37425,8 +37476,8 @@
         </p:nvSpPr>
         <p:spPr>
           <a:xfrm>
-            <a:off x="9624255" y="4491010"/>
-            <a:ext cx="636357" cy="177654"/>
+            <a:off x="9624255" y="4553712"/>
+            <a:ext cx="636357" cy="146304"/>
           </a:xfrm>
           <a:prstGeom prst="rect">
             <a:avLst/>
@@ -37451,9 +37502,9 @@
               </a:spcAft>
             </a:pPr>
             <a:r>
-              <a:rPr sz="580" b="0">
+              <a:rPr sz="620" b="0">
                 <a:solidFill>
-                  <a:srgbClr val="6E6A64"/>
+                  <a:srgbClr val="161616"/>
                 </a:solidFill>
                 <a:latin typeface="Helvetica Neue"/>
               </a:rPr>
@@ -37470,8 +37521,8 @@
         </p:nvSpPr>
         <p:spPr>
           <a:xfrm>
-            <a:off x="10271585" y="4501983"/>
-            <a:ext cx="614411" cy="155709"/>
+            <a:off x="10271585" y="4564684"/>
+            <a:ext cx="614411" cy="124358"/>
           </a:xfrm>
           <a:prstGeom prst="rect">
             <a:avLst/>
@@ -37514,8 +37565,8 @@
         </p:nvSpPr>
         <p:spPr>
           <a:xfrm>
-            <a:off x="10907942" y="4501983"/>
-            <a:ext cx="614411" cy="155709"/>
+            <a:off x="10907942" y="4564684"/>
+            <a:ext cx="614411" cy="124358"/>
           </a:xfrm>
           <a:prstGeom prst="rect">
             <a:avLst/>
@@ -37558,8 +37609,8 @@
         </p:nvSpPr>
         <p:spPr>
           <a:xfrm>
-            <a:off x="10896970" y="4491010"/>
-            <a:ext cx="636357" cy="177654"/>
+            <a:off x="10896970" y="4553712"/>
+            <a:ext cx="636357" cy="146304"/>
           </a:xfrm>
           <a:prstGeom prst="rect">
             <a:avLst/>
@@ -37584,9 +37635,9 @@
               </a:spcAft>
             </a:pPr>
             <a:r>
-              <a:rPr sz="580" b="0">
+              <a:rPr sz="620" b="0">
                 <a:solidFill>
-                  <a:srgbClr val="6E6A64"/>
+                  <a:srgbClr val="161616"/>
                 </a:solidFill>
                 <a:latin typeface="Helvetica Neue"/>
               </a:rPr>
@@ -37603,8 +37654,8 @@
         </p:nvSpPr>
         <p:spPr>
           <a:xfrm>
-            <a:off x="704088" y="4668665"/>
-            <a:ext cx="1856231" cy="177654"/>
+            <a:off x="704088" y="4700016"/>
+            <a:ext cx="1856231" cy="146304"/>
           </a:xfrm>
           <a:prstGeom prst="rect">
             <a:avLst/>
@@ -37657,8 +37708,8 @@
         </p:nvSpPr>
         <p:spPr>
           <a:xfrm>
-            <a:off x="2635300" y="4679637"/>
-            <a:ext cx="614411" cy="155709"/>
+            <a:off x="2635300" y="4710988"/>
+            <a:ext cx="614411" cy="124358"/>
           </a:xfrm>
           <a:prstGeom prst="rect">
             <a:avLst/>
@@ -37701,8 +37752,8 @@
         </p:nvSpPr>
         <p:spPr>
           <a:xfrm>
-            <a:off x="2624328" y="4668665"/>
-            <a:ext cx="636357" cy="177654"/>
+            <a:off x="2624328" y="4700016"/>
+            <a:ext cx="636357" cy="146304"/>
           </a:xfrm>
           <a:prstGeom prst="rect">
             <a:avLst/>
@@ -37727,7 +37778,7 @@
               </a:spcAft>
             </a:pPr>
             <a:r>
-              <a:rPr sz="580" b="0">
+              <a:rPr sz="620" b="0">
                 <a:solidFill>
                   <a:srgbClr val="FFFFFF"/>
                 </a:solidFill>
@@ -37746,8 +37797,8 @@
         </p:nvSpPr>
         <p:spPr>
           <a:xfrm>
-            <a:off x="3271657" y="4679637"/>
-            <a:ext cx="614411" cy="155709"/>
+            <a:off x="3271657" y="4710988"/>
+            <a:ext cx="614411" cy="124358"/>
           </a:xfrm>
           <a:prstGeom prst="rect">
             <a:avLst/>
@@ -37790,8 +37841,8 @@
         </p:nvSpPr>
         <p:spPr>
           <a:xfrm>
-            <a:off x="3260685" y="4668665"/>
-            <a:ext cx="636357" cy="177654"/>
+            <a:off x="3260685" y="4700016"/>
+            <a:ext cx="636357" cy="146304"/>
           </a:xfrm>
           <a:prstGeom prst="rect">
             <a:avLst/>
@@ -37816,7 +37867,7 @@
               </a:spcAft>
             </a:pPr>
             <a:r>
-              <a:rPr sz="580" b="0">
+              <a:rPr sz="620" b="0">
                 <a:solidFill>
                   <a:srgbClr val="FFFFFF"/>
                 </a:solidFill>
@@ -37835,8 +37886,8 @@
         </p:nvSpPr>
         <p:spPr>
           <a:xfrm>
-            <a:off x="3908014" y="4679637"/>
-            <a:ext cx="614411" cy="155709"/>
+            <a:off x="3908014" y="4710988"/>
+            <a:ext cx="614411" cy="124358"/>
           </a:xfrm>
           <a:prstGeom prst="rect">
             <a:avLst/>
@@ -37879,8 +37930,8 @@
         </p:nvSpPr>
         <p:spPr>
           <a:xfrm>
-            <a:off x="3897042" y="4668665"/>
-            <a:ext cx="636357" cy="177654"/>
+            <a:off x="3897042" y="4700016"/>
+            <a:ext cx="636357" cy="146304"/>
           </a:xfrm>
           <a:prstGeom prst="rect">
             <a:avLst/>
@@ -37905,7 +37956,7 @@
               </a:spcAft>
             </a:pPr>
             <a:r>
-              <a:rPr sz="580" b="0">
+              <a:rPr sz="620" b="0">
                 <a:solidFill>
                   <a:srgbClr val="FFFFFF"/>
                 </a:solidFill>
@@ -37924,8 +37975,8 @@
         </p:nvSpPr>
         <p:spPr>
           <a:xfrm>
-            <a:off x="4544372" y="4679637"/>
-            <a:ext cx="614411" cy="155709"/>
+            <a:off x="4544372" y="4710988"/>
+            <a:ext cx="614411" cy="124358"/>
           </a:xfrm>
           <a:prstGeom prst="rect">
             <a:avLst/>
@@ -37968,8 +38019,8 @@
         </p:nvSpPr>
         <p:spPr>
           <a:xfrm>
-            <a:off x="4533399" y="4668665"/>
-            <a:ext cx="636357" cy="177654"/>
+            <a:off x="4533399" y="4700016"/>
+            <a:ext cx="636357" cy="146304"/>
           </a:xfrm>
           <a:prstGeom prst="rect">
             <a:avLst/>
@@ -37994,7 +38045,7 @@
               </a:spcAft>
             </a:pPr>
             <a:r>
-              <a:rPr sz="580" b="0">
+              <a:rPr sz="620" b="0">
                 <a:solidFill>
                   <a:srgbClr val="FFFFFF"/>
                 </a:solidFill>
@@ -38013,8 +38064,8 @@
         </p:nvSpPr>
         <p:spPr>
           <a:xfrm>
-            <a:off x="5180729" y="4679637"/>
-            <a:ext cx="614411" cy="155709"/>
+            <a:off x="5180729" y="4710988"/>
+            <a:ext cx="614411" cy="124358"/>
           </a:xfrm>
           <a:prstGeom prst="rect">
             <a:avLst/>
@@ -38057,8 +38108,8 @@
         </p:nvSpPr>
         <p:spPr>
           <a:xfrm>
-            <a:off x="5169756" y="4668665"/>
-            <a:ext cx="636357" cy="177654"/>
+            <a:off x="5169756" y="4700016"/>
+            <a:ext cx="636357" cy="146304"/>
           </a:xfrm>
           <a:prstGeom prst="rect">
             <a:avLst/>
@@ -38083,7 +38134,7 @@
               </a:spcAft>
             </a:pPr>
             <a:r>
-              <a:rPr sz="580" b="0">
+              <a:rPr sz="620" b="0">
                 <a:solidFill>
                   <a:srgbClr val="FFFFFF"/>
                 </a:solidFill>
@@ -38102,8 +38153,8 @@
         </p:nvSpPr>
         <p:spPr>
           <a:xfrm>
-            <a:off x="5817086" y="4679637"/>
-            <a:ext cx="614411" cy="155709"/>
+            <a:off x="5817086" y="4710988"/>
+            <a:ext cx="614411" cy="124358"/>
           </a:xfrm>
           <a:prstGeom prst="rect">
             <a:avLst/>
@@ -38146,8 +38197,8 @@
         </p:nvSpPr>
         <p:spPr>
           <a:xfrm>
-            <a:off x="5806113" y="4668665"/>
-            <a:ext cx="636357" cy="177654"/>
+            <a:off x="5806113" y="4700016"/>
+            <a:ext cx="636357" cy="146304"/>
           </a:xfrm>
           <a:prstGeom prst="rect">
             <a:avLst/>
@@ -38172,7 +38223,7 @@
               </a:spcAft>
             </a:pPr>
             <a:r>
-              <a:rPr sz="580" b="0">
+              <a:rPr sz="620" b="0">
                 <a:solidFill>
                   <a:srgbClr val="FFFFFF"/>
                 </a:solidFill>
@@ -38191,8 +38242,8 @@
         </p:nvSpPr>
         <p:spPr>
           <a:xfrm>
-            <a:off x="6453443" y="4679637"/>
-            <a:ext cx="614411" cy="155709"/>
+            <a:off x="6453443" y="4710988"/>
+            <a:ext cx="614411" cy="124358"/>
           </a:xfrm>
           <a:prstGeom prst="rect">
             <a:avLst/>
@@ -38235,8 +38286,8 @@
         </p:nvSpPr>
         <p:spPr>
           <a:xfrm>
-            <a:off x="6442470" y="4668665"/>
-            <a:ext cx="636357" cy="177654"/>
+            <a:off x="6442470" y="4700016"/>
+            <a:ext cx="636357" cy="146304"/>
           </a:xfrm>
           <a:prstGeom prst="rect">
             <a:avLst/>
@@ -38261,7 +38312,7 @@
               </a:spcAft>
             </a:pPr>
             <a:r>
-              <a:rPr sz="580" b="0">
+              <a:rPr sz="620" b="0">
                 <a:solidFill>
                   <a:srgbClr val="FFFFFF"/>
                 </a:solidFill>
@@ -38280,8 +38331,8 @@
         </p:nvSpPr>
         <p:spPr>
           <a:xfrm>
-            <a:off x="7089800" y="4679637"/>
-            <a:ext cx="614411" cy="155709"/>
+            <a:off x="7089800" y="4710988"/>
+            <a:ext cx="614411" cy="124358"/>
           </a:xfrm>
           <a:prstGeom prst="rect">
             <a:avLst/>
@@ -38324,8 +38375,8 @@
         </p:nvSpPr>
         <p:spPr>
           <a:xfrm>
-            <a:off x="7078827" y="4668665"/>
-            <a:ext cx="636357" cy="177654"/>
+            <a:off x="7078827" y="4700016"/>
+            <a:ext cx="636357" cy="146304"/>
           </a:xfrm>
           <a:prstGeom prst="rect">
             <a:avLst/>
@@ -38350,9 +38401,9 @@
               </a:spcAft>
             </a:pPr>
             <a:r>
-              <a:rPr sz="580" b="0">
+              <a:rPr sz="620" b="0">
                 <a:solidFill>
-                  <a:srgbClr val="6E6A64"/>
+                  <a:srgbClr val="161616"/>
                 </a:solidFill>
                 <a:latin typeface="Helvetica Neue"/>
               </a:rPr>
@@ -38369,8 +38420,8 @@
         </p:nvSpPr>
         <p:spPr>
           <a:xfrm>
-            <a:off x="7726157" y="4679637"/>
-            <a:ext cx="614411" cy="155709"/>
+            <a:off x="7726157" y="4710988"/>
+            <a:ext cx="614411" cy="124358"/>
           </a:xfrm>
           <a:prstGeom prst="rect">
             <a:avLst/>
@@ -38413,8 +38464,8 @@
         </p:nvSpPr>
         <p:spPr>
           <a:xfrm>
-            <a:off x="7715184" y="4668665"/>
-            <a:ext cx="636357" cy="177654"/>
+            <a:off x="7715184" y="4700016"/>
+            <a:ext cx="636357" cy="146304"/>
           </a:xfrm>
           <a:prstGeom prst="rect">
             <a:avLst/>
@@ -38439,9 +38490,9 @@
               </a:spcAft>
             </a:pPr>
             <a:r>
-              <a:rPr sz="580" b="0">
+              <a:rPr sz="620" b="0">
                 <a:solidFill>
-                  <a:srgbClr val="6E6A64"/>
+                  <a:srgbClr val="161616"/>
                 </a:solidFill>
                 <a:latin typeface="Helvetica Neue"/>
               </a:rPr>
@@ -38458,8 +38509,8 @@
         </p:nvSpPr>
         <p:spPr>
           <a:xfrm>
-            <a:off x="8362514" y="4679637"/>
-            <a:ext cx="614411" cy="155709"/>
+            <a:off x="8362514" y="4710988"/>
+            <a:ext cx="614411" cy="124358"/>
           </a:xfrm>
           <a:prstGeom prst="rect">
             <a:avLst/>
@@ -38502,8 +38553,8 @@
         </p:nvSpPr>
         <p:spPr>
           <a:xfrm>
-            <a:off x="8351541" y="4668665"/>
-            <a:ext cx="636357" cy="177654"/>
+            <a:off x="8351541" y="4700016"/>
+            <a:ext cx="636357" cy="146304"/>
           </a:xfrm>
           <a:prstGeom prst="rect">
             <a:avLst/>
@@ -38528,9 +38579,9 @@
               </a:spcAft>
             </a:pPr>
             <a:r>
-              <a:rPr sz="580" b="0">
+              <a:rPr sz="620" b="0">
                 <a:solidFill>
-                  <a:srgbClr val="6E6A64"/>
+                  <a:srgbClr val="161616"/>
                 </a:solidFill>
                 <a:latin typeface="Helvetica Neue"/>
               </a:rPr>
@@ -38547,8 +38598,8 @@
         </p:nvSpPr>
         <p:spPr>
           <a:xfrm>
-            <a:off x="8998871" y="4679637"/>
-            <a:ext cx="614411" cy="155709"/>
+            <a:off x="8998871" y="4710988"/>
+            <a:ext cx="614411" cy="124358"/>
           </a:xfrm>
           <a:prstGeom prst="rect">
             <a:avLst/>
@@ -38591,8 +38642,8 @@
         </p:nvSpPr>
         <p:spPr>
           <a:xfrm>
-            <a:off x="8987898" y="4668665"/>
-            <a:ext cx="636357" cy="177654"/>
+            <a:off x="8987898" y="4700016"/>
+            <a:ext cx="636357" cy="146304"/>
           </a:xfrm>
           <a:prstGeom prst="rect">
             <a:avLst/>
@@ -38617,9 +38668,9 @@
               </a:spcAft>
             </a:pPr>
             <a:r>
-              <a:rPr sz="580" b="0">
+              <a:rPr sz="620" b="0">
                 <a:solidFill>
-                  <a:srgbClr val="6E6A64"/>
+                  <a:srgbClr val="161616"/>
                 </a:solidFill>
                 <a:latin typeface="Helvetica Neue"/>
               </a:rPr>
@@ -38636,8 +38687,8 @@
         </p:nvSpPr>
         <p:spPr>
           <a:xfrm>
-            <a:off x="9635228" y="4679637"/>
-            <a:ext cx="614411" cy="155709"/>
+            <a:off x="9635228" y="4710988"/>
+            <a:ext cx="614411" cy="124358"/>
           </a:xfrm>
           <a:prstGeom prst="rect">
             <a:avLst/>
@@ -38680,8 +38731,8 @@
         </p:nvSpPr>
         <p:spPr>
           <a:xfrm>
-            <a:off x="9624255" y="4668665"/>
-            <a:ext cx="636357" cy="177654"/>
+            <a:off x="9624255" y="4700016"/>
+            <a:ext cx="636357" cy="146304"/>
           </a:xfrm>
           <a:prstGeom prst="rect">
             <a:avLst/>
@@ -38706,9 +38757,9 @@
               </a:spcAft>
             </a:pPr>
             <a:r>
-              <a:rPr sz="580" b="0">
+              <a:rPr sz="620" b="0">
                 <a:solidFill>
-                  <a:srgbClr val="6E6A64"/>
+                  <a:srgbClr val="161616"/>
                 </a:solidFill>
                 <a:latin typeface="Helvetica Neue"/>
               </a:rPr>
@@ -38725,8 +38776,8 @@
         </p:nvSpPr>
         <p:spPr>
           <a:xfrm>
-            <a:off x="10271585" y="4679637"/>
-            <a:ext cx="614411" cy="155709"/>
+            <a:off x="10271585" y="4710988"/>
+            <a:ext cx="614411" cy="124358"/>
           </a:xfrm>
           <a:prstGeom prst="rect">
             <a:avLst/>
@@ -38769,8 +38820,8 @@
         </p:nvSpPr>
         <p:spPr>
           <a:xfrm>
-            <a:off x="10260613" y="4668665"/>
-            <a:ext cx="636357" cy="177654"/>
+            <a:off x="10260613" y="4700016"/>
+            <a:ext cx="636357" cy="146304"/>
           </a:xfrm>
           <a:prstGeom prst="rect">
             <a:avLst/>
@@ -38795,9 +38846,9 @@
               </a:spcAft>
             </a:pPr>
             <a:r>
-              <a:rPr sz="580" b="0">
+              <a:rPr sz="620" b="0">
                 <a:solidFill>
-                  <a:srgbClr val="6E6A64"/>
+                  <a:srgbClr val="161616"/>
                 </a:solidFill>
                 <a:latin typeface="Helvetica Neue"/>
               </a:rPr>
@@ -38814,8 +38865,8 @@
         </p:nvSpPr>
         <p:spPr>
           <a:xfrm>
-            <a:off x="10907942" y="4679637"/>
-            <a:ext cx="614411" cy="155709"/>
+            <a:off x="10907942" y="4710988"/>
+            <a:ext cx="614411" cy="124358"/>
           </a:xfrm>
           <a:prstGeom prst="rect">
             <a:avLst/>
@@ -39070,7 +39121,7 @@
                 </a:solidFill>
                 <a:latin typeface="Helvetica Neue"/>
               </a:rPr>
-              <a:t>Ser justos: manejar desde Batuco es caro, así que su sobreprecio por auto es acotado — no puede pedir más UF que Valle Grande ni Chicauma. Su ventaja real no está en esta tabla, sino en el tren.</a:t>
+              <a:t>La lectura honesta: manejar desde Batuco es caro y su sobreprecio por auto es acotado; no puede pedir más UF que Valle Grande ni Chicauma. Su diferencial de precio está en el tren.</a:t>
             </a:r>
           </a:p>
         </p:txBody>
@@ -39369,13 +39420,13 @@
               </a:spcAft>
             </a:pPr>
             <a:r>
-              <a:rPr sz="2700" b="1" spc="-10">
+              <a:rPr sz="2600" b="1" spc="-10">
                 <a:solidFill>
                   <a:srgbClr val="161616"/>
                 </a:solidFill>
                 <a:latin typeface="Helvetica Neue"/>
               </a:rPr>
-              <a:t>La palanca que depende de nosotros:</a:t>
+              <a:t>Integrar Batuco y Estación Colina a RED:</a:t>
             </a:r>
           </a:p>
           <a:p>
@@ -39391,13 +39442,13 @@
               </a:spcAft>
             </a:pPr>
             <a:r>
-              <a:rPr sz="2700" b="1" spc="-10">
+              <a:rPr sz="2600" b="1" spc="-10">
                 <a:solidFill>
                   <a:srgbClr val="161616"/>
                 </a:solidFill>
                 <a:latin typeface="Helvetica Neue"/>
               </a:rPr>
-              <a:t>integrar Batuco y Colina a RED.</a:t>
+              <a:t>la gestión que depende de nosotros.</a:t>
             </a:r>
           </a:p>
         </p:txBody>
@@ -39456,7 +39507,7 @@
         <p:spPr>
           <a:xfrm>
             <a:off x="6035040" y="2514600"/>
-            <a:ext cx="4937760" cy="457200"/>
+            <a:ext cx="3977639" cy="457200"/>
           </a:xfrm>
           <a:prstGeom prst="rect">
             <a:avLst/>
@@ -39499,8 +39550,8 @@
         </p:nvSpPr>
         <p:spPr>
           <a:xfrm>
-            <a:off x="11082528" y="2569464"/>
-            <a:ext cx="1463040" cy="365760"/>
+            <a:off x="10122407" y="2569464"/>
+            <a:ext cx="1508760" cy="365760"/>
           </a:xfrm>
           <a:prstGeom prst="rect">
             <a:avLst/>
@@ -39525,13 +39576,13 @@
               </a:spcAft>
             </a:pPr>
             <a:r>
-              <a:rPr sz="1500" b="1">
+              <a:rPr sz="1400" b="1">
                 <a:solidFill>
                   <a:srgbClr val="161616"/>
                 </a:solidFill>
                 <a:latin typeface="Helvetica Neue"/>
               </a:rPr>
-              <a:t>~$103k/mes</a:t>
+              <a:t>≈ $103 mil/mes</a:t>
             </a:r>
           </a:p>
         </p:txBody>
@@ -39590,7 +39641,7 @@
         <p:spPr>
           <a:xfrm>
             <a:off x="6035040" y="3383280"/>
-            <a:ext cx="1750747" cy="457200"/>
+            <a:ext cx="1410324" cy="457200"/>
           </a:xfrm>
           <a:prstGeom prst="rect">
             <a:avLst/>
@@ -39633,8 +39684,8 @@
         </p:nvSpPr>
         <p:spPr>
           <a:xfrm>
-            <a:off x="7895515" y="3438144"/>
-            <a:ext cx="1463040" cy="365760"/>
+            <a:off x="7555092" y="3438144"/>
+            <a:ext cx="1508760" cy="365760"/>
           </a:xfrm>
           <a:prstGeom prst="rect">
             <a:avLst/>
@@ -39659,13 +39710,13 @@
               </a:spcAft>
             </a:pPr>
             <a:r>
-              <a:rPr sz="1500" b="1">
+              <a:rPr sz="1400" b="1">
                 <a:solidFill>
                   <a:srgbClr val="2F9E6E"/>
                 </a:solidFill>
                 <a:latin typeface="Helvetica Neue"/>
               </a:rPr>
-              <a:t>~$37k/mes</a:t>
+              <a:t>≈ $37 mil/mes</a:t>
             </a:r>
           </a:p>
         </p:txBody>
@@ -39678,8 +39729,8 @@
         </p:nvSpPr>
         <p:spPr>
           <a:xfrm>
-            <a:off x="6035040" y="4480560"/>
-            <a:ext cx="5029200" cy="457200"/>
+            <a:off x="6035040" y="3995928"/>
+            <a:ext cx="4937760" cy="228600"/>
           </a:xfrm>
           <a:prstGeom prst="rect">
             <a:avLst/>
@@ -39704,22 +39755,58 @@
               </a:spcAft>
             </a:pPr>
             <a:r>
-              <a:rPr sz="2600" b="1">
+              <a:rPr sz="850" b="0">
+                <a:solidFill>
+                  <a:srgbClr val="9A958C"/>
+                </a:solidFill>
+                <a:latin typeface="Helvetica Neue"/>
+              </a:rPr>
+              <a:t>Caso de referencia: viaje diario a Metro Tobalaba; tarifa integrada de una zona RED comparable.</a:t>
+            </a:r>
+          </a:p>
+        </p:txBody>
+      </p:sp>
+      <p:sp>
+        <p:nvSpPr>
+          <p:cNvPr id="12" name="TextBox 11"/>
+          <p:cNvSpPr txBox="1"/>
+          <p:nvPr/>
+        </p:nvSpPr>
+        <p:spPr>
+          <a:xfrm>
+            <a:off x="6035040" y="4480560"/>
+            <a:ext cx="5029200" cy="457200"/>
+          </a:xfrm>
+          <a:prstGeom prst="rect">
+            <a:avLst/>
+          </a:prstGeom>
+          <a:noFill/>
+        </p:spPr>
+        <p:txBody>
+          <a:bodyPr wrap="square" anchor="t" lIns="0" rIns="0" tIns="0" bIns="0">
+            <a:spAutoFit/>
+          </a:bodyPr>
+          <a:lstStyle/>
+          <a:p>
+            <a:pPr algn="l">
+              <a:lnSpc>
+                <a:spcPct val="100000"/>
+              </a:lnSpc>
+              <a:spcBef>
+                <a:spcPts val="0"/>
+              </a:spcBef>
+              <a:spcAft>
+                <a:spcPts val="0"/>
+              </a:spcAft>
+            </a:pPr>
+            <a:r>
+              <a:rPr sz="2400" b="1">
                 <a:solidFill>
                   <a:srgbClr val="2F9E6E"/>
                 </a:solidFill>
                 <a:latin typeface="Helvetica Neue"/>
               </a:rPr>
-              <a:t>−</a:t>
-            </a:r>
-            <a:r>
-              <a:rPr sz="2600" b="1">
-                <a:solidFill>
-                  <a:srgbClr val="2F9E6E"/>
-                </a:solidFill>
-                <a:latin typeface="Helvetica Neue"/>
-              </a:rPr>
-              <a:t>65%</a:t>
+              <a:t>65% menos</a:t>
             </a:r>
             <a:r>
               <a:rPr sz="1400" b="0">
@@ -39735,7 +39822,7 @@
       </p:sp>
       <p:sp>
         <p:nvSpPr>
-          <p:cNvPr id="12" name="TextBox 11"/>
+          <p:cNvPr id="13" name="TextBox 12"/>
           <p:cNvSpPr txBox="1"/>
           <p:nvPr/>
         </p:nvSpPr>
@@ -39780,7 +39867,7 @@
       </p:sp>
       <p:sp>
         <p:nvSpPr>
-          <p:cNvPr id="13" name="TextBox 12"/>
+          <p:cNvPr id="14" name="TextBox 13"/>
           <p:cNvSpPr txBox="1"/>
           <p:nvPr/>
         </p:nvSpPr>
@@ -39818,14 +39905,14 @@
                 </a:solidFill>
                 <a:latin typeface="Helvetica Neue"/>
               </a:rPr>
-              <a:t>Batuco y Estación Colina quedan a un trámite de tarifa integrada. Gestionar su incorporación a RED con el Ministerio de Transportes y EFE completa su ventaja competitiva — y no depende de esperar a 2030.</a:t>
-            </a:r>
-          </a:p>
-        </p:txBody>
-      </p:sp>
-      <p:sp>
-        <p:nvSpPr>
-          <p:cNvPr id="14" name="Rectangle 13"/>
+              <a:t>Batuco y Estación Colina quedan a un trámite de tarifa integrada. Gestionar su incorporación a RED con el Ministerio de Transportes y EFE completa su ventaja competitiva, y no depende de esperar a 2030.</a:t>
+            </a:r>
+          </a:p>
+        </p:txBody>
+      </p:sp>
+      <p:sp>
+        <p:nvSpPr>
+          <p:cNvPr id="15" name="Rectangle 14"/>
           <p:cNvSpPr/>
           <p:nvPr/>
         </p:nvSpPr>
@@ -39871,7 +39958,7 @@
       </p:sp>
       <p:sp>
         <p:nvSpPr>
-          <p:cNvPr id="15" name="Rectangle 14"/>
+          <p:cNvPr id="16" name="Rectangle 15"/>
           <p:cNvSpPr/>
           <p:nvPr/>
         </p:nvSpPr>
@@ -39915,7 +40002,7 @@
       </p:sp>
       <p:sp>
         <p:nvSpPr>
-          <p:cNvPr id="16" name="TextBox 15"/>
+          <p:cNvPr id="17" name="TextBox 16"/>
           <p:cNvSpPr txBox="1"/>
           <p:nvPr/>
         </p:nvSpPr>
@@ -39960,7 +40047,7 @@
       </p:sp>
       <p:sp>
         <p:nvSpPr>
-          <p:cNvPr id="17" name="TextBox 16"/>
+          <p:cNvPr id="18" name="TextBox 17"/>
           <p:cNvSpPr txBox="1"/>
           <p:nvPr/>
         </p:nvSpPr>
@@ -39998,14 +40085,14 @@
                 </a:solidFill>
                 <a:latin typeface="Helvetica Neue"/>
               </a:rPr>
-              <a:t>Es la recomendación central: gestionar la integración a RED. Baja el costo, sube el atractivo, y está bajo nuestra influencia — no la de una autopista por construir.</a:t>
+              <a:t>Es la recomendación central: gestionar la integración a RED. Baja el costo, sube el atractivo y está bajo nuestra influencia, no la de una autopista por construir.</a:t>
             </a:r>
           </a:p>
         </p:txBody>
       </p:sp>
       <p:cxnSp>
         <p:nvCxnSpPr>
-          <p:cNvPr id="18" name="Connector 17"/>
+          <p:cNvPr id="19" name="Connector 18"/>
           <p:cNvCxnSpPr/>
           <p:nvPr/>
         </p:nvCxnSpPr>
@@ -40041,7 +40128,7 @@
       </p:cxnSp>
       <p:sp>
         <p:nvSpPr>
-          <p:cNvPr id="19" name="TextBox 18"/>
+          <p:cNvPr id="20" name="TextBox 19"/>
           <p:cNvSpPr txBox="1"/>
           <p:nvPr/>
         </p:nvSpPr>
@@ -40095,7 +40182,7 @@
       </p:sp>
       <p:sp>
         <p:nvSpPr>
-          <p:cNvPr id="20" name="TextBox 19"/>
+          <p:cNvPr id="21" name="TextBox 20"/>
           <p:cNvSpPr txBox="1"/>
           <p:nvPr/>
         </p:nvSpPr>
@@ -40303,7 +40390,7 @@
                 </a:solidFill>
                 <a:latin typeface="Helvetica Neue"/>
               </a:rPr>
-              <a:t>¿Cuánto vale la conectividad? Lo</a:t>
+              <a:t>¿Cuánto vale la conectividad?</a:t>
             </a:r>
           </a:p>
           <a:p>
@@ -40325,7 +40412,7 @@
                 </a:solidFill>
                 <a:latin typeface="Helvetica Neue"/>
               </a:rPr>
-              <a:t>suficiente para decidir el portafolio.</a:t>
+              <a:t>Seis conclusiones para decidir.</a:t>
             </a:r>
           </a:p>
         </p:txBody>
@@ -40415,7 +40502,7 @@
                 </a:solidFill>
                 <a:latin typeface="Helvetica Neue"/>
               </a:rPr>
-              <a:t>Dónde somos fuertes</a:t>
+              <a:t>Estación Colina, hoy</a:t>
             </a:r>
           </a:p>
         </p:txBody>
@@ -40460,7 +40547,7 @@
                 </a:solidFill>
                 <a:latin typeface="Helvetica Neue"/>
               </a:rPr>
-              <a:t>Estación Colina ya es central hoy; ambos proyectos justifican sobreprecio en UF.</a:t>
+              <a:t>En la mitad más rápida sin depender de obra futura: 6º de 14 en auto y 5º en transporte público.</a:t>
             </a:r>
           </a:p>
         </p:txBody>
@@ -40550,7 +40637,7 @@
                 </a:solidFill>
                 <a:latin typeface="Helvetica Neue"/>
               </a:rPr>
-              <a:t>Qué cambia con el tren</a:t>
+              <a:t>Batuco, con infraestructura</a:t>
             </a:r>
           </a:p>
         </p:txBody>
@@ -40595,7 +40682,7 @@
                 </a:solidFill>
                 <a:latin typeface="Helvetica Neue"/>
               </a:rPr>
-              <a:t>El transporte público se reordena: Estación Colina pasa a 1º y Batuco a 2º del set.</a:t>
+              <a:t>De 11º a 3º en auto con la Autopista, y de 11º a 2º en transporte público con el tren.</a:t>
             </a:r>
           </a:p>
         </p:txBody>
@@ -40685,7 +40772,7 @@
                 </a:solidFill>
                 <a:latin typeface="Helvetica Neue"/>
               </a:rPr>
-              <a:t>Qué cambia con la Orbital</a:t>
+              <a:t>El diferencial del tren</a:t>
             </a:r>
           </a:p>
         </p:txBody>
@@ -40730,7 +40817,7 @@
                 </a:solidFill>
                 <a:latin typeface="Helvetica Neue"/>
               </a:rPr>
-              <a:t>Batuco sube del 11º al 3º en auto — la mayor palanca vial del estudio.</a:t>
+              <a:t>Frente a las zonas sin estación nueva: +977 UF en Batuco y +652 en Estación Colina.</a:t>
             </a:r>
           </a:p>
         </p:txBody>
@@ -40820,7 +40907,7 @@
                 </a:solidFill>
                 <a:latin typeface="Helvetica Neue"/>
               </a:rPr>
-              <a:t>Dónde somos débiles</a:t>
+              <a:t>El costo de manejar</a:t>
             </a:r>
           </a:p>
         </p:txBody>
@@ -40865,7 +40952,7 @@
                 </a:solidFill>
                 <a:latin typeface="Helvetica Neue"/>
               </a:rPr>
-              <a:t>Batuco es caro en auto, y ninguno es RED: hoy pagan tarifa por tramo.</a:t>
+              <a:t>Acota el sobreprecio de Batuco por auto. Su argumento de precio es el tren, no el auto.</a:t>
             </a:r>
           </a:p>
         </p:txBody>
@@ -40955,7 +41042,7 @@
                 </a:solidFill>
                 <a:latin typeface="Helvetica Neue"/>
               </a:rPr>
-              <a:t>El paso inmediato</a:t>
+              <a:t>Integración a RED</a:t>
             </a:r>
           </a:p>
         </p:txBody>
@@ -41000,7 +41087,7 @@
                 </a:solidFill>
                 <a:latin typeface="Helvetica Neue"/>
               </a:rPr>
-              <a:t>Gestionar la integración de Batuco y Estación Colina a RED: baja el costo y depende de nosotros.</a:t>
+              <a:t>Reduce el costo mensual de transporte público en 65%. Es gestión, no obra.</a:t>
             </a:r>
           </a:p>
         </p:txBody>
@@ -41090,7 +41177,7 @@
                 </a:solidFill>
                 <a:latin typeface="Helvetica Neue"/>
               </a:rPr>
-              <a:t>Cuánto vale</a:t>
+              <a:t>Pricing por producto</a:t>
             </a:r>
           </a:p>
         </p:txBody>
@@ -41135,7 +41222,7 @@
                 </a:solidFill>
                 <a:latin typeface="Helvetica Neue"/>
               </a:rPr>
-              <a:t>El ahorro de tiempo y de costo se capitaliza en UF y en capacidad de compra.</a:t>
+              <a:t>Fijar precio contra las comparables de cada producto, con el diferencial en UF de referencia.</a:t>
             </a:r>
           </a:p>
         </p:txBody>
@@ -41315,7 +41402,7 @@
                 </a:solidFill>
                 <a:latin typeface="Helvetica Neue"/>
               </a:rPr>
-              <a:t>Competitivos hoy, y de los más competitivos del norte con la infraestructura que viene. La decisión que no depende de nadie más: integrarlos a RED.</a:t>
+              <a:t>Competitivos hoy y líderes del corredor con la infraestructura en construcción. La decisión que solo depende de nosotros: integrarlos a RED.</a:t>
             </a:r>
           </a:p>
         </p:txBody>

--- a/public/conectividad/Conectividad-Modela-Directorio.pptx
+++ b/public/conectividad/Conectividad-Modela-Directorio.pptx
@@ -3661,7 +3661,7 @@
                 </a:solidFill>
                 <a:latin typeface="Helvetica Neue"/>
               </a:rPr>
-              <a:t>Menos tiempo y menos costo de traslado se capitalizan en cuánto puede pagar una familia por su vivienda. Medimos esa conexión, zona por zona, y el veredicto para nuestros proyectos es claro.</a:t>
+              <a:t>Menos tiempo y menos costo de traslado se capitalizan en cuánto puede pagar una familia por su vivienda. Medimos ese efecto, zona por zona.</a:t>
             </a:r>
           </a:p>
         </p:txBody>
@@ -4156,7 +4156,7 @@
                 </a:solidFill>
                 <a:latin typeface="Helvetica Neue"/>
               </a:rPr>
-              <a:t>UF sobre la zona peor conectada, Estación Colina</a:t>
+              <a:t>UF de Estación Colina sobre la zona peor conectada</a:t>
             </a:r>
           </a:p>
         </p:txBody>
@@ -39121,7 +39121,7 @@
                 </a:solidFill>
                 <a:latin typeface="Helvetica Neue"/>
               </a:rPr>
-              <a:t>La lectura honesta: manejar desde Batuco es caro y su sobreprecio por auto es acotado; no puede pedir más UF que Valle Grande ni Chicauma. Su diferencial de precio está en el tren.</a:t>
+              <a:t>La lectura honesta: manejar desde Batuco es caro y su sobreprecio por auto es acotado; no puede pedir más UF que Valle Grande ni Chicauma. La lámina siguiente muestra dónde recupera esa diferencia.</a:t>
             </a:r>
           </a:p>
         </p:txBody>
@@ -40085,7 +40085,7 @@
                 </a:solidFill>
                 <a:latin typeface="Helvetica Neue"/>
               </a:rPr>
-              <a:t>Es la recomendación central: gestionar la integración a RED. Baja el costo, sube el atractivo y está bajo nuestra influencia, no la de una autopista por construir.</a:t>
+              <a:t>La recomendación central: gestionar la integración a RED. Baja el costo, sube el atractivo y depende de nosotros, no de una obra por construir.</a:t>
             </a:r>
           </a:p>
         </p:txBody>

--- a/public/conectividad/Conectividad-Modela-Directorio.pptx
+++ b/public/conectividad/Conectividad-Modela-Directorio.pptx
@@ -3222,7 +3222,7 @@
                 </a:solidFill>
                 <a:latin typeface="Helvetica Neue"/>
               </a:rPr>
-              <a:t>MODELA  ·  DESARROLLO INMOBILIARIO</a:t>
+              <a:t>MODELA  ·  DESARROLLO URBANO</a:t>
             </a:r>
           </a:p>
         </p:txBody>
@@ -4156,7 +4156,7 @@
                 </a:solidFill>
                 <a:latin typeface="Helvetica Neue"/>
               </a:rPr>
-              <a:t>UF de Estación Colina sobre la zona peor conectada</a:t>
+              <a:t>UF más que puede cobrar Estación Colina frente a la competencia peor conectada</a:t>
             </a:r>
           </a:p>
         </p:txBody>
@@ -4728,71 +4728,79 @@
             <a:avLst/>
           </a:prstGeom>
           <a:solidFill>
-            <a:srgbClr val="ECF2EE"/>
-          </a:solidFill>
-          <a:ln>
-            <a:noFill/>
-          </a:ln>
-          <a:effectLst/>
-        </p:spPr>
-        <p:style>
-          <a:lnRef idx="1">
-            <a:schemeClr val="accent1"/>
-          </a:lnRef>
-          <a:fillRef idx="3">
-            <a:schemeClr val="accent1"/>
-          </a:fillRef>
-          <a:effectRef idx="2">
-            <a:schemeClr val="accent1"/>
-          </a:effectRef>
-          <a:fontRef idx="minor">
-            <a:schemeClr val="lt1"/>
-          </a:fontRef>
-        </p:style>
-        <p:txBody>
-          <a:bodyPr rtlCol="0" anchor="ctr"/>
-          <a:lstStyle/>
-          <a:p>
-            <a:pPr algn="ctr"/>
-          </a:p>
-        </p:txBody>
-      </p:sp>
-      <p:cxnSp>
-        <p:nvCxnSpPr>
-          <p:cNvPr id="6" name="Connector 5"/>
-          <p:cNvCxnSpPr/>
-          <p:nvPr/>
-        </p:nvCxnSpPr>
+            <a:srgbClr val="E9F1EC"/>
+          </a:solidFill>
+          <a:ln>
+            <a:noFill/>
+          </a:ln>
+          <a:effectLst/>
+        </p:spPr>
+        <p:style>
+          <a:lnRef idx="1">
+            <a:schemeClr val="accent1"/>
+          </a:lnRef>
+          <a:fillRef idx="3">
+            <a:schemeClr val="accent1"/>
+          </a:fillRef>
+          <a:effectRef idx="2">
+            <a:schemeClr val="accent1"/>
+          </a:effectRef>
+          <a:fontRef idx="minor">
+            <a:schemeClr val="lt1"/>
+          </a:fontRef>
+        </p:style>
+        <p:txBody>
+          <a:bodyPr rtlCol="0" anchor="ctr"/>
+          <a:lstStyle/>
+          <a:p>
+            <a:pPr algn="ctr"/>
+          </a:p>
+        </p:txBody>
+      </p:sp>
+      <p:sp>
+        <p:nvSpPr>
+          <p:cNvPr id="6" name="Rectangle 5"/>
+          <p:cNvSpPr/>
+          <p:nvPr/>
+        </p:nvSpPr>
         <p:spPr>
           <a:xfrm>
             <a:off x="3667751" y="2606040"/>
-            <a:ext cx="0" cy="2011680"/>
-          </a:xfrm>
-          <a:prstGeom prst="line">
-            <a:avLst/>
-          </a:prstGeom>
-          <a:ln w="9525">
-            <a:solidFill>
-              <a:srgbClr val="E4DFD6"/>
-            </a:solidFill>
-          </a:ln>
-          <a:effectLst/>
-        </p:spPr>
-        <p:style>
-          <a:lnRef idx="2">
-            <a:schemeClr val="accent1"/>
-          </a:lnRef>
-          <a:fillRef idx="0">
-            <a:schemeClr val="accent1"/>
-          </a:fillRef>
-          <a:effectRef idx="1">
-            <a:schemeClr val="accent1"/>
-          </a:effectRef>
-          <a:fontRef idx="minor">
-            <a:schemeClr val="tx1"/>
-          </a:fontRef>
-        </p:style>
-      </p:cxnSp>
+            <a:ext cx="2979936" cy="1300099"/>
+          </a:xfrm>
+          <a:prstGeom prst="rect">
+            <a:avLst/>
+          </a:prstGeom>
+          <a:solidFill>
+            <a:srgbClr val="F6EEEA"/>
+          </a:solidFill>
+          <a:ln>
+            <a:noFill/>
+          </a:ln>
+          <a:effectLst/>
+        </p:spPr>
+        <p:style>
+          <a:lnRef idx="1">
+            <a:schemeClr val="accent1"/>
+          </a:lnRef>
+          <a:fillRef idx="3">
+            <a:schemeClr val="accent1"/>
+          </a:fillRef>
+          <a:effectRef idx="2">
+            <a:schemeClr val="accent1"/>
+          </a:effectRef>
+          <a:fontRef idx="minor">
+            <a:schemeClr val="lt1"/>
+          </a:fontRef>
+        </p:style>
+        <p:txBody>
+          <a:bodyPr rtlCol="0" anchor="ctr"/>
+          <a:lstStyle/>
+          <a:p>
+            <a:pPr algn="ctr"/>
+          </a:p>
+        </p:txBody>
+      </p:sp>
       <p:cxnSp>
         <p:nvCxnSpPr>
           <p:cNvPr id="7" name="Connector 6"/>
@@ -4801,16 +4809,17 @@
         </p:nvCxnSpPr>
         <p:spPr>
           <a:xfrm>
-            <a:off x="1161288" y="3906139"/>
-            <a:ext cx="5486400" cy="0"/>
+            <a:off x="3667751" y="2606040"/>
+            <a:ext cx="0" cy="2011680"/>
           </a:xfrm>
           <a:prstGeom prst="line">
             <a:avLst/>
           </a:prstGeom>
-          <a:ln w="9525">
+          <a:ln w="12700">
             <a:solidFill>
-              <a:srgbClr val="E4DFD6"/>
+              <a:srgbClr val="B4AEA3"/>
             </a:solidFill>
+            <a:prstDash val="dash"/>
           </a:ln>
           <a:effectLst/>
         </p:spPr>
@@ -4837,7 +4846,7 @@
         </p:nvCxnSpPr>
         <p:spPr>
           <a:xfrm>
-            <a:off x="1161288" y="4617720"/>
+            <a:off x="1161288" y="3906139"/>
             <a:ext cx="5486400" cy="0"/>
           </a:xfrm>
           <a:prstGeom prst="line">
@@ -4845,8 +4854,9 @@
           </a:prstGeom>
           <a:ln w="12700">
             <a:solidFill>
-              <a:srgbClr val="C9C4BA"/>
+              <a:srgbClr val="B4AEA3"/>
             </a:solidFill>
+            <a:prstDash val="dash"/>
           </a:ln>
           <a:effectLst/>
         </p:spPr>
@@ -4865,52 +4875,16 @@
           </a:fontRef>
         </p:style>
       </p:cxnSp>
-      <p:cxnSp>
-        <p:nvCxnSpPr>
-          <p:cNvPr id="9" name="Connector 8"/>
-          <p:cNvCxnSpPr/>
-          <p:nvPr/>
-        </p:nvCxnSpPr>
-        <p:spPr>
-          <a:xfrm>
-            <a:off x="1161288" y="2606040"/>
-            <a:ext cx="0" cy="2011680"/>
-          </a:xfrm>
-          <a:prstGeom prst="line">
-            <a:avLst/>
-          </a:prstGeom>
-          <a:ln w="12700">
-            <a:solidFill>
-              <a:srgbClr val="C9C4BA"/>
-            </a:solidFill>
-          </a:ln>
-          <a:effectLst/>
-        </p:spPr>
-        <p:style>
-          <a:lnRef idx="2">
-            <a:schemeClr val="accent1"/>
-          </a:lnRef>
-          <a:fillRef idx="0">
-            <a:schemeClr val="accent1"/>
-          </a:fillRef>
-          <a:effectRef idx="1">
-            <a:schemeClr val="accent1"/>
-          </a:effectRef>
-          <a:fontRef idx="minor">
-            <a:schemeClr val="tx1"/>
-          </a:fontRef>
-        </p:style>
-      </p:cxnSp>
-      <p:sp>
-        <p:nvSpPr>
-          <p:cNvPr id="10" name="TextBox 9"/>
+      <p:sp>
+        <p:nvSpPr>
+          <p:cNvPr id="9" name="TextBox 8"/>
           <p:cNvSpPr txBox="1"/>
           <p:nvPr/>
         </p:nvSpPr>
         <p:spPr>
           <a:xfrm>
-            <a:off x="1161288" y="4690872"/>
-            <a:ext cx="5486400" cy="182880"/>
+            <a:off x="3722615" y="2587752"/>
+            <a:ext cx="2011680" cy="146304"/>
           </a:xfrm>
           <a:prstGeom prst="rect">
             <a:avLst/>
@@ -4935,27 +4909,144 @@
               </a:spcAft>
             </a:pPr>
             <a:r>
-              <a:rPr sz="900" b="0">
-                <a:solidFill>
-                  <a:srgbClr val="6E6A64"/>
+              <a:rPr sz="750" b="0">
+                <a:solidFill>
+                  <a:srgbClr val="9A958C"/>
                 </a:solidFill>
                 <a:latin typeface="Helvetica Neue"/>
               </a:rPr>
-              <a:t>Minutos promedio en auto a los 9 destinos (40 a 99 min)  →</a:t>
-            </a:r>
-          </a:p>
-        </p:txBody>
-      </p:sp>
-      <p:sp>
-        <p:nvSpPr>
-          <p:cNvPr id="11" name="TextBox 10"/>
+              <a:t>mediana de tiempo</a:t>
+            </a:r>
+          </a:p>
+        </p:txBody>
+      </p:sp>
+      <p:sp>
+        <p:nvSpPr>
+          <p:cNvPr id="10" name="TextBox 9"/>
           <p:cNvSpPr txBox="1"/>
           <p:nvPr/>
         </p:nvSpPr>
         <p:spPr>
           <a:xfrm>
-            <a:off x="1161288" y="2331720"/>
-            <a:ext cx="5943600" cy="182880"/>
+            <a:off x="5413248" y="3736975"/>
+            <a:ext cx="1234440" cy="146304"/>
+          </a:xfrm>
+          <a:prstGeom prst="rect">
+            <a:avLst/>
+          </a:prstGeom>
+          <a:noFill/>
+        </p:spPr>
+        <p:txBody>
+          <a:bodyPr wrap="square" anchor="t" lIns="0" rIns="0" tIns="0" bIns="0">
+            <a:spAutoFit/>
+          </a:bodyPr>
+          <a:lstStyle/>
+          <a:p>
+            <a:pPr algn="r">
+              <a:lnSpc>
+                <a:spcPct val="100000"/>
+              </a:lnSpc>
+              <a:spcBef>
+                <a:spcPts val="0"/>
+              </a:spcBef>
+              <a:spcAft>
+                <a:spcPts val="0"/>
+              </a:spcAft>
+            </a:pPr>
+            <a:r>
+              <a:rPr sz="750" b="0">
+                <a:solidFill>
+                  <a:srgbClr val="9A958C"/>
+                </a:solidFill>
+                <a:latin typeface="Helvetica Neue"/>
+              </a:rPr>
+              <a:t>mediana de costo</a:t>
+            </a:r>
+          </a:p>
+        </p:txBody>
+      </p:sp>
+      <p:cxnSp>
+        <p:nvCxnSpPr>
+          <p:cNvPr id="11" name="Connector 10"/>
+          <p:cNvCxnSpPr/>
+          <p:nvPr/>
+        </p:nvCxnSpPr>
+        <p:spPr>
+          <a:xfrm>
+            <a:off x="1161288" y="4617720"/>
+            <a:ext cx="5486400" cy="0"/>
+          </a:xfrm>
+          <a:prstGeom prst="line">
+            <a:avLst/>
+          </a:prstGeom>
+          <a:ln w="15875">
+            <a:solidFill>
+              <a:srgbClr val="B4AEA3"/>
+            </a:solidFill>
+          </a:ln>
+          <a:effectLst/>
+        </p:spPr>
+        <p:style>
+          <a:lnRef idx="2">
+            <a:schemeClr val="accent1"/>
+          </a:lnRef>
+          <a:fillRef idx="0">
+            <a:schemeClr val="accent1"/>
+          </a:fillRef>
+          <a:effectRef idx="1">
+            <a:schemeClr val="accent1"/>
+          </a:effectRef>
+          <a:fontRef idx="minor">
+            <a:schemeClr val="tx1"/>
+          </a:fontRef>
+        </p:style>
+      </p:cxnSp>
+      <p:cxnSp>
+        <p:nvCxnSpPr>
+          <p:cNvPr id="12" name="Connector 11"/>
+          <p:cNvCxnSpPr/>
+          <p:nvPr/>
+        </p:nvCxnSpPr>
+        <p:spPr>
+          <a:xfrm>
+            <a:off x="1161288" y="2606040"/>
+            <a:ext cx="0" cy="2011680"/>
+          </a:xfrm>
+          <a:prstGeom prst="line">
+            <a:avLst/>
+          </a:prstGeom>
+          <a:ln w="15875">
+            <a:solidFill>
+              <a:srgbClr val="B4AEA3"/>
+            </a:solidFill>
+          </a:ln>
+          <a:effectLst/>
+        </p:spPr>
+        <p:style>
+          <a:lnRef idx="2">
+            <a:schemeClr val="accent1"/>
+          </a:lnRef>
+          <a:fillRef idx="0">
+            <a:schemeClr val="accent1"/>
+          </a:fillRef>
+          <a:effectRef idx="1">
+            <a:schemeClr val="accent1"/>
+          </a:effectRef>
+          <a:fontRef idx="minor">
+            <a:schemeClr val="tx1"/>
+          </a:fontRef>
+        </p:style>
+      </p:cxnSp>
+      <p:sp>
+        <p:nvSpPr>
+          <p:cNvPr id="13" name="TextBox 12"/>
+          <p:cNvSpPr txBox="1"/>
+          <p:nvPr/>
+        </p:nvSpPr>
+        <p:spPr>
+          <a:xfrm>
+            <a:off x="1161288" y="4690872"/>
+            <a:ext cx="5486400" cy="182880"/>
           </a:xfrm>
           <a:prstGeom prst="rect">
             <a:avLst/>
@@ -4986,21 +5077,21 @@
                 </a:solidFill>
                 <a:latin typeface="Helvetica Neue"/>
               </a:rPr>
-              <a:t>Costo mensual de manejar ($189 a $496 mil/mes)  ↑</a:t>
-            </a:r>
-          </a:p>
-        </p:txBody>
-      </p:sp>
-      <p:sp>
-        <p:nvSpPr>
-          <p:cNvPr id="12" name="TextBox 11"/>
+              <a:t>Minutos promedio en auto a los 9 destinos (40 a 99 min)  →</a:t>
+            </a:r>
+          </a:p>
+        </p:txBody>
+      </p:sp>
+      <p:sp>
+        <p:nvSpPr>
+          <p:cNvPr id="14" name="TextBox 13"/>
           <p:cNvSpPr txBox="1"/>
           <p:nvPr/>
         </p:nvSpPr>
         <p:spPr>
           <a:xfrm>
-            <a:off x="1252728" y="3970147"/>
-            <a:ext cx="2377440" cy="182880"/>
+            <a:off x="1161288" y="2331720"/>
+            <a:ext cx="5943600" cy="182880"/>
           </a:xfrm>
           <a:prstGeom prst="rect">
             <a:avLst/>
@@ -5025,6 +5116,51 @@
               </a:spcAft>
             </a:pPr>
             <a:r>
+              <a:rPr sz="900" b="0">
+                <a:solidFill>
+                  <a:srgbClr val="6E6A64"/>
+                </a:solidFill>
+                <a:latin typeface="Helvetica Neue"/>
+              </a:rPr>
+              <a:t>Costo mensual de manejar ($189 a $496 mil/mes)  ↑</a:t>
+            </a:r>
+          </a:p>
+        </p:txBody>
+      </p:sp>
+      <p:sp>
+        <p:nvSpPr>
+          <p:cNvPr id="15" name="TextBox 14"/>
+          <p:cNvSpPr txBox="1"/>
+          <p:nvPr/>
+        </p:nvSpPr>
+        <p:spPr>
+          <a:xfrm>
+            <a:off x="1252728" y="4416552"/>
+            <a:ext cx="2377440" cy="182880"/>
+          </a:xfrm>
+          <a:prstGeom prst="rect">
+            <a:avLst/>
+          </a:prstGeom>
+          <a:noFill/>
+        </p:spPr>
+        <p:txBody>
+          <a:bodyPr wrap="square" anchor="t" lIns="0" rIns="0" tIns="0" bIns="0">
+            <a:spAutoFit/>
+          </a:bodyPr>
+          <a:lstStyle/>
+          <a:p>
+            <a:pPr algn="l">
+              <a:lnSpc>
+                <a:spcPct val="100000"/>
+              </a:lnSpc>
+              <a:spcBef>
+                <a:spcPts val="0"/>
+              </a:spcBef>
+              <a:spcAft>
+                <a:spcPts val="0"/>
+              </a:spcAft>
+            </a:pPr>
+            <a:r>
               <a:rPr sz="800" b="1" spc="80">
                 <a:solidFill>
                   <a:srgbClr val="2F9E6E"/>
@@ -5038,290 +5174,59 @@
       </p:sp>
       <p:sp>
         <p:nvSpPr>
-          <p:cNvPr id="13" name="Oval 12"/>
-          <p:cNvSpPr/>
-          <p:nvPr/>
-        </p:nvSpPr>
-        <p:spPr>
-          <a:xfrm>
-            <a:off x="1553476" y="4219186"/>
-            <a:ext cx="118872" cy="118872"/>
-          </a:xfrm>
-          <a:prstGeom prst="ellipse">
-            <a:avLst/>
-          </a:prstGeom>
-          <a:solidFill>
-            <a:srgbClr val="134E48"/>
-          </a:solidFill>
-          <a:ln w="15240">
-            <a:solidFill>
-              <a:srgbClr val="FFFFFF"/>
-            </a:solidFill>
-          </a:ln>
-          <a:effectLst/>
-        </p:spPr>
-        <p:style>
-          <a:lnRef idx="1">
-            <a:schemeClr val="accent1"/>
-          </a:lnRef>
-          <a:fillRef idx="3">
-            <a:schemeClr val="accent1"/>
-          </a:fillRef>
-          <a:effectRef idx="2">
-            <a:schemeClr val="accent1"/>
-          </a:effectRef>
-          <a:fontRef idx="minor">
-            <a:schemeClr val="lt1"/>
-          </a:fontRef>
-        </p:style>
-        <p:txBody>
-          <a:bodyPr rtlCol="0" anchor="ctr"/>
-          <a:lstStyle/>
-          <a:p>
-            <a:pPr algn="ctr"/>
-          </a:p>
-        </p:txBody>
-      </p:sp>
-      <p:sp>
-        <p:nvSpPr>
-          <p:cNvPr id="14" name="Oval 13"/>
-          <p:cNvSpPr/>
-          <p:nvPr/>
-        </p:nvSpPr>
-        <p:spPr>
-          <a:xfrm>
-            <a:off x="2297820" y="4358035"/>
-            <a:ext cx="118872" cy="118872"/>
-          </a:xfrm>
-          <a:prstGeom prst="ellipse">
-            <a:avLst/>
-          </a:prstGeom>
-          <a:solidFill>
-            <a:srgbClr val="134E48"/>
-          </a:solidFill>
-          <a:ln w="15240">
-            <a:solidFill>
-              <a:srgbClr val="FFFFFF"/>
-            </a:solidFill>
-          </a:ln>
-          <a:effectLst/>
-        </p:spPr>
-        <p:style>
-          <a:lnRef idx="1">
-            <a:schemeClr val="accent1"/>
-          </a:lnRef>
-          <a:fillRef idx="3">
-            <a:schemeClr val="accent1"/>
-          </a:fillRef>
-          <a:effectRef idx="2">
-            <a:schemeClr val="accent1"/>
-          </a:effectRef>
-          <a:fontRef idx="minor">
-            <a:schemeClr val="lt1"/>
-          </a:fontRef>
-        </p:style>
-        <p:txBody>
-          <a:bodyPr rtlCol="0" anchor="ctr"/>
-          <a:lstStyle/>
-          <a:p>
-            <a:pPr algn="ctr"/>
-          </a:p>
-        </p:txBody>
-      </p:sp>
-      <p:sp>
-        <p:nvSpPr>
-          <p:cNvPr id="15" name="Oval 14"/>
-          <p:cNvSpPr/>
-          <p:nvPr/>
-        </p:nvSpPr>
-        <p:spPr>
-          <a:xfrm>
-            <a:off x="2741081" y="2986889"/>
-            <a:ext cx="118872" cy="118872"/>
-          </a:xfrm>
-          <a:prstGeom prst="ellipse">
-            <a:avLst/>
-          </a:prstGeom>
-          <a:solidFill>
-            <a:srgbClr val="134E48"/>
-          </a:solidFill>
-          <a:ln w="15240">
-            <a:solidFill>
-              <a:srgbClr val="FFFFFF"/>
-            </a:solidFill>
-          </a:ln>
-          <a:effectLst/>
-        </p:spPr>
-        <p:style>
-          <a:lnRef idx="1">
-            <a:schemeClr val="accent1"/>
-          </a:lnRef>
-          <a:fillRef idx="3">
-            <a:schemeClr val="accent1"/>
-          </a:fillRef>
-          <a:effectRef idx="2">
-            <a:schemeClr val="accent1"/>
-          </a:effectRef>
-          <a:fontRef idx="minor">
-            <a:schemeClr val="lt1"/>
-          </a:fontRef>
-        </p:style>
-        <p:txBody>
-          <a:bodyPr rtlCol="0" anchor="ctr"/>
-          <a:lstStyle/>
-          <a:p>
-            <a:pPr algn="ctr"/>
-          </a:p>
-        </p:txBody>
-      </p:sp>
-      <p:sp>
-        <p:nvSpPr>
-          <p:cNvPr id="16" name="Oval 15"/>
-          <p:cNvSpPr/>
-          <p:nvPr/>
-        </p:nvSpPr>
-        <p:spPr>
-          <a:xfrm>
-            <a:off x="2841442" y="3581631"/>
-            <a:ext cx="118872" cy="118872"/>
-          </a:xfrm>
-          <a:prstGeom prst="ellipse">
-            <a:avLst/>
-          </a:prstGeom>
-          <a:solidFill>
-            <a:srgbClr val="134E48"/>
-          </a:solidFill>
-          <a:ln w="15240">
-            <a:solidFill>
-              <a:srgbClr val="FFFFFF"/>
-            </a:solidFill>
-          </a:ln>
-          <a:effectLst/>
-        </p:spPr>
-        <p:style>
-          <a:lnRef idx="1">
-            <a:schemeClr val="accent1"/>
-          </a:lnRef>
-          <a:fillRef idx="3">
-            <a:schemeClr val="accent1"/>
-          </a:fillRef>
-          <a:effectRef idx="2">
-            <a:schemeClr val="accent1"/>
-          </a:effectRef>
-          <a:fontRef idx="minor">
-            <a:schemeClr val="lt1"/>
-          </a:fontRef>
-        </p:style>
-        <p:txBody>
-          <a:bodyPr rtlCol="0" anchor="ctr"/>
-          <a:lstStyle/>
-          <a:p>
-            <a:pPr algn="ctr"/>
-          </a:p>
-        </p:txBody>
-      </p:sp>
-      <p:sp>
-        <p:nvSpPr>
-          <p:cNvPr id="17" name="Oval 16"/>
-          <p:cNvSpPr/>
-          <p:nvPr/>
-        </p:nvSpPr>
-        <p:spPr>
-          <a:xfrm>
-            <a:off x="2883259" y="4398187"/>
-            <a:ext cx="118872" cy="118872"/>
-          </a:xfrm>
-          <a:prstGeom prst="ellipse">
-            <a:avLst/>
-          </a:prstGeom>
-          <a:solidFill>
-            <a:srgbClr val="134E48"/>
-          </a:solidFill>
-          <a:ln w="15240">
-            <a:solidFill>
-              <a:srgbClr val="FFFFFF"/>
-            </a:solidFill>
-          </a:ln>
-          <a:effectLst/>
-        </p:spPr>
-        <p:style>
-          <a:lnRef idx="1">
-            <a:schemeClr val="accent1"/>
-          </a:lnRef>
-          <a:fillRef idx="3">
-            <a:schemeClr val="accent1"/>
-          </a:fillRef>
-          <a:effectRef idx="2">
-            <a:schemeClr val="accent1"/>
-          </a:effectRef>
-          <a:fontRef idx="minor">
-            <a:schemeClr val="lt1"/>
-          </a:fontRef>
-        </p:style>
-        <p:txBody>
-          <a:bodyPr rtlCol="0" anchor="ctr"/>
-          <a:lstStyle/>
-          <a:p>
-            <a:pPr algn="ctr"/>
-          </a:p>
-        </p:txBody>
-      </p:sp>
-      <p:sp>
-        <p:nvSpPr>
-          <p:cNvPr id="18" name="Oval 17"/>
-          <p:cNvSpPr/>
-          <p:nvPr/>
-        </p:nvSpPr>
-        <p:spPr>
-          <a:xfrm>
-            <a:off x="2981278" y="3873511"/>
-            <a:ext cx="173736" cy="173736"/>
-          </a:xfrm>
-          <a:prstGeom prst="ellipse">
-            <a:avLst/>
-          </a:prstGeom>
-          <a:solidFill>
-            <a:srgbClr val="B07D24"/>
-          </a:solidFill>
-          <a:ln w="15240">
-            <a:solidFill>
-              <a:srgbClr val="FFFFFF"/>
-            </a:solidFill>
-          </a:ln>
-          <a:effectLst/>
-        </p:spPr>
-        <p:style>
-          <a:lnRef idx="1">
-            <a:schemeClr val="accent1"/>
-          </a:lnRef>
-          <a:fillRef idx="3">
-            <a:schemeClr val="accent1"/>
-          </a:fillRef>
-          <a:effectRef idx="2">
-            <a:schemeClr val="accent1"/>
-          </a:effectRef>
-          <a:fontRef idx="minor">
-            <a:schemeClr val="lt1"/>
-          </a:fontRef>
-        </p:style>
-        <p:txBody>
-          <a:bodyPr rtlCol="0" anchor="ctr"/>
-          <a:lstStyle/>
-          <a:p>
-            <a:pPr algn="ctr"/>
-          </a:p>
-        </p:txBody>
-      </p:sp>
-      <p:sp>
-        <p:nvSpPr>
-          <p:cNvPr id="19" name="TextBox 18"/>
+          <p:cNvPr id="16" name="TextBox 15"/>
           <p:cNvSpPr txBox="1"/>
           <p:nvPr/>
         </p:nvSpPr>
         <p:spPr>
           <a:xfrm>
-            <a:off x="1810846" y="3882655"/>
-            <a:ext cx="1147572" cy="164592"/>
+            <a:off x="1252728" y="2670048"/>
+            <a:ext cx="2377440" cy="182880"/>
+          </a:xfrm>
+          <a:prstGeom prst="rect">
+            <a:avLst/>
+          </a:prstGeom>
+          <a:noFill/>
+        </p:spPr>
+        <p:txBody>
+          <a:bodyPr wrap="square" anchor="t" lIns="0" rIns="0" tIns="0" bIns="0">
+            <a:spAutoFit/>
+          </a:bodyPr>
+          <a:lstStyle/>
+          <a:p>
+            <a:pPr algn="l">
+              <a:lnSpc>
+                <a:spcPct val="100000"/>
+              </a:lnSpc>
+              <a:spcBef>
+                <a:spcPts val="0"/>
+              </a:spcBef>
+              <a:spcAft>
+                <a:spcPts val="0"/>
+              </a:spcAft>
+            </a:pPr>
+            <a:r>
+              <a:rPr sz="750" b="1" spc="70">
+                <a:solidFill>
+                  <a:srgbClr val="9A958C"/>
+                </a:solidFill>
+                <a:latin typeface="Helvetica Neue"/>
+              </a:rPr>
+              <a:t>RÁPIDA, PERO CARA</a:t>
+            </a:r>
+          </a:p>
+        </p:txBody>
+      </p:sp>
+      <p:sp>
+        <p:nvSpPr>
+          <p:cNvPr id="17" name="TextBox 16"/>
+          <p:cNvSpPr txBox="1"/>
+          <p:nvPr/>
+        </p:nvSpPr>
+        <p:spPr>
+          <a:xfrm>
+            <a:off x="4544568" y="4416552"/>
+            <a:ext cx="2011680" cy="182880"/>
           </a:xfrm>
           <a:prstGeom prst="rect">
             <a:avLst/>
@@ -5346,26 +5251,71 @@
               </a:spcAft>
             </a:pPr>
             <a:r>
-              <a:rPr sz="950" b="1">
-                <a:solidFill>
-                  <a:srgbClr val="B07D24"/>
+              <a:rPr sz="750" b="1" spc="70">
+                <a:solidFill>
+                  <a:srgbClr val="9A958C"/>
                 </a:solidFill>
                 <a:latin typeface="Helvetica Neue"/>
               </a:rPr>
-              <a:t>Estación Colina</a:t>
-            </a:r>
-          </a:p>
-        </p:txBody>
-      </p:sp>
-      <p:sp>
-        <p:nvSpPr>
-          <p:cNvPr id="20" name="Oval 19"/>
-          <p:cNvSpPr/>
-          <p:nvPr/>
-        </p:nvSpPr>
-        <p:spPr>
-          <a:xfrm>
-            <a:off x="3485425" y="3560707"/>
+              <a:t>LENTA, PERO BARATA</a:t>
+            </a:r>
+          </a:p>
+        </p:txBody>
+      </p:sp>
+      <p:sp>
+        <p:nvSpPr>
+          <p:cNvPr id="18" name="TextBox 17"/>
+          <p:cNvSpPr txBox="1"/>
+          <p:nvPr/>
+        </p:nvSpPr>
+        <p:spPr>
+          <a:xfrm>
+            <a:off x="4544568" y="2670048"/>
+            <a:ext cx="2011680" cy="182880"/>
+          </a:xfrm>
+          <a:prstGeom prst="rect">
+            <a:avLst/>
+          </a:prstGeom>
+          <a:noFill/>
+        </p:spPr>
+        <p:txBody>
+          <a:bodyPr wrap="square" anchor="t" lIns="0" rIns="0" tIns="0" bIns="0">
+            <a:spAutoFit/>
+          </a:bodyPr>
+          <a:lstStyle/>
+          <a:p>
+            <a:pPr algn="r">
+              <a:lnSpc>
+                <a:spcPct val="100000"/>
+              </a:lnSpc>
+              <a:spcBef>
+                <a:spcPts val="0"/>
+              </a:spcBef>
+              <a:spcAft>
+                <a:spcPts val="0"/>
+              </a:spcAft>
+            </a:pPr>
+            <a:r>
+              <a:rPr sz="750" b="1" spc="70">
+                <a:solidFill>
+                  <a:srgbClr val="B06A5E"/>
+                </a:solidFill>
+                <a:latin typeface="Helvetica Neue"/>
+              </a:rPr>
+              <a:t>LENTA Y CARA</a:t>
+            </a:r>
+          </a:p>
+        </p:txBody>
+      </p:sp>
+      <p:sp>
+        <p:nvSpPr>
+          <p:cNvPr id="19" name="Oval 18"/>
+          <p:cNvSpPr/>
+          <p:nvPr/>
+        </p:nvSpPr>
+        <p:spPr>
+          <a:xfrm>
+            <a:off x="1553476" y="4219186"/>
             <a:ext cx="118872" cy="118872"/>
           </a:xfrm>
           <a:prstGeom prst="ellipse">
@@ -5405,13 +5355,13 @@
       </p:sp>
       <p:sp>
         <p:nvSpPr>
-          <p:cNvPr id="21" name="Oval 20"/>
-          <p:cNvSpPr/>
-          <p:nvPr/>
-        </p:nvSpPr>
-        <p:spPr>
-          <a:xfrm>
-            <a:off x="3608315" y="3890142"/>
+          <p:cNvPr id="20" name="Oval 19"/>
+          <p:cNvSpPr/>
+          <p:nvPr/>
+        </p:nvSpPr>
+        <p:spPr>
+          <a:xfrm>
+            <a:off x="2297820" y="4358035"/>
             <a:ext cx="118872" cy="118872"/>
           </a:xfrm>
           <a:prstGeom prst="ellipse">
@@ -5451,13 +5401,13 @@
       </p:sp>
       <p:sp>
         <p:nvSpPr>
-          <p:cNvPr id="22" name="Oval 21"/>
-          <p:cNvSpPr/>
-          <p:nvPr/>
-        </p:nvSpPr>
-        <p:spPr>
-          <a:xfrm>
-            <a:off x="3937049" y="3092579"/>
+          <p:cNvPr id="21" name="Oval 20"/>
+          <p:cNvSpPr/>
+          <p:nvPr/>
+        </p:nvSpPr>
+        <p:spPr>
+          <a:xfrm>
+            <a:off x="2741081" y="2986889"/>
             <a:ext cx="118872" cy="118872"/>
           </a:xfrm>
           <a:prstGeom prst="ellipse">
@@ -5497,13 +5447,13 @@
       </p:sp>
       <p:sp>
         <p:nvSpPr>
-          <p:cNvPr id="23" name="Oval 22"/>
-          <p:cNvSpPr/>
-          <p:nvPr/>
-        </p:nvSpPr>
-        <p:spPr>
-          <a:xfrm>
-            <a:off x="4321766" y="2760065"/>
+          <p:cNvPr id="22" name="Oval 21"/>
+          <p:cNvSpPr/>
+          <p:nvPr/>
+        </p:nvSpPr>
+        <p:spPr>
+          <a:xfrm>
+            <a:off x="2841442" y="3581631"/>
             <a:ext cx="118872" cy="118872"/>
           </a:xfrm>
           <a:prstGeom prst="ellipse">
@@ -5543,20 +5493,20 @@
       </p:sp>
       <p:sp>
         <p:nvSpPr>
-          <p:cNvPr id="24" name="Oval 23"/>
-          <p:cNvSpPr/>
-          <p:nvPr/>
-        </p:nvSpPr>
-        <p:spPr>
-          <a:xfrm>
-            <a:off x="4478329" y="3486026"/>
-            <a:ext cx="173736" cy="173736"/>
+          <p:cNvPr id="23" name="Oval 22"/>
+          <p:cNvSpPr/>
+          <p:nvPr/>
+        </p:nvSpPr>
+        <p:spPr>
+          <a:xfrm>
+            <a:off x="2883259" y="4398187"/>
+            <a:ext cx="118872" cy="118872"/>
           </a:xfrm>
           <a:prstGeom prst="ellipse">
             <a:avLst/>
           </a:prstGeom>
           <a:solidFill>
-            <a:srgbClr val="B07D24"/>
+            <a:srgbClr val="134E48"/>
           </a:solidFill>
           <a:ln w="15240">
             <a:solidFill>
@@ -5589,7 +5539,328 @@
       </p:sp>
       <p:sp>
         <p:nvSpPr>
+          <p:cNvPr id="24" name="Oval 23"/>
+          <p:cNvSpPr/>
+          <p:nvPr/>
+        </p:nvSpPr>
+        <p:spPr>
+          <a:xfrm>
+            <a:off x="2981278" y="3873511"/>
+            <a:ext cx="173736" cy="173736"/>
+          </a:xfrm>
+          <a:prstGeom prst="ellipse">
+            <a:avLst/>
+          </a:prstGeom>
+          <a:solidFill>
+            <a:srgbClr val="B07D24"/>
+          </a:solidFill>
+          <a:ln w="15240">
+            <a:solidFill>
+              <a:srgbClr val="FFFFFF"/>
+            </a:solidFill>
+          </a:ln>
+          <a:effectLst/>
+        </p:spPr>
+        <p:style>
+          <a:lnRef idx="1">
+            <a:schemeClr val="accent1"/>
+          </a:lnRef>
+          <a:fillRef idx="3">
+            <a:schemeClr val="accent1"/>
+          </a:fillRef>
+          <a:effectRef idx="2">
+            <a:schemeClr val="accent1"/>
+          </a:effectRef>
+          <a:fontRef idx="minor">
+            <a:schemeClr val="lt1"/>
+          </a:fontRef>
+        </p:style>
+        <p:txBody>
+          <a:bodyPr rtlCol="0" anchor="ctr"/>
+          <a:lstStyle/>
+          <a:p>
+            <a:pPr algn="ctr"/>
+          </a:p>
+        </p:txBody>
+      </p:sp>
+      <p:sp>
+        <p:nvSpPr>
           <p:cNvPr id="25" name="TextBox 24"/>
+          <p:cNvSpPr txBox="1"/>
+          <p:nvPr/>
+        </p:nvSpPr>
+        <p:spPr>
+          <a:xfrm>
+            <a:off x="1810846" y="3882655"/>
+            <a:ext cx="1147572" cy="164592"/>
+          </a:xfrm>
+          <a:prstGeom prst="rect">
+            <a:avLst/>
+          </a:prstGeom>
+          <a:noFill/>
+        </p:spPr>
+        <p:txBody>
+          <a:bodyPr wrap="square" anchor="t" lIns="0" rIns="0" tIns="0" bIns="0">
+            <a:spAutoFit/>
+          </a:bodyPr>
+          <a:lstStyle/>
+          <a:p>
+            <a:pPr algn="r">
+              <a:lnSpc>
+                <a:spcPct val="100000"/>
+              </a:lnSpc>
+              <a:spcBef>
+                <a:spcPts val="0"/>
+              </a:spcBef>
+              <a:spcAft>
+                <a:spcPts val="0"/>
+              </a:spcAft>
+            </a:pPr>
+            <a:r>
+              <a:rPr sz="950" b="1">
+                <a:solidFill>
+                  <a:srgbClr val="B07D24"/>
+                </a:solidFill>
+                <a:latin typeface="Helvetica Neue"/>
+              </a:rPr>
+              <a:t>Estación Colina</a:t>
+            </a:r>
+          </a:p>
+        </p:txBody>
+      </p:sp>
+      <p:sp>
+        <p:nvSpPr>
+          <p:cNvPr id="26" name="Oval 25"/>
+          <p:cNvSpPr/>
+          <p:nvPr/>
+        </p:nvSpPr>
+        <p:spPr>
+          <a:xfrm>
+            <a:off x="3485425" y="3560707"/>
+            <a:ext cx="118872" cy="118872"/>
+          </a:xfrm>
+          <a:prstGeom prst="ellipse">
+            <a:avLst/>
+          </a:prstGeom>
+          <a:solidFill>
+            <a:srgbClr val="134E48"/>
+          </a:solidFill>
+          <a:ln w="15240">
+            <a:solidFill>
+              <a:srgbClr val="FFFFFF"/>
+            </a:solidFill>
+          </a:ln>
+          <a:effectLst/>
+        </p:spPr>
+        <p:style>
+          <a:lnRef idx="1">
+            <a:schemeClr val="accent1"/>
+          </a:lnRef>
+          <a:fillRef idx="3">
+            <a:schemeClr val="accent1"/>
+          </a:fillRef>
+          <a:effectRef idx="2">
+            <a:schemeClr val="accent1"/>
+          </a:effectRef>
+          <a:fontRef idx="minor">
+            <a:schemeClr val="lt1"/>
+          </a:fontRef>
+        </p:style>
+        <p:txBody>
+          <a:bodyPr rtlCol="0" anchor="ctr"/>
+          <a:lstStyle/>
+          <a:p>
+            <a:pPr algn="ctr"/>
+          </a:p>
+        </p:txBody>
+      </p:sp>
+      <p:sp>
+        <p:nvSpPr>
+          <p:cNvPr id="27" name="Oval 26"/>
+          <p:cNvSpPr/>
+          <p:nvPr/>
+        </p:nvSpPr>
+        <p:spPr>
+          <a:xfrm>
+            <a:off x="3608315" y="3890142"/>
+            <a:ext cx="118872" cy="118872"/>
+          </a:xfrm>
+          <a:prstGeom prst="ellipse">
+            <a:avLst/>
+          </a:prstGeom>
+          <a:solidFill>
+            <a:srgbClr val="134E48"/>
+          </a:solidFill>
+          <a:ln w="15240">
+            <a:solidFill>
+              <a:srgbClr val="FFFFFF"/>
+            </a:solidFill>
+          </a:ln>
+          <a:effectLst/>
+        </p:spPr>
+        <p:style>
+          <a:lnRef idx="1">
+            <a:schemeClr val="accent1"/>
+          </a:lnRef>
+          <a:fillRef idx="3">
+            <a:schemeClr val="accent1"/>
+          </a:fillRef>
+          <a:effectRef idx="2">
+            <a:schemeClr val="accent1"/>
+          </a:effectRef>
+          <a:fontRef idx="minor">
+            <a:schemeClr val="lt1"/>
+          </a:fontRef>
+        </p:style>
+        <p:txBody>
+          <a:bodyPr rtlCol="0" anchor="ctr"/>
+          <a:lstStyle/>
+          <a:p>
+            <a:pPr algn="ctr"/>
+          </a:p>
+        </p:txBody>
+      </p:sp>
+      <p:sp>
+        <p:nvSpPr>
+          <p:cNvPr id="28" name="Oval 27"/>
+          <p:cNvSpPr/>
+          <p:nvPr/>
+        </p:nvSpPr>
+        <p:spPr>
+          <a:xfrm>
+            <a:off x="3937049" y="3092579"/>
+            <a:ext cx="118872" cy="118872"/>
+          </a:xfrm>
+          <a:prstGeom prst="ellipse">
+            <a:avLst/>
+          </a:prstGeom>
+          <a:solidFill>
+            <a:srgbClr val="134E48"/>
+          </a:solidFill>
+          <a:ln w="15240">
+            <a:solidFill>
+              <a:srgbClr val="FFFFFF"/>
+            </a:solidFill>
+          </a:ln>
+          <a:effectLst/>
+        </p:spPr>
+        <p:style>
+          <a:lnRef idx="1">
+            <a:schemeClr val="accent1"/>
+          </a:lnRef>
+          <a:fillRef idx="3">
+            <a:schemeClr val="accent1"/>
+          </a:fillRef>
+          <a:effectRef idx="2">
+            <a:schemeClr val="accent1"/>
+          </a:effectRef>
+          <a:fontRef idx="minor">
+            <a:schemeClr val="lt1"/>
+          </a:fontRef>
+        </p:style>
+        <p:txBody>
+          <a:bodyPr rtlCol="0" anchor="ctr"/>
+          <a:lstStyle/>
+          <a:p>
+            <a:pPr algn="ctr"/>
+          </a:p>
+        </p:txBody>
+      </p:sp>
+      <p:sp>
+        <p:nvSpPr>
+          <p:cNvPr id="29" name="Oval 28"/>
+          <p:cNvSpPr/>
+          <p:nvPr/>
+        </p:nvSpPr>
+        <p:spPr>
+          <a:xfrm>
+            <a:off x="4321766" y="2760065"/>
+            <a:ext cx="118872" cy="118872"/>
+          </a:xfrm>
+          <a:prstGeom prst="ellipse">
+            <a:avLst/>
+          </a:prstGeom>
+          <a:solidFill>
+            <a:srgbClr val="134E48"/>
+          </a:solidFill>
+          <a:ln w="15240">
+            <a:solidFill>
+              <a:srgbClr val="FFFFFF"/>
+            </a:solidFill>
+          </a:ln>
+          <a:effectLst/>
+        </p:spPr>
+        <p:style>
+          <a:lnRef idx="1">
+            <a:schemeClr val="accent1"/>
+          </a:lnRef>
+          <a:fillRef idx="3">
+            <a:schemeClr val="accent1"/>
+          </a:fillRef>
+          <a:effectRef idx="2">
+            <a:schemeClr val="accent1"/>
+          </a:effectRef>
+          <a:fontRef idx="minor">
+            <a:schemeClr val="lt1"/>
+          </a:fontRef>
+        </p:style>
+        <p:txBody>
+          <a:bodyPr rtlCol="0" anchor="ctr"/>
+          <a:lstStyle/>
+          <a:p>
+            <a:pPr algn="ctr"/>
+          </a:p>
+        </p:txBody>
+      </p:sp>
+      <p:sp>
+        <p:nvSpPr>
+          <p:cNvPr id="30" name="Oval 29"/>
+          <p:cNvSpPr/>
+          <p:nvPr/>
+        </p:nvSpPr>
+        <p:spPr>
+          <a:xfrm>
+            <a:off x="4478329" y="3486026"/>
+            <a:ext cx="173736" cy="173736"/>
+          </a:xfrm>
+          <a:prstGeom prst="ellipse">
+            <a:avLst/>
+          </a:prstGeom>
+          <a:solidFill>
+            <a:srgbClr val="B07D24"/>
+          </a:solidFill>
+          <a:ln w="15240">
+            <a:solidFill>
+              <a:srgbClr val="FFFFFF"/>
+            </a:solidFill>
+          </a:ln>
+          <a:effectLst/>
+        </p:spPr>
+        <p:style>
+          <a:lnRef idx="1">
+            <a:schemeClr val="accent1"/>
+          </a:lnRef>
+          <a:fillRef idx="3">
+            <a:schemeClr val="accent1"/>
+          </a:fillRef>
+          <a:effectRef idx="2">
+            <a:schemeClr val="accent1"/>
+          </a:effectRef>
+          <a:fontRef idx="minor">
+            <a:schemeClr val="lt1"/>
+          </a:fontRef>
+        </p:style>
+        <p:txBody>
+          <a:bodyPr rtlCol="0" anchor="ctr"/>
+          <a:lstStyle/>
+          <a:p>
+            <a:pPr algn="ctr"/>
+          </a:p>
+        </p:txBody>
+      </p:sp>
+      <p:sp>
+        <p:nvSpPr>
+          <p:cNvPr id="31" name="TextBox 30"/>
           <p:cNvSpPr txBox="1"/>
           <p:nvPr/>
         </p:nvSpPr>
@@ -5634,7 +5905,7 @@
       </p:sp>
       <p:sp>
         <p:nvSpPr>
-          <p:cNvPr id="26" name="Oval 25"/>
+          <p:cNvPr id="32" name="Oval 31"/>
           <p:cNvSpPr/>
           <p:nvPr/>
         </p:nvSpPr>
@@ -5680,7 +5951,7 @@
       </p:sp>
       <p:sp>
         <p:nvSpPr>
-          <p:cNvPr id="27" name="Oval 26"/>
+          <p:cNvPr id="33" name="Oval 32"/>
           <p:cNvSpPr/>
           <p:nvPr/>
         </p:nvSpPr>
@@ -5726,7 +5997,7 @@
       </p:sp>
       <p:sp>
         <p:nvSpPr>
-          <p:cNvPr id="28" name="Oval 27"/>
+          <p:cNvPr id="34" name="Oval 33"/>
           <p:cNvSpPr/>
           <p:nvPr/>
         </p:nvSpPr>
@@ -5772,7 +6043,7 @@
       </p:sp>
       <p:sp>
         <p:nvSpPr>
-          <p:cNvPr id="29" name="TextBox 28"/>
+          <p:cNvPr id="35" name="TextBox 34"/>
           <p:cNvSpPr txBox="1"/>
           <p:nvPr/>
         </p:nvSpPr>
@@ -5817,7 +6088,7 @@
       </p:sp>
       <p:sp>
         <p:nvSpPr>
-          <p:cNvPr id="30" name="TextBox 29"/>
+          <p:cNvPr id="36" name="TextBox 35"/>
           <p:cNvSpPr txBox="1"/>
           <p:nvPr/>
         </p:nvSpPr>
@@ -5862,7 +6133,7 @@
       </p:sp>
       <p:sp>
         <p:nvSpPr>
-          <p:cNvPr id="31" name="TextBox 30"/>
+          <p:cNvPr id="37" name="TextBox 36"/>
           <p:cNvSpPr txBox="1"/>
           <p:nvPr/>
         </p:nvSpPr>
@@ -5907,7 +6178,7 @@
       </p:sp>
       <p:sp>
         <p:nvSpPr>
-          <p:cNvPr id="32" name="TextBox 31"/>
+          <p:cNvPr id="38" name="TextBox 37"/>
           <p:cNvSpPr txBox="1"/>
           <p:nvPr/>
         </p:nvSpPr>
@@ -5952,7 +6223,7 @@
       </p:sp>
       <p:sp>
         <p:nvSpPr>
-          <p:cNvPr id="33" name="TextBox 32"/>
+          <p:cNvPr id="39" name="TextBox 38"/>
           <p:cNvSpPr txBox="1"/>
           <p:nvPr/>
         </p:nvSpPr>
@@ -5997,7 +6268,7 @@
       </p:sp>
       <p:sp>
         <p:nvSpPr>
-          <p:cNvPr id="34" name="TextBox 33"/>
+          <p:cNvPr id="40" name="TextBox 39"/>
           <p:cNvSpPr txBox="1"/>
           <p:nvPr/>
         </p:nvSpPr>
@@ -6042,7 +6313,7 @@
       </p:sp>
       <p:sp>
         <p:nvSpPr>
-          <p:cNvPr id="35" name="TextBox 34"/>
+          <p:cNvPr id="41" name="TextBox 40"/>
           <p:cNvSpPr txBox="1"/>
           <p:nvPr/>
         </p:nvSpPr>
@@ -6087,7 +6358,7 @@
       </p:sp>
       <p:sp>
         <p:nvSpPr>
-          <p:cNvPr id="36" name="Rectangle 35"/>
+          <p:cNvPr id="42" name="Rectangle 41"/>
           <p:cNvSpPr/>
           <p:nvPr/>
         </p:nvSpPr>
@@ -6133,7 +6404,7 @@
       </p:sp>
       <p:sp>
         <p:nvSpPr>
-          <p:cNvPr id="37" name="Rectangle 36"/>
+          <p:cNvPr id="43" name="Rectangle 42"/>
           <p:cNvSpPr/>
           <p:nvPr/>
         </p:nvSpPr>
@@ -6177,7 +6448,7 @@
       </p:sp>
       <p:sp>
         <p:nvSpPr>
-          <p:cNvPr id="38" name="TextBox 37"/>
+          <p:cNvPr id="44" name="TextBox 43"/>
           <p:cNvSpPr txBox="1"/>
           <p:nvPr/>
         </p:nvSpPr>
@@ -6222,7 +6493,7 @@
       </p:sp>
       <p:sp>
         <p:nvSpPr>
-          <p:cNvPr id="39" name="TextBox 38"/>
+          <p:cNvPr id="45" name="TextBox 44"/>
           <p:cNvSpPr txBox="1"/>
           <p:nvPr/>
         </p:nvSpPr>
@@ -6267,7 +6538,7 @@
       </p:sp>
       <p:cxnSp>
         <p:nvCxnSpPr>
-          <p:cNvPr id="40" name="Connector 39"/>
+          <p:cNvPr id="46" name="Connector 45"/>
           <p:cNvCxnSpPr/>
           <p:nvPr/>
         </p:nvCxnSpPr>
@@ -6303,7 +6574,7 @@
       </p:cxnSp>
       <p:sp>
         <p:nvSpPr>
-          <p:cNvPr id="41" name="TextBox 40"/>
+          <p:cNvPr id="47" name="TextBox 46"/>
           <p:cNvSpPr txBox="1"/>
           <p:nvPr/>
         </p:nvSpPr>
@@ -6357,7 +6628,7 @@
       </p:sp>
       <p:sp>
         <p:nvSpPr>
-          <p:cNvPr id="42" name="TextBox 41"/>
+          <p:cNvPr id="48" name="TextBox 47"/>
           <p:cNvSpPr txBox="1"/>
           <p:nvPr/>
         </p:nvSpPr>
@@ -20620,9 +20891,9 @@
           <p:nvPr/>
         </p:nvSpPr>
         <p:spPr>
-          <a:xfrm rot="16200000">
-            <a:off x="2622466" y="2377440"/>
-            <a:ext cx="640080" cy="164592"/>
+          <a:xfrm>
+            <a:off x="658368" y="1901952"/>
+            <a:ext cx="10607040" cy="201168"/>
           </a:xfrm>
           <a:prstGeom prst="rect">
             <a:avLst/>
@@ -20647,13 +20918,13 @@
               </a:spcAft>
             </a:pPr>
             <a:r>
-              <a:rPr sz="600" b="0">
+              <a:rPr sz="900" b="1" spc="50">
                 <a:solidFill>
                   <a:srgbClr val="6E6A64"/>
                 </a:solidFill>
                 <a:latin typeface="Helvetica Neue"/>
               </a:rPr>
-              <a:t>Chicauma</a:t>
+              <a:t>CADA CELDA: UF QUE LA FILA PUEDE COBRAR POR SOBRE LA COLUMNA, POR TIEMPO Y COSTO DE AUTO AHORRADOS</a:t>
             </a:r>
           </a:p>
         </p:txBody>
@@ -20666,7 +20937,7 @@
         </p:nvSpPr>
         <p:spPr>
           <a:xfrm rot="16200000">
-            <a:off x="3258823" y="2377440"/>
+            <a:off x="2622466" y="2395728"/>
             <a:ext cx="640080" cy="164592"/>
           </a:xfrm>
           <a:prstGeom prst="rect">
@@ -20698,7 +20969,7 @@
                 </a:solidFill>
                 <a:latin typeface="Helvetica Neue"/>
               </a:rPr>
-              <a:t>Urbanya</a:t>
+              <a:t>Chicauma</a:t>
             </a:r>
           </a:p>
         </p:txBody>
@@ -20711,7 +20982,7 @@
         </p:nvSpPr>
         <p:spPr>
           <a:xfrm rot="16200000">
-            <a:off x="3895180" y="2377440"/>
+            <a:off x="3258823" y="2395728"/>
             <a:ext cx="640080" cy="164592"/>
           </a:xfrm>
           <a:prstGeom prst="rect">
@@ -20743,7 +21014,7 @@
                 </a:solidFill>
                 <a:latin typeface="Helvetica Neue"/>
               </a:rPr>
-              <a:t>Valle Grande</a:t>
+              <a:t>Urbanya</a:t>
             </a:r>
           </a:p>
         </p:txBody>
@@ -20756,7 +21027,7 @@
         </p:nvSpPr>
         <p:spPr>
           <a:xfrm rot="16200000">
-            <a:off x="4531537" y="2377440"/>
+            <a:off x="3895180" y="2395728"/>
             <a:ext cx="640080" cy="164592"/>
           </a:xfrm>
           <a:prstGeom prst="rect">
@@ -20782,13 +21053,13 @@
               </a:spcAft>
             </a:pPr>
             <a:r>
-              <a:rPr sz="600" b="1">
-                <a:solidFill>
-                  <a:srgbClr val="B07D24"/>
+              <a:rPr sz="600" b="0">
+                <a:solidFill>
+                  <a:srgbClr val="6E6A64"/>
                 </a:solidFill>
                 <a:latin typeface="Helvetica Neue"/>
               </a:rPr>
-              <a:t>Estación Colina</a:t>
+              <a:t>Valle Grande</a:t>
             </a:r>
           </a:p>
         </p:txBody>
@@ -20801,7 +21072,7 @@
         </p:nvSpPr>
         <p:spPr>
           <a:xfrm rot="16200000">
-            <a:off x="5167894" y="2377440"/>
+            <a:off x="4531537" y="2395728"/>
             <a:ext cx="640080" cy="164592"/>
           </a:xfrm>
           <a:prstGeom prst="rect">
@@ -20827,13 +21098,13 @@
               </a:spcAft>
             </a:pPr>
             <a:r>
-              <a:rPr sz="600" b="0">
-                <a:solidFill>
-                  <a:srgbClr val="6E6A64"/>
+              <a:rPr sz="600" b="1">
+                <a:solidFill>
+                  <a:srgbClr val="B07D24"/>
                 </a:solidFill>
                 <a:latin typeface="Helvetica Neue"/>
               </a:rPr>
-              <a:t>Larapinta</a:t>
+              <a:t>Estación Colina</a:t>
             </a:r>
           </a:p>
         </p:txBody>
@@ -20846,7 +21117,7 @@
         </p:nvSpPr>
         <p:spPr>
           <a:xfrm rot="16200000">
-            <a:off x="5804251" y="2377440"/>
+            <a:off x="5167894" y="2395728"/>
             <a:ext cx="640080" cy="164592"/>
           </a:xfrm>
           <a:prstGeom prst="rect">
@@ -20878,7 +21149,7 @@
                 </a:solidFill>
                 <a:latin typeface="Helvetica Neue"/>
               </a:rPr>
-              <a:t>NOS</a:t>
+              <a:t>Larapinta</a:t>
             </a:r>
           </a:p>
         </p:txBody>
@@ -20891,7 +21162,7 @@
         </p:nvSpPr>
         <p:spPr>
           <a:xfrm rot="16200000">
-            <a:off x="6440609" y="2377440"/>
+            <a:off x="5804251" y="2395728"/>
             <a:ext cx="640080" cy="164592"/>
           </a:xfrm>
           <a:prstGeom prst="rect">
@@ -20923,7 +21194,7 @@
                 </a:solidFill>
                 <a:latin typeface="Helvetica Neue"/>
               </a:rPr>
-              <a:t>Santa Elena</a:t>
+              <a:t>NOS</a:t>
             </a:r>
           </a:p>
         </p:txBody>
@@ -20936,7 +21207,7 @@
         </p:nvSpPr>
         <p:spPr>
           <a:xfrm rot="16200000">
-            <a:off x="7076966" y="2377440"/>
+            <a:off x="6440609" y="2395728"/>
             <a:ext cx="640080" cy="164592"/>
           </a:xfrm>
           <a:prstGeom prst="rect">
@@ -20968,7 +21239,7 @@
                 </a:solidFill>
                 <a:latin typeface="Helvetica Neue"/>
               </a:rPr>
-              <a:t>Laguna del Sol</a:t>
+              <a:t>Santa Elena</a:t>
             </a:r>
           </a:p>
         </p:txBody>
@@ -20981,7 +21252,7 @@
         </p:nvSpPr>
         <p:spPr>
           <a:xfrm rot="16200000">
-            <a:off x="7713323" y="2377440"/>
+            <a:off x="7076966" y="2395728"/>
             <a:ext cx="640080" cy="164592"/>
           </a:xfrm>
           <a:prstGeom prst="rect">
@@ -21013,7 +21284,7 @@
                 </a:solidFill>
                 <a:latin typeface="Helvetica Neue"/>
               </a:rPr>
-              <a:t>Hacienda Batuco</a:t>
+              <a:t>Laguna del Sol</a:t>
             </a:r>
           </a:p>
         </p:txBody>
@@ -21026,7 +21297,7 @@
         </p:nvSpPr>
         <p:spPr>
           <a:xfrm rot="16200000">
-            <a:off x="8349680" y="2377440"/>
+            <a:off x="7713323" y="2395728"/>
             <a:ext cx="640080" cy="164592"/>
           </a:xfrm>
           <a:prstGeom prst="rect">
@@ -21058,7 +21329,7 @@
                 </a:solidFill>
                 <a:latin typeface="Helvetica Neue"/>
               </a:rPr>
-              <a:t>El Peñón</a:t>
+              <a:t>Hacienda Batuco</a:t>
             </a:r>
           </a:p>
         </p:txBody>
@@ -21071,7 +21342,7 @@
         </p:nvSpPr>
         <p:spPr>
           <a:xfrm rot="16200000">
-            <a:off x="8986037" y="2377440"/>
+            <a:off x="8349680" y="2395728"/>
             <a:ext cx="640080" cy="164592"/>
           </a:xfrm>
           <a:prstGeom prst="rect">
@@ -21097,13 +21368,13 @@
               </a:spcAft>
             </a:pPr>
             <a:r>
-              <a:rPr sz="600" b="1">
-                <a:solidFill>
-                  <a:srgbClr val="B07D24"/>
+              <a:rPr sz="600" b="0">
+                <a:solidFill>
+                  <a:srgbClr val="6E6A64"/>
                 </a:solidFill>
                 <a:latin typeface="Helvetica Neue"/>
               </a:rPr>
-              <a:t>Batuco</a:t>
+              <a:t>El Peñón</a:t>
             </a:r>
           </a:p>
         </p:txBody>
@@ -21116,7 +21387,7 @@
         </p:nvSpPr>
         <p:spPr>
           <a:xfrm rot="16200000">
-            <a:off x="9622394" y="2377440"/>
+            <a:off x="8986037" y="2395728"/>
             <a:ext cx="640080" cy="164592"/>
           </a:xfrm>
           <a:prstGeom prst="rect">
@@ -21142,13 +21413,13 @@
               </a:spcAft>
             </a:pPr>
             <a:r>
-              <a:rPr sz="600" b="0">
-                <a:solidFill>
-                  <a:srgbClr val="6E6A64"/>
+              <a:rPr sz="600" b="1">
+                <a:solidFill>
+                  <a:srgbClr val="B07D24"/>
                 </a:solidFill>
                 <a:latin typeface="Helvetica Neue"/>
               </a:rPr>
-              <a:t>Ayres</a:t>
+              <a:t>Batuco</a:t>
             </a:r>
           </a:p>
         </p:txBody>
@@ -21161,7 +21432,7 @@
         </p:nvSpPr>
         <p:spPr>
           <a:xfrm rot="16200000">
-            <a:off x="10258751" y="2377440"/>
+            <a:off x="9622394" y="2395728"/>
             <a:ext cx="640080" cy="164592"/>
           </a:xfrm>
           <a:prstGeom prst="rect">
@@ -21193,7 +21464,7 @@
                 </a:solidFill>
                 <a:latin typeface="Helvetica Neue"/>
               </a:rPr>
-              <a:t>Colina · Reina N.</a:t>
+              <a:t>Ayres</a:t>
             </a:r>
           </a:p>
         </p:txBody>
@@ -21206,7 +21477,7 @@
         </p:nvSpPr>
         <p:spPr>
           <a:xfrm rot="16200000">
-            <a:off x="10895108" y="2377440"/>
+            <a:off x="10258751" y="2395728"/>
             <a:ext cx="640080" cy="164592"/>
           </a:xfrm>
           <a:prstGeom prst="rect">
@@ -21238,7 +21509,7 @@
                 </a:solidFill>
                 <a:latin typeface="Helvetica Neue"/>
               </a:rPr>
-              <a:t>Buin</a:t>
+              <a:t>Colina · Reina N.</a:t>
             </a:r>
           </a:p>
         </p:txBody>
@@ -21250,9 +21521,9 @@
           <p:nvPr/>
         </p:nvSpPr>
         <p:spPr>
-          <a:xfrm>
-            <a:off x="704088" y="2798063"/>
-            <a:ext cx="1856231" cy="146304"/>
+          <a:xfrm rot="16200000">
+            <a:off x="10895108" y="2395728"/>
+            <a:ext cx="640080" cy="164592"/>
           </a:xfrm>
           <a:prstGeom prst="rect">
             <a:avLst/>
@@ -21260,7 +21531,7 @@
           <a:noFill/>
         </p:spPr>
         <p:txBody>
-          <a:bodyPr wrap="square" anchor="ctr" lIns="0" rIns="0" tIns="0" bIns="0">
+          <a:bodyPr wrap="square" anchor="t" lIns="0" rIns="0" tIns="0" bIns="0">
             <a:spAutoFit/>
           </a:bodyPr>
           <a:lstStyle/>
@@ -21277,6 +21548,51 @@
               </a:spcAft>
             </a:pPr>
             <a:r>
+              <a:rPr sz="600" b="0">
+                <a:solidFill>
+                  <a:srgbClr val="6E6A64"/>
+                </a:solidFill>
+                <a:latin typeface="Helvetica Neue"/>
+              </a:rPr>
+              <a:t>Buin</a:t>
+            </a:r>
+          </a:p>
+        </p:txBody>
+      </p:sp>
+      <p:sp>
+        <p:nvSpPr>
+          <p:cNvPr id="20" name="TextBox 19"/>
+          <p:cNvSpPr txBox="1"/>
+          <p:nvPr/>
+        </p:nvSpPr>
+        <p:spPr>
+          <a:xfrm>
+            <a:off x="704088" y="2816352"/>
+            <a:ext cx="1856231" cy="146304"/>
+          </a:xfrm>
+          <a:prstGeom prst="rect">
+            <a:avLst/>
+          </a:prstGeom>
+          <a:noFill/>
+        </p:spPr>
+        <p:txBody>
+          <a:bodyPr wrap="square" anchor="ctr" lIns="0" rIns="0" tIns="0" bIns="0">
+            <a:spAutoFit/>
+          </a:bodyPr>
+          <a:lstStyle/>
+          <a:p>
+            <a:pPr algn="l">
+              <a:lnSpc>
+                <a:spcPct val="100000"/>
+              </a:lnSpc>
+              <a:spcBef>
+                <a:spcPts val="0"/>
+              </a:spcBef>
+              <a:spcAft>
+                <a:spcPts val="0"/>
+              </a:spcAft>
+            </a:pPr>
+            <a:r>
               <a:rPr sz="750" b="1">
                 <a:solidFill>
                   <a:srgbClr val="9A958C"/>
@@ -21299,13 +21615,13 @@
       </p:sp>
       <p:sp>
         <p:nvSpPr>
-          <p:cNvPr id="20" name="Rectangle 19"/>
-          <p:cNvSpPr/>
-          <p:nvPr/>
-        </p:nvSpPr>
-        <p:spPr>
-          <a:xfrm>
-            <a:off x="2635300" y="2809036"/>
+          <p:cNvPr id="21" name="Rectangle 20"/>
+          <p:cNvSpPr/>
+          <p:nvPr/>
+        </p:nvSpPr>
+        <p:spPr>
+          <a:xfrm>
+            <a:off x="2635300" y="2827324"/>
             <a:ext cx="614411" cy="124358"/>
           </a:xfrm>
           <a:prstGeom prst="rect">
@@ -21343,13 +21659,13 @@
       </p:sp>
       <p:sp>
         <p:nvSpPr>
-          <p:cNvPr id="21" name="Rectangle 20"/>
-          <p:cNvSpPr/>
-          <p:nvPr/>
-        </p:nvSpPr>
-        <p:spPr>
-          <a:xfrm>
-            <a:off x="3271657" y="2809036"/>
+          <p:cNvPr id="22" name="Rectangle 21"/>
+          <p:cNvSpPr/>
+          <p:nvPr/>
+        </p:nvSpPr>
+        <p:spPr>
+          <a:xfrm>
+            <a:off x="3271657" y="2827324"/>
             <a:ext cx="614411" cy="124358"/>
           </a:xfrm>
           <a:prstGeom prst="rect">
@@ -21387,13 +21703,13 @@
       </p:sp>
       <p:sp>
         <p:nvSpPr>
-          <p:cNvPr id="22" name="TextBox 21"/>
+          <p:cNvPr id="23" name="TextBox 22"/>
           <p:cNvSpPr txBox="1"/>
           <p:nvPr/>
         </p:nvSpPr>
         <p:spPr>
           <a:xfrm>
-            <a:off x="3260685" y="2798063"/>
+            <a:off x="3260685" y="2816352"/>
             <a:ext cx="636357" cy="146304"/>
           </a:xfrm>
           <a:prstGeom prst="rect">
@@ -21432,13 +21748,13 @@
       </p:sp>
       <p:sp>
         <p:nvSpPr>
-          <p:cNvPr id="23" name="Rectangle 22"/>
-          <p:cNvSpPr/>
-          <p:nvPr/>
-        </p:nvSpPr>
-        <p:spPr>
-          <a:xfrm>
-            <a:off x="3908014" y="2809036"/>
+          <p:cNvPr id="24" name="Rectangle 23"/>
+          <p:cNvSpPr/>
+          <p:nvPr/>
+        </p:nvSpPr>
+        <p:spPr>
+          <a:xfrm>
+            <a:off x="3908014" y="2827324"/>
             <a:ext cx="614411" cy="124358"/>
           </a:xfrm>
           <a:prstGeom prst="rect">
@@ -21476,13 +21792,13 @@
       </p:sp>
       <p:sp>
         <p:nvSpPr>
-          <p:cNvPr id="24" name="TextBox 23"/>
+          <p:cNvPr id="25" name="TextBox 24"/>
           <p:cNvSpPr txBox="1"/>
           <p:nvPr/>
         </p:nvSpPr>
         <p:spPr>
           <a:xfrm>
-            <a:off x="3897042" y="2798063"/>
+            <a:off x="3897042" y="2816352"/>
             <a:ext cx="636357" cy="146304"/>
           </a:xfrm>
           <a:prstGeom prst="rect">
@@ -21521,13 +21837,13 @@
       </p:sp>
       <p:sp>
         <p:nvSpPr>
-          <p:cNvPr id="25" name="Rectangle 24"/>
-          <p:cNvSpPr/>
-          <p:nvPr/>
-        </p:nvSpPr>
-        <p:spPr>
-          <a:xfrm>
-            <a:off x="4544372" y="2809036"/>
+          <p:cNvPr id="26" name="Rectangle 25"/>
+          <p:cNvSpPr/>
+          <p:nvPr/>
+        </p:nvSpPr>
+        <p:spPr>
+          <a:xfrm>
+            <a:off x="4544372" y="2827324"/>
             <a:ext cx="614411" cy="124358"/>
           </a:xfrm>
           <a:prstGeom prst="rect">
@@ -21565,13 +21881,13 @@
       </p:sp>
       <p:sp>
         <p:nvSpPr>
-          <p:cNvPr id="26" name="TextBox 25"/>
+          <p:cNvPr id="27" name="TextBox 26"/>
           <p:cNvSpPr txBox="1"/>
           <p:nvPr/>
         </p:nvSpPr>
         <p:spPr>
           <a:xfrm>
-            <a:off x="4533399" y="2798063"/>
+            <a:off x="4533399" y="2816352"/>
             <a:ext cx="636357" cy="146304"/>
           </a:xfrm>
           <a:prstGeom prst="rect">
@@ -21610,13 +21926,13 @@
       </p:sp>
       <p:sp>
         <p:nvSpPr>
-          <p:cNvPr id="27" name="Rectangle 26"/>
-          <p:cNvSpPr/>
-          <p:nvPr/>
-        </p:nvSpPr>
-        <p:spPr>
-          <a:xfrm>
-            <a:off x="5180729" y="2809036"/>
+          <p:cNvPr id="28" name="Rectangle 27"/>
+          <p:cNvSpPr/>
+          <p:nvPr/>
+        </p:nvSpPr>
+        <p:spPr>
+          <a:xfrm>
+            <a:off x="5180729" y="2827324"/>
             <a:ext cx="614411" cy="124358"/>
           </a:xfrm>
           <a:prstGeom prst="rect">
@@ -21654,13 +21970,13 @@
       </p:sp>
       <p:sp>
         <p:nvSpPr>
-          <p:cNvPr id="28" name="TextBox 27"/>
+          <p:cNvPr id="29" name="TextBox 28"/>
           <p:cNvSpPr txBox="1"/>
           <p:nvPr/>
         </p:nvSpPr>
         <p:spPr>
           <a:xfrm>
-            <a:off x="5169756" y="2798063"/>
+            <a:off x="5169756" y="2816352"/>
             <a:ext cx="636357" cy="146304"/>
           </a:xfrm>
           <a:prstGeom prst="rect">
@@ -21699,13 +22015,13 @@
       </p:sp>
       <p:sp>
         <p:nvSpPr>
-          <p:cNvPr id="29" name="Rectangle 28"/>
-          <p:cNvSpPr/>
-          <p:nvPr/>
-        </p:nvSpPr>
-        <p:spPr>
-          <a:xfrm>
-            <a:off x="5817086" y="2809036"/>
+          <p:cNvPr id="30" name="Rectangle 29"/>
+          <p:cNvSpPr/>
+          <p:nvPr/>
+        </p:nvSpPr>
+        <p:spPr>
+          <a:xfrm>
+            <a:off x="5817086" y="2827324"/>
             <a:ext cx="614411" cy="124358"/>
           </a:xfrm>
           <a:prstGeom prst="rect">
@@ -21743,13 +22059,13 @@
       </p:sp>
       <p:sp>
         <p:nvSpPr>
-          <p:cNvPr id="30" name="TextBox 29"/>
+          <p:cNvPr id="31" name="TextBox 30"/>
           <p:cNvSpPr txBox="1"/>
           <p:nvPr/>
         </p:nvSpPr>
         <p:spPr>
           <a:xfrm>
-            <a:off x="5806113" y="2798063"/>
+            <a:off x="5806113" y="2816352"/>
             <a:ext cx="636357" cy="146304"/>
           </a:xfrm>
           <a:prstGeom prst="rect">
@@ -21788,13 +22104,13 @@
       </p:sp>
       <p:sp>
         <p:nvSpPr>
-          <p:cNvPr id="31" name="Rectangle 30"/>
-          <p:cNvSpPr/>
-          <p:nvPr/>
-        </p:nvSpPr>
-        <p:spPr>
-          <a:xfrm>
-            <a:off x="6453443" y="2809036"/>
+          <p:cNvPr id="32" name="Rectangle 31"/>
+          <p:cNvSpPr/>
+          <p:nvPr/>
+        </p:nvSpPr>
+        <p:spPr>
+          <a:xfrm>
+            <a:off x="6453443" y="2827324"/>
             <a:ext cx="614411" cy="124358"/>
           </a:xfrm>
           <a:prstGeom prst="rect">
@@ -21832,13 +22148,13 @@
       </p:sp>
       <p:sp>
         <p:nvSpPr>
-          <p:cNvPr id="32" name="TextBox 31"/>
+          <p:cNvPr id="33" name="TextBox 32"/>
           <p:cNvSpPr txBox="1"/>
           <p:nvPr/>
         </p:nvSpPr>
         <p:spPr>
           <a:xfrm>
-            <a:off x="6442470" y="2798063"/>
+            <a:off x="6442470" y="2816352"/>
             <a:ext cx="636357" cy="146304"/>
           </a:xfrm>
           <a:prstGeom prst="rect">
@@ -21877,13 +22193,13 @@
       </p:sp>
       <p:sp>
         <p:nvSpPr>
-          <p:cNvPr id="33" name="Rectangle 32"/>
-          <p:cNvSpPr/>
-          <p:nvPr/>
-        </p:nvSpPr>
-        <p:spPr>
-          <a:xfrm>
-            <a:off x="7089800" y="2809036"/>
+          <p:cNvPr id="34" name="Rectangle 33"/>
+          <p:cNvSpPr/>
+          <p:nvPr/>
+        </p:nvSpPr>
+        <p:spPr>
+          <a:xfrm>
+            <a:off x="7089800" y="2827324"/>
             <a:ext cx="614411" cy="124358"/>
           </a:xfrm>
           <a:prstGeom prst="rect">
@@ -21921,13 +22237,13 @@
       </p:sp>
       <p:sp>
         <p:nvSpPr>
-          <p:cNvPr id="34" name="TextBox 33"/>
+          <p:cNvPr id="35" name="TextBox 34"/>
           <p:cNvSpPr txBox="1"/>
           <p:nvPr/>
         </p:nvSpPr>
         <p:spPr>
           <a:xfrm>
-            <a:off x="7078827" y="2798063"/>
+            <a:off x="7078827" y="2816352"/>
             <a:ext cx="636357" cy="146304"/>
           </a:xfrm>
           <a:prstGeom prst="rect">
@@ -21966,13 +22282,13 @@
       </p:sp>
       <p:sp>
         <p:nvSpPr>
-          <p:cNvPr id="35" name="Rectangle 34"/>
-          <p:cNvSpPr/>
-          <p:nvPr/>
-        </p:nvSpPr>
-        <p:spPr>
-          <a:xfrm>
-            <a:off x="7726157" y="2809036"/>
+          <p:cNvPr id="36" name="Rectangle 35"/>
+          <p:cNvSpPr/>
+          <p:nvPr/>
+        </p:nvSpPr>
+        <p:spPr>
+          <a:xfrm>
+            <a:off x="7726157" y="2827324"/>
             <a:ext cx="614411" cy="124358"/>
           </a:xfrm>
           <a:prstGeom prst="rect">
@@ -22010,13 +22326,13 @@
       </p:sp>
       <p:sp>
         <p:nvSpPr>
-          <p:cNvPr id="36" name="TextBox 35"/>
+          <p:cNvPr id="37" name="TextBox 36"/>
           <p:cNvSpPr txBox="1"/>
           <p:nvPr/>
         </p:nvSpPr>
         <p:spPr>
           <a:xfrm>
-            <a:off x="7715184" y="2798063"/>
+            <a:off x="7715184" y="2816352"/>
             <a:ext cx="636357" cy="146304"/>
           </a:xfrm>
           <a:prstGeom prst="rect">
@@ -22055,13 +22371,13 @@
       </p:sp>
       <p:sp>
         <p:nvSpPr>
-          <p:cNvPr id="37" name="Rectangle 36"/>
-          <p:cNvSpPr/>
-          <p:nvPr/>
-        </p:nvSpPr>
-        <p:spPr>
-          <a:xfrm>
-            <a:off x="8362514" y="2809036"/>
+          <p:cNvPr id="38" name="Rectangle 37"/>
+          <p:cNvSpPr/>
+          <p:nvPr/>
+        </p:nvSpPr>
+        <p:spPr>
+          <a:xfrm>
+            <a:off x="8362514" y="2827324"/>
             <a:ext cx="614411" cy="124358"/>
           </a:xfrm>
           <a:prstGeom prst="rect">
@@ -22099,13 +22415,13 @@
       </p:sp>
       <p:sp>
         <p:nvSpPr>
-          <p:cNvPr id="38" name="TextBox 37"/>
+          <p:cNvPr id="39" name="TextBox 38"/>
           <p:cNvSpPr txBox="1"/>
           <p:nvPr/>
         </p:nvSpPr>
         <p:spPr>
           <a:xfrm>
-            <a:off x="8351541" y="2798063"/>
+            <a:off x="8351541" y="2816352"/>
             <a:ext cx="636357" cy="146304"/>
           </a:xfrm>
           <a:prstGeom prst="rect">
@@ -22144,13 +22460,13 @@
       </p:sp>
       <p:sp>
         <p:nvSpPr>
-          <p:cNvPr id="39" name="Rectangle 38"/>
-          <p:cNvSpPr/>
-          <p:nvPr/>
-        </p:nvSpPr>
-        <p:spPr>
-          <a:xfrm>
-            <a:off x="8998871" y="2809036"/>
+          <p:cNvPr id="40" name="Rectangle 39"/>
+          <p:cNvSpPr/>
+          <p:nvPr/>
+        </p:nvSpPr>
+        <p:spPr>
+          <a:xfrm>
+            <a:off x="8998871" y="2827324"/>
             <a:ext cx="614411" cy="124358"/>
           </a:xfrm>
           <a:prstGeom prst="rect">
@@ -22188,13 +22504,13 @@
       </p:sp>
       <p:sp>
         <p:nvSpPr>
-          <p:cNvPr id="40" name="TextBox 39"/>
+          <p:cNvPr id="41" name="TextBox 40"/>
           <p:cNvSpPr txBox="1"/>
           <p:nvPr/>
         </p:nvSpPr>
         <p:spPr>
           <a:xfrm>
-            <a:off x="8987898" y="2798063"/>
+            <a:off x="8987898" y="2816352"/>
             <a:ext cx="636357" cy="146304"/>
           </a:xfrm>
           <a:prstGeom prst="rect">
@@ -22233,13 +22549,13 @@
       </p:sp>
       <p:sp>
         <p:nvSpPr>
-          <p:cNvPr id="41" name="Rectangle 40"/>
-          <p:cNvSpPr/>
-          <p:nvPr/>
-        </p:nvSpPr>
-        <p:spPr>
-          <a:xfrm>
-            <a:off x="9635228" y="2809036"/>
+          <p:cNvPr id="42" name="Rectangle 41"/>
+          <p:cNvSpPr/>
+          <p:nvPr/>
+        </p:nvSpPr>
+        <p:spPr>
+          <a:xfrm>
+            <a:off x="9635228" y="2827324"/>
             <a:ext cx="614411" cy="124358"/>
           </a:xfrm>
           <a:prstGeom prst="rect">
@@ -22277,13 +22593,13 @@
       </p:sp>
       <p:sp>
         <p:nvSpPr>
-          <p:cNvPr id="42" name="TextBox 41"/>
+          <p:cNvPr id="43" name="TextBox 42"/>
           <p:cNvSpPr txBox="1"/>
           <p:nvPr/>
         </p:nvSpPr>
         <p:spPr>
           <a:xfrm>
-            <a:off x="9624255" y="2798063"/>
+            <a:off x="9624255" y="2816352"/>
             <a:ext cx="636357" cy="146304"/>
           </a:xfrm>
           <a:prstGeom prst="rect">
@@ -22322,13 +22638,13 @@
       </p:sp>
       <p:sp>
         <p:nvSpPr>
-          <p:cNvPr id="43" name="Rectangle 42"/>
-          <p:cNvSpPr/>
-          <p:nvPr/>
-        </p:nvSpPr>
-        <p:spPr>
-          <a:xfrm>
-            <a:off x="10271585" y="2809036"/>
+          <p:cNvPr id="44" name="Rectangle 43"/>
+          <p:cNvSpPr/>
+          <p:nvPr/>
+        </p:nvSpPr>
+        <p:spPr>
+          <a:xfrm>
+            <a:off x="10271585" y="2827324"/>
             <a:ext cx="614411" cy="124358"/>
           </a:xfrm>
           <a:prstGeom prst="rect">
@@ -22366,13 +22682,13 @@
       </p:sp>
       <p:sp>
         <p:nvSpPr>
-          <p:cNvPr id="44" name="TextBox 43"/>
+          <p:cNvPr id="45" name="TextBox 44"/>
           <p:cNvSpPr txBox="1"/>
           <p:nvPr/>
         </p:nvSpPr>
         <p:spPr>
           <a:xfrm>
-            <a:off x="10260613" y="2798063"/>
+            <a:off x="10260613" y="2816352"/>
             <a:ext cx="636357" cy="146304"/>
           </a:xfrm>
           <a:prstGeom prst="rect">
@@ -22411,13 +22727,13 @@
       </p:sp>
       <p:sp>
         <p:nvSpPr>
-          <p:cNvPr id="45" name="Rectangle 44"/>
-          <p:cNvSpPr/>
-          <p:nvPr/>
-        </p:nvSpPr>
-        <p:spPr>
-          <a:xfrm>
-            <a:off x="10907942" y="2809036"/>
+          <p:cNvPr id="46" name="Rectangle 45"/>
+          <p:cNvSpPr/>
+          <p:nvPr/>
+        </p:nvSpPr>
+        <p:spPr>
+          <a:xfrm>
+            <a:off x="10907942" y="2827324"/>
             <a:ext cx="614411" cy="124358"/>
           </a:xfrm>
           <a:prstGeom prst="rect">
@@ -22455,13 +22771,13 @@
       </p:sp>
       <p:sp>
         <p:nvSpPr>
-          <p:cNvPr id="46" name="TextBox 45"/>
+          <p:cNvPr id="47" name="TextBox 46"/>
           <p:cNvSpPr txBox="1"/>
           <p:nvPr/>
         </p:nvSpPr>
         <p:spPr>
           <a:xfrm>
-            <a:off x="10896970" y="2798063"/>
+            <a:off x="10896970" y="2816352"/>
             <a:ext cx="636357" cy="146304"/>
           </a:xfrm>
           <a:prstGeom prst="rect">
@@ -22500,13 +22816,13 @@
       </p:sp>
       <p:sp>
         <p:nvSpPr>
-          <p:cNvPr id="47" name="TextBox 46"/>
+          <p:cNvPr id="48" name="TextBox 47"/>
           <p:cNvSpPr txBox="1"/>
           <p:nvPr/>
         </p:nvSpPr>
         <p:spPr>
           <a:xfrm>
-            <a:off x="704088" y="2944368"/>
+            <a:off x="704088" y="2962656"/>
             <a:ext cx="1856231" cy="146304"/>
           </a:xfrm>
           <a:prstGeom prst="rect">
@@ -22554,13 +22870,13 @@
       </p:sp>
       <p:sp>
         <p:nvSpPr>
-          <p:cNvPr id="48" name="Rectangle 47"/>
-          <p:cNvSpPr/>
-          <p:nvPr/>
-        </p:nvSpPr>
-        <p:spPr>
-          <a:xfrm>
-            <a:off x="2635300" y="2955340"/>
+          <p:cNvPr id="49" name="Rectangle 48"/>
+          <p:cNvSpPr/>
+          <p:nvPr/>
+        </p:nvSpPr>
+        <p:spPr>
+          <a:xfrm>
+            <a:off x="2635300" y="2973628"/>
             <a:ext cx="614411" cy="124358"/>
           </a:xfrm>
           <a:prstGeom prst="rect">
@@ -22598,13 +22914,13 @@
       </p:sp>
       <p:sp>
         <p:nvSpPr>
-          <p:cNvPr id="49" name="TextBox 48"/>
+          <p:cNvPr id="50" name="TextBox 49"/>
           <p:cNvSpPr txBox="1"/>
           <p:nvPr/>
         </p:nvSpPr>
         <p:spPr>
           <a:xfrm>
-            <a:off x="2624328" y="2944368"/>
+            <a:off x="2624328" y="2962656"/>
             <a:ext cx="636357" cy="146304"/>
           </a:xfrm>
           <a:prstGeom prst="rect">
@@ -22643,13 +22959,13 @@
       </p:sp>
       <p:sp>
         <p:nvSpPr>
-          <p:cNvPr id="50" name="Rectangle 49"/>
-          <p:cNvSpPr/>
-          <p:nvPr/>
-        </p:nvSpPr>
-        <p:spPr>
-          <a:xfrm>
-            <a:off x="3271657" y="2955340"/>
+          <p:cNvPr id="51" name="Rectangle 50"/>
+          <p:cNvSpPr/>
+          <p:nvPr/>
+        </p:nvSpPr>
+        <p:spPr>
+          <a:xfrm>
+            <a:off x="3271657" y="2973628"/>
             <a:ext cx="614411" cy="124358"/>
           </a:xfrm>
           <a:prstGeom prst="rect">
@@ -22687,13 +23003,13 @@
       </p:sp>
       <p:sp>
         <p:nvSpPr>
-          <p:cNvPr id="51" name="Rectangle 50"/>
-          <p:cNvSpPr/>
-          <p:nvPr/>
-        </p:nvSpPr>
-        <p:spPr>
-          <a:xfrm>
-            <a:off x="3908014" y="2955340"/>
+          <p:cNvPr id="52" name="Rectangle 51"/>
+          <p:cNvSpPr/>
+          <p:nvPr/>
+        </p:nvSpPr>
+        <p:spPr>
+          <a:xfrm>
+            <a:off x="3908014" y="2973628"/>
             <a:ext cx="614411" cy="124358"/>
           </a:xfrm>
           <a:prstGeom prst="rect">
@@ -22731,13 +23047,13 @@
       </p:sp>
       <p:sp>
         <p:nvSpPr>
-          <p:cNvPr id="52" name="TextBox 51"/>
+          <p:cNvPr id="53" name="TextBox 52"/>
           <p:cNvSpPr txBox="1"/>
           <p:nvPr/>
         </p:nvSpPr>
         <p:spPr>
           <a:xfrm>
-            <a:off x="3897042" y="2944368"/>
+            <a:off x="3897042" y="2962656"/>
             <a:ext cx="636357" cy="146304"/>
           </a:xfrm>
           <a:prstGeom prst="rect">
@@ -22776,13 +23092,13 @@
       </p:sp>
       <p:sp>
         <p:nvSpPr>
-          <p:cNvPr id="53" name="Rectangle 52"/>
-          <p:cNvSpPr/>
-          <p:nvPr/>
-        </p:nvSpPr>
-        <p:spPr>
-          <a:xfrm>
-            <a:off x="4544372" y="2955340"/>
+          <p:cNvPr id="54" name="Rectangle 53"/>
+          <p:cNvSpPr/>
+          <p:nvPr/>
+        </p:nvSpPr>
+        <p:spPr>
+          <a:xfrm>
+            <a:off x="4544372" y="2973628"/>
             <a:ext cx="614411" cy="124358"/>
           </a:xfrm>
           <a:prstGeom prst="rect">
@@ -22820,13 +23136,13 @@
       </p:sp>
       <p:sp>
         <p:nvSpPr>
-          <p:cNvPr id="54" name="TextBox 53"/>
+          <p:cNvPr id="55" name="TextBox 54"/>
           <p:cNvSpPr txBox="1"/>
           <p:nvPr/>
         </p:nvSpPr>
         <p:spPr>
           <a:xfrm>
-            <a:off x="4533399" y="2944368"/>
+            <a:off x="4533399" y="2962656"/>
             <a:ext cx="636357" cy="146304"/>
           </a:xfrm>
           <a:prstGeom prst="rect">
@@ -22865,13 +23181,13 @@
       </p:sp>
       <p:sp>
         <p:nvSpPr>
-          <p:cNvPr id="55" name="Rectangle 54"/>
-          <p:cNvSpPr/>
-          <p:nvPr/>
-        </p:nvSpPr>
-        <p:spPr>
-          <a:xfrm>
-            <a:off x="5180729" y="2955340"/>
+          <p:cNvPr id="56" name="Rectangle 55"/>
+          <p:cNvSpPr/>
+          <p:nvPr/>
+        </p:nvSpPr>
+        <p:spPr>
+          <a:xfrm>
+            <a:off x="5180729" y="2973628"/>
             <a:ext cx="614411" cy="124358"/>
           </a:xfrm>
           <a:prstGeom prst="rect">
@@ -22909,13 +23225,13 @@
       </p:sp>
       <p:sp>
         <p:nvSpPr>
-          <p:cNvPr id="56" name="TextBox 55"/>
+          <p:cNvPr id="57" name="TextBox 56"/>
           <p:cNvSpPr txBox="1"/>
           <p:nvPr/>
         </p:nvSpPr>
         <p:spPr>
           <a:xfrm>
-            <a:off x="5169756" y="2944368"/>
+            <a:off x="5169756" y="2962656"/>
             <a:ext cx="636357" cy="146304"/>
           </a:xfrm>
           <a:prstGeom prst="rect">
@@ -22954,13 +23270,13 @@
       </p:sp>
       <p:sp>
         <p:nvSpPr>
-          <p:cNvPr id="57" name="Rectangle 56"/>
-          <p:cNvSpPr/>
-          <p:nvPr/>
-        </p:nvSpPr>
-        <p:spPr>
-          <a:xfrm>
-            <a:off x="5817086" y="2955340"/>
+          <p:cNvPr id="58" name="Rectangle 57"/>
+          <p:cNvSpPr/>
+          <p:nvPr/>
+        </p:nvSpPr>
+        <p:spPr>
+          <a:xfrm>
+            <a:off x="5817086" y="2973628"/>
             <a:ext cx="614411" cy="124358"/>
           </a:xfrm>
           <a:prstGeom prst="rect">
@@ -22998,13 +23314,13 @@
       </p:sp>
       <p:sp>
         <p:nvSpPr>
-          <p:cNvPr id="58" name="TextBox 57"/>
+          <p:cNvPr id="59" name="TextBox 58"/>
           <p:cNvSpPr txBox="1"/>
           <p:nvPr/>
         </p:nvSpPr>
         <p:spPr>
           <a:xfrm>
-            <a:off x="5806113" y="2944368"/>
+            <a:off x="5806113" y="2962656"/>
             <a:ext cx="636357" cy="146304"/>
           </a:xfrm>
           <a:prstGeom prst="rect">
@@ -23043,13 +23359,13 @@
       </p:sp>
       <p:sp>
         <p:nvSpPr>
-          <p:cNvPr id="59" name="Rectangle 58"/>
-          <p:cNvSpPr/>
-          <p:nvPr/>
-        </p:nvSpPr>
-        <p:spPr>
-          <a:xfrm>
-            <a:off x="6453443" y="2955340"/>
+          <p:cNvPr id="60" name="Rectangle 59"/>
+          <p:cNvSpPr/>
+          <p:nvPr/>
+        </p:nvSpPr>
+        <p:spPr>
+          <a:xfrm>
+            <a:off x="6453443" y="2973628"/>
             <a:ext cx="614411" cy="124358"/>
           </a:xfrm>
           <a:prstGeom prst="rect">
@@ -23087,13 +23403,13 @@
       </p:sp>
       <p:sp>
         <p:nvSpPr>
-          <p:cNvPr id="60" name="TextBox 59"/>
+          <p:cNvPr id="61" name="TextBox 60"/>
           <p:cNvSpPr txBox="1"/>
           <p:nvPr/>
         </p:nvSpPr>
         <p:spPr>
           <a:xfrm>
-            <a:off x="6442470" y="2944368"/>
+            <a:off x="6442470" y="2962656"/>
             <a:ext cx="636357" cy="146304"/>
           </a:xfrm>
           <a:prstGeom prst="rect">
@@ -23132,13 +23448,13 @@
       </p:sp>
       <p:sp>
         <p:nvSpPr>
-          <p:cNvPr id="61" name="Rectangle 60"/>
-          <p:cNvSpPr/>
-          <p:nvPr/>
-        </p:nvSpPr>
-        <p:spPr>
-          <a:xfrm>
-            <a:off x="7089800" y="2955340"/>
+          <p:cNvPr id="62" name="Rectangle 61"/>
+          <p:cNvSpPr/>
+          <p:nvPr/>
+        </p:nvSpPr>
+        <p:spPr>
+          <a:xfrm>
+            <a:off x="7089800" y="2973628"/>
             <a:ext cx="614411" cy="124358"/>
           </a:xfrm>
           <a:prstGeom prst="rect">
@@ -23176,13 +23492,13 @@
       </p:sp>
       <p:sp>
         <p:nvSpPr>
-          <p:cNvPr id="62" name="TextBox 61"/>
+          <p:cNvPr id="63" name="TextBox 62"/>
           <p:cNvSpPr txBox="1"/>
           <p:nvPr/>
         </p:nvSpPr>
         <p:spPr>
           <a:xfrm>
-            <a:off x="7078827" y="2944368"/>
+            <a:off x="7078827" y="2962656"/>
             <a:ext cx="636357" cy="146304"/>
           </a:xfrm>
           <a:prstGeom prst="rect">
@@ -23221,13 +23537,13 @@
       </p:sp>
       <p:sp>
         <p:nvSpPr>
-          <p:cNvPr id="63" name="Rectangle 62"/>
-          <p:cNvSpPr/>
-          <p:nvPr/>
-        </p:nvSpPr>
-        <p:spPr>
-          <a:xfrm>
-            <a:off x="7726157" y="2955340"/>
+          <p:cNvPr id="64" name="Rectangle 63"/>
+          <p:cNvSpPr/>
+          <p:nvPr/>
+        </p:nvSpPr>
+        <p:spPr>
+          <a:xfrm>
+            <a:off x="7726157" y="2973628"/>
             <a:ext cx="614411" cy="124358"/>
           </a:xfrm>
           <a:prstGeom prst="rect">
@@ -23265,13 +23581,13 @@
       </p:sp>
       <p:sp>
         <p:nvSpPr>
-          <p:cNvPr id="64" name="TextBox 63"/>
+          <p:cNvPr id="65" name="TextBox 64"/>
           <p:cNvSpPr txBox="1"/>
           <p:nvPr/>
         </p:nvSpPr>
         <p:spPr>
           <a:xfrm>
-            <a:off x="7715184" y="2944368"/>
+            <a:off x="7715184" y="2962656"/>
             <a:ext cx="636357" cy="146304"/>
           </a:xfrm>
           <a:prstGeom prst="rect">
@@ -23310,13 +23626,13 @@
       </p:sp>
       <p:sp>
         <p:nvSpPr>
-          <p:cNvPr id="65" name="Rectangle 64"/>
-          <p:cNvSpPr/>
-          <p:nvPr/>
-        </p:nvSpPr>
-        <p:spPr>
-          <a:xfrm>
-            <a:off x="8362514" y="2955340"/>
+          <p:cNvPr id="66" name="Rectangle 65"/>
+          <p:cNvSpPr/>
+          <p:nvPr/>
+        </p:nvSpPr>
+        <p:spPr>
+          <a:xfrm>
+            <a:off x="8362514" y="2973628"/>
             <a:ext cx="614411" cy="124358"/>
           </a:xfrm>
           <a:prstGeom prst="rect">
@@ -23354,13 +23670,13 @@
       </p:sp>
       <p:sp>
         <p:nvSpPr>
-          <p:cNvPr id="66" name="TextBox 65"/>
+          <p:cNvPr id="67" name="TextBox 66"/>
           <p:cNvSpPr txBox="1"/>
           <p:nvPr/>
         </p:nvSpPr>
         <p:spPr>
           <a:xfrm>
-            <a:off x="8351541" y="2944368"/>
+            <a:off x="8351541" y="2962656"/>
             <a:ext cx="636357" cy="146304"/>
           </a:xfrm>
           <a:prstGeom prst="rect">
@@ -23399,13 +23715,13 @@
       </p:sp>
       <p:sp>
         <p:nvSpPr>
-          <p:cNvPr id="67" name="Rectangle 66"/>
-          <p:cNvSpPr/>
-          <p:nvPr/>
-        </p:nvSpPr>
-        <p:spPr>
-          <a:xfrm>
-            <a:off x="8998871" y="2955340"/>
+          <p:cNvPr id="68" name="Rectangle 67"/>
+          <p:cNvSpPr/>
+          <p:nvPr/>
+        </p:nvSpPr>
+        <p:spPr>
+          <a:xfrm>
+            <a:off x="8998871" y="2973628"/>
             <a:ext cx="614411" cy="124358"/>
           </a:xfrm>
           <a:prstGeom prst="rect">
@@ -23443,13 +23759,13 @@
       </p:sp>
       <p:sp>
         <p:nvSpPr>
-          <p:cNvPr id="68" name="TextBox 67"/>
+          <p:cNvPr id="69" name="TextBox 68"/>
           <p:cNvSpPr txBox="1"/>
           <p:nvPr/>
         </p:nvSpPr>
         <p:spPr>
           <a:xfrm>
-            <a:off x="8987898" y="2944368"/>
+            <a:off x="8987898" y="2962656"/>
             <a:ext cx="636357" cy="146304"/>
           </a:xfrm>
           <a:prstGeom prst="rect">
@@ -23488,13 +23804,13 @@
       </p:sp>
       <p:sp>
         <p:nvSpPr>
-          <p:cNvPr id="69" name="Rectangle 68"/>
-          <p:cNvSpPr/>
-          <p:nvPr/>
-        </p:nvSpPr>
-        <p:spPr>
-          <a:xfrm>
-            <a:off x="9635228" y="2955340"/>
+          <p:cNvPr id="70" name="Rectangle 69"/>
+          <p:cNvSpPr/>
+          <p:nvPr/>
+        </p:nvSpPr>
+        <p:spPr>
+          <a:xfrm>
+            <a:off x="9635228" y="2973628"/>
             <a:ext cx="614411" cy="124358"/>
           </a:xfrm>
           <a:prstGeom prst="rect">
@@ -23532,13 +23848,13 @@
       </p:sp>
       <p:sp>
         <p:nvSpPr>
-          <p:cNvPr id="70" name="TextBox 69"/>
+          <p:cNvPr id="71" name="TextBox 70"/>
           <p:cNvSpPr txBox="1"/>
           <p:nvPr/>
         </p:nvSpPr>
         <p:spPr>
           <a:xfrm>
-            <a:off x="9624255" y="2944368"/>
+            <a:off x="9624255" y="2962656"/>
             <a:ext cx="636357" cy="146304"/>
           </a:xfrm>
           <a:prstGeom prst="rect">
@@ -23577,13 +23893,13 @@
       </p:sp>
       <p:sp>
         <p:nvSpPr>
-          <p:cNvPr id="71" name="Rectangle 70"/>
-          <p:cNvSpPr/>
-          <p:nvPr/>
-        </p:nvSpPr>
-        <p:spPr>
-          <a:xfrm>
-            <a:off x="10271585" y="2955340"/>
+          <p:cNvPr id="72" name="Rectangle 71"/>
+          <p:cNvSpPr/>
+          <p:nvPr/>
+        </p:nvSpPr>
+        <p:spPr>
+          <a:xfrm>
+            <a:off x="10271585" y="2973628"/>
             <a:ext cx="614411" cy="124358"/>
           </a:xfrm>
           <a:prstGeom prst="rect">
@@ -23621,13 +23937,13 @@
       </p:sp>
       <p:sp>
         <p:nvSpPr>
-          <p:cNvPr id="72" name="TextBox 71"/>
+          <p:cNvPr id="73" name="TextBox 72"/>
           <p:cNvSpPr txBox="1"/>
           <p:nvPr/>
         </p:nvSpPr>
         <p:spPr>
           <a:xfrm>
-            <a:off x="10260613" y="2944368"/>
+            <a:off x="10260613" y="2962656"/>
             <a:ext cx="636357" cy="146304"/>
           </a:xfrm>
           <a:prstGeom prst="rect">
@@ -23666,13 +23982,13 @@
       </p:sp>
       <p:sp>
         <p:nvSpPr>
-          <p:cNvPr id="73" name="Rectangle 72"/>
-          <p:cNvSpPr/>
-          <p:nvPr/>
-        </p:nvSpPr>
-        <p:spPr>
-          <a:xfrm>
-            <a:off x="10907942" y="2955340"/>
+          <p:cNvPr id="74" name="Rectangle 73"/>
+          <p:cNvSpPr/>
+          <p:nvPr/>
+        </p:nvSpPr>
+        <p:spPr>
+          <a:xfrm>
+            <a:off x="10907942" y="2973628"/>
             <a:ext cx="614411" cy="124358"/>
           </a:xfrm>
           <a:prstGeom prst="rect">
@@ -23710,13 +24026,13 @@
       </p:sp>
       <p:sp>
         <p:nvSpPr>
-          <p:cNvPr id="74" name="TextBox 73"/>
+          <p:cNvPr id="75" name="TextBox 74"/>
           <p:cNvSpPr txBox="1"/>
           <p:nvPr/>
         </p:nvSpPr>
         <p:spPr>
           <a:xfrm>
-            <a:off x="10896970" y="2944368"/>
+            <a:off x="10896970" y="2962656"/>
             <a:ext cx="636357" cy="146304"/>
           </a:xfrm>
           <a:prstGeom prst="rect">
@@ -23755,13 +24071,13 @@
       </p:sp>
       <p:sp>
         <p:nvSpPr>
-          <p:cNvPr id="75" name="TextBox 74"/>
+          <p:cNvPr id="76" name="TextBox 75"/>
           <p:cNvSpPr txBox="1"/>
           <p:nvPr/>
         </p:nvSpPr>
         <p:spPr>
           <a:xfrm>
-            <a:off x="704088" y="3090671"/>
+            <a:off x="704088" y="3108960"/>
             <a:ext cx="1856231" cy="146304"/>
           </a:xfrm>
           <a:prstGeom prst="rect">
@@ -23809,13 +24125,13 @@
       </p:sp>
       <p:sp>
         <p:nvSpPr>
-          <p:cNvPr id="76" name="Rectangle 75"/>
-          <p:cNvSpPr/>
-          <p:nvPr/>
-        </p:nvSpPr>
-        <p:spPr>
-          <a:xfrm>
-            <a:off x="2635300" y="3101644"/>
+          <p:cNvPr id="77" name="Rectangle 76"/>
+          <p:cNvSpPr/>
+          <p:nvPr/>
+        </p:nvSpPr>
+        <p:spPr>
+          <a:xfrm>
+            <a:off x="2635300" y="3119932"/>
             <a:ext cx="614411" cy="124358"/>
           </a:xfrm>
           <a:prstGeom prst="rect">
@@ -23853,13 +24169,13 @@
       </p:sp>
       <p:sp>
         <p:nvSpPr>
-          <p:cNvPr id="77" name="TextBox 76"/>
+          <p:cNvPr id="78" name="TextBox 77"/>
           <p:cNvSpPr txBox="1"/>
           <p:nvPr/>
         </p:nvSpPr>
         <p:spPr>
           <a:xfrm>
-            <a:off x="2624328" y="3090671"/>
+            <a:off x="2624328" y="3108960"/>
             <a:ext cx="636357" cy="146304"/>
           </a:xfrm>
           <a:prstGeom prst="rect">
@@ -23898,13 +24214,13 @@
       </p:sp>
       <p:sp>
         <p:nvSpPr>
-          <p:cNvPr id="78" name="Rectangle 77"/>
-          <p:cNvSpPr/>
-          <p:nvPr/>
-        </p:nvSpPr>
-        <p:spPr>
-          <a:xfrm>
-            <a:off x="3271657" y="3101644"/>
+          <p:cNvPr id="79" name="Rectangle 78"/>
+          <p:cNvSpPr/>
+          <p:nvPr/>
+        </p:nvSpPr>
+        <p:spPr>
+          <a:xfrm>
+            <a:off x="3271657" y="3119932"/>
             <a:ext cx="614411" cy="124358"/>
           </a:xfrm>
           <a:prstGeom prst="rect">
@@ -23942,13 +24258,13 @@
       </p:sp>
       <p:sp>
         <p:nvSpPr>
-          <p:cNvPr id="79" name="TextBox 78"/>
+          <p:cNvPr id="80" name="TextBox 79"/>
           <p:cNvSpPr txBox="1"/>
           <p:nvPr/>
         </p:nvSpPr>
         <p:spPr>
           <a:xfrm>
-            <a:off x="3260685" y="3090671"/>
+            <a:off x="3260685" y="3108960"/>
             <a:ext cx="636357" cy="146304"/>
           </a:xfrm>
           <a:prstGeom prst="rect">
@@ -23987,13 +24303,13 @@
       </p:sp>
       <p:sp>
         <p:nvSpPr>
-          <p:cNvPr id="80" name="Rectangle 79"/>
-          <p:cNvSpPr/>
-          <p:nvPr/>
-        </p:nvSpPr>
-        <p:spPr>
-          <a:xfrm>
-            <a:off x="3908014" y="3101644"/>
+          <p:cNvPr id="81" name="Rectangle 80"/>
+          <p:cNvSpPr/>
+          <p:nvPr/>
+        </p:nvSpPr>
+        <p:spPr>
+          <a:xfrm>
+            <a:off x="3908014" y="3119932"/>
             <a:ext cx="614411" cy="124358"/>
           </a:xfrm>
           <a:prstGeom prst="rect">
@@ -24031,13 +24347,13 @@
       </p:sp>
       <p:sp>
         <p:nvSpPr>
-          <p:cNvPr id="81" name="Rectangle 80"/>
-          <p:cNvSpPr/>
-          <p:nvPr/>
-        </p:nvSpPr>
-        <p:spPr>
-          <a:xfrm>
-            <a:off x="4544372" y="3101644"/>
+          <p:cNvPr id="82" name="Rectangle 81"/>
+          <p:cNvSpPr/>
+          <p:nvPr/>
+        </p:nvSpPr>
+        <p:spPr>
+          <a:xfrm>
+            <a:off x="4544372" y="3119932"/>
             <a:ext cx="614411" cy="124358"/>
           </a:xfrm>
           <a:prstGeom prst="rect">
@@ -24075,13 +24391,13 @@
       </p:sp>
       <p:sp>
         <p:nvSpPr>
-          <p:cNvPr id="82" name="TextBox 81"/>
+          <p:cNvPr id="83" name="TextBox 82"/>
           <p:cNvSpPr txBox="1"/>
           <p:nvPr/>
         </p:nvSpPr>
         <p:spPr>
           <a:xfrm>
-            <a:off x="4533399" y="3090671"/>
+            <a:off x="4533399" y="3108960"/>
             <a:ext cx="636357" cy="146304"/>
           </a:xfrm>
           <a:prstGeom prst="rect">
@@ -24120,13 +24436,13 @@
       </p:sp>
       <p:sp>
         <p:nvSpPr>
-          <p:cNvPr id="83" name="Rectangle 82"/>
-          <p:cNvSpPr/>
-          <p:nvPr/>
-        </p:nvSpPr>
-        <p:spPr>
-          <a:xfrm>
-            <a:off x="5180729" y="3101644"/>
+          <p:cNvPr id="84" name="Rectangle 83"/>
+          <p:cNvSpPr/>
+          <p:nvPr/>
+        </p:nvSpPr>
+        <p:spPr>
+          <a:xfrm>
+            <a:off x="5180729" y="3119932"/>
             <a:ext cx="614411" cy="124358"/>
           </a:xfrm>
           <a:prstGeom prst="rect">
@@ -24164,13 +24480,13 @@
       </p:sp>
       <p:sp>
         <p:nvSpPr>
-          <p:cNvPr id="84" name="TextBox 83"/>
+          <p:cNvPr id="85" name="TextBox 84"/>
           <p:cNvSpPr txBox="1"/>
           <p:nvPr/>
         </p:nvSpPr>
         <p:spPr>
           <a:xfrm>
-            <a:off x="5169756" y="3090671"/>
+            <a:off x="5169756" y="3108960"/>
             <a:ext cx="636357" cy="146304"/>
           </a:xfrm>
           <a:prstGeom prst="rect">
@@ -24209,13 +24525,13 @@
       </p:sp>
       <p:sp>
         <p:nvSpPr>
-          <p:cNvPr id="85" name="Rectangle 84"/>
-          <p:cNvSpPr/>
-          <p:nvPr/>
-        </p:nvSpPr>
-        <p:spPr>
-          <a:xfrm>
-            <a:off x="5817086" y="3101644"/>
+          <p:cNvPr id="86" name="Rectangle 85"/>
+          <p:cNvSpPr/>
+          <p:nvPr/>
+        </p:nvSpPr>
+        <p:spPr>
+          <a:xfrm>
+            <a:off x="5817086" y="3119932"/>
             <a:ext cx="614411" cy="124358"/>
           </a:xfrm>
           <a:prstGeom prst="rect">
@@ -24253,13 +24569,13 @@
       </p:sp>
       <p:sp>
         <p:nvSpPr>
-          <p:cNvPr id="86" name="TextBox 85"/>
+          <p:cNvPr id="87" name="TextBox 86"/>
           <p:cNvSpPr txBox="1"/>
           <p:nvPr/>
         </p:nvSpPr>
         <p:spPr>
           <a:xfrm>
-            <a:off x="5806113" y="3090671"/>
+            <a:off x="5806113" y="3108960"/>
             <a:ext cx="636357" cy="146304"/>
           </a:xfrm>
           <a:prstGeom prst="rect">
@@ -24298,13 +24614,13 @@
       </p:sp>
       <p:sp>
         <p:nvSpPr>
-          <p:cNvPr id="87" name="Rectangle 86"/>
-          <p:cNvSpPr/>
-          <p:nvPr/>
-        </p:nvSpPr>
-        <p:spPr>
-          <a:xfrm>
-            <a:off x="6453443" y="3101644"/>
+          <p:cNvPr id="88" name="Rectangle 87"/>
+          <p:cNvSpPr/>
+          <p:nvPr/>
+        </p:nvSpPr>
+        <p:spPr>
+          <a:xfrm>
+            <a:off x="6453443" y="3119932"/>
             <a:ext cx="614411" cy="124358"/>
           </a:xfrm>
           <a:prstGeom prst="rect">
@@ -24342,13 +24658,13 @@
       </p:sp>
       <p:sp>
         <p:nvSpPr>
-          <p:cNvPr id="88" name="TextBox 87"/>
+          <p:cNvPr id="89" name="TextBox 88"/>
           <p:cNvSpPr txBox="1"/>
           <p:nvPr/>
         </p:nvSpPr>
         <p:spPr>
           <a:xfrm>
-            <a:off x="6442470" y="3090671"/>
+            <a:off x="6442470" y="3108960"/>
             <a:ext cx="636357" cy="146304"/>
           </a:xfrm>
           <a:prstGeom prst="rect">
@@ -24387,13 +24703,13 @@
       </p:sp>
       <p:sp>
         <p:nvSpPr>
-          <p:cNvPr id="89" name="Rectangle 88"/>
-          <p:cNvSpPr/>
-          <p:nvPr/>
-        </p:nvSpPr>
-        <p:spPr>
-          <a:xfrm>
-            <a:off x="7089800" y="3101644"/>
+          <p:cNvPr id="90" name="Rectangle 89"/>
+          <p:cNvSpPr/>
+          <p:nvPr/>
+        </p:nvSpPr>
+        <p:spPr>
+          <a:xfrm>
+            <a:off x="7089800" y="3119932"/>
             <a:ext cx="614411" cy="124358"/>
           </a:xfrm>
           <a:prstGeom prst="rect">
@@ -24431,13 +24747,13 @@
       </p:sp>
       <p:sp>
         <p:nvSpPr>
-          <p:cNvPr id="90" name="TextBox 89"/>
+          <p:cNvPr id="91" name="TextBox 90"/>
           <p:cNvSpPr txBox="1"/>
           <p:nvPr/>
         </p:nvSpPr>
         <p:spPr>
           <a:xfrm>
-            <a:off x="7078827" y="3090671"/>
+            <a:off x="7078827" y="3108960"/>
             <a:ext cx="636357" cy="146304"/>
           </a:xfrm>
           <a:prstGeom prst="rect">
@@ -24476,13 +24792,13 @@
       </p:sp>
       <p:sp>
         <p:nvSpPr>
-          <p:cNvPr id="91" name="Rectangle 90"/>
-          <p:cNvSpPr/>
-          <p:nvPr/>
-        </p:nvSpPr>
-        <p:spPr>
-          <a:xfrm>
-            <a:off x="7726157" y="3101644"/>
+          <p:cNvPr id="92" name="Rectangle 91"/>
+          <p:cNvSpPr/>
+          <p:nvPr/>
+        </p:nvSpPr>
+        <p:spPr>
+          <a:xfrm>
+            <a:off x="7726157" y="3119932"/>
             <a:ext cx="614411" cy="124358"/>
           </a:xfrm>
           <a:prstGeom prst="rect">
@@ -24520,13 +24836,13 @@
       </p:sp>
       <p:sp>
         <p:nvSpPr>
-          <p:cNvPr id="92" name="TextBox 91"/>
+          <p:cNvPr id="93" name="TextBox 92"/>
           <p:cNvSpPr txBox="1"/>
           <p:nvPr/>
         </p:nvSpPr>
         <p:spPr>
           <a:xfrm>
-            <a:off x="7715184" y="3090671"/>
+            <a:off x="7715184" y="3108960"/>
             <a:ext cx="636357" cy="146304"/>
           </a:xfrm>
           <a:prstGeom prst="rect">
@@ -24565,13 +24881,13 @@
       </p:sp>
       <p:sp>
         <p:nvSpPr>
-          <p:cNvPr id="93" name="Rectangle 92"/>
-          <p:cNvSpPr/>
-          <p:nvPr/>
-        </p:nvSpPr>
-        <p:spPr>
-          <a:xfrm>
-            <a:off x="8362514" y="3101644"/>
+          <p:cNvPr id="94" name="Rectangle 93"/>
+          <p:cNvSpPr/>
+          <p:nvPr/>
+        </p:nvSpPr>
+        <p:spPr>
+          <a:xfrm>
+            <a:off x="8362514" y="3119932"/>
             <a:ext cx="614411" cy="124358"/>
           </a:xfrm>
           <a:prstGeom prst="rect">
@@ -24609,13 +24925,13 @@
       </p:sp>
       <p:sp>
         <p:nvSpPr>
-          <p:cNvPr id="94" name="TextBox 93"/>
+          <p:cNvPr id="95" name="TextBox 94"/>
           <p:cNvSpPr txBox="1"/>
           <p:nvPr/>
         </p:nvSpPr>
         <p:spPr>
           <a:xfrm>
-            <a:off x="8351541" y="3090671"/>
+            <a:off x="8351541" y="3108960"/>
             <a:ext cx="636357" cy="146304"/>
           </a:xfrm>
           <a:prstGeom prst="rect">
@@ -24654,13 +24970,13 @@
       </p:sp>
       <p:sp>
         <p:nvSpPr>
-          <p:cNvPr id="95" name="Rectangle 94"/>
-          <p:cNvSpPr/>
-          <p:nvPr/>
-        </p:nvSpPr>
-        <p:spPr>
-          <a:xfrm>
-            <a:off x="8998871" y="3101644"/>
+          <p:cNvPr id="96" name="Rectangle 95"/>
+          <p:cNvSpPr/>
+          <p:nvPr/>
+        </p:nvSpPr>
+        <p:spPr>
+          <a:xfrm>
+            <a:off x="8998871" y="3119932"/>
             <a:ext cx="614411" cy="124358"/>
           </a:xfrm>
           <a:prstGeom prst="rect">
@@ -24698,13 +25014,13 @@
       </p:sp>
       <p:sp>
         <p:nvSpPr>
-          <p:cNvPr id="96" name="TextBox 95"/>
+          <p:cNvPr id="97" name="TextBox 96"/>
           <p:cNvSpPr txBox="1"/>
           <p:nvPr/>
         </p:nvSpPr>
         <p:spPr>
           <a:xfrm>
-            <a:off x="8987898" y="3090671"/>
+            <a:off x="8987898" y="3108960"/>
             <a:ext cx="636357" cy="146304"/>
           </a:xfrm>
           <a:prstGeom prst="rect">
@@ -24743,13 +25059,13 @@
       </p:sp>
       <p:sp>
         <p:nvSpPr>
-          <p:cNvPr id="97" name="Rectangle 96"/>
-          <p:cNvSpPr/>
-          <p:nvPr/>
-        </p:nvSpPr>
-        <p:spPr>
-          <a:xfrm>
-            <a:off x="9635228" y="3101644"/>
+          <p:cNvPr id="98" name="Rectangle 97"/>
+          <p:cNvSpPr/>
+          <p:nvPr/>
+        </p:nvSpPr>
+        <p:spPr>
+          <a:xfrm>
+            <a:off x="9635228" y="3119932"/>
             <a:ext cx="614411" cy="124358"/>
           </a:xfrm>
           <a:prstGeom prst="rect">
@@ -24787,13 +25103,13 @@
       </p:sp>
       <p:sp>
         <p:nvSpPr>
-          <p:cNvPr id="98" name="TextBox 97"/>
+          <p:cNvPr id="99" name="TextBox 98"/>
           <p:cNvSpPr txBox="1"/>
           <p:nvPr/>
         </p:nvSpPr>
         <p:spPr>
           <a:xfrm>
-            <a:off x="9624255" y="3090671"/>
+            <a:off x="9624255" y="3108960"/>
             <a:ext cx="636357" cy="146304"/>
           </a:xfrm>
           <a:prstGeom prst="rect">
@@ -24832,13 +25148,13 @@
       </p:sp>
       <p:sp>
         <p:nvSpPr>
-          <p:cNvPr id="99" name="Rectangle 98"/>
-          <p:cNvSpPr/>
-          <p:nvPr/>
-        </p:nvSpPr>
-        <p:spPr>
-          <a:xfrm>
-            <a:off x="10271585" y="3101644"/>
+          <p:cNvPr id="100" name="Rectangle 99"/>
+          <p:cNvSpPr/>
+          <p:nvPr/>
+        </p:nvSpPr>
+        <p:spPr>
+          <a:xfrm>
+            <a:off x="10271585" y="3119932"/>
             <a:ext cx="614411" cy="124358"/>
           </a:xfrm>
           <a:prstGeom prst="rect">
@@ -24876,13 +25192,13 @@
       </p:sp>
       <p:sp>
         <p:nvSpPr>
-          <p:cNvPr id="100" name="TextBox 99"/>
+          <p:cNvPr id="101" name="TextBox 100"/>
           <p:cNvSpPr txBox="1"/>
           <p:nvPr/>
         </p:nvSpPr>
         <p:spPr>
           <a:xfrm>
-            <a:off x="10260613" y="3090671"/>
+            <a:off x="10260613" y="3108960"/>
             <a:ext cx="636357" cy="146304"/>
           </a:xfrm>
           <a:prstGeom prst="rect">
@@ -24921,13 +25237,13 @@
       </p:sp>
       <p:sp>
         <p:nvSpPr>
-          <p:cNvPr id="101" name="Rectangle 100"/>
-          <p:cNvSpPr/>
-          <p:nvPr/>
-        </p:nvSpPr>
-        <p:spPr>
-          <a:xfrm>
-            <a:off x="10907942" y="3101644"/>
+          <p:cNvPr id="102" name="Rectangle 101"/>
+          <p:cNvSpPr/>
+          <p:nvPr/>
+        </p:nvSpPr>
+        <p:spPr>
+          <a:xfrm>
+            <a:off x="10907942" y="3119932"/>
             <a:ext cx="614411" cy="124358"/>
           </a:xfrm>
           <a:prstGeom prst="rect">
@@ -24965,13 +25281,13 @@
       </p:sp>
       <p:sp>
         <p:nvSpPr>
-          <p:cNvPr id="102" name="TextBox 101"/>
+          <p:cNvPr id="103" name="TextBox 102"/>
           <p:cNvSpPr txBox="1"/>
           <p:nvPr/>
         </p:nvSpPr>
         <p:spPr>
           <a:xfrm>
-            <a:off x="10896970" y="3090671"/>
+            <a:off x="10896970" y="3108960"/>
             <a:ext cx="636357" cy="146304"/>
           </a:xfrm>
           <a:prstGeom prst="rect">
@@ -25010,13 +25326,13 @@
       </p:sp>
       <p:sp>
         <p:nvSpPr>
-          <p:cNvPr id="103" name="Rectangle 102"/>
-          <p:cNvSpPr/>
-          <p:nvPr/>
-        </p:nvSpPr>
-        <p:spPr>
-          <a:xfrm>
-            <a:off x="658368" y="3244291"/>
+          <p:cNvPr id="104" name="Rectangle 103"/>
+          <p:cNvSpPr/>
+          <p:nvPr/>
+        </p:nvSpPr>
+        <p:spPr>
+          <a:xfrm>
+            <a:off x="658368" y="3262579"/>
             <a:ext cx="1920240" cy="131673"/>
           </a:xfrm>
           <a:prstGeom prst="rect">
@@ -25054,13 +25370,13 @@
       </p:sp>
       <p:sp>
         <p:nvSpPr>
-          <p:cNvPr id="104" name="TextBox 103"/>
+          <p:cNvPr id="105" name="TextBox 104"/>
           <p:cNvSpPr txBox="1"/>
           <p:nvPr/>
         </p:nvSpPr>
         <p:spPr>
           <a:xfrm>
-            <a:off x="704088" y="3236975"/>
+            <a:off x="704088" y="3255264"/>
             <a:ext cx="1856231" cy="146304"/>
           </a:xfrm>
           <a:prstGeom prst="rect">
@@ -25108,13 +25424,13 @@
       </p:sp>
       <p:sp>
         <p:nvSpPr>
-          <p:cNvPr id="105" name="Rectangle 104"/>
-          <p:cNvSpPr/>
-          <p:nvPr/>
-        </p:nvSpPr>
-        <p:spPr>
-          <a:xfrm>
-            <a:off x="2635300" y="3247948"/>
+          <p:cNvPr id="106" name="Rectangle 105"/>
+          <p:cNvSpPr/>
+          <p:nvPr/>
+        </p:nvSpPr>
+        <p:spPr>
+          <a:xfrm>
+            <a:off x="2635300" y="3266236"/>
             <a:ext cx="614411" cy="124358"/>
           </a:xfrm>
           <a:prstGeom prst="rect">
@@ -25152,13 +25468,13 @@
       </p:sp>
       <p:sp>
         <p:nvSpPr>
-          <p:cNvPr id="106" name="TextBox 105"/>
+          <p:cNvPr id="107" name="TextBox 106"/>
           <p:cNvSpPr txBox="1"/>
           <p:nvPr/>
         </p:nvSpPr>
         <p:spPr>
           <a:xfrm>
-            <a:off x="2624328" y="3236975"/>
+            <a:off x="2624328" y="3255264"/>
             <a:ext cx="636357" cy="146304"/>
           </a:xfrm>
           <a:prstGeom prst="rect">
@@ -25197,13 +25513,13 @@
       </p:sp>
       <p:sp>
         <p:nvSpPr>
-          <p:cNvPr id="107" name="Rectangle 106"/>
-          <p:cNvSpPr/>
-          <p:nvPr/>
-        </p:nvSpPr>
-        <p:spPr>
-          <a:xfrm>
-            <a:off x="3271657" y="3247948"/>
+          <p:cNvPr id="108" name="Rectangle 107"/>
+          <p:cNvSpPr/>
+          <p:nvPr/>
+        </p:nvSpPr>
+        <p:spPr>
+          <a:xfrm>
+            <a:off x="3271657" y="3266236"/>
             <a:ext cx="614411" cy="124358"/>
           </a:xfrm>
           <a:prstGeom prst="rect">
@@ -25241,13 +25557,13 @@
       </p:sp>
       <p:sp>
         <p:nvSpPr>
-          <p:cNvPr id="108" name="TextBox 107"/>
+          <p:cNvPr id="109" name="TextBox 108"/>
           <p:cNvSpPr txBox="1"/>
           <p:nvPr/>
         </p:nvSpPr>
         <p:spPr>
           <a:xfrm>
-            <a:off x="3260685" y="3236975"/>
+            <a:off x="3260685" y="3255264"/>
             <a:ext cx="636357" cy="146304"/>
           </a:xfrm>
           <a:prstGeom prst="rect">
@@ -25286,13 +25602,13 @@
       </p:sp>
       <p:sp>
         <p:nvSpPr>
-          <p:cNvPr id="109" name="Rectangle 108"/>
-          <p:cNvSpPr/>
-          <p:nvPr/>
-        </p:nvSpPr>
-        <p:spPr>
-          <a:xfrm>
-            <a:off x="3908014" y="3247948"/>
+          <p:cNvPr id="110" name="Rectangle 109"/>
+          <p:cNvSpPr/>
+          <p:nvPr/>
+        </p:nvSpPr>
+        <p:spPr>
+          <a:xfrm>
+            <a:off x="3908014" y="3266236"/>
             <a:ext cx="614411" cy="124358"/>
           </a:xfrm>
           <a:prstGeom prst="rect">
@@ -25330,13 +25646,13 @@
       </p:sp>
       <p:sp>
         <p:nvSpPr>
-          <p:cNvPr id="110" name="TextBox 109"/>
+          <p:cNvPr id="111" name="TextBox 110"/>
           <p:cNvSpPr txBox="1"/>
           <p:nvPr/>
         </p:nvSpPr>
         <p:spPr>
           <a:xfrm>
-            <a:off x="3897042" y="3236975"/>
+            <a:off x="3897042" y="3255264"/>
             <a:ext cx="636357" cy="146304"/>
           </a:xfrm>
           <a:prstGeom prst="rect">
@@ -25375,13 +25691,13 @@
       </p:sp>
       <p:sp>
         <p:nvSpPr>
-          <p:cNvPr id="111" name="Rectangle 110"/>
-          <p:cNvSpPr/>
-          <p:nvPr/>
-        </p:nvSpPr>
-        <p:spPr>
-          <a:xfrm>
-            <a:off x="4544372" y="3247948"/>
+          <p:cNvPr id="112" name="Rectangle 111"/>
+          <p:cNvSpPr/>
+          <p:nvPr/>
+        </p:nvSpPr>
+        <p:spPr>
+          <a:xfrm>
+            <a:off x="4544372" y="3266236"/>
             <a:ext cx="614411" cy="124358"/>
           </a:xfrm>
           <a:prstGeom prst="rect">
@@ -25419,13 +25735,13 @@
       </p:sp>
       <p:sp>
         <p:nvSpPr>
-          <p:cNvPr id="112" name="Rectangle 111"/>
-          <p:cNvSpPr/>
-          <p:nvPr/>
-        </p:nvSpPr>
-        <p:spPr>
-          <a:xfrm>
-            <a:off x="5180729" y="3247948"/>
+          <p:cNvPr id="113" name="Rectangle 112"/>
+          <p:cNvSpPr/>
+          <p:nvPr/>
+        </p:nvSpPr>
+        <p:spPr>
+          <a:xfrm>
+            <a:off x="5180729" y="3266236"/>
             <a:ext cx="614411" cy="124358"/>
           </a:xfrm>
           <a:prstGeom prst="rect">
@@ -25463,13 +25779,13 @@
       </p:sp>
       <p:sp>
         <p:nvSpPr>
-          <p:cNvPr id="113" name="TextBox 112"/>
+          <p:cNvPr id="114" name="TextBox 113"/>
           <p:cNvSpPr txBox="1"/>
           <p:nvPr/>
         </p:nvSpPr>
         <p:spPr>
           <a:xfrm>
-            <a:off x="5169756" y="3236975"/>
+            <a:off x="5169756" y="3255264"/>
             <a:ext cx="636357" cy="146304"/>
           </a:xfrm>
           <a:prstGeom prst="rect">
@@ -25508,13 +25824,13 @@
       </p:sp>
       <p:sp>
         <p:nvSpPr>
-          <p:cNvPr id="114" name="Rectangle 113"/>
-          <p:cNvSpPr/>
-          <p:nvPr/>
-        </p:nvSpPr>
-        <p:spPr>
-          <a:xfrm>
-            <a:off x="5817086" y="3247948"/>
+          <p:cNvPr id="115" name="Rectangle 114"/>
+          <p:cNvSpPr/>
+          <p:nvPr/>
+        </p:nvSpPr>
+        <p:spPr>
+          <a:xfrm>
+            <a:off x="5817086" y="3266236"/>
             <a:ext cx="614411" cy="124358"/>
           </a:xfrm>
           <a:prstGeom prst="rect">
@@ -25552,13 +25868,13 @@
       </p:sp>
       <p:sp>
         <p:nvSpPr>
-          <p:cNvPr id="115" name="TextBox 114"/>
+          <p:cNvPr id="116" name="TextBox 115"/>
           <p:cNvSpPr txBox="1"/>
           <p:nvPr/>
         </p:nvSpPr>
         <p:spPr>
           <a:xfrm>
-            <a:off x="5806113" y="3236975"/>
+            <a:off x="5806113" y="3255264"/>
             <a:ext cx="636357" cy="146304"/>
           </a:xfrm>
           <a:prstGeom prst="rect">
@@ -25597,13 +25913,13 @@
       </p:sp>
       <p:sp>
         <p:nvSpPr>
-          <p:cNvPr id="116" name="Rectangle 115"/>
-          <p:cNvSpPr/>
-          <p:nvPr/>
-        </p:nvSpPr>
-        <p:spPr>
-          <a:xfrm>
-            <a:off x="6453443" y="3247948"/>
+          <p:cNvPr id="117" name="Rectangle 116"/>
+          <p:cNvSpPr/>
+          <p:nvPr/>
+        </p:nvSpPr>
+        <p:spPr>
+          <a:xfrm>
+            <a:off x="6453443" y="3266236"/>
             <a:ext cx="614411" cy="124358"/>
           </a:xfrm>
           <a:prstGeom prst="rect">
@@ -25641,13 +25957,13 @@
       </p:sp>
       <p:sp>
         <p:nvSpPr>
-          <p:cNvPr id="117" name="TextBox 116"/>
+          <p:cNvPr id="118" name="TextBox 117"/>
           <p:cNvSpPr txBox="1"/>
           <p:nvPr/>
         </p:nvSpPr>
         <p:spPr>
           <a:xfrm>
-            <a:off x="6442470" y="3236975"/>
+            <a:off x="6442470" y="3255264"/>
             <a:ext cx="636357" cy="146304"/>
           </a:xfrm>
           <a:prstGeom prst="rect">
@@ -25686,13 +26002,13 @@
       </p:sp>
       <p:sp>
         <p:nvSpPr>
-          <p:cNvPr id="118" name="Rectangle 117"/>
-          <p:cNvSpPr/>
-          <p:nvPr/>
-        </p:nvSpPr>
-        <p:spPr>
-          <a:xfrm>
-            <a:off x="7089800" y="3247948"/>
+          <p:cNvPr id="119" name="Rectangle 118"/>
+          <p:cNvSpPr/>
+          <p:nvPr/>
+        </p:nvSpPr>
+        <p:spPr>
+          <a:xfrm>
+            <a:off x="7089800" y="3266236"/>
             <a:ext cx="614411" cy="124358"/>
           </a:xfrm>
           <a:prstGeom prst="rect">
@@ -25730,13 +26046,13 @@
       </p:sp>
       <p:sp>
         <p:nvSpPr>
-          <p:cNvPr id="119" name="TextBox 118"/>
+          <p:cNvPr id="120" name="TextBox 119"/>
           <p:cNvSpPr txBox="1"/>
           <p:nvPr/>
         </p:nvSpPr>
         <p:spPr>
           <a:xfrm>
-            <a:off x="7078827" y="3236975"/>
+            <a:off x="7078827" y="3255264"/>
             <a:ext cx="636357" cy="146304"/>
           </a:xfrm>
           <a:prstGeom prst="rect">
@@ -25775,13 +26091,13 @@
       </p:sp>
       <p:sp>
         <p:nvSpPr>
-          <p:cNvPr id="120" name="Rectangle 119"/>
-          <p:cNvSpPr/>
-          <p:nvPr/>
-        </p:nvSpPr>
-        <p:spPr>
-          <a:xfrm>
-            <a:off x="7726157" y="3247948"/>
+          <p:cNvPr id="121" name="Rectangle 120"/>
+          <p:cNvSpPr/>
+          <p:nvPr/>
+        </p:nvSpPr>
+        <p:spPr>
+          <a:xfrm>
+            <a:off x="7726157" y="3266236"/>
             <a:ext cx="614411" cy="124358"/>
           </a:xfrm>
           <a:prstGeom prst="rect">
@@ -25819,13 +26135,13 @@
       </p:sp>
       <p:sp>
         <p:nvSpPr>
-          <p:cNvPr id="121" name="TextBox 120"/>
+          <p:cNvPr id="122" name="TextBox 121"/>
           <p:cNvSpPr txBox="1"/>
           <p:nvPr/>
         </p:nvSpPr>
         <p:spPr>
           <a:xfrm>
-            <a:off x="7715184" y="3236975"/>
+            <a:off x="7715184" y="3255264"/>
             <a:ext cx="636357" cy="146304"/>
           </a:xfrm>
           <a:prstGeom prst="rect">
@@ -25864,13 +26180,13 @@
       </p:sp>
       <p:sp>
         <p:nvSpPr>
-          <p:cNvPr id="122" name="Rectangle 121"/>
-          <p:cNvSpPr/>
-          <p:nvPr/>
-        </p:nvSpPr>
-        <p:spPr>
-          <a:xfrm>
-            <a:off x="8362514" y="3247948"/>
+          <p:cNvPr id="123" name="Rectangle 122"/>
+          <p:cNvSpPr/>
+          <p:nvPr/>
+        </p:nvSpPr>
+        <p:spPr>
+          <a:xfrm>
+            <a:off x="8362514" y="3266236"/>
             <a:ext cx="614411" cy="124358"/>
           </a:xfrm>
           <a:prstGeom prst="rect">
@@ -25908,13 +26224,13 @@
       </p:sp>
       <p:sp>
         <p:nvSpPr>
-          <p:cNvPr id="123" name="TextBox 122"/>
+          <p:cNvPr id="124" name="TextBox 123"/>
           <p:cNvSpPr txBox="1"/>
           <p:nvPr/>
         </p:nvSpPr>
         <p:spPr>
           <a:xfrm>
-            <a:off x="8351541" y="3236975"/>
+            <a:off x="8351541" y="3255264"/>
             <a:ext cx="636357" cy="146304"/>
           </a:xfrm>
           <a:prstGeom prst="rect">
@@ -25953,13 +26269,13 @@
       </p:sp>
       <p:sp>
         <p:nvSpPr>
-          <p:cNvPr id="124" name="Rectangle 123"/>
-          <p:cNvSpPr/>
-          <p:nvPr/>
-        </p:nvSpPr>
-        <p:spPr>
-          <a:xfrm>
-            <a:off x="8998871" y="3247948"/>
+          <p:cNvPr id="125" name="Rectangle 124"/>
+          <p:cNvSpPr/>
+          <p:nvPr/>
+        </p:nvSpPr>
+        <p:spPr>
+          <a:xfrm>
+            <a:off x="8998871" y="3266236"/>
             <a:ext cx="614411" cy="124358"/>
           </a:xfrm>
           <a:prstGeom prst="rect">
@@ -25997,13 +26313,13 @@
       </p:sp>
       <p:sp>
         <p:nvSpPr>
-          <p:cNvPr id="125" name="TextBox 124"/>
+          <p:cNvPr id="126" name="TextBox 125"/>
           <p:cNvSpPr txBox="1"/>
           <p:nvPr/>
         </p:nvSpPr>
         <p:spPr>
           <a:xfrm>
-            <a:off x="8987898" y="3236975"/>
+            <a:off x="8987898" y="3255264"/>
             <a:ext cx="636357" cy="146304"/>
           </a:xfrm>
           <a:prstGeom prst="rect">
@@ -26042,13 +26358,13 @@
       </p:sp>
       <p:sp>
         <p:nvSpPr>
-          <p:cNvPr id="126" name="Rectangle 125"/>
-          <p:cNvSpPr/>
-          <p:nvPr/>
-        </p:nvSpPr>
-        <p:spPr>
-          <a:xfrm>
-            <a:off x="9635228" y="3247948"/>
+          <p:cNvPr id="127" name="Rectangle 126"/>
+          <p:cNvSpPr/>
+          <p:nvPr/>
+        </p:nvSpPr>
+        <p:spPr>
+          <a:xfrm>
+            <a:off x="9635228" y="3266236"/>
             <a:ext cx="614411" cy="124358"/>
           </a:xfrm>
           <a:prstGeom prst="rect">
@@ -26086,13 +26402,13 @@
       </p:sp>
       <p:sp>
         <p:nvSpPr>
-          <p:cNvPr id="127" name="TextBox 126"/>
+          <p:cNvPr id="128" name="TextBox 127"/>
           <p:cNvSpPr txBox="1"/>
           <p:nvPr/>
         </p:nvSpPr>
         <p:spPr>
           <a:xfrm>
-            <a:off x="9624255" y="3236975"/>
+            <a:off x="9624255" y="3255264"/>
             <a:ext cx="636357" cy="146304"/>
           </a:xfrm>
           <a:prstGeom prst="rect">
@@ -26131,13 +26447,13 @@
       </p:sp>
       <p:sp>
         <p:nvSpPr>
-          <p:cNvPr id="128" name="Rectangle 127"/>
-          <p:cNvSpPr/>
-          <p:nvPr/>
-        </p:nvSpPr>
-        <p:spPr>
-          <a:xfrm>
-            <a:off x="10271585" y="3247948"/>
+          <p:cNvPr id="129" name="Rectangle 128"/>
+          <p:cNvSpPr/>
+          <p:nvPr/>
+        </p:nvSpPr>
+        <p:spPr>
+          <a:xfrm>
+            <a:off x="10271585" y="3266236"/>
             <a:ext cx="614411" cy="124358"/>
           </a:xfrm>
           <a:prstGeom prst="rect">
@@ -26175,13 +26491,13 @@
       </p:sp>
       <p:sp>
         <p:nvSpPr>
-          <p:cNvPr id="129" name="TextBox 128"/>
+          <p:cNvPr id="130" name="TextBox 129"/>
           <p:cNvSpPr txBox="1"/>
           <p:nvPr/>
         </p:nvSpPr>
         <p:spPr>
           <a:xfrm>
-            <a:off x="10260613" y="3236975"/>
+            <a:off x="10260613" y="3255264"/>
             <a:ext cx="636357" cy="146304"/>
           </a:xfrm>
           <a:prstGeom prst="rect">
@@ -26220,13 +26536,13 @@
       </p:sp>
       <p:sp>
         <p:nvSpPr>
-          <p:cNvPr id="130" name="Rectangle 129"/>
-          <p:cNvSpPr/>
-          <p:nvPr/>
-        </p:nvSpPr>
-        <p:spPr>
-          <a:xfrm>
-            <a:off x="10907942" y="3247948"/>
+          <p:cNvPr id="131" name="Rectangle 130"/>
+          <p:cNvSpPr/>
+          <p:nvPr/>
+        </p:nvSpPr>
+        <p:spPr>
+          <a:xfrm>
+            <a:off x="10907942" y="3266236"/>
             <a:ext cx="614411" cy="124358"/>
           </a:xfrm>
           <a:prstGeom prst="rect">
@@ -26264,13 +26580,13 @@
       </p:sp>
       <p:sp>
         <p:nvSpPr>
-          <p:cNvPr id="131" name="TextBox 130"/>
+          <p:cNvPr id="132" name="TextBox 131"/>
           <p:cNvSpPr txBox="1"/>
           <p:nvPr/>
         </p:nvSpPr>
         <p:spPr>
           <a:xfrm>
-            <a:off x="10896970" y="3236975"/>
+            <a:off x="10896970" y="3255264"/>
             <a:ext cx="636357" cy="146304"/>
           </a:xfrm>
           <a:prstGeom prst="rect">
@@ -26309,13 +26625,13 @@
       </p:sp>
       <p:sp>
         <p:nvSpPr>
-          <p:cNvPr id="132" name="TextBox 131"/>
+          <p:cNvPr id="133" name="TextBox 132"/>
           <p:cNvSpPr txBox="1"/>
           <p:nvPr/>
         </p:nvSpPr>
         <p:spPr>
           <a:xfrm>
-            <a:off x="704088" y="3383279"/>
+            <a:off x="704088" y="3401568"/>
             <a:ext cx="1856231" cy="146304"/>
           </a:xfrm>
           <a:prstGeom prst="rect">
@@ -26363,13 +26679,13 @@
       </p:sp>
       <p:sp>
         <p:nvSpPr>
-          <p:cNvPr id="133" name="Rectangle 132"/>
-          <p:cNvSpPr/>
-          <p:nvPr/>
-        </p:nvSpPr>
-        <p:spPr>
-          <a:xfrm>
-            <a:off x="2635300" y="3394252"/>
+          <p:cNvPr id="134" name="Rectangle 133"/>
+          <p:cNvSpPr/>
+          <p:nvPr/>
+        </p:nvSpPr>
+        <p:spPr>
+          <a:xfrm>
+            <a:off x="2635300" y="3412540"/>
             <a:ext cx="614411" cy="124358"/>
           </a:xfrm>
           <a:prstGeom prst="rect">
@@ -26407,13 +26723,13 @@
       </p:sp>
       <p:sp>
         <p:nvSpPr>
-          <p:cNvPr id="134" name="TextBox 133"/>
+          <p:cNvPr id="135" name="TextBox 134"/>
           <p:cNvSpPr txBox="1"/>
           <p:nvPr/>
         </p:nvSpPr>
         <p:spPr>
           <a:xfrm>
-            <a:off x="2624328" y="3383279"/>
+            <a:off x="2624328" y="3401568"/>
             <a:ext cx="636357" cy="146304"/>
           </a:xfrm>
           <a:prstGeom prst="rect">
@@ -26452,13 +26768,13 @@
       </p:sp>
       <p:sp>
         <p:nvSpPr>
-          <p:cNvPr id="135" name="Rectangle 134"/>
-          <p:cNvSpPr/>
-          <p:nvPr/>
-        </p:nvSpPr>
-        <p:spPr>
-          <a:xfrm>
-            <a:off x="3271657" y="3394252"/>
+          <p:cNvPr id="136" name="Rectangle 135"/>
+          <p:cNvSpPr/>
+          <p:nvPr/>
+        </p:nvSpPr>
+        <p:spPr>
+          <a:xfrm>
+            <a:off x="3271657" y="3412540"/>
             <a:ext cx="614411" cy="124358"/>
           </a:xfrm>
           <a:prstGeom prst="rect">
@@ -26496,13 +26812,13 @@
       </p:sp>
       <p:sp>
         <p:nvSpPr>
-          <p:cNvPr id="136" name="TextBox 135"/>
+          <p:cNvPr id="137" name="TextBox 136"/>
           <p:cNvSpPr txBox="1"/>
           <p:nvPr/>
         </p:nvSpPr>
         <p:spPr>
           <a:xfrm>
-            <a:off x="3260685" y="3383279"/>
+            <a:off x="3260685" y="3401568"/>
             <a:ext cx="636357" cy="146304"/>
           </a:xfrm>
           <a:prstGeom prst="rect">
@@ -26541,13 +26857,13 @@
       </p:sp>
       <p:sp>
         <p:nvSpPr>
-          <p:cNvPr id="137" name="Rectangle 136"/>
-          <p:cNvSpPr/>
-          <p:nvPr/>
-        </p:nvSpPr>
-        <p:spPr>
-          <a:xfrm>
-            <a:off x="3908014" y="3394252"/>
+          <p:cNvPr id="138" name="Rectangle 137"/>
+          <p:cNvSpPr/>
+          <p:nvPr/>
+        </p:nvSpPr>
+        <p:spPr>
+          <a:xfrm>
+            <a:off x="3908014" y="3412540"/>
             <a:ext cx="614411" cy="124358"/>
           </a:xfrm>
           <a:prstGeom prst="rect">
@@ -26585,13 +26901,13 @@
       </p:sp>
       <p:sp>
         <p:nvSpPr>
-          <p:cNvPr id="138" name="TextBox 137"/>
+          <p:cNvPr id="139" name="TextBox 138"/>
           <p:cNvSpPr txBox="1"/>
           <p:nvPr/>
         </p:nvSpPr>
         <p:spPr>
           <a:xfrm>
-            <a:off x="3897042" y="3383279"/>
+            <a:off x="3897042" y="3401568"/>
             <a:ext cx="636357" cy="146304"/>
           </a:xfrm>
           <a:prstGeom prst="rect">
@@ -26630,13 +26946,13 @@
       </p:sp>
       <p:sp>
         <p:nvSpPr>
-          <p:cNvPr id="139" name="Rectangle 138"/>
-          <p:cNvSpPr/>
-          <p:nvPr/>
-        </p:nvSpPr>
-        <p:spPr>
-          <a:xfrm>
-            <a:off x="4544372" y="3394252"/>
+          <p:cNvPr id="140" name="Rectangle 139"/>
+          <p:cNvSpPr/>
+          <p:nvPr/>
+        </p:nvSpPr>
+        <p:spPr>
+          <a:xfrm>
+            <a:off x="4544372" y="3412540"/>
             <a:ext cx="614411" cy="124358"/>
           </a:xfrm>
           <a:prstGeom prst="rect">
@@ -26674,13 +26990,13 @@
       </p:sp>
       <p:sp>
         <p:nvSpPr>
-          <p:cNvPr id="140" name="TextBox 139"/>
+          <p:cNvPr id="141" name="TextBox 140"/>
           <p:cNvSpPr txBox="1"/>
           <p:nvPr/>
         </p:nvSpPr>
         <p:spPr>
           <a:xfrm>
-            <a:off x="4533399" y="3383279"/>
+            <a:off x="4533399" y="3401568"/>
             <a:ext cx="636357" cy="146304"/>
           </a:xfrm>
           <a:prstGeom prst="rect">
@@ -26719,13 +27035,13 @@
       </p:sp>
       <p:sp>
         <p:nvSpPr>
-          <p:cNvPr id="141" name="Rectangle 140"/>
-          <p:cNvSpPr/>
-          <p:nvPr/>
-        </p:nvSpPr>
-        <p:spPr>
-          <a:xfrm>
-            <a:off x="5180729" y="3394252"/>
+          <p:cNvPr id="142" name="Rectangle 141"/>
+          <p:cNvSpPr/>
+          <p:nvPr/>
+        </p:nvSpPr>
+        <p:spPr>
+          <a:xfrm>
+            <a:off x="5180729" y="3412540"/>
             <a:ext cx="614411" cy="124358"/>
           </a:xfrm>
           <a:prstGeom prst="rect">
@@ -26763,13 +27079,13 @@
       </p:sp>
       <p:sp>
         <p:nvSpPr>
-          <p:cNvPr id="142" name="Rectangle 141"/>
-          <p:cNvSpPr/>
-          <p:nvPr/>
-        </p:nvSpPr>
-        <p:spPr>
-          <a:xfrm>
-            <a:off x="5817086" y="3394252"/>
+          <p:cNvPr id="143" name="Rectangle 142"/>
+          <p:cNvSpPr/>
+          <p:nvPr/>
+        </p:nvSpPr>
+        <p:spPr>
+          <a:xfrm>
+            <a:off x="5817086" y="3412540"/>
             <a:ext cx="614411" cy="124358"/>
           </a:xfrm>
           <a:prstGeom prst="rect">
@@ -26807,13 +27123,13 @@
       </p:sp>
       <p:sp>
         <p:nvSpPr>
-          <p:cNvPr id="143" name="TextBox 142"/>
+          <p:cNvPr id="144" name="TextBox 143"/>
           <p:cNvSpPr txBox="1"/>
           <p:nvPr/>
         </p:nvSpPr>
         <p:spPr>
           <a:xfrm>
-            <a:off x="5806113" y="3383279"/>
+            <a:off x="5806113" y="3401568"/>
             <a:ext cx="636357" cy="146304"/>
           </a:xfrm>
           <a:prstGeom prst="rect">
@@ -26852,13 +27168,13 @@
       </p:sp>
       <p:sp>
         <p:nvSpPr>
-          <p:cNvPr id="144" name="Rectangle 143"/>
-          <p:cNvSpPr/>
-          <p:nvPr/>
-        </p:nvSpPr>
-        <p:spPr>
-          <a:xfrm>
-            <a:off x="6453443" y="3394252"/>
+          <p:cNvPr id="145" name="Rectangle 144"/>
+          <p:cNvSpPr/>
+          <p:nvPr/>
+        </p:nvSpPr>
+        <p:spPr>
+          <a:xfrm>
+            <a:off x="6453443" y="3412540"/>
             <a:ext cx="614411" cy="124358"/>
           </a:xfrm>
           <a:prstGeom prst="rect">
@@ -26896,13 +27212,13 @@
       </p:sp>
       <p:sp>
         <p:nvSpPr>
-          <p:cNvPr id="145" name="TextBox 144"/>
+          <p:cNvPr id="146" name="TextBox 145"/>
           <p:cNvSpPr txBox="1"/>
           <p:nvPr/>
         </p:nvSpPr>
         <p:spPr>
           <a:xfrm>
-            <a:off x="6442470" y="3383279"/>
+            <a:off x="6442470" y="3401568"/>
             <a:ext cx="636357" cy="146304"/>
           </a:xfrm>
           <a:prstGeom prst="rect">
@@ -26941,13 +27257,13 @@
       </p:sp>
       <p:sp>
         <p:nvSpPr>
-          <p:cNvPr id="146" name="Rectangle 145"/>
-          <p:cNvSpPr/>
-          <p:nvPr/>
-        </p:nvSpPr>
-        <p:spPr>
-          <a:xfrm>
-            <a:off x="7089800" y="3394252"/>
+          <p:cNvPr id="147" name="Rectangle 146"/>
+          <p:cNvSpPr/>
+          <p:nvPr/>
+        </p:nvSpPr>
+        <p:spPr>
+          <a:xfrm>
+            <a:off x="7089800" y="3412540"/>
             <a:ext cx="614411" cy="124358"/>
           </a:xfrm>
           <a:prstGeom prst="rect">
@@ -26985,13 +27301,13 @@
       </p:sp>
       <p:sp>
         <p:nvSpPr>
-          <p:cNvPr id="147" name="TextBox 146"/>
+          <p:cNvPr id="148" name="TextBox 147"/>
           <p:cNvSpPr txBox="1"/>
           <p:nvPr/>
         </p:nvSpPr>
         <p:spPr>
           <a:xfrm>
-            <a:off x="7078827" y="3383279"/>
+            <a:off x="7078827" y="3401568"/>
             <a:ext cx="636357" cy="146304"/>
           </a:xfrm>
           <a:prstGeom prst="rect">
@@ -27030,13 +27346,13 @@
       </p:sp>
       <p:sp>
         <p:nvSpPr>
-          <p:cNvPr id="148" name="Rectangle 147"/>
-          <p:cNvSpPr/>
-          <p:nvPr/>
-        </p:nvSpPr>
-        <p:spPr>
-          <a:xfrm>
-            <a:off x="7726157" y="3394252"/>
+          <p:cNvPr id="149" name="Rectangle 148"/>
+          <p:cNvSpPr/>
+          <p:nvPr/>
+        </p:nvSpPr>
+        <p:spPr>
+          <a:xfrm>
+            <a:off x="7726157" y="3412540"/>
             <a:ext cx="614411" cy="124358"/>
           </a:xfrm>
           <a:prstGeom prst="rect">
@@ -27074,13 +27390,13 @@
       </p:sp>
       <p:sp>
         <p:nvSpPr>
-          <p:cNvPr id="149" name="TextBox 148"/>
+          <p:cNvPr id="150" name="TextBox 149"/>
           <p:cNvSpPr txBox="1"/>
           <p:nvPr/>
         </p:nvSpPr>
         <p:spPr>
           <a:xfrm>
-            <a:off x="7715184" y="3383279"/>
+            <a:off x="7715184" y="3401568"/>
             <a:ext cx="636357" cy="146304"/>
           </a:xfrm>
           <a:prstGeom prst="rect">
@@ -27119,13 +27435,13 @@
       </p:sp>
       <p:sp>
         <p:nvSpPr>
-          <p:cNvPr id="150" name="Rectangle 149"/>
-          <p:cNvSpPr/>
-          <p:nvPr/>
-        </p:nvSpPr>
-        <p:spPr>
-          <a:xfrm>
-            <a:off x="8362514" y="3394252"/>
+          <p:cNvPr id="151" name="Rectangle 150"/>
+          <p:cNvSpPr/>
+          <p:nvPr/>
+        </p:nvSpPr>
+        <p:spPr>
+          <a:xfrm>
+            <a:off x="8362514" y="3412540"/>
             <a:ext cx="614411" cy="124358"/>
           </a:xfrm>
           <a:prstGeom prst="rect">
@@ -27163,13 +27479,13 @@
       </p:sp>
       <p:sp>
         <p:nvSpPr>
-          <p:cNvPr id="151" name="TextBox 150"/>
+          <p:cNvPr id="152" name="TextBox 151"/>
           <p:cNvSpPr txBox="1"/>
           <p:nvPr/>
         </p:nvSpPr>
         <p:spPr>
           <a:xfrm>
-            <a:off x="8351541" y="3383279"/>
+            <a:off x="8351541" y="3401568"/>
             <a:ext cx="636357" cy="146304"/>
           </a:xfrm>
           <a:prstGeom prst="rect">
@@ -27208,13 +27524,13 @@
       </p:sp>
       <p:sp>
         <p:nvSpPr>
-          <p:cNvPr id="152" name="Rectangle 151"/>
-          <p:cNvSpPr/>
-          <p:nvPr/>
-        </p:nvSpPr>
-        <p:spPr>
-          <a:xfrm>
-            <a:off x="8998871" y="3394252"/>
+          <p:cNvPr id="153" name="Rectangle 152"/>
+          <p:cNvSpPr/>
+          <p:nvPr/>
+        </p:nvSpPr>
+        <p:spPr>
+          <a:xfrm>
+            <a:off x="8998871" y="3412540"/>
             <a:ext cx="614411" cy="124358"/>
           </a:xfrm>
           <a:prstGeom prst="rect">
@@ -27252,13 +27568,13 @@
       </p:sp>
       <p:sp>
         <p:nvSpPr>
-          <p:cNvPr id="153" name="TextBox 152"/>
+          <p:cNvPr id="154" name="TextBox 153"/>
           <p:cNvSpPr txBox="1"/>
           <p:nvPr/>
         </p:nvSpPr>
         <p:spPr>
           <a:xfrm>
-            <a:off x="8987898" y="3383279"/>
+            <a:off x="8987898" y="3401568"/>
             <a:ext cx="636357" cy="146304"/>
           </a:xfrm>
           <a:prstGeom prst="rect">
@@ -27297,13 +27613,13 @@
       </p:sp>
       <p:sp>
         <p:nvSpPr>
-          <p:cNvPr id="154" name="Rectangle 153"/>
-          <p:cNvSpPr/>
-          <p:nvPr/>
-        </p:nvSpPr>
-        <p:spPr>
-          <a:xfrm>
-            <a:off x="9635228" y="3394252"/>
+          <p:cNvPr id="155" name="Rectangle 154"/>
+          <p:cNvSpPr/>
+          <p:nvPr/>
+        </p:nvSpPr>
+        <p:spPr>
+          <a:xfrm>
+            <a:off x="9635228" y="3412540"/>
             <a:ext cx="614411" cy="124358"/>
           </a:xfrm>
           <a:prstGeom prst="rect">
@@ -27341,13 +27657,13 @@
       </p:sp>
       <p:sp>
         <p:nvSpPr>
-          <p:cNvPr id="155" name="TextBox 154"/>
+          <p:cNvPr id="156" name="TextBox 155"/>
           <p:cNvSpPr txBox="1"/>
           <p:nvPr/>
         </p:nvSpPr>
         <p:spPr>
           <a:xfrm>
-            <a:off x="9624255" y="3383279"/>
+            <a:off x="9624255" y="3401568"/>
             <a:ext cx="636357" cy="146304"/>
           </a:xfrm>
           <a:prstGeom prst="rect">
@@ -27386,13 +27702,13 @@
       </p:sp>
       <p:sp>
         <p:nvSpPr>
-          <p:cNvPr id="156" name="Rectangle 155"/>
-          <p:cNvSpPr/>
-          <p:nvPr/>
-        </p:nvSpPr>
-        <p:spPr>
-          <a:xfrm>
-            <a:off x="10271585" y="3394252"/>
+          <p:cNvPr id="157" name="Rectangle 156"/>
+          <p:cNvSpPr/>
+          <p:nvPr/>
+        </p:nvSpPr>
+        <p:spPr>
+          <a:xfrm>
+            <a:off x="10271585" y="3412540"/>
             <a:ext cx="614411" cy="124358"/>
           </a:xfrm>
           <a:prstGeom prst="rect">
@@ -27430,13 +27746,13 @@
       </p:sp>
       <p:sp>
         <p:nvSpPr>
-          <p:cNvPr id="157" name="TextBox 156"/>
+          <p:cNvPr id="158" name="TextBox 157"/>
           <p:cNvSpPr txBox="1"/>
           <p:nvPr/>
         </p:nvSpPr>
         <p:spPr>
           <a:xfrm>
-            <a:off x="10260613" y="3383279"/>
+            <a:off x="10260613" y="3401568"/>
             <a:ext cx="636357" cy="146304"/>
           </a:xfrm>
           <a:prstGeom prst="rect">
@@ -27475,13 +27791,13 @@
       </p:sp>
       <p:sp>
         <p:nvSpPr>
-          <p:cNvPr id="158" name="Rectangle 157"/>
-          <p:cNvSpPr/>
-          <p:nvPr/>
-        </p:nvSpPr>
-        <p:spPr>
-          <a:xfrm>
-            <a:off x="10907942" y="3394252"/>
+          <p:cNvPr id="159" name="Rectangle 158"/>
+          <p:cNvSpPr/>
+          <p:nvPr/>
+        </p:nvSpPr>
+        <p:spPr>
+          <a:xfrm>
+            <a:off x="10907942" y="3412540"/>
             <a:ext cx="614411" cy="124358"/>
           </a:xfrm>
           <a:prstGeom prst="rect">
@@ -27519,13 +27835,13 @@
       </p:sp>
       <p:sp>
         <p:nvSpPr>
-          <p:cNvPr id="159" name="TextBox 158"/>
+          <p:cNvPr id="160" name="TextBox 159"/>
           <p:cNvSpPr txBox="1"/>
           <p:nvPr/>
         </p:nvSpPr>
         <p:spPr>
           <a:xfrm>
-            <a:off x="10896970" y="3383279"/>
+            <a:off x="10896970" y="3401568"/>
             <a:ext cx="636357" cy="146304"/>
           </a:xfrm>
           <a:prstGeom prst="rect">
@@ -27564,13 +27880,13 @@
       </p:sp>
       <p:sp>
         <p:nvSpPr>
-          <p:cNvPr id="160" name="TextBox 159"/>
+          <p:cNvPr id="161" name="TextBox 160"/>
           <p:cNvSpPr txBox="1"/>
           <p:nvPr/>
         </p:nvSpPr>
         <p:spPr>
           <a:xfrm>
-            <a:off x="704088" y="3529583"/>
+            <a:off x="704088" y="3547872"/>
             <a:ext cx="1856231" cy="146304"/>
           </a:xfrm>
           <a:prstGeom prst="rect">
@@ -27618,13 +27934,13 @@
       </p:sp>
       <p:sp>
         <p:nvSpPr>
-          <p:cNvPr id="161" name="Rectangle 160"/>
-          <p:cNvSpPr/>
-          <p:nvPr/>
-        </p:nvSpPr>
-        <p:spPr>
-          <a:xfrm>
-            <a:off x="2635300" y="3540556"/>
+          <p:cNvPr id="162" name="Rectangle 161"/>
+          <p:cNvSpPr/>
+          <p:nvPr/>
+        </p:nvSpPr>
+        <p:spPr>
+          <a:xfrm>
+            <a:off x="2635300" y="3558844"/>
             <a:ext cx="614411" cy="124358"/>
           </a:xfrm>
           <a:prstGeom prst="rect">
@@ -27662,13 +27978,13 @@
       </p:sp>
       <p:sp>
         <p:nvSpPr>
-          <p:cNvPr id="162" name="TextBox 161"/>
+          <p:cNvPr id="163" name="TextBox 162"/>
           <p:cNvSpPr txBox="1"/>
           <p:nvPr/>
         </p:nvSpPr>
         <p:spPr>
           <a:xfrm>
-            <a:off x="2624328" y="3529583"/>
+            <a:off x="2624328" y="3547872"/>
             <a:ext cx="636357" cy="146304"/>
           </a:xfrm>
           <a:prstGeom prst="rect">
@@ -27707,13 +28023,13 @@
       </p:sp>
       <p:sp>
         <p:nvSpPr>
-          <p:cNvPr id="163" name="Rectangle 162"/>
-          <p:cNvSpPr/>
-          <p:nvPr/>
-        </p:nvSpPr>
-        <p:spPr>
-          <a:xfrm>
-            <a:off x="3271657" y="3540556"/>
+          <p:cNvPr id="164" name="Rectangle 163"/>
+          <p:cNvSpPr/>
+          <p:nvPr/>
+        </p:nvSpPr>
+        <p:spPr>
+          <a:xfrm>
+            <a:off x="3271657" y="3558844"/>
             <a:ext cx="614411" cy="124358"/>
           </a:xfrm>
           <a:prstGeom prst="rect">
@@ -27751,13 +28067,13 @@
       </p:sp>
       <p:sp>
         <p:nvSpPr>
-          <p:cNvPr id="164" name="TextBox 163"/>
+          <p:cNvPr id="165" name="TextBox 164"/>
           <p:cNvSpPr txBox="1"/>
           <p:nvPr/>
         </p:nvSpPr>
         <p:spPr>
           <a:xfrm>
-            <a:off x="3260685" y="3529583"/>
+            <a:off x="3260685" y="3547872"/>
             <a:ext cx="636357" cy="146304"/>
           </a:xfrm>
           <a:prstGeom prst="rect">
@@ -27796,13 +28112,13 @@
       </p:sp>
       <p:sp>
         <p:nvSpPr>
-          <p:cNvPr id="165" name="Rectangle 164"/>
-          <p:cNvSpPr/>
-          <p:nvPr/>
-        </p:nvSpPr>
-        <p:spPr>
-          <a:xfrm>
-            <a:off x="3908014" y="3540556"/>
+          <p:cNvPr id="166" name="Rectangle 165"/>
+          <p:cNvSpPr/>
+          <p:nvPr/>
+        </p:nvSpPr>
+        <p:spPr>
+          <a:xfrm>
+            <a:off x="3908014" y="3558844"/>
             <a:ext cx="614411" cy="124358"/>
           </a:xfrm>
           <a:prstGeom prst="rect">
@@ -27840,13 +28156,13 @@
       </p:sp>
       <p:sp>
         <p:nvSpPr>
-          <p:cNvPr id="166" name="TextBox 165"/>
+          <p:cNvPr id="167" name="TextBox 166"/>
           <p:cNvSpPr txBox="1"/>
           <p:nvPr/>
         </p:nvSpPr>
         <p:spPr>
           <a:xfrm>
-            <a:off x="3897042" y="3529583"/>
+            <a:off x="3897042" y="3547872"/>
             <a:ext cx="636357" cy="146304"/>
           </a:xfrm>
           <a:prstGeom prst="rect">
@@ -27885,13 +28201,13 @@
       </p:sp>
       <p:sp>
         <p:nvSpPr>
-          <p:cNvPr id="167" name="Rectangle 166"/>
-          <p:cNvSpPr/>
-          <p:nvPr/>
-        </p:nvSpPr>
-        <p:spPr>
-          <a:xfrm>
-            <a:off x="4544372" y="3540556"/>
+          <p:cNvPr id="168" name="Rectangle 167"/>
+          <p:cNvSpPr/>
+          <p:nvPr/>
+        </p:nvSpPr>
+        <p:spPr>
+          <a:xfrm>
+            <a:off x="4544372" y="3558844"/>
             <a:ext cx="614411" cy="124358"/>
           </a:xfrm>
           <a:prstGeom prst="rect">
@@ -27929,13 +28245,13 @@
       </p:sp>
       <p:sp>
         <p:nvSpPr>
-          <p:cNvPr id="168" name="TextBox 167"/>
+          <p:cNvPr id="169" name="TextBox 168"/>
           <p:cNvSpPr txBox="1"/>
           <p:nvPr/>
         </p:nvSpPr>
         <p:spPr>
           <a:xfrm>
-            <a:off x="4533399" y="3529583"/>
+            <a:off x="4533399" y="3547872"/>
             <a:ext cx="636357" cy="146304"/>
           </a:xfrm>
           <a:prstGeom prst="rect">
@@ -27974,13 +28290,13 @@
       </p:sp>
       <p:sp>
         <p:nvSpPr>
-          <p:cNvPr id="169" name="Rectangle 168"/>
-          <p:cNvSpPr/>
-          <p:nvPr/>
-        </p:nvSpPr>
-        <p:spPr>
-          <a:xfrm>
-            <a:off x="5180729" y="3540556"/>
+          <p:cNvPr id="170" name="Rectangle 169"/>
+          <p:cNvSpPr/>
+          <p:nvPr/>
+        </p:nvSpPr>
+        <p:spPr>
+          <a:xfrm>
+            <a:off x="5180729" y="3558844"/>
             <a:ext cx="614411" cy="124358"/>
           </a:xfrm>
           <a:prstGeom prst="rect">
@@ -28018,13 +28334,13 @@
       </p:sp>
       <p:sp>
         <p:nvSpPr>
-          <p:cNvPr id="170" name="TextBox 169"/>
+          <p:cNvPr id="171" name="TextBox 170"/>
           <p:cNvSpPr txBox="1"/>
           <p:nvPr/>
         </p:nvSpPr>
         <p:spPr>
           <a:xfrm>
-            <a:off x="5169756" y="3529583"/>
+            <a:off x="5169756" y="3547872"/>
             <a:ext cx="636357" cy="146304"/>
           </a:xfrm>
           <a:prstGeom prst="rect">
@@ -28063,13 +28379,13 @@
       </p:sp>
       <p:sp>
         <p:nvSpPr>
-          <p:cNvPr id="171" name="Rectangle 170"/>
-          <p:cNvSpPr/>
-          <p:nvPr/>
-        </p:nvSpPr>
-        <p:spPr>
-          <a:xfrm>
-            <a:off x="5817086" y="3540556"/>
+          <p:cNvPr id="172" name="Rectangle 171"/>
+          <p:cNvSpPr/>
+          <p:nvPr/>
+        </p:nvSpPr>
+        <p:spPr>
+          <a:xfrm>
+            <a:off x="5817086" y="3558844"/>
             <a:ext cx="614411" cy="124358"/>
           </a:xfrm>
           <a:prstGeom prst="rect">
@@ -28107,13 +28423,13 @@
       </p:sp>
       <p:sp>
         <p:nvSpPr>
-          <p:cNvPr id="172" name="Rectangle 171"/>
-          <p:cNvSpPr/>
-          <p:nvPr/>
-        </p:nvSpPr>
-        <p:spPr>
-          <a:xfrm>
-            <a:off x="6453443" y="3540556"/>
+          <p:cNvPr id="173" name="Rectangle 172"/>
+          <p:cNvSpPr/>
+          <p:nvPr/>
+        </p:nvSpPr>
+        <p:spPr>
+          <a:xfrm>
+            <a:off x="6453443" y="3558844"/>
             <a:ext cx="614411" cy="124358"/>
           </a:xfrm>
           <a:prstGeom prst="rect">
@@ -28151,13 +28467,13 @@
       </p:sp>
       <p:sp>
         <p:nvSpPr>
-          <p:cNvPr id="173" name="TextBox 172"/>
+          <p:cNvPr id="174" name="TextBox 173"/>
           <p:cNvSpPr txBox="1"/>
           <p:nvPr/>
         </p:nvSpPr>
         <p:spPr>
           <a:xfrm>
-            <a:off x="6442470" y="3529583"/>
+            <a:off x="6442470" y="3547872"/>
             <a:ext cx="636357" cy="146304"/>
           </a:xfrm>
           <a:prstGeom prst="rect">
@@ -28196,13 +28512,13 @@
       </p:sp>
       <p:sp>
         <p:nvSpPr>
-          <p:cNvPr id="174" name="Rectangle 173"/>
-          <p:cNvSpPr/>
-          <p:nvPr/>
-        </p:nvSpPr>
-        <p:spPr>
-          <a:xfrm>
-            <a:off x="7089800" y="3540556"/>
+          <p:cNvPr id="175" name="Rectangle 174"/>
+          <p:cNvSpPr/>
+          <p:nvPr/>
+        </p:nvSpPr>
+        <p:spPr>
+          <a:xfrm>
+            <a:off x="7089800" y="3558844"/>
             <a:ext cx="614411" cy="124358"/>
           </a:xfrm>
           <a:prstGeom prst="rect">
@@ -28240,13 +28556,13 @@
       </p:sp>
       <p:sp>
         <p:nvSpPr>
-          <p:cNvPr id="175" name="TextBox 174"/>
+          <p:cNvPr id="176" name="TextBox 175"/>
           <p:cNvSpPr txBox="1"/>
           <p:nvPr/>
         </p:nvSpPr>
         <p:spPr>
           <a:xfrm>
-            <a:off x="7078827" y="3529583"/>
+            <a:off x="7078827" y="3547872"/>
             <a:ext cx="636357" cy="146304"/>
           </a:xfrm>
           <a:prstGeom prst="rect">
@@ -28285,13 +28601,13 @@
       </p:sp>
       <p:sp>
         <p:nvSpPr>
-          <p:cNvPr id="176" name="Rectangle 175"/>
-          <p:cNvSpPr/>
-          <p:nvPr/>
-        </p:nvSpPr>
-        <p:spPr>
-          <a:xfrm>
-            <a:off x="7726157" y="3540556"/>
+          <p:cNvPr id="177" name="Rectangle 176"/>
+          <p:cNvSpPr/>
+          <p:nvPr/>
+        </p:nvSpPr>
+        <p:spPr>
+          <a:xfrm>
+            <a:off x="7726157" y="3558844"/>
             <a:ext cx="614411" cy="124358"/>
           </a:xfrm>
           <a:prstGeom prst="rect">
@@ -28329,13 +28645,13 @@
       </p:sp>
       <p:sp>
         <p:nvSpPr>
-          <p:cNvPr id="177" name="TextBox 176"/>
+          <p:cNvPr id="178" name="TextBox 177"/>
           <p:cNvSpPr txBox="1"/>
           <p:nvPr/>
         </p:nvSpPr>
         <p:spPr>
           <a:xfrm>
-            <a:off x="7715184" y="3529583"/>
+            <a:off x="7715184" y="3547872"/>
             <a:ext cx="636357" cy="146304"/>
           </a:xfrm>
           <a:prstGeom prst="rect">
@@ -28374,13 +28690,13 @@
       </p:sp>
       <p:sp>
         <p:nvSpPr>
-          <p:cNvPr id="178" name="Rectangle 177"/>
-          <p:cNvSpPr/>
-          <p:nvPr/>
-        </p:nvSpPr>
-        <p:spPr>
-          <a:xfrm>
-            <a:off x="8362514" y="3540556"/>
+          <p:cNvPr id="179" name="Rectangle 178"/>
+          <p:cNvSpPr/>
+          <p:nvPr/>
+        </p:nvSpPr>
+        <p:spPr>
+          <a:xfrm>
+            <a:off x="8362514" y="3558844"/>
             <a:ext cx="614411" cy="124358"/>
           </a:xfrm>
           <a:prstGeom prst="rect">
@@ -28418,13 +28734,13 @@
       </p:sp>
       <p:sp>
         <p:nvSpPr>
-          <p:cNvPr id="179" name="TextBox 178"/>
+          <p:cNvPr id="180" name="TextBox 179"/>
           <p:cNvSpPr txBox="1"/>
           <p:nvPr/>
         </p:nvSpPr>
         <p:spPr>
           <a:xfrm>
-            <a:off x="8351541" y="3529583"/>
+            <a:off x="8351541" y="3547872"/>
             <a:ext cx="636357" cy="146304"/>
           </a:xfrm>
           <a:prstGeom prst="rect">
@@ -28463,13 +28779,13 @@
       </p:sp>
       <p:sp>
         <p:nvSpPr>
-          <p:cNvPr id="180" name="Rectangle 179"/>
-          <p:cNvSpPr/>
-          <p:nvPr/>
-        </p:nvSpPr>
-        <p:spPr>
-          <a:xfrm>
-            <a:off x="8998871" y="3540556"/>
+          <p:cNvPr id="181" name="Rectangle 180"/>
+          <p:cNvSpPr/>
+          <p:nvPr/>
+        </p:nvSpPr>
+        <p:spPr>
+          <a:xfrm>
+            <a:off x="8998871" y="3558844"/>
             <a:ext cx="614411" cy="124358"/>
           </a:xfrm>
           <a:prstGeom prst="rect">
@@ -28507,13 +28823,13 @@
       </p:sp>
       <p:sp>
         <p:nvSpPr>
-          <p:cNvPr id="181" name="TextBox 180"/>
+          <p:cNvPr id="182" name="TextBox 181"/>
           <p:cNvSpPr txBox="1"/>
           <p:nvPr/>
         </p:nvSpPr>
         <p:spPr>
           <a:xfrm>
-            <a:off x="8987898" y="3529583"/>
+            <a:off x="8987898" y="3547872"/>
             <a:ext cx="636357" cy="146304"/>
           </a:xfrm>
           <a:prstGeom prst="rect">
@@ -28552,13 +28868,13 @@
       </p:sp>
       <p:sp>
         <p:nvSpPr>
-          <p:cNvPr id="182" name="Rectangle 181"/>
-          <p:cNvSpPr/>
-          <p:nvPr/>
-        </p:nvSpPr>
-        <p:spPr>
-          <a:xfrm>
-            <a:off x="9635228" y="3540556"/>
+          <p:cNvPr id="183" name="Rectangle 182"/>
+          <p:cNvSpPr/>
+          <p:nvPr/>
+        </p:nvSpPr>
+        <p:spPr>
+          <a:xfrm>
+            <a:off x="9635228" y="3558844"/>
             <a:ext cx="614411" cy="124358"/>
           </a:xfrm>
           <a:prstGeom prst="rect">
@@ -28596,13 +28912,13 @@
       </p:sp>
       <p:sp>
         <p:nvSpPr>
-          <p:cNvPr id="183" name="TextBox 182"/>
+          <p:cNvPr id="184" name="TextBox 183"/>
           <p:cNvSpPr txBox="1"/>
           <p:nvPr/>
         </p:nvSpPr>
         <p:spPr>
           <a:xfrm>
-            <a:off x="9624255" y="3529583"/>
+            <a:off x="9624255" y="3547872"/>
             <a:ext cx="636357" cy="146304"/>
           </a:xfrm>
           <a:prstGeom prst="rect">
@@ -28641,13 +28957,13 @@
       </p:sp>
       <p:sp>
         <p:nvSpPr>
-          <p:cNvPr id="184" name="Rectangle 183"/>
-          <p:cNvSpPr/>
-          <p:nvPr/>
-        </p:nvSpPr>
-        <p:spPr>
-          <a:xfrm>
-            <a:off x="10271585" y="3540556"/>
+          <p:cNvPr id="185" name="Rectangle 184"/>
+          <p:cNvSpPr/>
+          <p:nvPr/>
+        </p:nvSpPr>
+        <p:spPr>
+          <a:xfrm>
+            <a:off x="10271585" y="3558844"/>
             <a:ext cx="614411" cy="124358"/>
           </a:xfrm>
           <a:prstGeom prst="rect">
@@ -28685,13 +29001,13 @@
       </p:sp>
       <p:sp>
         <p:nvSpPr>
-          <p:cNvPr id="185" name="TextBox 184"/>
+          <p:cNvPr id="186" name="TextBox 185"/>
           <p:cNvSpPr txBox="1"/>
           <p:nvPr/>
         </p:nvSpPr>
         <p:spPr>
           <a:xfrm>
-            <a:off x="10260613" y="3529583"/>
+            <a:off x="10260613" y="3547872"/>
             <a:ext cx="636357" cy="146304"/>
           </a:xfrm>
           <a:prstGeom prst="rect">
@@ -28730,13 +29046,13 @@
       </p:sp>
       <p:sp>
         <p:nvSpPr>
-          <p:cNvPr id="186" name="Rectangle 185"/>
-          <p:cNvSpPr/>
-          <p:nvPr/>
-        </p:nvSpPr>
-        <p:spPr>
-          <a:xfrm>
-            <a:off x="10907942" y="3540556"/>
+          <p:cNvPr id="187" name="Rectangle 186"/>
+          <p:cNvSpPr/>
+          <p:nvPr/>
+        </p:nvSpPr>
+        <p:spPr>
+          <a:xfrm>
+            <a:off x="10907942" y="3558844"/>
             <a:ext cx="614411" cy="124358"/>
           </a:xfrm>
           <a:prstGeom prst="rect">
@@ -28774,13 +29090,13 @@
       </p:sp>
       <p:sp>
         <p:nvSpPr>
-          <p:cNvPr id="187" name="TextBox 186"/>
+          <p:cNvPr id="188" name="TextBox 187"/>
           <p:cNvSpPr txBox="1"/>
           <p:nvPr/>
         </p:nvSpPr>
         <p:spPr>
           <a:xfrm>
-            <a:off x="10896970" y="3529583"/>
+            <a:off x="10896970" y="3547872"/>
             <a:ext cx="636357" cy="146304"/>
           </a:xfrm>
           <a:prstGeom prst="rect">
@@ -28819,13 +29135,13 @@
       </p:sp>
       <p:sp>
         <p:nvSpPr>
-          <p:cNvPr id="188" name="TextBox 187"/>
+          <p:cNvPr id="189" name="TextBox 188"/>
           <p:cNvSpPr txBox="1"/>
           <p:nvPr/>
         </p:nvSpPr>
         <p:spPr>
           <a:xfrm>
-            <a:off x="704088" y="3675887"/>
+            <a:off x="704088" y="3694176"/>
             <a:ext cx="1856231" cy="146304"/>
           </a:xfrm>
           <a:prstGeom prst="rect">
@@ -28873,13 +29189,13 @@
       </p:sp>
       <p:sp>
         <p:nvSpPr>
-          <p:cNvPr id="189" name="Rectangle 188"/>
-          <p:cNvSpPr/>
-          <p:nvPr/>
-        </p:nvSpPr>
-        <p:spPr>
-          <a:xfrm>
-            <a:off x="2635300" y="3686860"/>
+          <p:cNvPr id="190" name="Rectangle 189"/>
+          <p:cNvSpPr/>
+          <p:nvPr/>
+        </p:nvSpPr>
+        <p:spPr>
+          <a:xfrm>
+            <a:off x="2635300" y="3705148"/>
             <a:ext cx="614411" cy="124358"/>
           </a:xfrm>
           <a:prstGeom prst="rect">
@@ -28917,13 +29233,13 @@
       </p:sp>
       <p:sp>
         <p:nvSpPr>
-          <p:cNvPr id="190" name="TextBox 189"/>
+          <p:cNvPr id="191" name="TextBox 190"/>
           <p:cNvSpPr txBox="1"/>
           <p:nvPr/>
         </p:nvSpPr>
         <p:spPr>
           <a:xfrm>
-            <a:off x="2624328" y="3675887"/>
+            <a:off x="2624328" y="3694176"/>
             <a:ext cx="636357" cy="146304"/>
           </a:xfrm>
           <a:prstGeom prst="rect">
@@ -28962,13 +29278,13 @@
       </p:sp>
       <p:sp>
         <p:nvSpPr>
-          <p:cNvPr id="191" name="Rectangle 190"/>
-          <p:cNvSpPr/>
-          <p:nvPr/>
-        </p:nvSpPr>
-        <p:spPr>
-          <a:xfrm>
-            <a:off x="3271657" y="3686860"/>
+          <p:cNvPr id="192" name="Rectangle 191"/>
+          <p:cNvSpPr/>
+          <p:nvPr/>
+        </p:nvSpPr>
+        <p:spPr>
+          <a:xfrm>
+            <a:off x="3271657" y="3705148"/>
             <a:ext cx="614411" cy="124358"/>
           </a:xfrm>
           <a:prstGeom prst="rect">
@@ -29006,13 +29322,13 @@
       </p:sp>
       <p:sp>
         <p:nvSpPr>
-          <p:cNvPr id="192" name="TextBox 191"/>
+          <p:cNvPr id="193" name="TextBox 192"/>
           <p:cNvSpPr txBox="1"/>
           <p:nvPr/>
         </p:nvSpPr>
         <p:spPr>
           <a:xfrm>
-            <a:off x="3260685" y="3675887"/>
+            <a:off x="3260685" y="3694176"/>
             <a:ext cx="636357" cy="146304"/>
           </a:xfrm>
           <a:prstGeom prst="rect">
@@ -29051,13 +29367,13 @@
       </p:sp>
       <p:sp>
         <p:nvSpPr>
-          <p:cNvPr id="193" name="Rectangle 192"/>
-          <p:cNvSpPr/>
-          <p:nvPr/>
-        </p:nvSpPr>
-        <p:spPr>
-          <a:xfrm>
-            <a:off x="3908014" y="3686860"/>
+          <p:cNvPr id="194" name="Rectangle 193"/>
+          <p:cNvSpPr/>
+          <p:nvPr/>
+        </p:nvSpPr>
+        <p:spPr>
+          <a:xfrm>
+            <a:off x="3908014" y="3705148"/>
             <a:ext cx="614411" cy="124358"/>
           </a:xfrm>
           <a:prstGeom prst="rect">
@@ -29095,13 +29411,13 @@
       </p:sp>
       <p:sp>
         <p:nvSpPr>
-          <p:cNvPr id="194" name="TextBox 193"/>
+          <p:cNvPr id="195" name="TextBox 194"/>
           <p:cNvSpPr txBox="1"/>
           <p:nvPr/>
         </p:nvSpPr>
         <p:spPr>
           <a:xfrm>
-            <a:off x="3897042" y="3675887"/>
+            <a:off x="3897042" y="3694176"/>
             <a:ext cx="636357" cy="146304"/>
           </a:xfrm>
           <a:prstGeom prst="rect">
@@ -29140,13 +29456,13 @@
       </p:sp>
       <p:sp>
         <p:nvSpPr>
-          <p:cNvPr id="195" name="Rectangle 194"/>
-          <p:cNvSpPr/>
-          <p:nvPr/>
-        </p:nvSpPr>
-        <p:spPr>
-          <a:xfrm>
-            <a:off x="4544372" y="3686860"/>
+          <p:cNvPr id="196" name="Rectangle 195"/>
+          <p:cNvSpPr/>
+          <p:nvPr/>
+        </p:nvSpPr>
+        <p:spPr>
+          <a:xfrm>
+            <a:off x="4544372" y="3705148"/>
             <a:ext cx="614411" cy="124358"/>
           </a:xfrm>
           <a:prstGeom prst="rect">
@@ -29184,13 +29500,13 @@
       </p:sp>
       <p:sp>
         <p:nvSpPr>
-          <p:cNvPr id="196" name="TextBox 195"/>
+          <p:cNvPr id="197" name="TextBox 196"/>
           <p:cNvSpPr txBox="1"/>
           <p:nvPr/>
         </p:nvSpPr>
         <p:spPr>
           <a:xfrm>
-            <a:off x="4533399" y="3675887"/>
+            <a:off x="4533399" y="3694176"/>
             <a:ext cx="636357" cy="146304"/>
           </a:xfrm>
           <a:prstGeom prst="rect">
@@ -29229,13 +29545,13 @@
       </p:sp>
       <p:sp>
         <p:nvSpPr>
-          <p:cNvPr id="197" name="Rectangle 196"/>
-          <p:cNvSpPr/>
-          <p:nvPr/>
-        </p:nvSpPr>
-        <p:spPr>
-          <a:xfrm>
-            <a:off x="5180729" y="3686860"/>
+          <p:cNvPr id="198" name="Rectangle 197"/>
+          <p:cNvSpPr/>
+          <p:nvPr/>
+        </p:nvSpPr>
+        <p:spPr>
+          <a:xfrm>
+            <a:off x="5180729" y="3705148"/>
             <a:ext cx="614411" cy="124358"/>
           </a:xfrm>
           <a:prstGeom prst="rect">
@@ -29273,13 +29589,13 @@
       </p:sp>
       <p:sp>
         <p:nvSpPr>
-          <p:cNvPr id="198" name="TextBox 197"/>
+          <p:cNvPr id="199" name="TextBox 198"/>
           <p:cNvSpPr txBox="1"/>
           <p:nvPr/>
         </p:nvSpPr>
         <p:spPr>
           <a:xfrm>
-            <a:off x="5169756" y="3675887"/>
+            <a:off x="5169756" y="3694176"/>
             <a:ext cx="636357" cy="146304"/>
           </a:xfrm>
           <a:prstGeom prst="rect">
@@ -29318,13 +29634,13 @@
       </p:sp>
       <p:sp>
         <p:nvSpPr>
-          <p:cNvPr id="199" name="Rectangle 198"/>
-          <p:cNvSpPr/>
-          <p:nvPr/>
-        </p:nvSpPr>
-        <p:spPr>
-          <a:xfrm>
-            <a:off x="5817086" y="3686860"/>
+          <p:cNvPr id="200" name="Rectangle 199"/>
+          <p:cNvSpPr/>
+          <p:nvPr/>
+        </p:nvSpPr>
+        <p:spPr>
+          <a:xfrm>
+            <a:off x="5817086" y="3705148"/>
             <a:ext cx="614411" cy="124358"/>
           </a:xfrm>
           <a:prstGeom prst="rect">
@@ -29362,13 +29678,13 @@
       </p:sp>
       <p:sp>
         <p:nvSpPr>
-          <p:cNvPr id="200" name="TextBox 199"/>
+          <p:cNvPr id="201" name="TextBox 200"/>
           <p:cNvSpPr txBox="1"/>
           <p:nvPr/>
         </p:nvSpPr>
         <p:spPr>
           <a:xfrm>
-            <a:off x="5806113" y="3675887"/>
+            <a:off x="5806113" y="3694176"/>
             <a:ext cx="636357" cy="146304"/>
           </a:xfrm>
           <a:prstGeom prst="rect">
@@ -29407,13 +29723,13 @@
       </p:sp>
       <p:sp>
         <p:nvSpPr>
-          <p:cNvPr id="201" name="Rectangle 200"/>
-          <p:cNvSpPr/>
-          <p:nvPr/>
-        </p:nvSpPr>
-        <p:spPr>
-          <a:xfrm>
-            <a:off x="6453443" y="3686860"/>
+          <p:cNvPr id="202" name="Rectangle 201"/>
+          <p:cNvSpPr/>
+          <p:nvPr/>
+        </p:nvSpPr>
+        <p:spPr>
+          <a:xfrm>
+            <a:off x="6453443" y="3705148"/>
             <a:ext cx="614411" cy="124358"/>
           </a:xfrm>
           <a:prstGeom prst="rect">
@@ -29451,13 +29767,13 @@
       </p:sp>
       <p:sp>
         <p:nvSpPr>
-          <p:cNvPr id="202" name="Rectangle 201"/>
-          <p:cNvSpPr/>
-          <p:nvPr/>
-        </p:nvSpPr>
-        <p:spPr>
-          <a:xfrm>
-            <a:off x="7089800" y="3686860"/>
+          <p:cNvPr id="203" name="Rectangle 202"/>
+          <p:cNvSpPr/>
+          <p:nvPr/>
+        </p:nvSpPr>
+        <p:spPr>
+          <a:xfrm>
+            <a:off x="7089800" y="3705148"/>
             <a:ext cx="614411" cy="124358"/>
           </a:xfrm>
           <a:prstGeom prst="rect">
@@ -29495,13 +29811,13 @@
       </p:sp>
       <p:sp>
         <p:nvSpPr>
-          <p:cNvPr id="203" name="TextBox 202"/>
+          <p:cNvPr id="204" name="TextBox 203"/>
           <p:cNvSpPr txBox="1"/>
           <p:nvPr/>
         </p:nvSpPr>
         <p:spPr>
           <a:xfrm>
-            <a:off x="7078827" y="3675887"/>
+            <a:off x="7078827" y="3694176"/>
             <a:ext cx="636357" cy="146304"/>
           </a:xfrm>
           <a:prstGeom prst="rect">
@@ -29540,13 +29856,13 @@
       </p:sp>
       <p:sp>
         <p:nvSpPr>
-          <p:cNvPr id="204" name="Rectangle 203"/>
-          <p:cNvSpPr/>
-          <p:nvPr/>
-        </p:nvSpPr>
-        <p:spPr>
-          <a:xfrm>
-            <a:off x="7726157" y="3686860"/>
+          <p:cNvPr id="205" name="Rectangle 204"/>
+          <p:cNvSpPr/>
+          <p:nvPr/>
+        </p:nvSpPr>
+        <p:spPr>
+          <a:xfrm>
+            <a:off x="7726157" y="3705148"/>
             <a:ext cx="614411" cy="124358"/>
           </a:xfrm>
           <a:prstGeom prst="rect">
@@ -29584,13 +29900,13 @@
       </p:sp>
       <p:sp>
         <p:nvSpPr>
-          <p:cNvPr id="205" name="TextBox 204"/>
+          <p:cNvPr id="206" name="TextBox 205"/>
           <p:cNvSpPr txBox="1"/>
           <p:nvPr/>
         </p:nvSpPr>
         <p:spPr>
           <a:xfrm>
-            <a:off x="7715184" y="3675887"/>
+            <a:off x="7715184" y="3694176"/>
             <a:ext cx="636357" cy="146304"/>
           </a:xfrm>
           <a:prstGeom prst="rect">
@@ -29629,13 +29945,13 @@
       </p:sp>
       <p:sp>
         <p:nvSpPr>
-          <p:cNvPr id="206" name="Rectangle 205"/>
-          <p:cNvSpPr/>
-          <p:nvPr/>
-        </p:nvSpPr>
-        <p:spPr>
-          <a:xfrm>
-            <a:off x="8362514" y="3686860"/>
+          <p:cNvPr id="207" name="Rectangle 206"/>
+          <p:cNvSpPr/>
+          <p:nvPr/>
+        </p:nvSpPr>
+        <p:spPr>
+          <a:xfrm>
+            <a:off x="8362514" y="3705148"/>
             <a:ext cx="614411" cy="124358"/>
           </a:xfrm>
           <a:prstGeom prst="rect">
@@ -29673,13 +29989,13 @@
       </p:sp>
       <p:sp>
         <p:nvSpPr>
-          <p:cNvPr id="207" name="TextBox 206"/>
+          <p:cNvPr id="208" name="TextBox 207"/>
           <p:cNvSpPr txBox="1"/>
           <p:nvPr/>
         </p:nvSpPr>
         <p:spPr>
           <a:xfrm>
-            <a:off x="8351541" y="3675887"/>
+            <a:off x="8351541" y="3694176"/>
             <a:ext cx="636357" cy="146304"/>
           </a:xfrm>
           <a:prstGeom prst="rect">
@@ -29718,13 +30034,13 @@
       </p:sp>
       <p:sp>
         <p:nvSpPr>
-          <p:cNvPr id="208" name="Rectangle 207"/>
-          <p:cNvSpPr/>
-          <p:nvPr/>
-        </p:nvSpPr>
-        <p:spPr>
-          <a:xfrm>
-            <a:off x="8998871" y="3686860"/>
+          <p:cNvPr id="209" name="Rectangle 208"/>
+          <p:cNvSpPr/>
+          <p:nvPr/>
+        </p:nvSpPr>
+        <p:spPr>
+          <a:xfrm>
+            <a:off x="8998871" y="3705148"/>
             <a:ext cx="614411" cy="124358"/>
           </a:xfrm>
           <a:prstGeom prst="rect">
@@ -29762,13 +30078,13 @@
       </p:sp>
       <p:sp>
         <p:nvSpPr>
-          <p:cNvPr id="209" name="TextBox 208"/>
+          <p:cNvPr id="210" name="TextBox 209"/>
           <p:cNvSpPr txBox="1"/>
           <p:nvPr/>
         </p:nvSpPr>
         <p:spPr>
           <a:xfrm>
-            <a:off x="8987898" y="3675887"/>
+            <a:off x="8987898" y="3694176"/>
             <a:ext cx="636357" cy="146304"/>
           </a:xfrm>
           <a:prstGeom prst="rect">
@@ -29807,13 +30123,13 @@
       </p:sp>
       <p:sp>
         <p:nvSpPr>
-          <p:cNvPr id="210" name="Rectangle 209"/>
-          <p:cNvSpPr/>
-          <p:nvPr/>
-        </p:nvSpPr>
-        <p:spPr>
-          <a:xfrm>
-            <a:off x="9635228" y="3686860"/>
+          <p:cNvPr id="211" name="Rectangle 210"/>
+          <p:cNvSpPr/>
+          <p:nvPr/>
+        </p:nvSpPr>
+        <p:spPr>
+          <a:xfrm>
+            <a:off x="9635228" y="3705148"/>
             <a:ext cx="614411" cy="124358"/>
           </a:xfrm>
           <a:prstGeom prst="rect">
@@ -29851,13 +30167,13 @@
       </p:sp>
       <p:sp>
         <p:nvSpPr>
-          <p:cNvPr id="211" name="TextBox 210"/>
+          <p:cNvPr id="212" name="TextBox 211"/>
           <p:cNvSpPr txBox="1"/>
           <p:nvPr/>
         </p:nvSpPr>
         <p:spPr>
           <a:xfrm>
-            <a:off x="9624255" y="3675887"/>
+            <a:off x="9624255" y="3694176"/>
             <a:ext cx="636357" cy="146304"/>
           </a:xfrm>
           <a:prstGeom prst="rect">
@@ -29896,13 +30212,13 @@
       </p:sp>
       <p:sp>
         <p:nvSpPr>
-          <p:cNvPr id="212" name="Rectangle 211"/>
-          <p:cNvSpPr/>
-          <p:nvPr/>
-        </p:nvSpPr>
-        <p:spPr>
-          <a:xfrm>
-            <a:off x="10271585" y="3686860"/>
+          <p:cNvPr id="213" name="Rectangle 212"/>
+          <p:cNvSpPr/>
+          <p:nvPr/>
+        </p:nvSpPr>
+        <p:spPr>
+          <a:xfrm>
+            <a:off x="10271585" y="3705148"/>
             <a:ext cx="614411" cy="124358"/>
           </a:xfrm>
           <a:prstGeom prst="rect">
@@ -29940,13 +30256,13 @@
       </p:sp>
       <p:sp>
         <p:nvSpPr>
-          <p:cNvPr id="213" name="TextBox 212"/>
+          <p:cNvPr id="214" name="TextBox 213"/>
           <p:cNvSpPr txBox="1"/>
           <p:nvPr/>
         </p:nvSpPr>
         <p:spPr>
           <a:xfrm>
-            <a:off x="10260613" y="3675887"/>
+            <a:off x="10260613" y="3694176"/>
             <a:ext cx="636357" cy="146304"/>
           </a:xfrm>
           <a:prstGeom prst="rect">
@@ -29985,13 +30301,13 @@
       </p:sp>
       <p:sp>
         <p:nvSpPr>
-          <p:cNvPr id="214" name="Rectangle 213"/>
-          <p:cNvSpPr/>
-          <p:nvPr/>
-        </p:nvSpPr>
-        <p:spPr>
-          <a:xfrm>
-            <a:off x="10907942" y="3686860"/>
+          <p:cNvPr id="215" name="Rectangle 214"/>
+          <p:cNvSpPr/>
+          <p:nvPr/>
+        </p:nvSpPr>
+        <p:spPr>
+          <a:xfrm>
+            <a:off x="10907942" y="3705148"/>
             <a:ext cx="614411" cy="124358"/>
           </a:xfrm>
           <a:prstGeom prst="rect">
@@ -30029,13 +30345,13 @@
       </p:sp>
       <p:sp>
         <p:nvSpPr>
-          <p:cNvPr id="215" name="TextBox 214"/>
+          <p:cNvPr id="216" name="TextBox 215"/>
           <p:cNvSpPr txBox="1"/>
           <p:nvPr/>
         </p:nvSpPr>
         <p:spPr>
           <a:xfrm>
-            <a:off x="10896970" y="3675887"/>
+            <a:off x="10896970" y="3694176"/>
             <a:ext cx="636357" cy="146304"/>
           </a:xfrm>
           <a:prstGeom prst="rect">
@@ -30074,13 +30390,13 @@
       </p:sp>
       <p:sp>
         <p:nvSpPr>
-          <p:cNvPr id="216" name="TextBox 215"/>
+          <p:cNvPr id="217" name="TextBox 216"/>
           <p:cNvSpPr txBox="1"/>
           <p:nvPr/>
         </p:nvSpPr>
         <p:spPr>
           <a:xfrm>
-            <a:off x="704088" y="3822191"/>
+            <a:off x="704088" y="3840480"/>
             <a:ext cx="1856231" cy="146304"/>
           </a:xfrm>
           <a:prstGeom prst="rect">
@@ -30128,13 +30444,13 @@
       </p:sp>
       <p:sp>
         <p:nvSpPr>
-          <p:cNvPr id="217" name="Rectangle 216"/>
-          <p:cNvSpPr/>
-          <p:nvPr/>
-        </p:nvSpPr>
-        <p:spPr>
-          <a:xfrm>
-            <a:off x="2635300" y="3833164"/>
+          <p:cNvPr id="218" name="Rectangle 217"/>
+          <p:cNvSpPr/>
+          <p:nvPr/>
+        </p:nvSpPr>
+        <p:spPr>
+          <a:xfrm>
+            <a:off x="2635300" y="3851452"/>
             <a:ext cx="614411" cy="124358"/>
           </a:xfrm>
           <a:prstGeom prst="rect">
@@ -30172,13 +30488,13 @@
       </p:sp>
       <p:sp>
         <p:nvSpPr>
-          <p:cNvPr id="218" name="TextBox 217"/>
+          <p:cNvPr id="219" name="TextBox 218"/>
           <p:cNvSpPr txBox="1"/>
           <p:nvPr/>
         </p:nvSpPr>
         <p:spPr>
           <a:xfrm>
-            <a:off x="2624328" y="3822191"/>
+            <a:off x="2624328" y="3840480"/>
             <a:ext cx="636357" cy="146304"/>
           </a:xfrm>
           <a:prstGeom prst="rect">
@@ -30217,13 +30533,13 @@
       </p:sp>
       <p:sp>
         <p:nvSpPr>
-          <p:cNvPr id="219" name="Rectangle 218"/>
-          <p:cNvSpPr/>
-          <p:nvPr/>
-        </p:nvSpPr>
-        <p:spPr>
-          <a:xfrm>
-            <a:off x="3271657" y="3833164"/>
+          <p:cNvPr id="220" name="Rectangle 219"/>
+          <p:cNvSpPr/>
+          <p:nvPr/>
+        </p:nvSpPr>
+        <p:spPr>
+          <a:xfrm>
+            <a:off x="3271657" y="3851452"/>
             <a:ext cx="614411" cy="124358"/>
           </a:xfrm>
           <a:prstGeom prst="rect">
@@ -30261,13 +30577,13 @@
       </p:sp>
       <p:sp>
         <p:nvSpPr>
-          <p:cNvPr id="220" name="TextBox 219"/>
+          <p:cNvPr id="221" name="TextBox 220"/>
           <p:cNvSpPr txBox="1"/>
           <p:nvPr/>
         </p:nvSpPr>
         <p:spPr>
           <a:xfrm>
-            <a:off x="3260685" y="3822191"/>
+            <a:off x="3260685" y="3840480"/>
             <a:ext cx="636357" cy="146304"/>
           </a:xfrm>
           <a:prstGeom prst="rect">
@@ -30306,13 +30622,13 @@
       </p:sp>
       <p:sp>
         <p:nvSpPr>
-          <p:cNvPr id="221" name="Rectangle 220"/>
-          <p:cNvSpPr/>
-          <p:nvPr/>
-        </p:nvSpPr>
-        <p:spPr>
-          <a:xfrm>
-            <a:off x="3908014" y="3833164"/>
+          <p:cNvPr id="222" name="Rectangle 221"/>
+          <p:cNvSpPr/>
+          <p:nvPr/>
+        </p:nvSpPr>
+        <p:spPr>
+          <a:xfrm>
+            <a:off x="3908014" y="3851452"/>
             <a:ext cx="614411" cy="124358"/>
           </a:xfrm>
           <a:prstGeom prst="rect">
@@ -30350,13 +30666,13 @@
       </p:sp>
       <p:sp>
         <p:nvSpPr>
-          <p:cNvPr id="222" name="TextBox 221"/>
+          <p:cNvPr id="223" name="TextBox 222"/>
           <p:cNvSpPr txBox="1"/>
           <p:nvPr/>
         </p:nvSpPr>
         <p:spPr>
           <a:xfrm>
-            <a:off x="3897042" y="3822191"/>
+            <a:off x="3897042" y="3840480"/>
             <a:ext cx="636357" cy="146304"/>
           </a:xfrm>
           <a:prstGeom prst="rect">
@@ -30395,13 +30711,13 @@
       </p:sp>
       <p:sp>
         <p:nvSpPr>
-          <p:cNvPr id="223" name="Rectangle 222"/>
-          <p:cNvSpPr/>
-          <p:nvPr/>
-        </p:nvSpPr>
-        <p:spPr>
-          <a:xfrm>
-            <a:off x="4544372" y="3833164"/>
+          <p:cNvPr id="224" name="Rectangle 223"/>
+          <p:cNvSpPr/>
+          <p:nvPr/>
+        </p:nvSpPr>
+        <p:spPr>
+          <a:xfrm>
+            <a:off x="4544372" y="3851452"/>
             <a:ext cx="614411" cy="124358"/>
           </a:xfrm>
           <a:prstGeom prst="rect">
@@ -30439,13 +30755,13 @@
       </p:sp>
       <p:sp>
         <p:nvSpPr>
-          <p:cNvPr id="224" name="TextBox 223"/>
+          <p:cNvPr id="225" name="TextBox 224"/>
           <p:cNvSpPr txBox="1"/>
           <p:nvPr/>
         </p:nvSpPr>
         <p:spPr>
           <a:xfrm>
-            <a:off x="4533399" y="3822191"/>
+            <a:off x="4533399" y="3840480"/>
             <a:ext cx="636357" cy="146304"/>
           </a:xfrm>
           <a:prstGeom prst="rect">
@@ -30484,13 +30800,13 @@
       </p:sp>
       <p:sp>
         <p:nvSpPr>
-          <p:cNvPr id="225" name="Rectangle 224"/>
-          <p:cNvSpPr/>
-          <p:nvPr/>
-        </p:nvSpPr>
-        <p:spPr>
-          <a:xfrm>
-            <a:off x="5180729" y="3833164"/>
+          <p:cNvPr id="226" name="Rectangle 225"/>
+          <p:cNvSpPr/>
+          <p:nvPr/>
+        </p:nvSpPr>
+        <p:spPr>
+          <a:xfrm>
+            <a:off x="5180729" y="3851452"/>
             <a:ext cx="614411" cy="124358"/>
           </a:xfrm>
           <a:prstGeom prst="rect">
@@ -30528,13 +30844,13 @@
       </p:sp>
       <p:sp>
         <p:nvSpPr>
-          <p:cNvPr id="226" name="TextBox 225"/>
+          <p:cNvPr id="227" name="TextBox 226"/>
           <p:cNvSpPr txBox="1"/>
           <p:nvPr/>
         </p:nvSpPr>
         <p:spPr>
           <a:xfrm>
-            <a:off x="5169756" y="3822191"/>
+            <a:off x="5169756" y="3840480"/>
             <a:ext cx="636357" cy="146304"/>
           </a:xfrm>
           <a:prstGeom prst="rect">
@@ -30573,13 +30889,13 @@
       </p:sp>
       <p:sp>
         <p:nvSpPr>
-          <p:cNvPr id="227" name="Rectangle 226"/>
-          <p:cNvSpPr/>
-          <p:nvPr/>
-        </p:nvSpPr>
-        <p:spPr>
-          <a:xfrm>
-            <a:off x="5817086" y="3833164"/>
+          <p:cNvPr id="228" name="Rectangle 227"/>
+          <p:cNvSpPr/>
+          <p:nvPr/>
+        </p:nvSpPr>
+        <p:spPr>
+          <a:xfrm>
+            <a:off x="5817086" y="3851452"/>
             <a:ext cx="614411" cy="124358"/>
           </a:xfrm>
           <a:prstGeom prst="rect">
@@ -30617,13 +30933,13 @@
       </p:sp>
       <p:sp>
         <p:nvSpPr>
-          <p:cNvPr id="228" name="TextBox 227"/>
+          <p:cNvPr id="229" name="TextBox 228"/>
           <p:cNvSpPr txBox="1"/>
           <p:nvPr/>
         </p:nvSpPr>
         <p:spPr>
           <a:xfrm>
-            <a:off x="5806113" y="3822191"/>
+            <a:off x="5806113" y="3840480"/>
             <a:ext cx="636357" cy="146304"/>
           </a:xfrm>
           <a:prstGeom prst="rect">
@@ -30662,13 +30978,13 @@
       </p:sp>
       <p:sp>
         <p:nvSpPr>
-          <p:cNvPr id="229" name="Rectangle 228"/>
-          <p:cNvSpPr/>
-          <p:nvPr/>
-        </p:nvSpPr>
-        <p:spPr>
-          <a:xfrm>
-            <a:off x="6453443" y="3833164"/>
+          <p:cNvPr id="230" name="Rectangle 229"/>
+          <p:cNvSpPr/>
+          <p:nvPr/>
+        </p:nvSpPr>
+        <p:spPr>
+          <a:xfrm>
+            <a:off x="6453443" y="3851452"/>
             <a:ext cx="614411" cy="124358"/>
           </a:xfrm>
           <a:prstGeom prst="rect">
@@ -30706,13 +31022,13 @@
       </p:sp>
       <p:sp>
         <p:nvSpPr>
-          <p:cNvPr id="230" name="TextBox 229"/>
+          <p:cNvPr id="231" name="TextBox 230"/>
           <p:cNvSpPr txBox="1"/>
           <p:nvPr/>
         </p:nvSpPr>
         <p:spPr>
           <a:xfrm>
-            <a:off x="6442470" y="3822191"/>
+            <a:off x="6442470" y="3840480"/>
             <a:ext cx="636357" cy="146304"/>
           </a:xfrm>
           <a:prstGeom prst="rect">
@@ -30751,13 +31067,13 @@
       </p:sp>
       <p:sp>
         <p:nvSpPr>
-          <p:cNvPr id="231" name="Rectangle 230"/>
-          <p:cNvSpPr/>
-          <p:nvPr/>
-        </p:nvSpPr>
-        <p:spPr>
-          <a:xfrm>
-            <a:off x="7089800" y="3833164"/>
+          <p:cNvPr id="232" name="Rectangle 231"/>
+          <p:cNvSpPr/>
+          <p:nvPr/>
+        </p:nvSpPr>
+        <p:spPr>
+          <a:xfrm>
+            <a:off x="7089800" y="3851452"/>
             <a:ext cx="614411" cy="124358"/>
           </a:xfrm>
           <a:prstGeom prst="rect">
@@ -30795,13 +31111,13 @@
       </p:sp>
       <p:sp>
         <p:nvSpPr>
-          <p:cNvPr id="232" name="Rectangle 231"/>
-          <p:cNvSpPr/>
-          <p:nvPr/>
-        </p:nvSpPr>
-        <p:spPr>
-          <a:xfrm>
-            <a:off x="7726157" y="3833164"/>
+          <p:cNvPr id="233" name="Rectangle 232"/>
+          <p:cNvSpPr/>
+          <p:nvPr/>
+        </p:nvSpPr>
+        <p:spPr>
+          <a:xfrm>
+            <a:off x="7726157" y="3851452"/>
             <a:ext cx="614411" cy="124358"/>
           </a:xfrm>
           <a:prstGeom prst="rect">
@@ -30839,13 +31155,13 @@
       </p:sp>
       <p:sp>
         <p:nvSpPr>
-          <p:cNvPr id="233" name="TextBox 232"/>
+          <p:cNvPr id="234" name="TextBox 233"/>
           <p:cNvSpPr txBox="1"/>
           <p:nvPr/>
         </p:nvSpPr>
         <p:spPr>
           <a:xfrm>
-            <a:off x="7715184" y="3822191"/>
+            <a:off x="7715184" y="3840480"/>
             <a:ext cx="636357" cy="146304"/>
           </a:xfrm>
           <a:prstGeom prst="rect">
@@ -30884,13 +31200,13 @@
       </p:sp>
       <p:sp>
         <p:nvSpPr>
-          <p:cNvPr id="234" name="Rectangle 233"/>
-          <p:cNvSpPr/>
-          <p:nvPr/>
-        </p:nvSpPr>
-        <p:spPr>
-          <a:xfrm>
-            <a:off x="8362514" y="3833164"/>
+          <p:cNvPr id="235" name="Rectangle 234"/>
+          <p:cNvSpPr/>
+          <p:nvPr/>
+        </p:nvSpPr>
+        <p:spPr>
+          <a:xfrm>
+            <a:off x="8362514" y="3851452"/>
             <a:ext cx="614411" cy="124358"/>
           </a:xfrm>
           <a:prstGeom prst="rect">
@@ -30928,13 +31244,13 @@
       </p:sp>
       <p:sp>
         <p:nvSpPr>
-          <p:cNvPr id="235" name="TextBox 234"/>
+          <p:cNvPr id="236" name="TextBox 235"/>
           <p:cNvSpPr txBox="1"/>
           <p:nvPr/>
         </p:nvSpPr>
         <p:spPr>
           <a:xfrm>
-            <a:off x="8351541" y="3822191"/>
+            <a:off x="8351541" y="3840480"/>
             <a:ext cx="636357" cy="146304"/>
           </a:xfrm>
           <a:prstGeom prst="rect">
@@ -30973,13 +31289,13 @@
       </p:sp>
       <p:sp>
         <p:nvSpPr>
-          <p:cNvPr id="236" name="Rectangle 235"/>
-          <p:cNvSpPr/>
-          <p:nvPr/>
-        </p:nvSpPr>
-        <p:spPr>
-          <a:xfrm>
-            <a:off x="8998871" y="3833164"/>
+          <p:cNvPr id="237" name="Rectangle 236"/>
+          <p:cNvSpPr/>
+          <p:nvPr/>
+        </p:nvSpPr>
+        <p:spPr>
+          <a:xfrm>
+            <a:off x="8998871" y="3851452"/>
             <a:ext cx="614411" cy="124358"/>
           </a:xfrm>
           <a:prstGeom prst="rect">
@@ -31017,13 +31333,13 @@
       </p:sp>
       <p:sp>
         <p:nvSpPr>
-          <p:cNvPr id="237" name="TextBox 236"/>
+          <p:cNvPr id="238" name="TextBox 237"/>
           <p:cNvSpPr txBox="1"/>
           <p:nvPr/>
         </p:nvSpPr>
         <p:spPr>
           <a:xfrm>
-            <a:off x="8987898" y="3822191"/>
+            <a:off x="8987898" y="3840480"/>
             <a:ext cx="636357" cy="146304"/>
           </a:xfrm>
           <a:prstGeom prst="rect">
@@ -31062,13 +31378,13 @@
       </p:sp>
       <p:sp>
         <p:nvSpPr>
-          <p:cNvPr id="238" name="Rectangle 237"/>
-          <p:cNvSpPr/>
-          <p:nvPr/>
-        </p:nvSpPr>
-        <p:spPr>
-          <a:xfrm>
-            <a:off x="9635228" y="3833164"/>
+          <p:cNvPr id="239" name="Rectangle 238"/>
+          <p:cNvSpPr/>
+          <p:nvPr/>
+        </p:nvSpPr>
+        <p:spPr>
+          <a:xfrm>
+            <a:off x="9635228" y="3851452"/>
             <a:ext cx="614411" cy="124358"/>
           </a:xfrm>
           <a:prstGeom prst="rect">
@@ -31106,13 +31422,13 @@
       </p:sp>
       <p:sp>
         <p:nvSpPr>
-          <p:cNvPr id="239" name="TextBox 238"/>
+          <p:cNvPr id="240" name="TextBox 239"/>
           <p:cNvSpPr txBox="1"/>
           <p:nvPr/>
         </p:nvSpPr>
         <p:spPr>
           <a:xfrm>
-            <a:off x="9624255" y="3822191"/>
+            <a:off x="9624255" y="3840480"/>
             <a:ext cx="636357" cy="146304"/>
           </a:xfrm>
           <a:prstGeom prst="rect">
@@ -31151,13 +31467,13 @@
       </p:sp>
       <p:sp>
         <p:nvSpPr>
-          <p:cNvPr id="240" name="Rectangle 239"/>
-          <p:cNvSpPr/>
-          <p:nvPr/>
-        </p:nvSpPr>
-        <p:spPr>
-          <a:xfrm>
-            <a:off x="10271585" y="3833164"/>
+          <p:cNvPr id="241" name="Rectangle 240"/>
+          <p:cNvSpPr/>
+          <p:nvPr/>
+        </p:nvSpPr>
+        <p:spPr>
+          <a:xfrm>
+            <a:off x="10271585" y="3851452"/>
             <a:ext cx="614411" cy="124358"/>
           </a:xfrm>
           <a:prstGeom prst="rect">
@@ -31195,13 +31511,13 @@
       </p:sp>
       <p:sp>
         <p:nvSpPr>
-          <p:cNvPr id="241" name="TextBox 240"/>
+          <p:cNvPr id="242" name="TextBox 241"/>
           <p:cNvSpPr txBox="1"/>
           <p:nvPr/>
         </p:nvSpPr>
         <p:spPr>
           <a:xfrm>
-            <a:off x="10260613" y="3822191"/>
+            <a:off x="10260613" y="3840480"/>
             <a:ext cx="636357" cy="146304"/>
           </a:xfrm>
           <a:prstGeom prst="rect">
@@ -31240,13 +31556,13 @@
       </p:sp>
       <p:sp>
         <p:nvSpPr>
-          <p:cNvPr id="242" name="Rectangle 241"/>
-          <p:cNvSpPr/>
-          <p:nvPr/>
-        </p:nvSpPr>
-        <p:spPr>
-          <a:xfrm>
-            <a:off x="10907942" y="3833164"/>
+          <p:cNvPr id="243" name="Rectangle 242"/>
+          <p:cNvSpPr/>
+          <p:nvPr/>
+        </p:nvSpPr>
+        <p:spPr>
+          <a:xfrm>
+            <a:off x="10907942" y="3851452"/>
             <a:ext cx="614411" cy="124358"/>
           </a:xfrm>
           <a:prstGeom prst="rect">
@@ -31284,13 +31600,13 @@
       </p:sp>
       <p:sp>
         <p:nvSpPr>
-          <p:cNvPr id="243" name="TextBox 242"/>
+          <p:cNvPr id="244" name="TextBox 243"/>
           <p:cNvSpPr txBox="1"/>
           <p:nvPr/>
         </p:nvSpPr>
         <p:spPr>
           <a:xfrm>
-            <a:off x="10896970" y="3822191"/>
+            <a:off x="10896970" y="3840480"/>
             <a:ext cx="636357" cy="146304"/>
           </a:xfrm>
           <a:prstGeom prst="rect">
@@ -31329,13 +31645,13 @@
       </p:sp>
       <p:sp>
         <p:nvSpPr>
-          <p:cNvPr id="244" name="TextBox 243"/>
+          <p:cNvPr id="245" name="TextBox 244"/>
           <p:cNvSpPr txBox="1"/>
           <p:nvPr/>
         </p:nvSpPr>
         <p:spPr>
           <a:xfrm>
-            <a:off x="704088" y="3968496"/>
+            <a:off x="704088" y="3986784"/>
             <a:ext cx="1856231" cy="146304"/>
           </a:xfrm>
           <a:prstGeom prst="rect">
@@ -31383,13 +31699,13 @@
       </p:sp>
       <p:sp>
         <p:nvSpPr>
-          <p:cNvPr id="245" name="Rectangle 244"/>
-          <p:cNvSpPr/>
-          <p:nvPr/>
-        </p:nvSpPr>
-        <p:spPr>
-          <a:xfrm>
-            <a:off x="2635300" y="3979468"/>
+          <p:cNvPr id="246" name="Rectangle 245"/>
+          <p:cNvSpPr/>
+          <p:nvPr/>
+        </p:nvSpPr>
+        <p:spPr>
+          <a:xfrm>
+            <a:off x="2635300" y="3997756"/>
             <a:ext cx="614411" cy="124358"/>
           </a:xfrm>
           <a:prstGeom prst="rect">
@@ -31427,13 +31743,13 @@
       </p:sp>
       <p:sp>
         <p:nvSpPr>
-          <p:cNvPr id="246" name="TextBox 245"/>
+          <p:cNvPr id="247" name="TextBox 246"/>
           <p:cNvSpPr txBox="1"/>
           <p:nvPr/>
         </p:nvSpPr>
         <p:spPr>
           <a:xfrm>
-            <a:off x="2624328" y="3968496"/>
+            <a:off x="2624328" y="3986784"/>
             <a:ext cx="636357" cy="146304"/>
           </a:xfrm>
           <a:prstGeom prst="rect">
@@ -31472,13 +31788,13 @@
       </p:sp>
       <p:sp>
         <p:nvSpPr>
-          <p:cNvPr id="247" name="Rectangle 246"/>
-          <p:cNvSpPr/>
-          <p:nvPr/>
-        </p:nvSpPr>
-        <p:spPr>
-          <a:xfrm>
-            <a:off x="3271657" y="3979468"/>
+          <p:cNvPr id="248" name="Rectangle 247"/>
+          <p:cNvSpPr/>
+          <p:nvPr/>
+        </p:nvSpPr>
+        <p:spPr>
+          <a:xfrm>
+            <a:off x="3271657" y="3997756"/>
             <a:ext cx="614411" cy="124358"/>
           </a:xfrm>
           <a:prstGeom prst="rect">
@@ -31516,13 +31832,13 @@
       </p:sp>
       <p:sp>
         <p:nvSpPr>
-          <p:cNvPr id="248" name="TextBox 247"/>
+          <p:cNvPr id="249" name="TextBox 248"/>
           <p:cNvSpPr txBox="1"/>
           <p:nvPr/>
         </p:nvSpPr>
         <p:spPr>
           <a:xfrm>
-            <a:off x="3260685" y="3968496"/>
+            <a:off x="3260685" y="3986784"/>
             <a:ext cx="636357" cy="146304"/>
           </a:xfrm>
           <a:prstGeom prst="rect">
@@ -31561,13 +31877,13 @@
       </p:sp>
       <p:sp>
         <p:nvSpPr>
-          <p:cNvPr id="249" name="Rectangle 248"/>
-          <p:cNvSpPr/>
-          <p:nvPr/>
-        </p:nvSpPr>
-        <p:spPr>
-          <a:xfrm>
-            <a:off x="3908014" y="3979468"/>
+          <p:cNvPr id="250" name="Rectangle 249"/>
+          <p:cNvSpPr/>
+          <p:nvPr/>
+        </p:nvSpPr>
+        <p:spPr>
+          <a:xfrm>
+            <a:off x="3908014" y="3997756"/>
             <a:ext cx="614411" cy="124358"/>
           </a:xfrm>
           <a:prstGeom prst="rect">
@@ -31605,13 +31921,13 @@
       </p:sp>
       <p:sp>
         <p:nvSpPr>
-          <p:cNvPr id="250" name="TextBox 249"/>
+          <p:cNvPr id="251" name="TextBox 250"/>
           <p:cNvSpPr txBox="1"/>
           <p:nvPr/>
         </p:nvSpPr>
         <p:spPr>
           <a:xfrm>
-            <a:off x="3897042" y="3968496"/>
+            <a:off x="3897042" y="3986784"/>
             <a:ext cx="636357" cy="146304"/>
           </a:xfrm>
           <a:prstGeom prst="rect">
@@ -31650,13 +31966,13 @@
       </p:sp>
       <p:sp>
         <p:nvSpPr>
-          <p:cNvPr id="251" name="Rectangle 250"/>
-          <p:cNvSpPr/>
-          <p:nvPr/>
-        </p:nvSpPr>
-        <p:spPr>
-          <a:xfrm>
-            <a:off x="4544372" y="3979468"/>
+          <p:cNvPr id="252" name="Rectangle 251"/>
+          <p:cNvSpPr/>
+          <p:nvPr/>
+        </p:nvSpPr>
+        <p:spPr>
+          <a:xfrm>
+            <a:off x="4544372" y="3997756"/>
             <a:ext cx="614411" cy="124358"/>
           </a:xfrm>
           <a:prstGeom prst="rect">
@@ -31694,13 +32010,13 @@
       </p:sp>
       <p:sp>
         <p:nvSpPr>
-          <p:cNvPr id="252" name="TextBox 251"/>
+          <p:cNvPr id="253" name="TextBox 252"/>
           <p:cNvSpPr txBox="1"/>
           <p:nvPr/>
         </p:nvSpPr>
         <p:spPr>
           <a:xfrm>
-            <a:off x="4533399" y="3968496"/>
+            <a:off x="4533399" y="3986784"/>
             <a:ext cx="636357" cy="146304"/>
           </a:xfrm>
           <a:prstGeom prst="rect">
@@ -31739,13 +32055,13 @@
       </p:sp>
       <p:sp>
         <p:nvSpPr>
-          <p:cNvPr id="253" name="Rectangle 252"/>
-          <p:cNvSpPr/>
-          <p:nvPr/>
-        </p:nvSpPr>
-        <p:spPr>
-          <a:xfrm>
-            <a:off x="5180729" y="3979468"/>
+          <p:cNvPr id="254" name="Rectangle 253"/>
+          <p:cNvSpPr/>
+          <p:nvPr/>
+        </p:nvSpPr>
+        <p:spPr>
+          <a:xfrm>
+            <a:off x="5180729" y="3997756"/>
             <a:ext cx="614411" cy="124358"/>
           </a:xfrm>
           <a:prstGeom prst="rect">
@@ -31783,13 +32099,13 @@
       </p:sp>
       <p:sp>
         <p:nvSpPr>
-          <p:cNvPr id="254" name="TextBox 253"/>
+          <p:cNvPr id="255" name="TextBox 254"/>
           <p:cNvSpPr txBox="1"/>
           <p:nvPr/>
         </p:nvSpPr>
         <p:spPr>
           <a:xfrm>
-            <a:off x="5169756" y="3968496"/>
+            <a:off x="5169756" y="3986784"/>
             <a:ext cx="636357" cy="146304"/>
           </a:xfrm>
           <a:prstGeom prst="rect">
@@ -31828,13 +32144,13 @@
       </p:sp>
       <p:sp>
         <p:nvSpPr>
-          <p:cNvPr id="255" name="Rectangle 254"/>
-          <p:cNvSpPr/>
-          <p:nvPr/>
-        </p:nvSpPr>
-        <p:spPr>
-          <a:xfrm>
-            <a:off x="5817086" y="3979468"/>
+          <p:cNvPr id="256" name="Rectangle 255"/>
+          <p:cNvSpPr/>
+          <p:nvPr/>
+        </p:nvSpPr>
+        <p:spPr>
+          <a:xfrm>
+            <a:off x="5817086" y="3997756"/>
             <a:ext cx="614411" cy="124358"/>
           </a:xfrm>
           <a:prstGeom prst="rect">
@@ -31872,13 +32188,13 @@
       </p:sp>
       <p:sp>
         <p:nvSpPr>
-          <p:cNvPr id="256" name="TextBox 255"/>
+          <p:cNvPr id="257" name="TextBox 256"/>
           <p:cNvSpPr txBox="1"/>
           <p:nvPr/>
         </p:nvSpPr>
         <p:spPr>
           <a:xfrm>
-            <a:off x="5806113" y="3968496"/>
+            <a:off x="5806113" y="3986784"/>
             <a:ext cx="636357" cy="146304"/>
           </a:xfrm>
           <a:prstGeom prst="rect">
@@ -31917,13 +32233,13 @@
       </p:sp>
       <p:sp>
         <p:nvSpPr>
-          <p:cNvPr id="257" name="Rectangle 256"/>
-          <p:cNvSpPr/>
-          <p:nvPr/>
-        </p:nvSpPr>
-        <p:spPr>
-          <a:xfrm>
-            <a:off x="6453443" y="3979468"/>
+          <p:cNvPr id="258" name="Rectangle 257"/>
+          <p:cNvSpPr/>
+          <p:nvPr/>
+        </p:nvSpPr>
+        <p:spPr>
+          <a:xfrm>
+            <a:off x="6453443" y="3997756"/>
             <a:ext cx="614411" cy="124358"/>
           </a:xfrm>
           <a:prstGeom prst="rect">
@@ -31961,13 +32277,13 @@
       </p:sp>
       <p:sp>
         <p:nvSpPr>
-          <p:cNvPr id="258" name="TextBox 257"/>
+          <p:cNvPr id="259" name="TextBox 258"/>
           <p:cNvSpPr txBox="1"/>
           <p:nvPr/>
         </p:nvSpPr>
         <p:spPr>
           <a:xfrm>
-            <a:off x="6442470" y="3968496"/>
+            <a:off x="6442470" y="3986784"/>
             <a:ext cx="636357" cy="146304"/>
           </a:xfrm>
           <a:prstGeom prst="rect">
@@ -32006,13 +32322,13 @@
       </p:sp>
       <p:sp>
         <p:nvSpPr>
-          <p:cNvPr id="259" name="Rectangle 258"/>
-          <p:cNvSpPr/>
-          <p:nvPr/>
-        </p:nvSpPr>
-        <p:spPr>
-          <a:xfrm>
-            <a:off x="7089800" y="3979468"/>
+          <p:cNvPr id="260" name="Rectangle 259"/>
+          <p:cNvSpPr/>
+          <p:nvPr/>
+        </p:nvSpPr>
+        <p:spPr>
+          <a:xfrm>
+            <a:off x="7089800" y="3997756"/>
             <a:ext cx="614411" cy="124358"/>
           </a:xfrm>
           <a:prstGeom prst="rect">
@@ -32050,13 +32366,13 @@
       </p:sp>
       <p:sp>
         <p:nvSpPr>
-          <p:cNvPr id="260" name="TextBox 259"/>
+          <p:cNvPr id="261" name="TextBox 260"/>
           <p:cNvSpPr txBox="1"/>
           <p:nvPr/>
         </p:nvSpPr>
         <p:spPr>
           <a:xfrm>
-            <a:off x="7078827" y="3968496"/>
+            <a:off x="7078827" y="3986784"/>
             <a:ext cx="636357" cy="146304"/>
           </a:xfrm>
           <a:prstGeom prst="rect">
@@ -32095,13 +32411,13 @@
       </p:sp>
       <p:sp>
         <p:nvSpPr>
-          <p:cNvPr id="261" name="Rectangle 260"/>
-          <p:cNvSpPr/>
-          <p:nvPr/>
-        </p:nvSpPr>
-        <p:spPr>
-          <a:xfrm>
-            <a:off x="7726157" y="3979468"/>
+          <p:cNvPr id="262" name="Rectangle 261"/>
+          <p:cNvSpPr/>
+          <p:nvPr/>
+        </p:nvSpPr>
+        <p:spPr>
+          <a:xfrm>
+            <a:off x="7726157" y="3997756"/>
             <a:ext cx="614411" cy="124358"/>
           </a:xfrm>
           <a:prstGeom prst="rect">
@@ -32139,13 +32455,13 @@
       </p:sp>
       <p:sp>
         <p:nvSpPr>
-          <p:cNvPr id="262" name="Rectangle 261"/>
-          <p:cNvSpPr/>
-          <p:nvPr/>
-        </p:nvSpPr>
-        <p:spPr>
-          <a:xfrm>
-            <a:off x="8362514" y="3979468"/>
+          <p:cNvPr id="263" name="Rectangle 262"/>
+          <p:cNvSpPr/>
+          <p:nvPr/>
+        </p:nvSpPr>
+        <p:spPr>
+          <a:xfrm>
+            <a:off x="8362514" y="3997756"/>
             <a:ext cx="614411" cy="124358"/>
           </a:xfrm>
           <a:prstGeom prst="rect">
@@ -32183,13 +32499,13 @@
       </p:sp>
       <p:sp>
         <p:nvSpPr>
-          <p:cNvPr id="263" name="TextBox 262"/>
+          <p:cNvPr id="264" name="TextBox 263"/>
           <p:cNvSpPr txBox="1"/>
           <p:nvPr/>
         </p:nvSpPr>
         <p:spPr>
           <a:xfrm>
-            <a:off x="8351541" y="3968496"/>
+            <a:off x="8351541" y="3986784"/>
             <a:ext cx="636357" cy="146304"/>
           </a:xfrm>
           <a:prstGeom prst="rect">
@@ -32228,13 +32544,13 @@
       </p:sp>
       <p:sp>
         <p:nvSpPr>
-          <p:cNvPr id="264" name="Rectangle 263"/>
-          <p:cNvSpPr/>
-          <p:nvPr/>
-        </p:nvSpPr>
-        <p:spPr>
-          <a:xfrm>
-            <a:off x="8998871" y="3979468"/>
+          <p:cNvPr id="265" name="Rectangle 264"/>
+          <p:cNvSpPr/>
+          <p:nvPr/>
+        </p:nvSpPr>
+        <p:spPr>
+          <a:xfrm>
+            <a:off x="8998871" y="3997756"/>
             <a:ext cx="614411" cy="124358"/>
           </a:xfrm>
           <a:prstGeom prst="rect">
@@ -32272,13 +32588,13 @@
       </p:sp>
       <p:sp>
         <p:nvSpPr>
-          <p:cNvPr id="265" name="TextBox 264"/>
+          <p:cNvPr id="266" name="TextBox 265"/>
           <p:cNvSpPr txBox="1"/>
           <p:nvPr/>
         </p:nvSpPr>
         <p:spPr>
           <a:xfrm>
-            <a:off x="8987898" y="3968496"/>
+            <a:off x="8987898" y="3986784"/>
             <a:ext cx="636357" cy="146304"/>
           </a:xfrm>
           <a:prstGeom prst="rect">
@@ -32317,13 +32633,13 @@
       </p:sp>
       <p:sp>
         <p:nvSpPr>
-          <p:cNvPr id="266" name="Rectangle 265"/>
-          <p:cNvSpPr/>
-          <p:nvPr/>
-        </p:nvSpPr>
-        <p:spPr>
-          <a:xfrm>
-            <a:off x="9635228" y="3979468"/>
+          <p:cNvPr id="267" name="Rectangle 266"/>
+          <p:cNvSpPr/>
+          <p:nvPr/>
+        </p:nvSpPr>
+        <p:spPr>
+          <a:xfrm>
+            <a:off x="9635228" y="3997756"/>
             <a:ext cx="614411" cy="124358"/>
           </a:xfrm>
           <a:prstGeom prst="rect">
@@ -32361,13 +32677,13 @@
       </p:sp>
       <p:sp>
         <p:nvSpPr>
-          <p:cNvPr id="267" name="TextBox 266"/>
+          <p:cNvPr id="268" name="TextBox 267"/>
           <p:cNvSpPr txBox="1"/>
           <p:nvPr/>
         </p:nvSpPr>
         <p:spPr>
           <a:xfrm>
-            <a:off x="9624255" y="3968496"/>
+            <a:off x="9624255" y="3986784"/>
             <a:ext cx="636357" cy="146304"/>
           </a:xfrm>
           <a:prstGeom prst="rect">
@@ -32406,13 +32722,13 @@
       </p:sp>
       <p:sp>
         <p:nvSpPr>
-          <p:cNvPr id="268" name="Rectangle 267"/>
-          <p:cNvSpPr/>
-          <p:nvPr/>
-        </p:nvSpPr>
-        <p:spPr>
-          <a:xfrm>
-            <a:off x="10271585" y="3979468"/>
+          <p:cNvPr id="269" name="Rectangle 268"/>
+          <p:cNvSpPr/>
+          <p:nvPr/>
+        </p:nvSpPr>
+        <p:spPr>
+          <a:xfrm>
+            <a:off x="10271585" y="3997756"/>
             <a:ext cx="614411" cy="124358"/>
           </a:xfrm>
           <a:prstGeom prst="rect">
@@ -32450,13 +32766,13 @@
       </p:sp>
       <p:sp>
         <p:nvSpPr>
-          <p:cNvPr id="269" name="TextBox 268"/>
+          <p:cNvPr id="270" name="TextBox 269"/>
           <p:cNvSpPr txBox="1"/>
           <p:nvPr/>
         </p:nvSpPr>
         <p:spPr>
           <a:xfrm>
-            <a:off x="10260613" y="3968496"/>
+            <a:off x="10260613" y="3986784"/>
             <a:ext cx="636357" cy="146304"/>
           </a:xfrm>
           <a:prstGeom prst="rect">
@@ -32495,13 +32811,13 @@
       </p:sp>
       <p:sp>
         <p:nvSpPr>
-          <p:cNvPr id="270" name="Rectangle 269"/>
-          <p:cNvSpPr/>
-          <p:nvPr/>
-        </p:nvSpPr>
-        <p:spPr>
-          <a:xfrm>
-            <a:off x="10907942" y="3979468"/>
+          <p:cNvPr id="271" name="Rectangle 270"/>
+          <p:cNvSpPr/>
+          <p:nvPr/>
+        </p:nvSpPr>
+        <p:spPr>
+          <a:xfrm>
+            <a:off x="10907942" y="3997756"/>
             <a:ext cx="614411" cy="124358"/>
           </a:xfrm>
           <a:prstGeom prst="rect">
@@ -32539,13 +32855,13 @@
       </p:sp>
       <p:sp>
         <p:nvSpPr>
-          <p:cNvPr id="271" name="TextBox 270"/>
+          <p:cNvPr id="272" name="TextBox 271"/>
           <p:cNvSpPr txBox="1"/>
           <p:nvPr/>
         </p:nvSpPr>
         <p:spPr>
           <a:xfrm>
-            <a:off x="10896970" y="3968496"/>
+            <a:off x="10896970" y="3986784"/>
             <a:ext cx="636357" cy="146304"/>
           </a:xfrm>
           <a:prstGeom prst="rect">
@@ -32584,13 +32900,13 @@
       </p:sp>
       <p:sp>
         <p:nvSpPr>
-          <p:cNvPr id="272" name="TextBox 271"/>
+          <p:cNvPr id="273" name="TextBox 272"/>
           <p:cNvSpPr txBox="1"/>
           <p:nvPr/>
         </p:nvSpPr>
         <p:spPr>
           <a:xfrm>
-            <a:off x="704088" y="4114800"/>
+            <a:off x="704088" y="4133087"/>
             <a:ext cx="1856231" cy="146304"/>
           </a:xfrm>
           <a:prstGeom prst="rect">
@@ -32638,13 +32954,13 @@
       </p:sp>
       <p:sp>
         <p:nvSpPr>
-          <p:cNvPr id="273" name="Rectangle 272"/>
-          <p:cNvSpPr/>
-          <p:nvPr/>
-        </p:nvSpPr>
-        <p:spPr>
-          <a:xfrm>
-            <a:off x="2635300" y="4125772"/>
+          <p:cNvPr id="274" name="Rectangle 273"/>
+          <p:cNvSpPr/>
+          <p:nvPr/>
+        </p:nvSpPr>
+        <p:spPr>
+          <a:xfrm>
+            <a:off x="2635300" y="4144060"/>
             <a:ext cx="614411" cy="124358"/>
           </a:xfrm>
           <a:prstGeom prst="rect">
@@ -32682,13 +32998,13 @@
       </p:sp>
       <p:sp>
         <p:nvSpPr>
-          <p:cNvPr id="274" name="TextBox 273"/>
+          <p:cNvPr id="275" name="TextBox 274"/>
           <p:cNvSpPr txBox="1"/>
           <p:nvPr/>
         </p:nvSpPr>
         <p:spPr>
           <a:xfrm>
-            <a:off x="2624328" y="4114800"/>
+            <a:off x="2624328" y="4133087"/>
             <a:ext cx="636357" cy="146304"/>
           </a:xfrm>
           <a:prstGeom prst="rect">
@@ -32727,13 +33043,13 @@
       </p:sp>
       <p:sp>
         <p:nvSpPr>
-          <p:cNvPr id="275" name="Rectangle 274"/>
-          <p:cNvSpPr/>
-          <p:nvPr/>
-        </p:nvSpPr>
-        <p:spPr>
-          <a:xfrm>
-            <a:off x="3271657" y="4125772"/>
+          <p:cNvPr id="276" name="Rectangle 275"/>
+          <p:cNvSpPr/>
+          <p:nvPr/>
+        </p:nvSpPr>
+        <p:spPr>
+          <a:xfrm>
+            <a:off x="3271657" y="4144060"/>
             <a:ext cx="614411" cy="124358"/>
           </a:xfrm>
           <a:prstGeom prst="rect">
@@ -32771,13 +33087,13 @@
       </p:sp>
       <p:sp>
         <p:nvSpPr>
-          <p:cNvPr id="276" name="TextBox 275"/>
+          <p:cNvPr id="277" name="TextBox 276"/>
           <p:cNvSpPr txBox="1"/>
           <p:nvPr/>
         </p:nvSpPr>
         <p:spPr>
           <a:xfrm>
-            <a:off x="3260685" y="4114800"/>
+            <a:off x="3260685" y="4133087"/>
             <a:ext cx="636357" cy="146304"/>
           </a:xfrm>
           <a:prstGeom prst="rect">
@@ -32816,13 +33132,13 @@
       </p:sp>
       <p:sp>
         <p:nvSpPr>
-          <p:cNvPr id="277" name="Rectangle 276"/>
-          <p:cNvSpPr/>
-          <p:nvPr/>
-        </p:nvSpPr>
-        <p:spPr>
-          <a:xfrm>
-            <a:off x="3908014" y="4125772"/>
+          <p:cNvPr id="278" name="Rectangle 277"/>
+          <p:cNvSpPr/>
+          <p:nvPr/>
+        </p:nvSpPr>
+        <p:spPr>
+          <a:xfrm>
+            <a:off x="3908014" y="4144060"/>
             <a:ext cx="614411" cy="124358"/>
           </a:xfrm>
           <a:prstGeom prst="rect">
@@ -32860,13 +33176,13 @@
       </p:sp>
       <p:sp>
         <p:nvSpPr>
-          <p:cNvPr id="278" name="TextBox 277"/>
+          <p:cNvPr id="279" name="TextBox 278"/>
           <p:cNvSpPr txBox="1"/>
           <p:nvPr/>
         </p:nvSpPr>
         <p:spPr>
           <a:xfrm>
-            <a:off x="3897042" y="4114800"/>
+            <a:off x="3897042" y="4133087"/>
             <a:ext cx="636357" cy="146304"/>
           </a:xfrm>
           <a:prstGeom prst="rect">
@@ -32905,13 +33221,13 @@
       </p:sp>
       <p:sp>
         <p:nvSpPr>
-          <p:cNvPr id="279" name="Rectangle 278"/>
-          <p:cNvSpPr/>
-          <p:nvPr/>
-        </p:nvSpPr>
-        <p:spPr>
-          <a:xfrm>
-            <a:off x="4544372" y="4125772"/>
+          <p:cNvPr id="280" name="Rectangle 279"/>
+          <p:cNvSpPr/>
+          <p:nvPr/>
+        </p:nvSpPr>
+        <p:spPr>
+          <a:xfrm>
+            <a:off x="4544372" y="4144060"/>
             <a:ext cx="614411" cy="124358"/>
           </a:xfrm>
           <a:prstGeom prst="rect">
@@ -32949,13 +33265,13 @@
       </p:sp>
       <p:sp>
         <p:nvSpPr>
-          <p:cNvPr id="280" name="TextBox 279"/>
+          <p:cNvPr id="281" name="TextBox 280"/>
           <p:cNvSpPr txBox="1"/>
           <p:nvPr/>
         </p:nvSpPr>
         <p:spPr>
           <a:xfrm>
-            <a:off x="4533399" y="4114800"/>
+            <a:off x="4533399" y="4133087"/>
             <a:ext cx="636357" cy="146304"/>
           </a:xfrm>
           <a:prstGeom prst="rect">
@@ -32994,13 +33310,13 @@
       </p:sp>
       <p:sp>
         <p:nvSpPr>
-          <p:cNvPr id="281" name="Rectangle 280"/>
-          <p:cNvSpPr/>
-          <p:nvPr/>
-        </p:nvSpPr>
-        <p:spPr>
-          <a:xfrm>
-            <a:off x="5180729" y="4125772"/>
+          <p:cNvPr id="282" name="Rectangle 281"/>
+          <p:cNvSpPr/>
+          <p:nvPr/>
+        </p:nvSpPr>
+        <p:spPr>
+          <a:xfrm>
+            <a:off x="5180729" y="4144060"/>
             <a:ext cx="614411" cy="124358"/>
           </a:xfrm>
           <a:prstGeom prst="rect">
@@ -33038,13 +33354,13 @@
       </p:sp>
       <p:sp>
         <p:nvSpPr>
-          <p:cNvPr id="282" name="TextBox 281"/>
+          <p:cNvPr id="283" name="TextBox 282"/>
           <p:cNvSpPr txBox="1"/>
           <p:nvPr/>
         </p:nvSpPr>
         <p:spPr>
           <a:xfrm>
-            <a:off x="5169756" y="4114800"/>
+            <a:off x="5169756" y="4133087"/>
             <a:ext cx="636357" cy="146304"/>
           </a:xfrm>
           <a:prstGeom prst="rect">
@@ -33083,13 +33399,13 @@
       </p:sp>
       <p:sp>
         <p:nvSpPr>
-          <p:cNvPr id="283" name="Rectangle 282"/>
-          <p:cNvSpPr/>
-          <p:nvPr/>
-        </p:nvSpPr>
-        <p:spPr>
-          <a:xfrm>
-            <a:off x="5817086" y="4125772"/>
+          <p:cNvPr id="284" name="Rectangle 283"/>
+          <p:cNvSpPr/>
+          <p:nvPr/>
+        </p:nvSpPr>
+        <p:spPr>
+          <a:xfrm>
+            <a:off x="5817086" y="4144060"/>
             <a:ext cx="614411" cy="124358"/>
           </a:xfrm>
           <a:prstGeom prst="rect">
@@ -33127,13 +33443,13 @@
       </p:sp>
       <p:sp>
         <p:nvSpPr>
-          <p:cNvPr id="284" name="TextBox 283"/>
+          <p:cNvPr id="285" name="TextBox 284"/>
           <p:cNvSpPr txBox="1"/>
           <p:nvPr/>
         </p:nvSpPr>
         <p:spPr>
           <a:xfrm>
-            <a:off x="5806113" y="4114800"/>
+            <a:off x="5806113" y="4133087"/>
             <a:ext cx="636357" cy="146304"/>
           </a:xfrm>
           <a:prstGeom prst="rect">
@@ -33172,13 +33488,13 @@
       </p:sp>
       <p:sp>
         <p:nvSpPr>
-          <p:cNvPr id="285" name="Rectangle 284"/>
-          <p:cNvSpPr/>
-          <p:nvPr/>
-        </p:nvSpPr>
-        <p:spPr>
-          <a:xfrm>
-            <a:off x="6453443" y="4125772"/>
+          <p:cNvPr id="286" name="Rectangle 285"/>
+          <p:cNvSpPr/>
+          <p:nvPr/>
+        </p:nvSpPr>
+        <p:spPr>
+          <a:xfrm>
+            <a:off x="6453443" y="4144060"/>
             <a:ext cx="614411" cy="124358"/>
           </a:xfrm>
           <a:prstGeom prst="rect">
@@ -33216,13 +33532,13 @@
       </p:sp>
       <p:sp>
         <p:nvSpPr>
-          <p:cNvPr id="286" name="TextBox 285"/>
+          <p:cNvPr id="287" name="TextBox 286"/>
           <p:cNvSpPr txBox="1"/>
           <p:nvPr/>
         </p:nvSpPr>
         <p:spPr>
           <a:xfrm>
-            <a:off x="6442470" y="4114800"/>
+            <a:off x="6442470" y="4133087"/>
             <a:ext cx="636357" cy="146304"/>
           </a:xfrm>
           <a:prstGeom prst="rect">
@@ -33261,13 +33577,13 @@
       </p:sp>
       <p:sp>
         <p:nvSpPr>
-          <p:cNvPr id="287" name="Rectangle 286"/>
-          <p:cNvSpPr/>
-          <p:nvPr/>
-        </p:nvSpPr>
-        <p:spPr>
-          <a:xfrm>
-            <a:off x="7089800" y="4125772"/>
+          <p:cNvPr id="288" name="Rectangle 287"/>
+          <p:cNvSpPr/>
+          <p:nvPr/>
+        </p:nvSpPr>
+        <p:spPr>
+          <a:xfrm>
+            <a:off x="7089800" y="4144060"/>
             <a:ext cx="614411" cy="124358"/>
           </a:xfrm>
           <a:prstGeom prst="rect">
@@ -33305,13 +33621,13 @@
       </p:sp>
       <p:sp>
         <p:nvSpPr>
-          <p:cNvPr id="288" name="TextBox 287"/>
+          <p:cNvPr id="289" name="TextBox 288"/>
           <p:cNvSpPr txBox="1"/>
           <p:nvPr/>
         </p:nvSpPr>
         <p:spPr>
           <a:xfrm>
-            <a:off x="7078827" y="4114800"/>
+            <a:off x="7078827" y="4133087"/>
             <a:ext cx="636357" cy="146304"/>
           </a:xfrm>
           <a:prstGeom prst="rect">
@@ -33350,13 +33666,13 @@
       </p:sp>
       <p:sp>
         <p:nvSpPr>
-          <p:cNvPr id="289" name="Rectangle 288"/>
-          <p:cNvSpPr/>
-          <p:nvPr/>
-        </p:nvSpPr>
-        <p:spPr>
-          <a:xfrm>
-            <a:off x="7726157" y="4125772"/>
+          <p:cNvPr id="290" name="Rectangle 289"/>
+          <p:cNvSpPr/>
+          <p:nvPr/>
+        </p:nvSpPr>
+        <p:spPr>
+          <a:xfrm>
+            <a:off x="7726157" y="4144060"/>
             <a:ext cx="614411" cy="124358"/>
           </a:xfrm>
           <a:prstGeom prst="rect">
@@ -33394,13 +33710,13 @@
       </p:sp>
       <p:sp>
         <p:nvSpPr>
-          <p:cNvPr id="290" name="TextBox 289"/>
+          <p:cNvPr id="291" name="TextBox 290"/>
           <p:cNvSpPr txBox="1"/>
           <p:nvPr/>
         </p:nvSpPr>
         <p:spPr>
           <a:xfrm>
-            <a:off x="7715184" y="4114800"/>
+            <a:off x="7715184" y="4133087"/>
             <a:ext cx="636357" cy="146304"/>
           </a:xfrm>
           <a:prstGeom prst="rect">
@@ -33439,13 +33755,13 @@
       </p:sp>
       <p:sp>
         <p:nvSpPr>
-          <p:cNvPr id="291" name="Rectangle 290"/>
-          <p:cNvSpPr/>
-          <p:nvPr/>
-        </p:nvSpPr>
-        <p:spPr>
-          <a:xfrm>
-            <a:off x="8362514" y="4125772"/>
+          <p:cNvPr id="292" name="Rectangle 291"/>
+          <p:cNvSpPr/>
+          <p:nvPr/>
+        </p:nvSpPr>
+        <p:spPr>
+          <a:xfrm>
+            <a:off x="8362514" y="4144060"/>
             <a:ext cx="614411" cy="124358"/>
           </a:xfrm>
           <a:prstGeom prst="rect">
@@ -33483,13 +33799,13 @@
       </p:sp>
       <p:sp>
         <p:nvSpPr>
-          <p:cNvPr id="292" name="Rectangle 291"/>
-          <p:cNvSpPr/>
-          <p:nvPr/>
-        </p:nvSpPr>
-        <p:spPr>
-          <a:xfrm>
-            <a:off x="8998871" y="4125772"/>
+          <p:cNvPr id="293" name="Rectangle 292"/>
+          <p:cNvSpPr/>
+          <p:nvPr/>
+        </p:nvSpPr>
+        <p:spPr>
+          <a:xfrm>
+            <a:off x="8998871" y="4144060"/>
             <a:ext cx="614411" cy="124358"/>
           </a:xfrm>
           <a:prstGeom prst="rect">
@@ -33527,13 +33843,13 @@
       </p:sp>
       <p:sp>
         <p:nvSpPr>
-          <p:cNvPr id="293" name="TextBox 292"/>
+          <p:cNvPr id="294" name="TextBox 293"/>
           <p:cNvSpPr txBox="1"/>
           <p:nvPr/>
         </p:nvSpPr>
         <p:spPr>
           <a:xfrm>
-            <a:off x="8987898" y="4114800"/>
+            <a:off x="8987898" y="4133087"/>
             <a:ext cx="636357" cy="146304"/>
           </a:xfrm>
           <a:prstGeom prst="rect">
@@ -33572,13 +33888,13 @@
       </p:sp>
       <p:sp>
         <p:nvSpPr>
-          <p:cNvPr id="294" name="Rectangle 293"/>
-          <p:cNvSpPr/>
-          <p:nvPr/>
-        </p:nvSpPr>
-        <p:spPr>
-          <a:xfrm>
-            <a:off x="9635228" y="4125772"/>
+          <p:cNvPr id="295" name="Rectangle 294"/>
+          <p:cNvSpPr/>
+          <p:nvPr/>
+        </p:nvSpPr>
+        <p:spPr>
+          <a:xfrm>
+            <a:off x="9635228" y="4144060"/>
             <a:ext cx="614411" cy="124358"/>
           </a:xfrm>
           <a:prstGeom prst="rect">
@@ -33616,13 +33932,13 @@
       </p:sp>
       <p:sp>
         <p:nvSpPr>
-          <p:cNvPr id="295" name="TextBox 294"/>
+          <p:cNvPr id="296" name="TextBox 295"/>
           <p:cNvSpPr txBox="1"/>
           <p:nvPr/>
         </p:nvSpPr>
         <p:spPr>
           <a:xfrm>
-            <a:off x="9624255" y="4114800"/>
+            <a:off x="9624255" y="4133087"/>
             <a:ext cx="636357" cy="146304"/>
           </a:xfrm>
           <a:prstGeom prst="rect">
@@ -33661,13 +33977,13 @@
       </p:sp>
       <p:sp>
         <p:nvSpPr>
-          <p:cNvPr id="296" name="Rectangle 295"/>
-          <p:cNvSpPr/>
-          <p:nvPr/>
-        </p:nvSpPr>
-        <p:spPr>
-          <a:xfrm>
-            <a:off x="10271585" y="4125772"/>
+          <p:cNvPr id="297" name="Rectangle 296"/>
+          <p:cNvSpPr/>
+          <p:nvPr/>
+        </p:nvSpPr>
+        <p:spPr>
+          <a:xfrm>
+            <a:off x="10271585" y="4144060"/>
             <a:ext cx="614411" cy="124358"/>
           </a:xfrm>
           <a:prstGeom prst="rect">
@@ -33705,13 +34021,13 @@
       </p:sp>
       <p:sp>
         <p:nvSpPr>
-          <p:cNvPr id="297" name="TextBox 296"/>
+          <p:cNvPr id="298" name="TextBox 297"/>
           <p:cNvSpPr txBox="1"/>
           <p:nvPr/>
         </p:nvSpPr>
         <p:spPr>
           <a:xfrm>
-            <a:off x="10260613" y="4114800"/>
+            <a:off x="10260613" y="4133087"/>
             <a:ext cx="636357" cy="146304"/>
           </a:xfrm>
           <a:prstGeom prst="rect">
@@ -33750,13 +34066,13 @@
       </p:sp>
       <p:sp>
         <p:nvSpPr>
-          <p:cNvPr id="298" name="Rectangle 297"/>
-          <p:cNvSpPr/>
-          <p:nvPr/>
-        </p:nvSpPr>
-        <p:spPr>
-          <a:xfrm>
-            <a:off x="10907942" y="4125772"/>
+          <p:cNvPr id="299" name="Rectangle 298"/>
+          <p:cNvSpPr/>
+          <p:nvPr/>
+        </p:nvSpPr>
+        <p:spPr>
+          <a:xfrm>
+            <a:off x="10907942" y="4144060"/>
             <a:ext cx="614411" cy="124358"/>
           </a:xfrm>
           <a:prstGeom prst="rect">
@@ -33794,13 +34110,13 @@
       </p:sp>
       <p:sp>
         <p:nvSpPr>
-          <p:cNvPr id="299" name="TextBox 298"/>
+          <p:cNvPr id="300" name="TextBox 299"/>
           <p:cNvSpPr txBox="1"/>
           <p:nvPr/>
         </p:nvSpPr>
         <p:spPr>
           <a:xfrm>
-            <a:off x="10896970" y="4114800"/>
+            <a:off x="10896970" y="4133087"/>
             <a:ext cx="636357" cy="146304"/>
           </a:xfrm>
           <a:prstGeom prst="rect">
@@ -33839,13 +34155,13 @@
       </p:sp>
       <p:sp>
         <p:nvSpPr>
-          <p:cNvPr id="300" name="Rectangle 299"/>
-          <p:cNvSpPr/>
-          <p:nvPr/>
-        </p:nvSpPr>
-        <p:spPr>
-          <a:xfrm>
-            <a:off x="658368" y="4268419"/>
+          <p:cNvPr id="301" name="Rectangle 300"/>
+          <p:cNvSpPr/>
+          <p:nvPr/>
+        </p:nvSpPr>
+        <p:spPr>
+          <a:xfrm>
+            <a:off x="658368" y="4286707"/>
             <a:ext cx="1920240" cy="131673"/>
           </a:xfrm>
           <a:prstGeom prst="rect">
@@ -33883,13 +34199,13 @@
       </p:sp>
       <p:sp>
         <p:nvSpPr>
-          <p:cNvPr id="301" name="TextBox 300"/>
+          <p:cNvPr id="302" name="TextBox 301"/>
           <p:cNvSpPr txBox="1"/>
           <p:nvPr/>
         </p:nvSpPr>
         <p:spPr>
           <a:xfrm>
-            <a:off x="704088" y="4261104"/>
+            <a:off x="704088" y="4279392"/>
             <a:ext cx="1856231" cy="146304"/>
           </a:xfrm>
           <a:prstGeom prst="rect">
@@ -33937,13 +34253,13 @@
       </p:sp>
       <p:sp>
         <p:nvSpPr>
-          <p:cNvPr id="302" name="Rectangle 301"/>
-          <p:cNvSpPr/>
-          <p:nvPr/>
-        </p:nvSpPr>
-        <p:spPr>
-          <a:xfrm>
-            <a:off x="2635300" y="4272076"/>
+          <p:cNvPr id="303" name="Rectangle 302"/>
+          <p:cNvSpPr/>
+          <p:nvPr/>
+        </p:nvSpPr>
+        <p:spPr>
+          <a:xfrm>
+            <a:off x="2635300" y="4290364"/>
             <a:ext cx="614411" cy="124358"/>
           </a:xfrm>
           <a:prstGeom prst="rect">
@@ -33981,13 +34297,13 @@
       </p:sp>
       <p:sp>
         <p:nvSpPr>
-          <p:cNvPr id="303" name="TextBox 302"/>
+          <p:cNvPr id="304" name="TextBox 303"/>
           <p:cNvSpPr txBox="1"/>
           <p:nvPr/>
         </p:nvSpPr>
         <p:spPr>
           <a:xfrm>
-            <a:off x="2624328" y="4261104"/>
+            <a:off x="2624328" y="4279392"/>
             <a:ext cx="636357" cy="146304"/>
           </a:xfrm>
           <a:prstGeom prst="rect">
@@ -34026,13 +34342,13 @@
       </p:sp>
       <p:sp>
         <p:nvSpPr>
-          <p:cNvPr id="304" name="Rectangle 303"/>
-          <p:cNvSpPr/>
-          <p:nvPr/>
-        </p:nvSpPr>
-        <p:spPr>
-          <a:xfrm>
-            <a:off x="3271657" y="4272076"/>
+          <p:cNvPr id="305" name="Rectangle 304"/>
+          <p:cNvSpPr/>
+          <p:nvPr/>
+        </p:nvSpPr>
+        <p:spPr>
+          <a:xfrm>
+            <a:off x="3271657" y="4290364"/>
             <a:ext cx="614411" cy="124358"/>
           </a:xfrm>
           <a:prstGeom prst="rect">
@@ -34070,13 +34386,13 @@
       </p:sp>
       <p:sp>
         <p:nvSpPr>
-          <p:cNvPr id="305" name="TextBox 304"/>
+          <p:cNvPr id="306" name="TextBox 305"/>
           <p:cNvSpPr txBox="1"/>
           <p:nvPr/>
         </p:nvSpPr>
         <p:spPr>
           <a:xfrm>
-            <a:off x="3260685" y="4261104"/>
+            <a:off x="3260685" y="4279392"/>
             <a:ext cx="636357" cy="146304"/>
           </a:xfrm>
           <a:prstGeom prst="rect">
@@ -34115,13 +34431,13 @@
       </p:sp>
       <p:sp>
         <p:nvSpPr>
-          <p:cNvPr id="306" name="Rectangle 305"/>
-          <p:cNvSpPr/>
-          <p:nvPr/>
-        </p:nvSpPr>
-        <p:spPr>
-          <a:xfrm>
-            <a:off x="3908014" y="4272076"/>
+          <p:cNvPr id="307" name="Rectangle 306"/>
+          <p:cNvSpPr/>
+          <p:nvPr/>
+        </p:nvSpPr>
+        <p:spPr>
+          <a:xfrm>
+            <a:off x="3908014" y="4290364"/>
             <a:ext cx="614411" cy="124358"/>
           </a:xfrm>
           <a:prstGeom prst="rect">
@@ -34159,13 +34475,13 @@
       </p:sp>
       <p:sp>
         <p:nvSpPr>
-          <p:cNvPr id="307" name="TextBox 306"/>
+          <p:cNvPr id="308" name="TextBox 307"/>
           <p:cNvSpPr txBox="1"/>
           <p:nvPr/>
         </p:nvSpPr>
         <p:spPr>
           <a:xfrm>
-            <a:off x="3897042" y="4261104"/>
+            <a:off x="3897042" y="4279392"/>
             <a:ext cx="636357" cy="146304"/>
           </a:xfrm>
           <a:prstGeom prst="rect">
@@ -34204,13 +34520,13 @@
       </p:sp>
       <p:sp>
         <p:nvSpPr>
-          <p:cNvPr id="308" name="Rectangle 307"/>
-          <p:cNvSpPr/>
-          <p:nvPr/>
-        </p:nvSpPr>
-        <p:spPr>
-          <a:xfrm>
-            <a:off x="4544372" y="4272076"/>
+          <p:cNvPr id="309" name="Rectangle 308"/>
+          <p:cNvSpPr/>
+          <p:nvPr/>
+        </p:nvSpPr>
+        <p:spPr>
+          <a:xfrm>
+            <a:off x="4544372" y="4290364"/>
             <a:ext cx="614411" cy="124358"/>
           </a:xfrm>
           <a:prstGeom prst="rect">
@@ -34248,13 +34564,13 @@
       </p:sp>
       <p:sp>
         <p:nvSpPr>
-          <p:cNvPr id="309" name="TextBox 308"/>
+          <p:cNvPr id="310" name="TextBox 309"/>
           <p:cNvSpPr txBox="1"/>
           <p:nvPr/>
         </p:nvSpPr>
         <p:spPr>
           <a:xfrm>
-            <a:off x="4533399" y="4261104"/>
+            <a:off x="4533399" y="4279392"/>
             <a:ext cx="636357" cy="146304"/>
           </a:xfrm>
           <a:prstGeom prst="rect">
@@ -34293,13 +34609,13 @@
       </p:sp>
       <p:sp>
         <p:nvSpPr>
-          <p:cNvPr id="310" name="Rectangle 309"/>
-          <p:cNvSpPr/>
-          <p:nvPr/>
-        </p:nvSpPr>
-        <p:spPr>
-          <a:xfrm>
-            <a:off x="5180729" y="4272076"/>
+          <p:cNvPr id="311" name="Rectangle 310"/>
+          <p:cNvSpPr/>
+          <p:nvPr/>
+        </p:nvSpPr>
+        <p:spPr>
+          <a:xfrm>
+            <a:off x="5180729" y="4290364"/>
             <a:ext cx="614411" cy="124358"/>
           </a:xfrm>
           <a:prstGeom prst="rect">
@@ -34337,13 +34653,13 @@
       </p:sp>
       <p:sp>
         <p:nvSpPr>
-          <p:cNvPr id="311" name="TextBox 310"/>
+          <p:cNvPr id="312" name="TextBox 311"/>
           <p:cNvSpPr txBox="1"/>
           <p:nvPr/>
         </p:nvSpPr>
         <p:spPr>
           <a:xfrm>
-            <a:off x="5169756" y="4261104"/>
+            <a:off x="5169756" y="4279392"/>
             <a:ext cx="636357" cy="146304"/>
           </a:xfrm>
           <a:prstGeom prst="rect">
@@ -34382,13 +34698,13 @@
       </p:sp>
       <p:sp>
         <p:nvSpPr>
-          <p:cNvPr id="312" name="Rectangle 311"/>
-          <p:cNvSpPr/>
-          <p:nvPr/>
-        </p:nvSpPr>
-        <p:spPr>
-          <a:xfrm>
-            <a:off x="5817086" y="4272076"/>
+          <p:cNvPr id="313" name="Rectangle 312"/>
+          <p:cNvSpPr/>
+          <p:nvPr/>
+        </p:nvSpPr>
+        <p:spPr>
+          <a:xfrm>
+            <a:off x="5817086" y="4290364"/>
             <a:ext cx="614411" cy="124358"/>
           </a:xfrm>
           <a:prstGeom prst="rect">
@@ -34426,13 +34742,13 @@
       </p:sp>
       <p:sp>
         <p:nvSpPr>
-          <p:cNvPr id="313" name="TextBox 312"/>
+          <p:cNvPr id="314" name="TextBox 313"/>
           <p:cNvSpPr txBox="1"/>
           <p:nvPr/>
         </p:nvSpPr>
         <p:spPr>
           <a:xfrm>
-            <a:off x="5806113" y="4261104"/>
+            <a:off x="5806113" y="4279392"/>
             <a:ext cx="636357" cy="146304"/>
           </a:xfrm>
           <a:prstGeom prst="rect">
@@ -34471,13 +34787,13 @@
       </p:sp>
       <p:sp>
         <p:nvSpPr>
-          <p:cNvPr id="314" name="Rectangle 313"/>
-          <p:cNvSpPr/>
-          <p:nvPr/>
-        </p:nvSpPr>
-        <p:spPr>
-          <a:xfrm>
-            <a:off x="6453443" y="4272076"/>
+          <p:cNvPr id="315" name="Rectangle 314"/>
+          <p:cNvSpPr/>
+          <p:nvPr/>
+        </p:nvSpPr>
+        <p:spPr>
+          <a:xfrm>
+            <a:off x="6453443" y="4290364"/>
             <a:ext cx="614411" cy="124358"/>
           </a:xfrm>
           <a:prstGeom prst="rect">
@@ -34515,13 +34831,13 @@
       </p:sp>
       <p:sp>
         <p:nvSpPr>
-          <p:cNvPr id="315" name="TextBox 314"/>
+          <p:cNvPr id="316" name="TextBox 315"/>
           <p:cNvSpPr txBox="1"/>
           <p:nvPr/>
         </p:nvSpPr>
         <p:spPr>
           <a:xfrm>
-            <a:off x="6442470" y="4261104"/>
+            <a:off x="6442470" y="4279392"/>
             <a:ext cx="636357" cy="146304"/>
           </a:xfrm>
           <a:prstGeom prst="rect">
@@ -34560,13 +34876,13 @@
       </p:sp>
       <p:sp>
         <p:nvSpPr>
-          <p:cNvPr id="316" name="Rectangle 315"/>
-          <p:cNvSpPr/>
-          <p:nvPr/>
-        </p:nvSpPr>
-        <p:spPr>
-          <a:xfrm>
-            <a:off x="7089800" y="4272076"/>
+          <p:cNvPr id="317" name="Rectangle 316"/>
+          <p:cNvSpPr/>
+          <p:nvPr/>
+        </p:nvSpPr>
+        <p:spPr>
+          <a:xfrm>
+            <a:off x="7089800" y="4290364"/>
             <a:ext cx="614411" cy="124358"/>
           </a:xfrm>
           <a:prstGeom prst="rect">
@@ -34604,13 +34920,13 @@
       </p:sp>
       <p:sp>
         <p:nvSpPr>
-          <p:cNvPr id="317" name="TextBox 316"/>
+          <p:cNvPr id="318" name="TextBox 317"/>
           <p:cNvSpPr txBox="1"/>
           <p:nvPr/>
         </p:nvSpPr>
         <p:spPr>
           <a:xfrm>
-            <a:off x="7078827" y="4261104"/>
+            <a:off x="7078827" y="4279392"/>
             <a:ext cx="636357" cy="146304"/>
           </a:xfrm>
           <a:prstGeom prst="rect">
@@ -34649,13 +34965,13 @@
       </p:sp>
       <p:sp>
         <p:nvSpPr>
-          <p:cNvPr id="318" name="Rectangle 317"/>
-          <p:cNvSpPr/>
-          <p:nvPr/>
-        </p:nvSpPr>
-        <p:spPr>
-          <a:xfrm>
-            <a:off x="7726157" y="4272076"/>
+          <p:cNvPr id="319" name="Rectangle 318"/>
+          <p:cNvSpPr/>
+          <p:nvPr/>
+        </p:nvSpPr>
+        <p:spPr>
+          <a:xfrm>
+            <a:off x="7726157" y="4290364"/>
             <a:ext cx="614411" cy="124358"/>
           </a:xfrm>
           <a:prstGeom prst="rect">
@@ -34693,13 +35009,13 @@
       </p:sp>
       <p:sp>
         <p:nvSpPr>
-          <p:cNvPr id="319" name="TextBox 318"/>
+          <p:cNvPr id="320" name="TextBox 319"/>
           <p:cNvSpPr txBox="1"/>
           <p:nvPr/>
         </p:nvSpPr>
         <p:spPr>
           <a:xfrm>
-            <a:off x="7715184" y="4261104"/>
+            <a:off x="7715184" y="4279392"/>
             <a:ext cx="636357" cy="146304"/>
           </a:xfrm>
           <a:prstGeom prst="rect">
@@ -34738,13 +35054,13 @@
       </p:sp>
       <p:sp>
         <p:nvSpPr>
-          <p:cNvPr id="320" name="Rectangle 319"/>
-          <p:cNvSpPr/>
-          <p:nvPr/>
-        </p:nvSpPr>
-        <p:spPr>
-          <a:xfrm>
-            <a:off x="8362514" y="4272076"/>
+          <p:cNvPr id="321" name="Rectangle 320"/>
+          <p:cNvSpPr/>
+          <p:nvPr/>
+        </p:nvSpPr>
+        <p:spPr>
+          <a:xfrm>
+            <a:off x="8362514" y="4290364"/>
             <a:ext cx="614411" cy="124358"/>
           </a:xfrm>
           <a:prstGeom prst="rect">
@@ -34782,13 +35098,13 @@
       </p:sp>
       <p:sp>
         <p:nvSpPr>
-          <p:cNvPr id="321" name="TextBox 320"/>
+          <p:cNvPr id="322" name="TextBox 321"/>
           <p:cNvSpPr txBox="1"/>
           <p:nvPr/>
         </p:nvSpPr>
         <p:spPr>
           <a:xfrm>
-            <a:off x="8351541" y="4261104"/>
+            <a:off x="8351541" y="4279392"/>
             <a:ext cx="636357" cy="146304"/>
           </a:xfrm>
           <a:prstGeom prst="rect">
@@ -34827,13 +35143,13 @@
       </p:sp>
       <p:sp>
         <p:nvSpPr>
-          <p:cNvPr id="322" name="Rectangle 321"/>
-          <p:cNvSpPr/>
-          <p:nvPr/>
-        </p:nvSpPr>
-        <p:spPr>
-          <a:xfrm>
-            <a:off x="8998871" y="4272076"/>
+          <p:cNvPr id="323" name="Rectangle 322"/>
+          <p:cNvSpPr/>
+          <p:nvPr/>
+        </p:nvSpPr>
+        <p:spPr>
+          <a:xfrm>
+            <a:off x="8998871" y="4290364"/>
             <a:ext cx="614411" cy="124358"/>
           </a:xfrm>
           <a:prstGeom prst="rect">
@@ -34871,13 +35187,13 @@
       </p:sp>
       <p:sp>
         <p:nvSpPr>
-          <p:cNvPr id="323" name="Rectangle 322"/>
-          <p:cNvSpPr/>
-          <p:nvPr/>
-        </p:nvSpPr>
-        <p:spPr>
-          <a:xfrm>
-            <a:off x="9635228" y="4272076"/>
+          <p:cNvPr id="324" name="Rectangle 323"/>
+          <p:cNvSpPr/>
+          <p:nvPr/>
+        </p:nvSpPr>
+        <p:spPr>
+          <a:xfrm>
+            <a:off x="9635228" y="4290364"/>
             <a:ext cx="614411" cy="124358"/>
           </a:xfrm>
           <a:prstGeom prst="rect">
@@ -34915,13 +35231,13 @@
       </p:sp>
       <p:sp>
         <p:nvSpPr>
-          <p:cNvPr id="324" name="TextBox 323"/>
+          <p:cNvPr id="325" name="TextBox 324"/>
           <p:cNvSpPr txBox="1"/>
           <p:nvPr/>
         </p:nvSpPr>
         <p:spPr>
           <a:xfrm>
-            <a:off x="9624255" y="4261104"/>
+            <a:off x="9624255" y="4279392"/>
             <a:ext cx="636357" cy="146304"/>
           </a:xfrm>
           <a:prstGeom prst="rect">
@@ -34960,13 +35276,13 @@
       </p:sp>
       <p:sp>
         <p:nvSpPr>
-          <p:cNvPr id="325" name="Rectangle 324"/>
-          <p:cNvSpPr/>
-          <p:nvPr/>
-        </p:nvSpPr>
-        <p:spPr>
-          <a:xfrm>
-            <a:off x="10271585" y="4272076"/>
+          <p:cNvPr id="326" name="Rectangle 325"/>
+          <p:cNvSpPr/>
+          <p:nvPr/>
+        </p:nvSpPr>
+        <p:spPr>
+          <a:xfrm>
+            <a:off x="10271585" y="4290364"/>
             <a:ext cx="614411" cy="124358"/>
           </a:xfrm>
           <a:prstGeom prst="rect">
@@ -35004,13 +35320,13 @@
       </p:sp>
       <p:sp>
         <p:nvSpPr>
-          <p:cNvPr id="326" name="TextBox 325"/>
+          <p:cNvPr id="327" name="TextBox 326"/>
           <p:cNvSpPr txBox="1"/>
           <p:nvPr/>
         </p:nvSpPr>
         <p:spPr>
           <a:xfrm>
-            <a:off x="10260613" y="4261104"/>
+            <a:off x="10260613" y="4279392"/>
             <a:ext cx="636357" cy="146304"/>
           </a:xfrm>
           <a:prstGeom prst="rect">
@@ -35049,13 +35365,13 @@
       </p:sp>
       <p:sp>
         <p:nvSpPr>
-          <p:cNvPr id="327" name="Rectangle 326"/>
-          <p:cNvSpPr/>
-          <p:nvPr/>
-        </p:nvSpPr>
-        <p:spPr>
-          <a:xfrm>
-            <a:off x="10907942" y="4272076"/>
+          <p:cNvPr id="328" name="Rectangle 327"/>
+          <p:cNvSpPr/>
+          <p:nvPr/>
+        </p:nvSpPr>
+        <p:spPr>
+          <a:xfrm>
+            <a:off x="10907942" y="4290364"/>
             <a:ext cx="614411" cy="124358"/>
           </a:xfrm>
           <a:prstGeom prst="rect">
@@ -35093,13 +35409,13 @@
       </p:sp>
       <p:sp>
         <p:nvSpPr>
-          <p:cNvPr id="328" name="TextBox 327"/>
+          <p:cNvPr id="329" name="TextBox 328"/>
           <p:cNvSpPr txBox="1"/>
           <p:nvPr/>
         </p:nvSpPr>
         <p:spPr>
           <a:xfrm>
-            <a:off x="10896970" y="4261104"/>
+            <a:off x="10896970" y="4279392"/>
             <a:ext cx="636357" cy="146304"/>
           </a:xfrm>
           <a:prstGeom prst="rect">
@@ -35138,13 +35454,13 @@
       </p:sp>
       <p:sp>
         <p:nvSpPr>
-          <p:cNvPr id="329" name="TextBox 328"/>
+          <p:cNvPr id="330" name="TextBox 329"/>
           <p:cNvSpPr txBox="1"/>
           <p:nvPr/>
         </p:nvSpPr>
         <p:spPr>
           <a:xfrm>
-            <a:off x="704088" y="4407407"/>
+            <a:off x="704088" y="4425696"/>
             <a:ext cx="1856231" cy="146304"/>
           </a:xfrm>
           <a:prstGeom prst="rect">
@@ -35192,13 +35508,13 @@
       </p:sp>
       <p:sp>
         <p:nvSpPr>
-          <p:cNvPr id="330" name="Rectangle 329"/>
-          <p:cNvSpPr/>
-          <p:nvPr/>
-        </p:nvSpPr>
-        <p:spPr>
-          <a:xfrm>
-            <a:off x="2635300" y="4418380"/>
+          <p:cNvPr id="331" name="Rectangle 330"/>
+          <p:cNvSpPr/>
+          <p:nvPr/>
+        </p:nvSpPr>
+        <p:spPr>
+          <a:xfrm>
+            <a:off x="2635300" y="4436668"/>
             <a:ext cx="614411" cy="124358"/>
           </a:xfrm>
           <a:prstGeom prst="rect">
@@ -35236,13 +35552,13 @@
       </p:sp>
       <p:sp>
         <p:nvSpPr>
-          <p:cNvPr id="331" name="TextBox 330"/>
+          <p:cNvPr id="332" name="TextBox 331"/>
           <p:cNvSpPr txBox="1"/>
           <p:nvPr/>
         </p:nvSpPr>
         <p:spPr>
           <a:xfrm>
-            <a:off x="2624328" y="4407407"/>
+            <a:off x="2624328" y="4425696"/>
             <a:ext cx="636357" cy="146304"/>
           </a:xfrm>
           <a:prstGeom prst="rect">
@@ -35281,13 +35597,13 @@
       </p:sp>
       <p:sp>
         <p:nvSpPr>
-          <p:cNvPr id="332" name="Rectangle 331"/>
-          <p:cNvSpPr/>
-          <p:nvPr/>
-        </p:nvSpPr>
-        <p:spPr>
-          <a:xfrm>
-            <a:off x="3271657" y="4418380"/>
+          <p:cNvPr id="333" name="Rectangle 332"/>
+          <p:cNvSpPr/>
+          <p:nvPr/>
+        </p:nvSpPr>
+        <p:spPr>
+          <a:xfrm>
+            <a:off x="3271657" y="4436668"/>
             <a:ext cx="614411" cy="124358"/>
           </a:xfrm>
           <a:prstGeom prst="rect">
@@ -35325,13 +35641,13 @@
       </p:sp>
       <p:sp>
         <p:nvSpPr>
-          <p:cNvPr id="333" name="TextBox 332"/>
+          <p:cNvPr id="334" name="TextBox 333"/>
           <p:cNvSpPr txBox="1"/>
           <p:nvPr/>
         </p:nvSpPr>
         <p:spPr>
           <a:xfrm>
-            <a:off x="3260685" y="4407407"/>
+            <a:off x="3260685" y="4425696"/>
             <a:ext cx="636357" cy="146304"/>
           </a:xfrm>
           <a:prstGeom prst="rect">
@@ -35370,13 +35686,13 @@
       </p:sp>
       <p:sp>
         <p:nvSpPr>
-          <p:cNvPr id="334" name="Rectangle 333"/>
-          <p:cNvSpPr/>
-          <p:nvPr/>
-        </p:nvSpPr>
-        <p:spPr>
-          <a:xfrm>
-            <a:off x="3908014" y="4418380"/>
+          <p:cNvPr id="335" name="Rectangle 334"/>
+          <p:cNvSpPr/>
+          <p:nvPr/>
+        </p:nvSpPr>
+        <p:spPr>
+          <a:xfrm>
+            <a:off x="3908014" y="4436668"/>
             <a:ext cx="614411" cy="124358"/>
           </a:xfrm>
           <a:prstGeom prst="rect">
@@ -35414,13 +35730,13 @@
       </p:sp>
       <p:sp>
         <p:nvSpPr>
-          <p:cNvPr id="335" name="TextBox 334"/>
+          <p:cNvPr id="336" name="TextBox 335"/>
           <p:cNvSpPr txBox="1"/>
           <p:nvPr/>
         </p:nvSpPr>
         <p:spPr>
           <a:xfrm>
-            <a:off x="3897042" y="4407407"/>
+            <a:off x="3897042" y="4425696"/>
             <a:ext cx="636357" cy="146304"/>
           </a:xfrm>
           <a:prstGeom prst="rect">
@@ -35459,13 +35775,13 @@
       </p:sp>
       <p:sp>
         <p:nvSpPr>
-          <p:cNvPr id="336" name="Rectangle 335"/>
-          <p:cNvSpPr/>
-          <p:nvPr/>
-        </p:nvSpPr>
-        <p:spPr>
-          <a:xfrm>
-            <a:off x="4544372" y="4418380"/>
+          <p:cNvPr id="337" name="Rectangle 336"/>
+          <p:cNvSpPr/>
+          <p:nvPr/>
+        </p:nvSpPr>
+        <p:spPr>
+          <a:xfrm>
+            <a:off x="4544372" y="4436668"/>
             <a:ext cx="614411" cy="124358"/>
           </a:xfrm>
           <a:prstGeom prst="rect">
@@ -35503,13 +35819,13 @@
       </p:sp>
       <p:sp>
         <p:nvSpPr>
-          <p:cNvPr id="337" name="TextBox 336"/>
+          <p:cNvPr id="338" name="TextBox 337"/>
           <p:cNvSpPr txBox="1"/>
           <p:nvPr/>
         </p:nvSpPr>
         <p:spPr>
           <a:xfrm>
-            <a:off x="4533399" y="4407407"/>
+            <a:off x="4533399" y="4425696"/>
             <a:ext cx="636357" cy="146304"/>
           </a:xfrm>
           <a:prstGeom prst="rect">
@@ -35548,13 +35864,13 @@
       </p:sp>
       <p:sp>
         <p:nvSpPr>
-          <p:cNvPr id="338" name="Rectangle 337"/>
-          <p:cNvSpPr/>
-          <p:nvPr/>
-        </p:nvSpPr>
-        <p:spPr>
-          <a:xfrm>
-            <a:off x="5180729" y="4418380"/>
+          <p:cNvPr id="339" name="Rectangle 338"/>
+          <p:cNvSpPr/>
+          <p:nvPr/>
+        </p:nvSpPr>
+        <p:spPr>
+          <a:xfrm>
+            <a:off x="5180729" y="4436668"/>
             <a:ext cx="614411" cy="124358"/>
           </a:xfrm>
           <a:prstGeom prst="rect">
@@ -35592,13 +35908,13 @@
       </p:sp>
       <p:sp>
         <p:nvSpPr>
-          <p:cNvPr id="339" name="TextBox 338"/>
+          <p:cNvPr id="340" name="TextBox 339"/>
           <p:cNvSpPr txBox="1"/>
           <p:nvPr/>
         </p:nvSpPr>
         <p:spPr>
           <a:xfrm>
-            <a:off x="5169756" y="4407407"/>
+            <a:off x="5169756" y="4425696"/>
             <a:ext cx="636357" cy="146304"/>
           </a:xfrm>
           <a:prstGeom prst="rect">
@@ -35637,13 +35953,13 @@
       </p:sp>
       <p:sp>
         <p:nvSpPr>
-          <p:cNvPr id="340" name="Rectangle 339"/>
-          <p:cNvSpPr/>
-          <p:nvPr/>
-        </p:nvSpPr>
-        <p:spPr>
-          <a:xfrm>
-            <a:off x="5817086" y="4418380"/>
+          <p:cNvPr id="341" name="Rectangle 340"/>
+          <p:cNvSpPr/>
+          <p:nvPr/>
+        </p:nvSpPr>
+        <p:spPr>
+          <a:xfrm>
+            <a:off x="5817086" y="4436668"/>
             <a:ext cx="614411" cy="124358"/>
           </a:xfrm>
           <a:prstGeom prst="rect">
@@ -35681,13 +35997,13 @@
       </p:sp>
       <p:sp>
         <p:nvSpPr>
-          <p:cNvPr id="341" name="TextBox 340"/>
+          <p:cNvPr id="342" name="TextBox 341"/>
           <p:cNvSpPr txBox="1"/>
           <p:nvPr/>
         </p:nvSpPr>
         <p:spPr>
           <a:xfrm>
-            <a:off x="5806113" y="4407407"/>
+            <a:off x="5806113" y="4425696"/>
             <a:ext cx="636357" cy="146304"/>
           </a:xfrm>
           <a:prstGeom prst="rect">
@@ -35726,13 +36042,13 @@
       </p:sp>
       <p:sp>
         <p:nvSpPr>
-          <p:cNvPr id="342" name="Rectangle 341"/>
-          <p:cNvSpPr/>
-          <p:nvPr/>
-        </p:nvSpPr>
-        <p:spPr>
-          <a:xfrm>
-            <a:off x="6453443" y="4418380"/>
+          <p:cNvPr id="343" name="Rectangle 342"/>
+          <p:cNvSpPr/>
+          <p:nvPr/>
+        </p:nvSpPr>
+        <p:spPr>
+          <a:xfrm>
+            <a:off x="6453443" y="4436668"/>
             <a:ext cx="614411" cy="124358"/>
           </a:xfrm>
           <a:prstGeom prst="rect">
@@ -35770,13 +36086,13 @@
       </p:sp>
       <p:sp>
         <p:nvSpPr>
-          <p:cNvPr id="343" name="TextBox 342"/>
+          <p:cNvPr id="344" name="TextBox 343"/>
           <p:cNvSpPr txBox="1"/>
           <p:nvPr/>
         </p:nvSpPr>
         <p:spPr>
           <a:xfrm>
-            <a:off x="6442470" y="4407407"/>
+            <a:off x="6442470" y="4425696"/>
             <a:ext cx="636357" cy="146304"/>
           </a:xfrm>
           <a:prstGeom prst="rect">
@@ -35815,13 +36131,13 @@
       </p:sp>
       <p:sp>
         <p:nvSpPr>
-          <p:cNvPr id="344" name="Rectangle 343"/>
-          <p:cNvSpPr/>
-          <p:nvPr/>
-        </p:nvSpPr>
-        <p:spPr>
-          <a:xfrm>
-            <a:off x="7089800" y="4418380"/>
+          <p:cNvPr id="345" name="Rectangle 344"/>
+          <p:cNvSpPr/>
+          <p:nvPr/>
+        </p:nvSpPr>
+        <p:spPr>
+          <a:xfrm>
+            <a:off x="7089800" y="4436668"/>
             <a:ext cx="614411" cy="124358"/>
           </a:xfrm>
           <a:prstGeom prst="rect">
@@ -35859,13 +36175,13 @@
       </p:sp>
       <p:sp>
         <p:nvSpPr>
-          <p:cNvPr id="345" name="TextBox 344"/>
+          <p:cNvPr id="346" name="TextBox 345"/>
           <p:cNvSpPr txBox="1"/>
           <p:nvPr/>
         </p:nvSpPr>
         <p:spPr>
           <a:xfrm>
-            <a:off x="7078827" y="4407407"/>
+            <a:off x="7078827" y="4425696"/>
             <a:ext cx="636357" cy="146304"/>
           </a:xfrm>
           <a:prstGeom prst="rect">
@@ -35904,13 +36220,13 @@
       </p:sp>
       <p:sp>
         <p:nvSpPr>
-          <p:cNvPr id="346" name="Rectangle 345"/>
-          <p:cNvSpPr/>
-          <p:nvPr/>
-        </p:nvSpPr>
-        <p:spPr>
-          <a:xfrm>
-            <a:off x="7726157" y="4418380"/>
+          <p:cNvPr id="347" name="Rectangle 346"/>
+          <p:cNvSpPr/>
+          <p:nvPr/>
+        </p:nvSpPr>
+        <p:spPr>
+          <a:xfrm>
+            <a:off x="7726157" y="4436668"/>
             <a:ext cx="614411" cy="124358"/>
           </a:xfrm>
           <a:prstGeom prst="rect">
@@ -35948,13 +36264,13 @@
       </p:sp>
       <p:sp>
         <p:nvSpPr>
-          <p:cNvPr id="347" name="TextBox 346"/>
+          <p:cNvPr id="348" name="TextBox 347"/>
           <p:cNvSpPr txBox="1"/>
           <p:nvPr/>
         </p:nvSpPr>
         <p:spPr>
           <a:xfrm>
-            <a:off x="7715184" y="4407407"/>
+            <a:off x="7715184" y="4425696"/>
             <a:ext cx="636357" cy="146304"/>
           </a:xfrm>
           <a:prstGeom prst="rect">
@@ -35993,13 +36309,13 @@
       </p:sp>
       <p:sp>
         <p:nvSpPr>
-          <p:cNvPr id="348" name="Rectangle 347"/>
-          <p:cNvSpPr/>
-          <p:nvPr/>
-        </p:nvSpPr>
-        <p:spPr>
-          <a:xfrm>
-            <a:off x="8362514" y="4418380"/>
+          <p:cNvPr id="349" name="Rectangle 348"/>
+          <p:cNvSpPr/>
+          <p:nvPr/>
+        </p:nvSpPr>
+        <p:spPr>
+          <a:xfrm>
+            <a:off x="8362514" y="4436668"/>
             <a:ext cx="614411" cy="124358"/>
           </a:xfrm>
           <a:prstGeom prst="rect">
@@ -36037,13 +36353,13 @@
       </p:sp>
       <p:sp>
         <p:nvSpPr>
-          <p:cNvPr id="349" name="TextBox 348"/>
+          <p:cNvPr id="350" name="TextBox 349"/>
           <p:cNvSpPr txBox="1"/>
           <p:nvPr/>
         </p:nvSpPr>
         <p:spPr>
           <a:xfrm>
-            <a:off x="8351541" y="4407407"/>
+            <a:off x="8351541" y="4425696"/>
             <a:ext cx="636357" cy="146304"/>
           </a:xfrm>
           <a:prstGeom prst="rect">
@@ -36082,13 +36398,13 @@
       </p:sp>
       <p:sp>
         <p:nvSpPr>
-          <p:cNvPr id="350" name="Rectangle 349"/>
-          <p:cNvSpPr/>
-          <p:nvPr/>
-        </p:nvSpPr>
-        <p:spPr>
-          <a:xfrm>
-            <a:off x="8998871" y="4418380"/>
+          <p:cNvPr id="351" name="Rectangle 350"/>
+          <p:cNvSpPr/>
+          <p:nvPr/>
+        </p:nvSpPr>
+        <p:spPr>
+          <a:xfrm>
+            <a:off x="8998871" y="4436668"/>
             <a:ext cx="614411" cy="124358"/>
           </a:xfrm>
           <a:prstGeom prst="rect">
@@ -36126,13 +36442,13 @@
       </p:sp>
       <p:sp>
         <p:nvSpPr>
-          <p:cNvPr id="351" name="TextBox 350"/>
+          <p:cNvPr id="352" name="TextBox 351"/>
           <p:cNvSpPr txBox="1"/>
           <p:nvPr/>
         </p:nvSpPr>
         <p:spPr>
           <a:xfrm>
-            <a:off x="8987898" y="4407407"/>
+            <a:off x="8987898" y="4425696"/>
             <a:ext cx="636357" cy="146304"/>
           </a:xfrm>
           <a:prstGeom prst="rect">
@@ -36171,13 +36487,13 @@
       </p:sp>
       <p:sp>
         <p:nvSpPr>
-          <p:cNvPr id="352" name="Rectangle 351"/>
-          <p:cNvSpPr/>
-          <p:nvPr/>
-        </p:nvSpPr>
-        <p:spPr>
-          <a:xfrm>
-            <a:off x="9635228" y="4418380"/>
+          <p:cNvPr id="353" name="Rectangle 352"/>
+          <p:cNvSpPr/>
+          <p:nvPr/>
+        </p:nvSpPr>
+        <p:spPr>
+          <a:xfrm>
+            <a:off x="9635228" y="4436668"/>
             <a:ext cx="614411" cy="124358"/>
           </a:xfrm>
           <a:prstGeom prst="rect">
@@ -36215,13 +36531,13 @@
       </p:sp>
       <p:sp>
         <p:nvSpPr>
-          <p:cNvPr id="353" name="Rectangle 352"/>
-          <p:cNvSpPr/>
-          <p:nvPr/>
-        </p:nvSpPr>
-        <p:spPr>
-          <a:xfrm>
-            <a:off x="10271585" y="4418380"/>
+          <p:cNvPr id="354" name="Rectangle 353"/>
+          <p:cNvSpPr/>
+          <p:nvPr/>
+        </p:nvSpPr>
+        <p:spPr>
+          <a:xfrm>
+            <a:off x="10271585" y="4436668"/>
             <a:ext cx="614411" cy="124358"/>
           </a:xfrm>
           <a:prstGeom prst="rect">
@@ -36259,13 +36575,13 @@
       </p:sp>
       <p:sp>
         <p:nvSpPr>
-          <p:cNvPr id="354" name="TextBox 353"/>
+          <p:cNvPr id="355" name="TextBox 354"/>
           <p:cNvSpPr txBox="1"/>
           <p:nvPr/>
         </p:nvSpPr>
         <p:spPr>
           <a:xfrm>
-            <a:off x="10260613" y="4407407"/>
+            <a:off x="10260613" y="4425696"/>
             <a:ext cx="636357" cy="146304"/>
           </a:xfrm>
           <a:prstGeom prst="rect">
@@ -36304,13 +36620,13 @@
       </p:sp>
       <p:sp>
         <p:nvSpPr>
-          <p:cNvPr id="355" name="Rectangle 354"/>
-          <p:cNvSpPr/>
-          <p:nvPr/>
-        </p:nvSpPr>
-        <p:spPr>
-          <a:xfrm>
-            <a:off x="10907942" y="4418380"/>
+          <p:cNvPr id="356" name="Rectangle 355"/>
+          <p:cNvSpPr/>
+          <p:nvPr/>
+        </p:nvSpPr>
+        <p:spPr>
+          <a:xfrm>
+            <a:off x="10907942" y="4436668"/>
             <a:ext cx="614411" cy="124358"/>
           </a:xfrm>
           <a:prstGeom prst="rect">
@@ -36348,13 +36664,13 @@
       </p:sp>
       <p:sp>
         <p:nvSpPr>
-          <p:cNvPr id="356" name="TextBox 355"/>
+          <p:cNvPr id="357" name="TextBox 356"/>
           <p:cNvSpPr txBox="1"/>
           <p:nvPr/>
         </p:nvSpPr>
         <p:spPr>
           <a:xfrm>
-            <a:off x="10896970" y="4407407"/>
+            <a:off x="10896970" y="4425696"/>
             <a:ext cx="636357" cy="146304"/>
           </a:xfrm>
           <a:prstGeom prst="rect">
@@ -36393,13 +36709,13 @@
       </p:sp>
       <p:sp>
         <p:nvSpPr>
-          <p:cNvPr id="357" name="TextBox 356"/>
+          <p:cNvPr id="358" name="TextBox 357"/>
           <p:cNvSpPr txBox="1"/>
           <p:nvPr/>
         </p:nvSpPr>
         <p:spPr>
           <a:xfrm>
-            <a:off x="704088" y="4553712"/>
+            <a:off x="704088" y="4572000"/>
             <a:ext cx="1856231" cy="146304"/>
           </a:xfrm>
           <a:prstGeom prst="rect">
@@ -36447,13 +36763,13 @@
       </p:sp>
       <p:sp>
         <p:nvSpPr>
-          <p:cNvPr id="358" name="Rectangle 357"/>
-          <p:cNvSpPr/>
-          <p:nvPr/>
-        </p:nvSpPr>
-        <p:spPr>
-          <a:xfrm>
-            <a:off x="2635300" y="4564684"/>
+          <p:cNvPr id="359" name="Rectangle 358"/>
+          <p:cNvSpPr/>
+          <p:nvPr/>
+        </p:nvSpPr>
+        <p:spPr>
+          <a:xfrm>
+            <a:off x="2635300" y="4582972"/>
             <a:ext cx="614411" cy="124358"/>
           </a:xfrm>
           <a:prstGeom prst="rect">
@@ -36491,13 +36807,13 @@
       </p:sp>
       <p:sp>
         <p:nvSpPr>
-          <p:cNvPr id="359" name="TextBox 358"/>
+          <p:cNvPr id="360" name="TextBox 359"/>
           <p:cNvSpPr txBox="1"/>
           <p:nvPr/>
         </p:nvSpPr>
         <p:spPr>
           <a:xfrm>
-            <a:off x="2624328" y="4553712"/>
+            <a:off x="2624328" y="4572000"/>
             <a:ext cx="636357" cy="146304"/>
           </a:xfrm>
           <a:prstGeom prst="rect">
@@ -36536,13 +36852,13 @@
       </p:sp>
       <p:sp>
         <p:nvSpPr>
-          <p:cNvPr id="360" name="Rectangle 359"/>
-          <p:cNvSpPr/>
-          <p:nvPr/>
-        </p:nvSpPr>
-        <p:spPr>
-          <a:xfrm>
-            <a:off x="3271657" y="4564684"/>
+          <p:cNvPr id="361" name="Rectangle 360"/>
+          <p:cNvSpPr/>
+          <p:nvPr/>
+        </p:nvSpPr>
+        <p:spPr>
+          <a:xfrm>
+            <a:off x="3271657" y="4582972"/>
             <a:ext cx="614411" cy="124358"/>
           </a:xfrm>
           <a:prstGeom prst="rect">
@@ -36580,13 +36896,13 @@
       </p:sp>
       <p:sp>
         <p:nvSpPr>
-          <p:cNvPr id="361" name="TextBox 360"/>
+          <p:cNvPr id="362" name="TextBox 361"/>
           <p:cNvSpPr txBox="1"/>
           <p:nvPr/>
         </p:nvSpPr>
         <p:spPr>
           <a:xfrm>
-            <a:off x="3260685" y="4553712"/>
+            <a:off x="3260685" y="4572000"/>
             <a:ext cx="636357" cy="146304"/>
           </a:xfrm>
           <a:prstGeom prst="rect">
@@ -36625,13 +36941,13 @@
       </p:sp>
       <p:sp>
         <p:nvSpPr>
-          <p:cNvPr id="362" name="Rectangle 361"/>
-          <p:cNvSpPr/>
-          <p:nvPr/>
-        </p:nvSpPr>
-        <p:spPr>
-          <a:xfrm>
-            <a:off x="3908014" y="4564684"/>
+          <p:cNvPr id="363" name="Rectangle 362"/>
+          <p:cNvSpPr/>
+          <p:nvPr/>
+        </p:nvSpPr>
+        <p:spPr>
+          <a:xfrm>
+            <a:off x="3908014" y="4582972"/>
             <a:ext cx="614411" cy="124358"/>
           </a:xfrm>
           <a:prstGeom prst="rect">
@@ -36669,13 +36985,13 @@
       </p:sp>
       <p:sp>
         <p:nvSpPr>
-          <p:cNvPr id="363" name="TextBox 362"/>
+          <p:cNvPr id="364" name="TextBox 363"/>
           <p:cNvSpPr txBox="1"/>
           <p:nvPr/>
         </p:nvSpPr>
         <p:spPr>
           <a:xfrm>
-            <a:off x="3897042" y="4553712"/>
+            <a:off x="3897042" y="4572000"/>
             <a:ext cx="636357" cy="146304"/>
           </a:xfrm>
           <a:prstGeom prst="rect">
@@ -36714,13 +37030,13 @@
       </p:sp>
       <p:sp>
         <p:nvSpPr>
-          <p:cNvPr id="364" name="Rectangle 363"/>
-          <p:cNvSpPr/>
-          <p:nvPr/>
-        </p:nvSpPr>
-        <p:spPr>
-          <a:xfrm>
-            <a:off x="4544372" y="4564684"/>
+          <p:cNvPr id="365" name="Rectangle 364"/>
+          <p:cNvSpPr/>
+          <p:nvPr/>
+        </p:nvSpPr>
+        <p:spPr>
+          <a:xfrm>
+            <a:off x="4544372" y="4582972"/>
             <a:ext cx="614411" cy="124358"/>
           </a:xfrm>
           <a:prstGeom prst="rect">
@@ -36758,13 +37074,13 @@
       </p:sp>
       <p:sp>
         <p:nvSpPr>
-          <p:cNvPr id="365" name="TextBox 364"/>
+          <p:cNvPr id="366" name="TextBox 365"/>
           <p:cNvSpPr txBox="1"/>
           <p:nvPr/>
         </p:nvSpPr>
         <p:spPr>
           <a:xfrm>
-            <a:off x="4533399" y="4553712"/>
+            <a:off x="4533399" y="4572000"/>
             <a:ext cx="636357" cy="146304"/>
           </a:xfrm>
           <a:prstGeom prst="rect">
@@ -36803,13 +37119,13 @@
       </p:sp>
       <p:sp>
         <p:nvSpPr>
-          <p:cNvPr id="366" name="Rectangle 365"/>
-          <p:cNvSpPr/>
-          <p:nvPr/>
-        </p:nvSpPr>
-        <p:spPr>
-          <a:xfrm>
-            <a:off x="5180729" y="4564684"/>
+          <p:cNvPr id="367" name="Rectangle 366"/>
+          <p:cNvSpPr/>
+          <p:nvPr/>
+        </p:nvSpPr>
+        <p:spPr>
+          <a:xfrm>
+            <a:off x="5180729" y="4582972"/>
             <a:ext cx="614411" cy="124358"/>
           </a:xfrm>
           <a:prstGeom prst="rect">
@@ -36847,13 +37163,13 @@
       </p:sp>
       <p:sp>
         <p:nvSpPr>
-          <p:cNvPr id="367" name="TextBox 366"/>
+          <p:cNvPr id="368" name="TextBox 367"/>
           <p:cNvSpPr txBox="1"/>
           <p:nvPr/>
         </p:nvSpPr>
         <p:spPr>
           <a:xfrm>
-            <a:off x="5169756" y="4553712"/>
+            <a:off x="5169756" y="4572000"/>
             <a:ext cx="636357" cy="146304"/>
           </a:xfrm>
           <a:prstGeom prst="rect">
@@ -36892,13 +37208,13 @@
       </p:sp>
       <p:sp>
         <p:nvSpPr>
-          <p:cNvPr id="368" name="Rectangle 367"/>
-          <p:cNvSpPr/>
-          <p:nvPr/>
-        </p:nvSpPr>
-        <p:spPr>
-          <a:xfrm>
-            <a:off x="5817086" y="4564684"/>
+          <p:cNvPr id="369" name="Rectangle 368"/>
+          <p:cNvSpPr/>
+          <p:nvPr/>
+        </p:nvSpPr>
+        <p:spPr>
+          <a:xfrm>
+            <a:off x="5817086" y="4582972"/>
             <a:ext cx="614411" cy="124358"/>
           </a:xfrm>
           <a:prstGeom prst="rect">
@@ -36936,13 +37252,13 @@
       </p:sp>
       <p:sp>
         <p:nvSpPr>
-          <p:cNvPr id="369" name="TextBox 368"/>
+          <p:cNvPr id="370" name="TextBox 369"/>
           <p:cNvSpPr txBox="1"/>
           <p:nvPr/>
         </p:nvSpPr>
         <p:spPr>
           <a:xfrm>
-            <a:off x="5806113" y="4553712"/>
+            <a:off x="5806113" y="4572000"/>
             <a:ext cx="636357" cy="146304"/>
           </a:xfrm>
           <a:prstGeom prst="rect">
@@ -36981,13 +37297,13 @@
       </p:sp>
       <p:sp>
         <p:nvSpPr>
-          <p:cNvPr id="370" name="Rectangle 369"/>
-          <p:cNvSpPr/>
-          <p:nvPr/>
-        </p:nvSpPr>
-        <p:spPr>
-          <a:xfrm>
-            <a:off x="6453443" y="4564684"/>
+          <p:cNvPr id="371" name="Rectangle 370"/>
+          <p:cNvSpPr/>
+          <p:nvPr/>
+        </p:nvSpPr>
+        <p:spPr>
+          <a:xfrm>
+            <a:off x="6453443" y="4582972"/>
             <a:ext cx="614411" cy="124358"/>
           </a:xfrm>
           <a:prstGeom prst="rect">
@@ -37025,13 +37341,13 @@
       </p:sp>
       <p:sp>
         <p:nvSpPr>
-          <p:cNvPr id="371" name="TextBox 370"/>
+          <p:cNvPr id="372" name="TextBox 371"/>
           <p:cNvSpPr txBox="1"/>
           <p:nvPr/>
         </p:nvSpPr>
         <p:spPr>
           <a:xfrm>
-            <a:off x="6442470" y="4553712"/>
+            <a:off x="6442470" y="4572000"/>
             <a:ext cx="636357" cy="146304"/>
           </a:xfrm>
           <a:prstGeom prst="rect">
@@ -37070,13 +37386,13 @@
       </p:sp>
       <p:sp>
         <p:nvSpPr>
-          <p:cNvPr id="372" name="Rectangle 371"/>
-          <p:cNvSpPr/>
-          <p:nvPr/>
-        </p:nvSpPr>
-        <p:spPr>
-          <a:xfrm>
-            <a:off x="7089800" y="4564684"/>
+          <p:cNvPr id="373" name="Rectangle 372"/>
+          <p:cNvSpPr/>
+          <p:nvPr/>
+        </p:nvSpPr>
+        <p:spPr>
+          <a:xfrm>
+            <a:off x="7089800" y="4582972"/>
             <a:ext cx="614411" cy="124358"/>
           </a:xfrm>
           <a:prstGeom prst="rect">
@@ -37114,13 +37430,13 @@
       </p:sp>
       <p:sp>
         <p:nvSpPr>
-          <p:cNvPr id="373" name="TextBox 372"/>
+          <p:cNvPr id="374" name="TextBox 373"/>
           <p:cNvSpPr txBox="1"/>
           <p:nvPr/>
         </p:nvSpPr>
         <p:spPr>
           <a:xfrm>
-            <a:off x="7078827" y="4553712"/>
+            <a:off x="7078827" y="4572000"/>
             <a:ext cx="636357" cy="146304"/>
           </a:xfrm>
           <a:prstGeom prst="rect">
@@ -37159,13 +37475,13 @@
       </p:sp>
       <p:sp>
         <p:nvSpPr>
-          <p:cNvPr id="374" name="Rectangle 373"/>
-          <p:cNvSpPr/>
-          <p:nvPr/>
-        </p:nvSpPr>
-        <p:spPr>
-          <a:xfrm>
-            <a:off x="7726157" y="4564684"/>
+          <p:cNvPr id="375" name="Rectangle 374"/>
+          <p:cNvSpPr/>
+          <p:nvPr/>
+        </p:nvSpPr>
+        <p:spPr>
+          <a:xfrm>
+            <a:off x="7726157" y="4582972"/>
             <a:ext cx="614411" cy="124358"/>
           </a:xfrm>
           <a:prstGeom prst="rect">
@@ -37203,13 +37519,13 @@
       </p:sp>
       <p:sp>
         <p:nvSpPr>
-          <p:cNvPr id="375" name="TextBox 374"/>
+          <p:cNvPr id="376" name="TextBox 375"/>
           <p:cNvSpPr txBox="1"/>
           <p:nvPr/>
         </p:nvSpPr>
         <p:spPr>
           <a:xfrm>
-            <a:off x="7715184" y="4553712"/>
+            <a:off x="7715184" y="4572000"/>
             <a:ext cx="636357" cy="146304"/>
           </a:xfrm>
           <a:prstGeom prst="rect">
@@ -37248,13 +37564,13 @@
       </p:sp>
       <p:sp>
         <p:nvSpPr>
-          <p:cNvPr id="376" name="Rectangle 375"/>
-          <p:cNvSpPr/>
-          <p:nvPr/>
-        </p:nvSpPr>
-        <p:spPr>
-          <a:xfrm>
-            <a:off x="8362514" y="4564684"/>
+          <p:cNvPr id="377" name="Rectangle 376"/>
+          <p:cNvSpPr/>
+          <p:nvPr/>
+        </p:nvSpPr>
+        <p:spPr>
+          <a:xfrm>
+            <a:off x="8362514" y="4582972"/>
             <a:ext cx="614411" cy="124358"/>
           </a:xfrm>
           <a:prstGeom prst="rect">
@@ -37292,13 +37608,13 @@
       </p:sp>
       <p:sp>
         <p:nvSpPr>
-          <p:cNvPr id="377" name="TextBox 376"/>
+          <p:cNvPr id="378" name="TextBox 377"/>
           <p:cNvSpPr txBox="1"/>
           <p:nvPr/>
         </p:nvSpPr>
         <p:spPr>
           <a:xfrm>
-            <a:off x="8351541" y="4553712"/>
+            <a:off x="8351541" y="4572000"/>
             <a:ext cx="636357" cy="146304"/>
           </a:xfrm>
           <a:prstGeom prst="rect">
@@ -37337,13 +37653,13 @@
       </p:sp>
       <p:sp>
         <p:nvSpPr>
-          <p:cNvPr id="378" name="Rectangle 377"/>
-          <p:cNvSpPr/>
-          <p:nvPr/>
-        </p:nvSpPr>
-        <p:spPr>
-          <a:xfrm>
-            <a:off x="8998871" y="4564684"/>
+          <p:cNvPr id="379" name="Rectangle 378"/>
+          <p:cNvSpPr/>
+          <p:nvPr/>
+        </p:nvSpPr>
+        <p:spPr>
+          <a:xfrm>
+            <a:off x="8998871" y="4582972"/>
             <a:ext cx="614411" cy="124358"/>
           </a:xfrm>
           <a:prstGeom prst="rect">
@@ -37381,13 +37697,13 @@
       </p:sp>
       <p:sp>
         <p:nvSpPr>
-          <p:cNvPr id="379" name="TextBox 378"/>
+          <p:cNvPr id="380" name="TextBox 379"/>
           <p:cNvSpPr txBox="1"/>
           <p:nvPr/>
         </p:nvSpPr>
         <p:spPr>
           <a:xfrm>
-            <a:off x="8987898" y="4553712"/>
+            <a:off x="8987898" y="4572000"/>
             <a:ext cx="636357" cy="146304"/>
           </a:xfrm>
           <a:prstGeom prst="rect">
@@ -37426,13 +37742,13 @@
       </p:sp>
       <p:sp>
         <p:nvSpPr>
-          <p:cNvPr id="380" name="Rectangle 379"/>
-          <p:cNvSpPr/>
-          <p:nvPr/>
-        </p:nvSpPr>
-        <p:spPr>
-          <a:xfrm>
-            <a:off x="9635228" y="4564684"/>
+          <p:cNvPr id="381" name="Rectangle 380"/>
+          <p:cNvSpPr/>
+          <p:nvPr/>
+        </p:nvSpPr>
+        <p:spPr>
+          <a:xfrm>
+            <a:off x="9635228" y="4582972"/>
             <a:ext cx="614411" cy="124358"/>
           </a:xfrm>
           <a:prstGeom prst="rect">
@@ -37470,13 +37786,13 @@
       </p:sp>
       <p:sp>
         <p:nvSpPr>
-          <p:cNvPr id="381" name="TextBox 380"/>
+          <p:cNvPr id="382" name="TextBox 381"/>
           <p:cNvSpPr txBox="1"/>
           <p:nvPr/>
         </p:nvSpPr>
         <p:spPr>
           <a:xfrm>
-            <a:off x="9624255" y="4553712"/>
+            <a:off x="9624255" y="4572000"/>
             <a:ext cx="636357" cy="146304"/>
           </a:xfrm>
           <a:prstGeom prst="rect">
@@ -37515,13 +37831,13 @@
       </p:sp>
       <p:sp>
         <p:nvSpPr>
-          <p:cNvPr id="382" name="Rectangle 381"/>
-          <p:cNvSpPr/>
-          <p:nvPr/>
-        </p:nvSpPr>
-        <p:spPr>
-          <a:xfrm>
-            <a:off x="10271585" y="4564684"/>
+          <p:cNvPr id="383" name="Rectangle 382"/>
+          <p:cNvSpPr/>
+          <p:nvPr/>
+        </p:nvSpPr>
+        <p:spPr>
+          <a:xfrm>
+            <a:off x="10271585" y="4582972"/>
             <a:ext cx="614411" cy="124358"/>
           </a:xfrm>
           <a:prstGeom prst="rect">
@@ -37559,13 +37875,13 @@
       </p:sp>
       <p:sp>
         <p:nvSpPr>
-          <p:cNvPr id="383" name="Rectangle 382"/>
-          <p:cNvSpPr/>
-          <p:nvPr/>
-        </p:nvSpPr>
-        <p:spPr>
-          <a:xfrm>
-            <a:off x="10907942" y="4564684"/>
+          <p:cNvPr id="384" name="Rectangle 383"/>
+          <p:cNvSpPr/>
+          <p:nvPr/>
+        </p:nvSpPr>
+        <p:spPr>
+          <a:xfrm>
+            <a:off x="10907942" y="4582972"/>
             <a:ext cx="614411" cy="124358"/>
           </a:xfrm>
           <a:prstGeom prst="rect">
@@ -37603,13 +37919,13 @@
       </p:sp>
       <p:sp>
         <p:nvSpPr>
-          <p:cNvPr id="384" name="TextBox 383"/>
+          <p:cNvPr id="385" name="TextBox 384"/>
           <p:cNvSpPr txBox="1"/>
           <p:nvPr/>
         </p:nvSpPr>
         <p:spPr>
           <a:xfrm>
-            <a:off x="10896970" y="4553712"/>
+            <a:off x="10896970" y="4572000"/>
             <a:ext cx="636357" cy="146304"/>
           </a:xfrm>
           <a:prstGeom prst="rect">
@@ -37648,13 +37964,13 @@
       </p:sp>
       <p:sp>
         <p:nvSpPr>
-          <p:cNvPr id="385" name="TextBox 384"/>
+          <p:cNvPr id="386" name="TextBox 385"/>
           <p:cNvSpPr txBox="1"/>
           <p:nvPr/>
         </p:nvSpPr>
         <p:spPr>
           <a:xfrm>
-            <a:off x="704088" y="4700016"/>
+            <a:off x="704088" y="4718304"/>
             <a:ext cx="1856231" cy="146304"/>
           </a:xfrm>
           <a:prstGeom prst="rect">
@@ -37702,13 +38018,13 @@
       </p:sp>
       <p:sp>
         <p:nvSpPr>
-          <p:cNvPr id="386" name="Rectangle 385"/>
-          <p:cNvSpPr/>
-          <p:nvPr/>
-        </p:nvSpPr>
-        <p:spPr>
-          <a:xfrm>
-            <a:off x="2635300" y="4710988"/>
+          <p:cNvPr id="387" name="Rectangle 386"/>
+          <p:cNvSpPr/>
+          <p:nvPr/>
+        </p:nvSpPr>
+        <p:spPr>
+          <a:xfrm>
+            <a:off x="2635300" y="4729276"/>
             <a:ext cx="614411" cy="124358"/>
           </a:xfrm>
           <a:prstGeom prst="rect">
@@ -37746,13 +38062,13 @@
       </p:sp>
       <p:sp>
         <p:nvSpPr>
-          <p:cNvPr id="387" name="TextBox 386"/>
+          <p:cNvPr id="388" name="TextBox 387"/>
           <p:cNvSpPr txBox="1"/>
           <p:nvPr/>
         </p:nvSpPr>
         <p:spPr>
           <a:xfrm>
-            <a:off x="2624328" y="4700016"/>
+            <a:off x="2624328" y="4718304"/>
             <a:ext cx="636357" cy="146304"/>
           </a:xfrm>
           <a:prstGeom prst="rect">
@@ -37791,13 +38107,13 @@
       </p:sp>
       <p:sp>
         <p:nvSpPr>
-          <p:cNvPr id="388" name="Rectangle 387"/>
-          <p:cNvSpPr/>
-          <p:nvPr/>
-        </p:nvSpPr>
-        <p:spPr>
-          <a:xfrm>
-            <a:off x="3271657" y="4710988"/>
+          <p:cNvPr id="389" name="Rectangle 388"/>
+          <p:cNvSpPr/>
+          <p:nvPr/>
+        </p:nvSpPr>
+        <p:spPr>
+          <a:xfrm>
+            <a:off x="3271657" y="4729276"/>
             <a:ext cx="614411" cy="124358"/>
           </a:xfrm>
           <a:prstGeom prst="rect">
@@ -37835,13 +38151,13 @@
       </p:sp>
       <p:sp>
         <p:nvSpPr>
-          <p:cNvPr id="389" name="TextBox 388"/>
+          <p:cNvPr id="390" name="TextBox 389"/>
           <p:cNvSpPr txBox="1"/>
           <p:nvPr/>
         </p:nvSpPr>
         <p:spPr>
           <a:xfrm>
-            <a:off x="3260685" y="4700016"/>
+            <a:off x="3260685" y="4718304"/>
             <a:ext cx="636357" cy="146304"/>
           </a:xfrm>
           <a:prstGeom prst="rect">
@@ -37880,13 +38196,13 @@
       </p:sp>
       <p:sp>
         <p:nvSpPr>
-          <p:cNvPr id="390" name="Rectangle 389"/>
-          <p:cNvSpPr/>
-          <p:nvPr/>
-        </p:nvSpPr>
-        <p:spPr>
-          <a:xfrm>
-            <a:off x="3908014" y="4710988"/>
+          <p:cNvPr id="391" name="Rectangle 390"/>
+          <p:cNvSpPr/>
+          <p:nvPr/>
+        </p:nvSpPr>
+        <p:spPr>
+          <a:xfrm>
+            <a:off x="3908014" y="4729276"/>
             <a:ext cx="614411" cy="124358"/>
           </a:xfrm>
           <a:prstGeom prst="rect">
@@ -37924,13 +38240,13 @@
       </p:sp>
       <p:sp>
         <p:nvSpPr>
-          <p:cNvPr id="391" name="TextBox 390"/>
+          <p:cNvPr id="392" name="TextBox 391"/>
           <p:cNvSpPr txBox="1"/>
           <p:nvPr/>
         </p:nvSpPr>
         <p:spPr>
           <a:xfrm>
-            <a:off x="3897042" y="4700016"/>
+            <a:off x="3897042" y="4718304"/>
             <a:ext cx="636357" cy="146304"/>
           </a:xfrm>
           <a:prstGeom prst="rect">
@@ -37969,13 +38285,13 @@
       </p:sp>
       <p:sp>
         <p:nvSpPr>
-          <p:cNvPr id="392" name="Rectangle 391"/>
-          <p:cNvSpPr/>
-          <p:nvPr/>
-        </p:nvSpPr>
-        <p:spPr>
-          <a:xfrm>
-            <a:off x="4544372" y="4710988"/>
+          <p:cNvPr id="393" name="Rectangle 392"/>
+          <p:cNvSpPr/>
+          <p:nvPr/>
+        </p:nvSpPr>
+        <p:spPr>
+          <a:xfrm>
+            <a:off x="4544372" y="4729276"/>
             <a:ext cx="614411" cy="124358"/>
           </a:xfrm>
           <a:prstGeom prst="rect">
@@ -38013,13 +38329,13 @@
       </p:sp>
       <p:sp>
         <p:nvSpPr>
-          <p:cNvPr id="393" name="TextBox 392"/>
+          <p:cNvPr id="394" name="TextBox 393"/>
           <p:cNvSpPr txBox="1"/>
           <p:nvPr/>
         </p:nvSpPr>
         <p:spPr>
           <a:xfrm>
-            <a:off x="4533399" y="4700016"/>
+            <a:off x="4533399" y="4718304"/>
             <a:ext cx="636357" cy="146304"/>
           </a:xfrm>
           <a:prstGeom prst="rect">
@@ -38058,13 +38374,13 @@
       </p:sp>
       <p:sp>
         <p:nvSpPr>
-          <p:cNvPr id="394" name="Rectangle 393"/>
-          <p:cNvSpPr/>
-          <p:nvPr/>
-        </p:nvSpPr>
-        <p:spPr>
-          <a:xfrm>
-            <a:off x="5180729" y="4710988"/>
+          <p:cNvPr id="395" name="Rectangle 394"/>
+          <p:cNvSpPr/>
+          <p:nvPr/>
+        </p:nvSpPr>
+        <p:spPr>
+          <a:xfrm>
+            <a:off x="5180729" y="4729276"/>
             <a:ext cx="614411" cy="124358"/>
           </a:xfrm>
           <a:prstGeom prst="rect">
@@ -38102,13 +38418,13 @@
       </p:sp>
       <p:sp>
         <p:nvSpPr>
-          <p:cNvPr id="395" name="TextBox 394"/>
+          <p:cNvPr id="396" name="TextBox 395"/>
           <p:cNvSpPr txBox="1"/>
           <p:nvPr/>
         </p:nvSpPr>
         <p:spPr>
           <a:xfrm>
-            <a:off x="5169756" y="4700016"/>
+            <a:off x="5169756" y="4718304"/>
             <a:ext cx="636357" cy="146304"/>
           </a:xfrm>
           <a:prstGeom prst="rect">
@@ -38147,13 +38463,13 @@
       </p:sp>
       <p:sp>
         <p:nvSpPr>
-          <p:cNvPr id="396" name="Rectangle 395"/>
-          <p:cNvSpPr/>
-          <p:nvPr/>
-        </p:nvSpPr>
-        <p:spPr>
-          <a:xfrm>
-            <a:off x="5817086" y="4710988"/>
+          <p:cNvPr id="397" name="Rectangle 396"/>
+          <p:cNvSpPr/>
+          <p:nvPr/>
+        </p:nvSpPr>
+        <p:spPr>
+          <a:xfrm>
+            <a:off x="5817086" y="4729276"/>
             <a:ext cx="614411" cy="124358"/>
           </a:xfrm>
           <a:prstGeom prst="rect">
@@ -38191,13 +38507,13 @@
       </p:sp>
       <p:sp>
         <p:nvSpPr>
-          <p:cNvPr id="397" name="TextBox 396"/>
+          <p:cNvPr id="398" name="TextBox 397"/>
           <p:cNvSpPr txBox="1"/>
           <p:nvPr/>
         </p:nvSpPr>
         <p:spPr>
           <a:xfrm>
-            <a:off x="5806113" y="4700016"/>
+            <a:off x="5806113" y="4718304"/>
             <a:ext cx="636357" cy="146304"/>
           </a:xfrm>
           <a:prstGeom prst="rect">
@@ -38236,13 +38552,13 @@
       </p:sp>
       <p:sp>
         <p:nvSpPr>
-          <p:cNvPr id="398" name="Rectangle 397"/>
-          <p:cNvSpPr/>
-          <p:nvPr/>
-        </p:nvSpPr>
-        <p:spPr>
-          <a:xfrm>
-            <a:off x="6453443" y="4710988"/>
+          <p:cNvPr id="399" name="Rectangle 398"/>
+          <p:cNvSpPr/>
+          <p:nvPr/>
+        </p:nvSpPr>
+        <p:spPr>
+          <a:xfrm>
+            <a:off x="6453443" y="4729276"/>
             <a:ext cx="614411" cy="124358"/>
           </a:xfrm>
           <a:prstGeom prst="rect">
@@ -38280,13 +38596,13 @@
       </p:sp>
       <p:sp>
         <p:nvSpPr>
-          <p:cNvPr id="399" name="TextBox 398"/>
+          <p:cNvPr id="400" name="TextBox 399"/>
           <p:cNvSpPr txBox="1"/>
           <p:nvPr/>
         </p:nvSpPr>
         <p:spPr>
           <a:xfrm>
-            <a:off x="6442470" y="4700016"/>
+            <a:off x="6442470" y="4718304"/>
             <a:ext cx="636357" cy="146304"/>
           </a:xfrm>
           <a:prstGeom prst="rect">
@@ -38325,13 +38641,13 @@
       </p:sp>
       <p:sp>
         <p:nvSpPr>
-          <p:cNvPr id="400" name="Rectangle 399"/>
-          <p:cNvSpPr/>
-          <p:nvPr/>
-        </p:nvSpPr>
-        <p:spPr>
-          <a:xfrm>
-            <a:off x="7089800" y="4710988"/>
+          <p:cNvPr id="401" name="Rectangle 400"/>
+          <p:cNvSpPr/>
+          <p:nvPr/>
+        </p:nvSpPr>
+        <p:spPr>
+          <a:xfrm>
+            <a:off x="7089800" y="4729276"/>
             <a:ext cx="614411" cy="124358"/>
           </a:xfrm>
           <a:prstGeom prst="rect">
@@ -38369,13 +38685,13 @@
       </p:sp>
       <p:sp>
         <p:nvSpPr>
-          <p:cNvPr id="401" name="TextBox 400"/>
+          <p:cNvPr id="402" name="TextBox 401"/>
           <p:cNvSpPr txBox="1"/>
           <p:nvPr/>
         </p:nvSpPr>
         <p:spPr>
           <a:xfrm>
-            <a:off x="7078827" y="4700016"/>
+            <a:off x="7078827" y="4718304"/>
             <a:ext cx="636357" cy="146304"/>
           </a:xfrm>
           <a:prstGeom prst="rect">
@@ -38414,13 +38730,13 @@
       </p:sp>
       <p:sp>
         <p:nvSpPr>
-          <p:cNvPr id="402" name="Rectangle 401"/>
-          <p:cNvSpPr/>
-          <p:nvPr/>
-        </p:nvSpPr>
-        <p:spPr>
-          <a:xfrm>
-            <a:off x="7726157" y="4710988"/>
+          <p:cNvPr id="403" name="Rectangle 402"/>
+          <p:cNvSpPr/>
+          <p:nvPr/>
+        </p:nvSpPr>
+        <p:spPr>
+          <a:xfrm>
+            <a:off x="7726157" y="4729276"/>
             <a:ext cx="614411" cy="124358"/>
           </a:xfrm>
           <a:prstGeom prst="rect">
@@ -38458,13 +38774,13 @@
       </p:sp>
       <p:sp>
         <p:nvSpPr>
-          <p:cNvPr id="403" name="TextBox 402"/>
+          <p:cNvPr id="404" name="TextBox 403"/>
           <p:cNvSpPr txBox="1"/>
           <p:nvPr/>
         </p:nvSpPr>
         <p:spPr>
           <a:xfrm>
-            <a:off x="7715184" y="4700016"/>
+            <a:off x="7715184" y="4718304"/>
             <a:ext cx="636357" cy="146304"/>
           </a:xfrm>
           <a:prstGeom prst="rect">
@@ -38503,13 +38819,13 @@
       </p:sp>
       <p:sp>
         <p:nvSpPr>
-          <p:cNvPr id="404" name="Rectangle 403"/>
-          <p:cNvSpPr/>
-          <p:nvPr/>
-        </p:nvSpPr>
-        <p:spPr>
-          <a:xfrm>
-            <a:off x="8362514" y="4710988"/>
+          <p:cNvPr id="405" name="Rectangle 404"/>
+          <p:cNvSpPr/>
+          <p:nvPr/>
+        </p:nvSpPr>
+        <p:spPr>
+          <a:xfrm>
+            <a:off x="8362514" y="4729276"/>
             <a:ext cx="614411" cy="124358"/>
           </a:xfrm>
           <a:prstGeom prst="rect">
@@ -38547,13 +38863,13 @@
       </p:sp>
       <p:sp>
         <p:nvSpPr>
-          <p:cNvPr id="405" name="TextBox 404"/>
+          <p:cNvPr id="406" name="TextBox 405"/>
           <p:cNvSpPr txBox="1"/>
           <p:nvPr/>
         </p:nvSpPr>
         <p:spPr>
           <a:xfrm>
-            <a:off x="8351541" y="4700016"/>
+            <a:off x="8351541" y="4718304"/>
             <a:ext cx="636357" cy="146304"/>
           </a:xfrm>
           <a:prstGeom prst="rect">
@@ -38592,13 +38908,13 @@
       </p:sp>
       <p:sp>
         <p:nvSpPr>
-          <p:cNvPr id="406" name="Rectangle 405"/>
-          <p:cNvSpPr/>
-          <p:nvPr/>
-        </p:nvSpPr>
-        <p:spPr>
-          <a:xfrm>
-            <a:off x="8998871" y="4710988"/>
+          <p:cNvPr id="407" name="Rectangle 406"/>
+          <p:cNvSpPr/>
+          <p:nvPr/>
+        </p:nvSpPr>
+        <p:spPr>
+          <a:xfrm>
+            <a:off x="8998871" y="4729276"/>
             <a:ext cx="614411" cy="124358"/>
           </a:xfrm>
           <a:prstGeom prst="rect">
@@ -38636,13 +38952,13 @@
       </p:sp>
       <p:sp>
         <p:nvSpPr>
-          <p:cNvPr id="407" name="TextBox 406"/>
+          <p:cNvPr id="408" name="TextBox 407"/>
           <p:cNvSpPr txBox="1"/>
           <p:nvPr/>
         </p:nvSpPr>
         <p:spPr>
           <a:xfrm>
-            <a:off x="8987898" y="4700016"/>
+            <a:off x="8987898" y="4718304"/>
             <a:ext cx="636357" cy="146304"/>
           </a:xfrm>
           <a:prstGeom prst="rect">
@@ -38681,13 +38997,13 @@
       </p:sp>
       <p:sp>
         <p:nvSpPr>
-          <p:cNvPr id="408" name="Rectangle 407"/>
-          <p:cNvSpPr/>
-          <p:nvPr/>
-        </p:nvSpPr>
-        <p:spPr>
-          <a:xfrm>
-            <a:off x="9635228" y="4710988"/>
+          <p:cNvPr id="409" name="Rectangle 408"/>
+          <p:cNvSpPr/>
+          <p:nvPr/>
+        </p:nvSpPr>
+        <p:spPr>
+          <a:xfrm>
+            <a:off x="9635228" y="4729276"/>
             <a:ext cx="614411" cy="124358"/>
           </a:xfrm>
           <a:prstGeom prst="rect">
@@ -38725,13 +39041,13 @@
       </p:sp>
       <p:sp>
         <p:nvSpPr>
-          <p:cNvPr id="409" name="TextBox 408"/>
+          <p:cNvPr id="410" name="TextBox 409"/>
           <p:cNvSpPr txBox="1"/>
           <p:nvPr/>
         </p:nvSpPr>
         <p:spPr>
           <a:xfrm>
-            <a:off x="9624255" y="4700016"/>
+            <a:off x="9624255" y="4718304"/>
             <a:ext cx="636357" cy="146304"/>
           </a:xfrm>
           <a:prstGeom prst="rect">
@@ -38770,13 +39086,13 @@
       </p:sp>
       <p:sp>
         <p:nvSpPr>
-          <p:cNvPr id="410" name="Rectangle 409"/>
-          <p:cNvSpPr/>
-          <p:nvPr/>
-        </p:nvSpPr>
-        <p:spPr>
-          <a:xfrm>
-            <a:off x="10271585" y="4710988"/>
+          <p:cNvPr id="411" name="Rectangle 410"/>
+          <p:cNvSpPr/>
+          <p:nvPr/>
+        </p:nvSpPr>
+        <p:spPr>
+          <a:xfrm>
+            <a:off x="10271585" y="4729276"/>
             <a:ext cx="614411" cy="124358"/>
           </a:xfrm>
           <a:prstGeom prst="rect">
@@ -38814,13 +39130,13 @@
       </p:sp>
       <p:sp>
         <p:nvSpPr>
-          <p:cNvPr id="411" name="TextBox 410"/>
+          <p:cNvPr id="412" name="TextBox 411"/>
           <p:cNvSpPr txBox="1"/>
           <p:nvPr/>
         </p:nvSpPr>
         <p:spPr>
           <a:xfrm>
-            <a:off x="10260613" y="4700016"/>
+            <a:off x="10260613" y="4718304"/>
             <a:ext cx="636357" cy="146304"/>
           </a:xfrm>
           <a:prstGeom prst="rect">
@@ -38859,13 +39175,13 @@
       </p:sp>
       <p:sp>
         <p:nvSpPr>
-          <p:cNvPr id="412" name="Rectangle 411"/>
-          <p:cNvSpPr/>
-          <p:nvPr/>
-        </p:nvSpPr>
-        <p:spPr>
-          <a:xfrm>
-            <a:off x="10907942" y="4710988"/>
+          <p:cNvPr id="413" name="Rectangle 412"/>
+          <p:cNvSpPr/>
+          <p:nvPr/>
+        </p:nvSpPr>
+        <p:spPr>
+          <a:xfrm>
+            <a:off x="10907942" y="4729276"/>
             <a:ext cx="614411" cy="124358"/>
           </a:xfrm>
           <a:prstGeom prst="rect">
@@ -38903,13 +39219,13 @@
       </p:sp>
       <p:sp>
         <p:nvSpPr>
-          <p:cNvPr id="413" name="TextBox 412"/>
+          <p:cNvPr id="414" name="TextBox 413"/>
           <p:cNvSpPr txBox="1"/>
           <p:nvPr/>
         </p:nvSpPr>
         <p:spPr>
           <a:xfrm>
-            <a:off x="658368" y="4956048"/>
+            <a:off x="658368" y="4974336"/>
             <a:ext cx="10607040" cy="182880"/>
           </a:xfrm>
           <a:prstGeom prst="rect">
@@ -38941,14 +39257,14 @@
                 </a:solidFill>
                 <a:latin typeface="Helvetica Neue"/>
               </a:rPr>
-              <a:t>Cada celda: UF que la vivienda de la FILA justifica por sobre la de la COLUMNA (tiempo + costo de auto ahorrados). Verde = puede pedir más; rojo = debe pedir menos.</a:t>
-            </a:r>
-          </a:p>
-        </p:txBody>
-      </p:sp>
-      <p:sp>
-        <p:nvSpPr>
-          <p:cNvPr id="414" name="Rectangle 413"/>
+              <a:t>Verde = puede cobrar más que esa columna; rojo = debe cobrar menos. Orden: de la que más sobreprecio justifica a la que menos.</a:t>
+            </a:r>
+          </a:p>
+        </p:txBody>
+      </p:sp>
+      <p:sp>
+        <p:nvSpPr>
+          <p:cNvPr id="415" name="Rectangle 414"/>
           <p:cNvSpPr/>
           <p:nvPr/>
         </p:nvSpPr>
@@ -38994,7 +39310,7 @@
       </p:sp>
       <p:sp>
         <p:nvSpPr>
-          <p:cNvPr id="415" name="Rectangle 414"/>
+          <p:cNvPr id="416" name="Rectangle 415"/>
           <p:cNvSpPr/>
           <p:nvPr/>
         </p:nvSpPr>
@@ -39038,7 +39354,7 @@
       </p:sp>
       <p:sp>
         <p:nvSpPr>
-          <p:cNvPr id="416" name="TextBox 415"/>
+          <p:cNvPr id="417" name="TextBox 416"/>
           <p:cNvSpPr txBox="1"/>
           <p:nvPr/>
         </p:nvSpPr>
@@ -39083,7 +39399,7 @@
       </p:sp>
       <p:sp>
         <p:nvSpPr>
-          <p:cNvPr id="417" name="TextBox 416"/>
+          <p:cNvPr id="418" name="TextBox 417"/>
           <p:cNvSpPr txBox="1"/>
           <p:nvPr/>
         </p:nvSpPr>
@@ -39128,7 +39444,7 @@
       </p:sp>
       <p:cxnSp>
         <p:nvCxnSpPr>
-          <p:cNvPr id="418" name="Connector 417"/>
+          <p:cNvPr id="419" name="Connector 418"/>
           <p:cNvCxnSpPr/>
           <p:nvPr/>
         </p:nvCxnSpPr>
@@ -39164,7 +39480,7 @@
       </p:cxnSp>
       <p:sp>
         <p:nvSpPr>
-          <p:cNvPr id="419" name="TextBox 418"/>
+          <p:cNvPr id="420" name="TextBox 419"/>
           <p:cNvSpPr txBox="1"/>
           <p:nvPr/>
         </p:nvSpPr>
@@ -39218,7 +39534,7 @@
       </p:sp>
       <p:sp>
         <p:nvSpPr>
-          <p:cNvPr id="420" name="TextBox 419"/>
+          <p:cNvPr id="421" name="TextBox 420"/>
           <p:cNvSpPr txBox="1"/>
           <p:nvPr/>
         </p:nvSpPr>
@@ -41222,7 +41538,7 @@
                 </a:solidFill>
                 <a:latin typeface="Helvetica Neue"/>
               </a:rPr>
-              <a:t>Fijar precio contra las comparables de cada producto, con el diferencial en UF de referencia.</a:t>
+              <a:t>Capturar el diferencial en UF, o mantener precio competitivo y convertirlo en velocidad de venta.</a:t>
             </a:r>
           </a:p>
         </p:txBody>
